--- a/VAVE Slide Files/VAVE-Slides-Generated.pptx
+++ b/VAVE Slide Files/VAVE-Slides-Generated.pptx
@@ -2,14 +2,15 @@
 <file path=ppt/presentation.xml><?xml version="1.0" encoding="utf-8"?>
 <p:presentation xmlns:p="http://schemas.openxmlformats.org/presentationml/2006/main">
   <p:sldMasterIdLst>
-    <p:sldMasterId xmlns:r="http://schemas.openxmlformats.org/officeDocument/2006/relationships" id="2147483648" r:id="R024b7691692344ec"/>
+    <p:sldMasterId xmlns:r="http://schemas.openxmlformats.org/officeDocument/2006/relationships" id="2147483648" r:id="R953e3b7bed9a49f0"/>
   </p:sldMasterIdLst>
   <p:notesMasterIdLst>
-    <p:notesMasterId xmlns:r="http://schemas.openxmlformats.org/officeDocument/2006/relationships" r:id="R412da78686964ab3"/>
+    <p:notesMasterId xmlns:r="http://schemas.openxmlformats.org/officeDocument/2006/relationships" r:id="R429b3e7c4f434e75"/>
   </p:notesMasterIdLst>
   <p:sldIdLst>
-    <p:sldId xmlns:r="http://schemas.openxmlformats.org/officeDocument/2006/relationships" id="256" r:id="R55d144a78b6a4cc6"/>
-    <p:sldId xmlns:r="http://schemas.openxmlformats.org/officeDocument/2006/relationships" id="257" r:id="Rc9c92728990247e1"/>
+    <p:sldId xmlns:r="http://schemas.openxmlformats.org/officeDocument/2006/relationships" id="256" r:id="R98daf698a5cc4a28"/>
+    <p:sldId xmlns:r="http://schemas.openxmlformats.org/officeDocument/2006/relationships" id="257" r:id="Re4bdb7dd7fb94c4d"/>
+    <p:sldId xmlns:r="http://schemas.openxmlformats.org/officeDocument/2006/relationships" id="258" r:id="R5f94da43a0cd4d07"/>
   </p:sldIdLst>
   <p:sldSz cx="12192000" cy="6858000"/>
   <p:notesSz cx="6858000" cy="9144000"/>
@@ -563,6 +564,81 @@
           </a:p>
           <a:p xmlns:a="http://schemas.openxmlformats.org/drawingml/2006/main">
             <a:r>
+              <a:t>- VAVE-Slide-Input.xlsx; sheet: VAVE Data; section: Cassette VAVE activities</a:t>
+            </a:r>
+          </a:p>
+        </p:txBody>
+      </p:sp>
+      <p:sp>
+        <p:nvSpPr>
+          <p:cNvPr id="4" name="Slide Number Placeholder 3"/>
+          <p:cNvSpPr>
+            <a:spLocks xmlns:a="http://schemas.openxmlformats.org/drawingml/2006/main" noGrp="1"/>
+          </p:cNvSpPr>
+          <p:nvPr>
+            <p:ph type="sldNum" idx="5"/>
+          </p:nvPr>
+        </p:nvSpPr>
+        <p:spPr/>
+        <p:txBody>
+          <a:bodyPr xmlns:a="http://schemas.openxmlformats.org/drawingml/2006/main"/>
+          <a:lstStyle xmlns:a="http://schemas.openxmlformats.org/drawingml/2006/main"/>
+          <a:p xmlns:a="http://schemas.openxmlformats.org/drawingml/2006/main"/>
+        </p:txBody>
+      </p:sp>
+    </p:spTree>
+  </p:cSld>
+  <p:clrMapOvr>
+    <a:masterClrMapping xmlns:a="http://schemas.openxmlformats.org/drawingml/2006/main"/>
+  </p:clrMapOvr>
+</p:notes>
+</file>
+
+<file path=ppt/notesSlides/notesSlide3.xml><?xml version="1.0" encoding="utf-8"?>
+<p:notes xmlns:p="http://schemas.openxmlformats.org/presentationml/2006/main">
+  <p:cSld>
+    <p:spTree>
+      <p:nvGrpSpPr>
+        <p:cNvPr id="1" name=""/>
+        <p:cNvGrpSpPr/>
+        <p:nvPr/>
+      </p:nvGrpSpPr>
+      <p:grpSpPr>
+        <a:xfrm xmlns:a="http://schemas.openxmlformats.org/drawingml/2006/main"/>
+      </p:grpSpPr>
+      <p:sp>
+        <p:nvSpPr>
+          <p:cNvPr id="2" name="Slide Image Placeholder 1"/>
+          <p:cNvSpPr>
+            <a:spLocks xmlns:a="http://schemas.openxmlformats.org/drawingml/2006/main" noGrp="1"/>
+          </p:cNvSpPr>
+          <p:nvPr>
+            <p:ph type="sldImg" idx="0"/>
+          </p:nvPr>
+        </p:nvSpPr>
+        <p:spPr/>
+      </p:sp>
+      <p:sp>
+        <p:nvSpPr>
+          <p:cNvPr id="3" name="Notes Placeholder 2"/>
+          <p:cNvSpPr>
+            <a:spLocks xmlns:a="http://schemas.openxmlformats.org/drawingml/2006/main" noGrp="1"/>
+          </p:cNvSpPr>
+          <p:nvPr>
+            <p:ph type="body" idx="1"/>
+          </p:nvPr>
+        </p:nvSpPr>
+        <p:spPr/>
+        <p:txBody>
+          <a:bodyPr xmlns:a="http://schemas.openxmlformats.org/drawingml/2006/main"/>
+          <a:lstStyle xmlns:a="http://schemas.openxmlformats.org/drawingml/2006/main"/>
+          <a:p xmlns:a="http://schemas.openxmlformats.org/drawingml/2006/main">
+            <a:r>
+              <a:t>[Sources]</a:t>
+            </a:r>
+          </a:p>
+          <a:p xmlns:a="http://schemas.openxmlformats.org/drawingml/2006/main">
+            <a:r>
               <a:t>- VAVE-Slide-Input.xlsx; sheet: VAVE Data; section: Case VAVE activities</a:t>
             </a:r>
           </a:p>
@@ -730,8 +806,8 @@
   </p:cSld>
   <p:clrMap bg1="lt1" tx1="dk1" bg2="lt2" tx2="dk2" accent1="accent1" accent2="accent2" accent3="accent3" accent4="accent4" accent5="accent5" accent6="accent6" hlink="hlink" folHlink="folHlink"/>
   <p:sldLayoutIdLst>
-    <p:sldLayoutId xmlns:r="http://schemas.openxmlformats.org/officeDocument/2006/relationships" id="2147483649" r:id="R185a880c06f2459e"/>
-    <p:sldLayoutId xmlns:r="http://schemas.openxmlformats.org/officeDocument/2006/relationships" id="2147483650" r:id="Rc04f965cd8f44bf7"/>
+    <p:sldLayoutId xmlns:r="http://schemas.openxmlformats.org/officeDocument/2006/relationships" id="2147483649" r:id="Rf96702ce7b8f408e"/>
+    <p:sldLayoutId xmlns:r="http://schemas.openxmlformats.org/officeDocument/2006/relationships" id="2147483650" r:id="Rb70bb1667ac347b2"/>
   </p:sldLayoutIdLst>
   <p:hf sldNum="0" hdr="0" ftr="0" dt="0"/>
   <p:txStyles>
@@ -1394,7 +1470,7 @@
                 <a:ea typeface="Aptos Display"/>
                 <a:cs typeface="Aptos Display"/>
               </a:rPr>
-              <a:t>Cassette VAVE activities</a:t>
+              <a:t>Cassette VAVE activities · 1 of 2</a:t>
             </a:r>
           </a:p>
         </p:txBody>
@@ -1497,7 +1573,7 @@
                 <a:ea typeface="Aptos"/>
                 <a:cs typeface="Aptos"/>
               </a:rPr>
-              <a:t>14 savings opportunities</a:t>
+              <a:t>19 savings opportunities</a:t>
             </a:r>
           </a:p>
         </p:txBody>
@@ -1544,7 +1620,7 @@
                 <a:ea typeface="Aptos"/>
                 <a:cs typeface="Aptos"/>
               </a:rPr>
-              <a:t>Total: $268.20</a:t>
+              <a:t>Total: $283.20</a:t>
             </a:r>
           </a:p>
         </p:txBody>
@@ -2310,11 +2386,11 @@
             <a:avLst/>
           </a:prstGeom>
           <a:solidFill xmlns:a="http://schemas.openxmlformats.org/drawingml/2006/main">
-            <a:srgbClr val="ED7D31"/>
+            <a:srgbClr val="A6A6A6"/>
           </a:solidFill>
           <a:ln xmlns:a="http://schemas.openxmlformats.org/drawingml/2006/main" w="0">
             <a:solidFill>
-              <a:srgbClr val="ED7D31"/>
+              <a:srgbClr val="A6A6A6"/>
             </a:solidFill>
             <a:prstDash val="solid"/>
           </a:ln>
@@ -2603,6 +2679,2380 @@
         <p:spPr>
           <a:xfrm xmlns:a="http://schemas.openxmlformats.org/drawingml/2006/main">
             <a:off x="5149900" y="3337560"/>
+            <a:ext cx="822960" cy="256032"/>
+          </a:xfrm>
+          <a:prstGeom xmlns:a="http://schemas.openxmlformats.org/drawingml/2006/main" prst="roundRect">
+            <a:avLst/>
+          </a:prstGeom>
+          <a:solidFill xmlns:a="http://schemas.openxmlformats.org/drawingml/2006/main">
+            <a:srgbClr val="A6A6A6"/>
+          </a:solidFill>
+          <a:ln xmlns:a="http://schemas.openxmlformats.org/drawingml/2006/main" w="0">
+            <a:solidFill>
+              <a:srgbClr val="A6A6A6"/>
+            </a:solidFill>
+            <a:prstDash val="solid"/>
+          </a:ln>
+        </p:spPr>
+        <p:style>
+          <a:lnRef xmlns:a="http://schemas.openxmlformats.org/drawingml/2006/main" idx="1">
+            <a:schemeClr val="accent1"/>
+          </a:lnRef>
+          <a:fillRef xmlns:a="http://schemas.openxmlformats.org/drawingml/2006/main" idx="3">
+            <a:schemeClr val="accent1"/>
+          </a:fillRef>
+          <a:effectRef xmlns:a="http://schemas.openxmlformats.org/drawingml/2006/main" idx="2">
+            <a:schemeClr val="accent1"/>
+          </a:effectRef>
+          <a:fontRef xmlns:a="http://schemas.openxmlformats.org/drawingml/2006/main" idx="minor">
+            <a:schemeClr val="lt1"/>
+          </a:fontRef>
+        </p:style>
+        <p:txBody>
+          <a:bodyPr xmlns:a="http://schemas.openxmlformats.org/drawingml/2006/main" anchor="ctr"/>
+          <a:lstStyle xmlns:a="http://schemas.openxmlformats.org/drawingml/2006/main"/>
+          <a:p xmlns:a="http://schemas.openxmlformats.org/drawingml/2006/main">
+            <a:pPr algn="ctr">
+              <a:buNone/>
+            </a:pPr>
+          </a:p>
+        </p:txBody>
+      </p:sp>
+      <p:sp>
+        <p:nvSpPr>
+          <p:cNvPr id="31" name="TextBox 30">
+            <a:extLst xmlns:a="http://schemas.openxmlformats.org/drawingml/2006/main">
+              <a:ext uri="{FF2B5EF4-FFF2-40B4-BE49-F238E27FC236}">
+                <a16:creationId xmlns:a16="http://schemas.microsoft.com/office/drawing/2014/main" id="{B16EE97C-3AE6-4353-A7E8-89ED0011E895}"/>
+              </a:ext>
+            </a:extLst>
+          </p:cNvPr>
+          <p:cNvSpPr>
+            <a:spLocks xmlns:a="http://schemas.openxmlformats.org/drawingml/2006/main" noGrp="1"/>
+          </p:cNvSpPr>
+          <p:nvPr/>
+        </p:nvSpPr>
+        <p:spPr>
+          <a:xfrm xmlns:a="http://schemas.openxmlformats.org/drawingml/2006/main">
+            <a:off x="5215901" y="3352012"/>
+            <a:ext cx="690959" cy="163122"/>
+          </a:xfrm>
+          <a:prstGeom xmlns:a="http://schemas.openxmlformats.org/drawingml/2006/main" prst="rect">
+            <a:avLst/>
+          </a:prstGeom>
+          <a:noFill xmlns:a="http://schemas.openxmlformats.org/drawingml/2006/main"/>
+        </p:spPr>
+        <p:txBody>
+          <a:bodyPr xmlns:a="http://schemas.openxmlformats.org/drawingml/2006/main" wrap="none" lIns="18288" tIns="4572" rIns="18288" bIns="4572" anchor="ctr">
+            <a:spAutoFit/>
+          </a:bodyPr>
+          <a:lstStyle xmlns:a="http://schemas.openxmlformats.org/drawingml/2006/main"/>
+          <a:p xmlns:a="http://schemas.openxmlformats.org/drawingml/2006/main">
+            <a:pPr algn="ctr">
+              <a:buNone/>
+            </a:pPr>
+            <a:r>
+              <a:rPr sz="1000" b="1" i="0">
+                <a:solidFill>
+                  <a:srgbClr val="FFFFFF"/>
+                </a:solidFill>
+                <a:latin typeface="Aptos"/>
+                <a:ea typeface="Aptos"/>
+                <a:cs typeface="Aptos"/>
+              </a:rPr>
+              <a:t>On Track</a:t>
+            </a:r>
+          </a:p>
+        </p:txBody>
+      </p:sp>
+      <p:sp>
+        <p:nvSpPr>
+          <p:cNvPr id="32" name="Rectangle 31">
+            <a:extLst xmlns:a="http://schemas.openxmlformats.org/drawingml/2006/main">
+              <a:ext uri="{FF2B5EF4-FFF2-40B4-BE49-F238E27FC236}">
+                <a16:creationId xmlns:a16="http://schemas.microsoft.com/office/drawing/2014/main" id="{E1A1E86E-02AB-4A19-A753-F6663635B6EC}"/>
+              </a:ext>
+            </a:extLst>
+          </p:cNvPr>
+          <p:cNvSpPr>
+            <a:spLocks xmlns:a="http://schemas.openxmlformats.org/drawingml/2006/main" noGrp="1"/>
+          </p:cNvSpPr>
+          <p:nvPr/>
+        </p:nvSpPr>
+        <p:spPr>
+          <a:xfrm xmlns:a="http://schemas.openxmlformats.org/drawingml/2006/main">
+            <a:off x="502920" y="3867912"/>
+            <a:ext cx="5532120" cy="585216"/>
+          </a:xfrm>
+          <a:prstGeom xmlns:a="http://schemas.openxmlformats.org/drawingml/2006/main" prst="rect">
+            <a:avLst/>
+          </a:prstGeom>
+          <a:solidFill xmlns:a="http://schemas.openxmlformats.org/drawingml/2006/main">
+            <a:srgbClr val="FFFFFF"/>
+          </a:solidFill>
+          <a:ln xmlns:a="http://schemas.openxmlformats.org/drawingml/2006/main">
+            <a:solidFill>
+              <a:srgbClr val="FFFFFF"/>
+            </a:solidFill>
+          </a:ln>
+        </p:spPr>
+        <p:style>
+          <a:lnRef xmlns:a="http://schemas.openxmlformats.org/drawingml/2006/main" idx="1">
+            <a:schemeClr val="accent1"/>
+          </a:lnRef>
+          <a:fillRef xmlns:a="http://schemas.openxmlformats.org/drawingml/2006/main" idx="3">
+            <a:schemeClr val="accent1"/>
+          </a:fillRef>
+          <a:effectRef xmlns:a="http://schemas.openxmlformats.org/drawingml/2006/main" idx="2">
+            <a:schemeClr val="accent1"/>
+          </a:effectRef>
+          <a:fontRef xmlns:a="http://schemas.openxmlformats.org/drawingml/2006/main" idx="minor">
+            <a:schemeClr val="lt1"/>
+          </a:fontRef>
+        </p:style>
+        <p:txBody>
+          <a:bodyPr xmlns:a="http://schemas.openxmlformats.org/drawingml/2006/main" anchor="ctr"/>
+          <a:lstStyle xmlns:a="http://schemas.openxmlformats.org/drawingml/2006/main"/>
+          <a:p xmlns:a="http://schemas.openxmlformats.org/drawingml/2006/main">
+            <a:pPr algn="ctr">
+              <a:buNone/>
+            </a:pPr>
+          </a:p>
+        </p:txBody>
+      </p:sp>
+      <p:sp>
+        <p:nvSpPr>
+          <p:cNvPr id="33" name="TextBox 32">
+            <a:extLst xmlns:a="http://schemas.openxmlformats.org/drawingml/2006/main">
+              <a:ext uri="{FF2B5EF4-FFF2-40B4-BE49-F238E27FC236}">
+                <a16:creationId xmlns:a16="http://schemas.microsoft.com/office/drawing/2014/main" id="{609D2D58-E815-451C-88B1-C0D9CD009572}"/>
+              </a:ext>
+            </a:extLst>
+          </p:cNvPr>
+          <p:cNvSpPr>
+            <a:spLocks xmlns:a="http://schemas.openxmlformats.org/drawingml/2006/main" noGrp="1"/>
+          </p:cNvSpPr>
+          <p:nvPr/>
+        </p:nvSpPr>
+        <p:spPr>
+          <a:xfrm xmlns:a="http://schemas.openxmlformats.org/drawingml/2006/main">
+            <a:off x="612648" y="4020304"/>
+            <a:ext cx="2414187" cy="317010"/>
+          </a:xfrm>
+          <a:prstGeom xmlns:a="http://schemas.openxmlformats.org/drawingml/2006/main" prst="rect">
+            <a:avLst/>
+          </a:prstGeom>
+          <a:noFill xmlns:a="http://schemas.openxmlformats.org/drawingml/2006/main"/>
+        </p:spPr>
+        <p:txBody>
+          <a:bodyPr xmlns:a="http://schemas.openxmlformats.org/drawingml/2006/main" wrap="none" lIns="18288" tIns="4572" rIns="18288" bIns="4572" anchor="ctr">
+            <a:spAutoFit/>
+          </a:bodyPr>
+          <a:lstStyle xmlns:a="http://schemas.openxmlformats.org/drawingml/2006/main"/>
+          <a:p xmlns:a="http://schemas.openxmlformats.org/drawingml/2006/main">
+            <a:pPr algn="l">
+              <a:buNone/>
+            </a:pPr>
+            <a:r>
+              <a:rPr sz="1000" b="0" i="0">
+                <a:solidFill>
+                  <a:srgbClr val="202020"/>
+                </a:solidFill>
+                <a:latin typeface="Aptos"/>
+                <a:ea typeface="Aptos"/>
+                <a:cs typeface="Aptos"/>
+              </a:rPr>
+              <a:t>S/m - 2 (Control box redesign, </a:t>
+            </a:r>
+            <a:r>
+              <a:rPr sz="1000" b="0" i="0">
+                <a:solidFill>
+                  <a:srgbClr val="202020"/>
+                </a:solidFill>
+                <a:latin typeface="Aptos"/>
+                <a:ea typeface="Aptos"/>
+                <a:cs typeface="Aptos"/>
+              </a:rPr>
+              <a:t>evap</a:t>
+            </a:r>
+            <a:r>
+              <a:rPr sz="1000" b="0" i="0">
+                <a:solidFill>
+                  <a:srgbClr val="202020"/>
+                </a:solidFill>
+                <a:latin typeface="Aptos"/>
+                <a:ea typeface="Aptos"/>
+                <a:cs typeface="Aptos"/>
+              </a:rPr>
+              <a:t> shroud,</a:t>
+            </a:r>
+          </a:p>
+          <a:p xmlns:a="http://schemas.openxmlformats.org/drawingml/2006/main">
+            <a:pPr algn="l">
+              <a:buNone/>
+            </a:pPr>
+            <a:r>
+              <a:rPr sz="1000" b="0" i="0">
+                <a:solidFill>
+                  <a:srgbClr val="202020"/>
+                </a:solidFill>
+                <a:latin typeface="Aptos"/>
+                <a:ea typeface="Aptos"/>
+                <a:cs typeface="Aptos"/>
+              </a:rPr>
+              <a:t> compress base, cond. shroud)</a:t>
+            </a:r>
+          </a:p>
+        </p:txBody>
+      </p:sp>
+      <p:sp>
+        <p:nvSpPr>
+          <p:cNvPr id="34" name="TextBox 33">
+            <a:extLst xmlns:a="http://schemas.openxmlformats.org/drawingml/2006/main">
+              <a:ext uri="{FF2B5EF4-FFF2-40B4-BE49-F238E27FC236}">
+                <a16:creationId xmlns:a16="http://schemas.microsoft.com/office/drawing/2014/main" id="{A296F264-219A-400A-BD6C-F22A158AB125}"/>
+              </a:ext>
+            </a:extLst>
+          </p:cNvPr>
+          <p:cNvSpPr>
+            <a:spLocks xmlns:a="http://schemas.openxmlformats.org/drawingml/2006/main" noGrp="1"/>
+          </p:cNvSpPr>
+          <p:nvPr/>
+        </p:nvSpPr>
+        <p:spPr>
+          <a:xfrm xmlns:a="http://schemas.openxmlformats.org/drawingml/2006/main">
+            <a:off x="3811335" y="4024096"/>
+            <a:ext cx="420051" cy="163122"/>
+          </a:xfrm>
+          <a:prstGeom xmlns:a="http://schemas.openxmlformats.org/drawingml/2006/main" prst="rect">
+            <a:avLst/>
+          </a:prstGeom>
+          <a:noFill xmlns:a="http://schemas.openxmlformats.org/drawingml/2006/main"/>
+        </p:spPr>
+        <p:txBody>
+          <a:bodyPr xmlns:a="http://schemas.openxmlformats.org/drawingml/2006/main" wrap="none" lIns="18288" tIns="4572" rIns="18288" bIns="4572" anchor="ctr">
+            <a:spAutoFit/>
+          </a:bodyPr>
+          <a:lstStyle xmlns:a="http://schemas.openxmlformats.org/drawingml/2006/main"/>
+          <a:p xmlns:a="http://schemas.openxmlformats.org/drawingml/2006/main">
+            <a:pPr algn="r">
+              <a:buNone/>
+            </a:pPr>
+            <a:r>
+              <a:rPr sz="1000" b="1" i="0">
+                <a:solidFill>
+                  <a:srgbClr val="202020"/>
+                </a:solidFill>
+                <a:latin typeface="Aptos"/>
+                <a:ea typeface="Aptos"/>
+                <a:cs typeface="Aptos"/>
+              </a:rPr>
+              <a:t>$25.00</a:t>
+            </a:r>
+          </a:p>
+        </p:txBody>
+      </p:sp>
+      <p:sp>
+        <p:nvSpPr>
+          <p:cNvPr id="35" name="TextBox 34">
+            <a:extLst xmlns:a="http://schemas.openxmlformats.org/drawingml/2006/main">
+              <a:ext uri="{FF2B5EF4-FFF2-40B4-BE49-F238E27FC236}">
+                <a16:creationId xmlns:a16="http://schemas.microsoft.com/office/drawing/2014/main" id="{3582A80F-F6A8-4183-8901-E68043A686FE}"/>
+              </a:ext>
+            </a:extLst>
+          </p:cNvPr>
+          <p:cNvSpPr>
+            <a:spLocks xmlns:a="http://schemas.openxmlformats.org/drawingml/2006/main" noGrp="1"/>
+          </p:cNvSpPr>
+          <p:nvPr/>
+        </p:nvSpPr>
+        <p:spPr>
+          <a:xfrm xmlns:a="http://schemas.openxmlformats.org/drawingml/2006/main">
+            <a:off x="4429020" y="4024096"/>
+            <a:ext cx="606000" cy="163122"/>
+          </a:xfrm>
+          <a:prstGeom xmlns:a="http://schemas.openxmlformats.org/drawingml/2006/main" prst="rect">
+            <a:avLst/>
+          </a:prstGeom>
+          <a:noFill xmlns:a="http://schemas.openxmlformats.org/drawingml/2006/main"/>
+        </p:spPr>
+        <p:txBody>
+          <a:bodyPr xmlns:a="http://schemas.openxmlformats.org/drawingml/2006/main" wrap="none" lIns="18288" tIns="4572" rIns="18288" bIns="4572" anchor="ctr">
+            <a:spAutoFit/>
+          </a:bodyPr>
+          <a:lstStyle xmlns:a="http://schemas.openxmlformats.org/drawingml/2006/main"/>
+          <a:p xmlns:a="http://schemas.openxmlformats.org/drawingml/2006/main">
+            <a:pPr algn="ctr">
+              <a:buNone/>
+            </a:pPr>
+            <a:r>
+              <a:rPr sz="1000" b="0" i="0">
+                <a:solidFill>
+                  <a:srgbClr val="202020"/>
+                </a:solidFill>
+                <a:latin typeface="Aptos"/>
+                <a:ea typeface="Aptos"/>
+                <a:cs typeface="Aptos"/>
+              </a:rPr>
+              <a:t>10/21/2026</a:t>
+            </a:r>
+          </a:p>
+        </p:txBody>
+      </p:sp>
+      <p:sp>
+        <p:nvSpPr>
+          <p:cNvPr id="36" name="Rounded Rectangle 35">
+            <a:extLst xmlns:a="http://schemas.openxmlformats.org/drawingml/2006/main">
+              <a:ext uri="{FF2B5EF4-FFF2-40B4-BE49-F238E27FC236}">
+                <a16:creationId xmlns:a16="http://schemas.microsoft.com/office/drawing/2014/main" id="{DCE43CBC-76E8-4F66-BD17-6D9C57A1EA6A}"/>
+              </a:ext>
+            </a:extLst>
+          </p:cNvPr>
+          <p:cNvSpPr>
+            <a:spLocks xmlns:a="http://schemas.openxmlformats.org/drawingml/2006/main" noGrp="1"/>
+          </p:cNvSpPr>
+          <p:nvPr/>
+        </p:nvSpPr>
+        <p:spPr>
+          <a:xfrm xmlns:a="http://schemas.openxmlformats.org/drawingml/2006/main">
+            <a:off x="5149900" y="4005072"/>
+            <a:ext cx="822960" cy="256032"/>
+          </a:xfrm>
+          <a:prstGeom xmlns:a="http://schemas.openxmlformats.org/drawingml/2006/main" prst="roundRect">
+            <a:avLst/>
+          </a:prstGeom>
+          <a:solidFill xmlns:a="http://schemas.openxmlformats.org/drawingml/2006/main">
+            <a:srgbClr val="A6A6A6"/>
+          </a:solidFill>
+          <a:ln xmlns:a="http://schemas.openxmlformats.org/drawingml/2006/main" w="0">
+            <a:solidFill>
+              <a:srgbClr val="A6A6A6"/>
+            </a:solidFill>
+            <a:prstDash val="solid"/>
+          </a:ln>
+        </p:spPr>
+        <p:style>
+          <a:lnRef xmlns:a="http://schemas.openxmlformats.org/drawingml/2006/main" idx="1">
+            <a:schemeClr val="accent1"/>
+          </a:lnRef>
+          <a:fillRef xmlns:a="http://schemas.openxmlformats.org/drawingml/2006/main" idx="3">
+            <a:schemeClr val="accent1"/>
+          </a:fillRef>
+          <a:effectRef xmlns:a="http://schemas.openxmlformats.org/drawingml/2006/main" idx="2">
+            <a:schemeClr val="accent1"/>
+          </a:effectRef>
+          <a:fontRef xmlns:a="http://schemas.openxmlformats.org/drawingml/2006/main" idx="minor">
+            <a:schemeClr val="lt1"/>
+          </a:fontRef>
+        </p:style>
+        <p:txBody>
+          <a:bodyPr xmlns:a="http://schemas.openxmlformats.org/drawingml/2006/main" anchor="ctr"/>
+          <a:lstStyle xmlns:a="http://schemas.openxmlformats.org/drawingml/2006/main"/>
+          <a:p xmlns:a="http://schemas.openxmlformats.org/drawingml/2006/main">
+            <a:pPr algn="ctr">
+              <a:buNone/>
+            </a:pPr>
+          </a:p>
+        </p:txBody>
+      </p:sp>
+      <p:sp>
+        <p:nvSpPr>
+          <p:cNvPr id="37" name="TextBox 36">
+            <a:extLst xmlns:a="http://schemas.openxmlformats.org/drawingml/2006/main">
+              <a:ext uri="{FF2B5EF4-FFF2-40B4-BE49-F238E27FC236}">
+                <a16:creationId xmlns:a16="http://schemas.microsoft.com/office/drawing/2014/main" id="{8C0E9E66-321E-4090-9244-1CBF4CDFF844}"/>
+              </a:ext>
+            </a:extLst>
+          </p:cNvPr>
+          <p:cNvSpPr>
+            <a:spLocks xmlns:a="http://schemas.openxmlformats.org/drawingml/2006/main" noGrp="1"/>
+          </p:cNvSpPr>
+          <p:nvPr/>
+        </p:nvSpPr>
+        <p:spPr>
+          <a:xfrm xmlns:a="http://schemas.openxmlformats.org/drawingml/2006/main">
+            <a:off x="5216702" y="4019524"/>
+            <a:ext cx="689356" cy="163122"/>
+          </a:xfrm>
+          <a:prstGeom xmlns:a="http://schemas.openxmlformats.org/drawingml/2006/main" prst="rect">
+            <a:avLst/>
+          </a:prstGeom>
+          <a:noFill xmlns:a="http://schemas.openxmlformats.org/drawingml/2006/main"/>
+        </p:spPr>
+        <p:txBody>
+          <a:bodyPr xmlns:a="http://schemas.openxmlformats.org/drawingml/2006/main" wrap="none" lIns="18288" tIns="4572" rIns="18288" bIns="4572" anchor="ctr">
+            <a:spAutoFit/>
+          </a:bodyPr>
+          <a:lstStyle xmlns:a="http://schemas.openxmlformats.org/drawingml/2006/main"/>
+          <a:p xmlns:a="http://schemas.openxmlformats.org/drawingml/2006/main">
+            <a:pPr algn="ctr">
+              <a:buNone/>
+            </a:pPr>
+            <a:r>
+              <a:rPr sz="1000" b="1" i="0">
+                <a:solidFill>
+                  <a:srgbClr val="FFFFFF"/>
+                </a:solidFill>
+                <a:latin typeface="Aptos"/>
+                <a:ea typeface="Aptos"/>
+                <a:cs typeface="Aptos"/>
+              </a:rPr>
+              <a:t>On Track</a:t>
+            </a:r>
+          </a:p>
+        </p:txBody>
+      </p:sp>
+      <p:sp>
+        <p:nvSpPr>
+          <p:cNvPr id="38" name="Rectangle 37">
+            <a:extLst xmlns:a="http://schemas.openxmlformats.org/drawingml/2006/main">
+              <a:ext uri="{FF2B5EF4-FFF2-40B4-BE49-F238E27FC236}">
+                <a16:creationId xmlns:a16="http://schemas.microsoft.com/office/drawing/2014/main" id="{1D6CC113-D710-4DB9-B50D-94895BE24F34}"/>
+              </a:ext>
+            </a:extLst>
+          </p:cNvPr>
+          <p:cNvSpPr>
+            <a:spLocks xmlns:a="http://schemas.openxmlformats.org/drawingml/2006/main" noGrp="1"/>
+          </p:cNvSpPr>
+          <p:nvPr/>
+        </p:nvSpPr>
+        <p:spPr>
+          <a:xfrm xmlns:a="http://schemas.openxmlformats.org/drawingml/2006/main">
+            <a:off x="502920" y="4535424"/>
+            <a:ext cx="5532120" cy="585216"/>
+          </a:xfrm>
+          <a:prstGeom xmlns:a="http://schemas.openxmlformats.org/drawingml/2006/main" prst="rect">
+            <a:avLst/>
+          </a:prstGeom>
+          <a:solidFill xmlns:a="http://schemas.openxmlformats.org/drawingml/2006/main">
+            <a:srgbClr val="F2F5FA"/>
+          </a:solidFill>
+          <a:ln xmlns:a="http://schemas.openxmlformats.org/drawingml/2006/main">
+            <a:solidFill>
+              <a:srgbClr val="F2F5FA"/>
+            </a:solidFill>
+          </a:ln>
+        </p:spPr>
+        <p:style>
+          <a:lnRef xmlns:a="http://schemas.openxmlformats.org/drawingml/2006/main" idx="1">
+            <a:schemeClr val="accent1"/>
+          </a:lnRef>
+          <a:fillRef xmlns:a="http://schemas.openxmlformats.org/drawingml/2006/main" idx="3">
+            <a:schemeClr val="accent1"/>
+          </a:fillRef>
+          <a:effectRef xmlns:a="http://schemas.openxmlformats.org/drawingml/2006/main" idx="2">
+            <a:schemeClr val="accent1"/>
+          </a:effectRef>
+          <a:fontRef xmlns:a="http://schemas.openxmlformats.org/drawingml/2006/main" idx="minor">
+            <a:schemeClr val="lt1"/>
+          </a:fontRef>
+        </p:style>
+        <p:txBody>
+          <a:bodyPr xmlns:a="http://schemas.openxmlformats.org/drawingml/2006/main" anchor="ctr"/>
+          <a:lstStyle xmlns:a="http://schemas.openxmlformats.org/drawingml/2006/main"/>
+          <a:p xmlns:a="http://schemas.openxmlformats.org/drawingml/2006/main">
+            <a:pPr algn="ctr">
+              <a:buNone/>
+            </a:pPr>
+          </a:p>
+        </p:txBody>
+      </p:sp>
+      <p:sp>
+        <p:nvSpPr>
+          <p:cNvPr id="39" name="TextBox 38">
+            <a:extLst xmlns:a="http://schemas.openxmlformats.org/drawingml/2006/main">
+              <a:ext uri="{FF2B5EF4-FFF2-40B4-BE49-F238E27FC236}">
+                <a16:creationId xmlns:a16="http://schemas.microsoft.com/office/drawing/2014/main" id="{B3A8F3CC-740B-4352-A533-F6803D1F9EA8}"/>
+              </a:ext>
+            </a:extLst>
+          </p:cNvPr>
+          <p:cNvSpPr>
+            <a:spLocks xmlns:a="http://schemas.openxmlformats.org/drawingml/2006/main" noGrp="1"/>
+          </p:cNvSpPr>
+          <p:nvPr/>
+        </p:nvSpPr>
+        <p:spPr>
+          <a:xfrm xmlns:a="http://schemas.openxmlformats.org/drawingml/2006/main">
+            <a:off x="612648" y="4764760"/>
+            <a:ext cx="2758832" cy="163122"/>
+          </a:xfrm>
+          <a:prstGeom xmlns:a="http://schemas.openxmlformats.org/drawingml/2006/main" prst="rect">
+            <a:avLst/>
+          </a:prstGeom>
+          <a:noFill xmlns:a="http://schemas.openxmlformats.org/drawingml/2006/main"/>
+        </p:spPr>
+        <p:txBody>
+          <a:bodyPr xmlns:a="http://schemas.openxmlformats.org/drawingml/2006/main" wrap="none" lIns="18288" tIns="4572" rIns="18288" bIns="4572" anchor="ctr">
+            <a:spAutoFit/>
+          </a:bodyPr>
+          <a:lstStyle xmlns:a="http://schemas.openxmlformats.org/drawingml/2006/main"/>
+          <a:p xmlns:a="http://schemas.openxmlformats.org/drawingml/2006/main">
+            <a:pPr algn="l">
+              <a:buNone/>
+            </a:pPr>
+            <a:r>
+              <a:rPr sz="1000" b="0" i="0">
+                <a:solidFill>
+                  <a:srgbClr val="202020"/>
+                </a:solidFill>
+                <a:latin typeface="Aptos"/>
+                <a:ea typeface="Aptos"/>
+                <a:cs typeface="Aptos"/>
+              </a:rPr>
+              <a:t>New enclosure for 2.0 (Molded foam/ Sm/ gasket)</a:t>
+            </a:r>
+          </a:p>
+        </p:txBody>
+      </p:sp>
+      <p:sp>
+        <p:nvSpPr>
+          <p:cNvPr id="40" name="TextBox 39">
+            <a:extLst xmlns:a="http://schemas.openxmlformats.org/drawingml/2006/main">
+              <a:ext uri="{FF2B5EF4-FFF2-40B4-BE49-F238E27FC236}">
+                <a16:creationId xmlns:a16="http://schemas.microsoft.com/office/drawing/2014/main" id="{71B6A305-ADB7-47AB-BC84-8A8BE68B417C}"/>
+              </a:ext>
+            </a:extLst>
+          </p:cNvPr>
+          <p:cNvSpPr>
+            <a:spLocks xmlns:a="http://schemas.openxmlformats.org/drawingml/2006/main" noGrp="1"/>
+          </p:cNvSpPr>
+          <p:nvPr/>
+        </p:nvSpPr>
+        <p:spPr>
+          <a:xfrm xmlns:a="http://schemas.openxmlformats.org/drawingml/2006/main">
+            <a:off x="3811335" y="4691608"/>
+            <a:ext cx="420051" cy="163122"/>
+          </a:xfrm>
+          <a:prstGeom xmlns:a="http://schemas.openxmlformats.org/drawingml/2006/main" prst="rect">
+            <a:avLst/>
+          </a:prstGeom>
+          <a:noFill xmlns:a="http://schemas.openxmlformats.org/drawingml/2006/main"/>
+        </p:spPr>
+        <p:txBody>
+          <a:bodyPr xmlns:a="http://schemas.openxmlformats.org/drawingml/2006/main" wrap="none" lIns="18288" tIns="4572" rIns="18288" bIns="4572" anchor="ctr">
+            <a:spAutoFit/>
+          </a:bodyPr>
+          <a:lstStyle xmlns:a="http://schemas.openxmlformats.org/drawingml/2006/main"/>
+          <a:p xmlns:a="http://schemas.openxmlformats.org/drawingml/2006/main">
+            <a:pPr algn="r">
+              <a:buNone/>
+            </a:pPr>
+            <a:r>
+              <a:rPr sz="1000" b="1" i="0">
+                <a:solidFill>
+                  <a:srgbClr val="202020"/>
+                </a:solidFill>
+                <a:latin typeface="Aptos"/>
+                <a:ea typeface="Aptos"/>
+                <a:cs typeface="Aptos"/>
+              </a:rPr>
+              <a:t>$20.00</a:t>
+            </a:r>
+          </a:p>
+        </p:txBody>
+      </p:sp>
+      <p:sp>
+        <p:nvSpPr>
+          <p:cNvPr id="41" name="TextBox 40">
+            <a:extLst xmlns:a="http://schemas.openxmlformats.org/drawingml/2006/main">
+              <a:ext uri="{FF2B5EF4-FFF2-40B4-BE49-F238E27FC236}">
+                <a16:creationId xmlns:a16="http://schemas.microsoft.com/office/drawing/2014/main" id="{FE60127C-CA66-4A04-BB7E-11398B1C1A41}"/>
+              </a:ext>
+            </a:extLst>
+          </p:cNvPr>
+          <p:cNvSpPr>
+            <a:spLocks xmlns:a="http://schemas.openxmlformats.org/drawingml/2006/main" noGrp="1"/>
+          </p:cNvSpPr>
+          <p:nvPr/>
+        </p:nvSpPr>
+        <p:spPr>
+          <a:xfrm xmlns:a="http://schemas.openxmlformats.org/drawingml/2006/main">
+            <a:off x="4394555" y="4691608"/>
+            <a:ext cx="674929" cy="163122"/>
+          </a:xfrm>
+          <a:prstGeom xmlns:a="http://schemas.openxmlformats.org/drawingml/2006/main" prst="rect">
+            <a:avLst/>
+          </a:prstGeom>
+          <a:noFill xmlns:a="http://schemas.openxmlformats.org/drawingml/2006/main"/>
+        </p:spPr>
+        <p:txBody>
+          <a:bodyPr xmlns:a="http://schemas.openxmlformats.org/drawingml/2006/main" wrap="none" lIns="18288" tIns="4572" rIns="18288" bIns="4572" anchor="ctr">
+            <a:spAutoFit/>
+          </a:bodyPr>
+          <a:lstStyle xmlns:a="http://schemas.openxmlformats.org/drawingml/2006/main"/>
+          <a:p xmlns:a="http://schemas.openxmlformats.org/drawingml/2006/main">
+            <a:pPr algn="ctr">
+              <a:buNone/>
+            </a:pPr>
+            <a:r>
+              <a:rPr sz="1000" b="0" i="0">
+                <a:solidFill>
+                  <a:srgbClr val="202020"/>
+                </a:solidFill>
+                <a:latin typeface="Aptos"/>
+                <a:ea typeface="Aptos"/>
+                <a:cs typeface="Aptos"/>
+              </a:rPr>
+              <a:t>10/30/2026</a:t>
+            </a:r>
+          </a:p>
+        </p:txBody>
+      </p:sp>
+      <p:sp>
+        <p:nvSpPr>
+          <p:cNvPr id="42" name="Rounded Rectangle 41">
+            <a:extLst xmlns:a="http://schemas.openxmlformats.org/drawingml/2006/main">
+              <a:ext uri="{FF2B5EF4-FFF2-40B4-BE49-F238E27FC236}">
+                <a16:creationId xmlns:a16="http://schemas.microsoft.com/office/drawing/2014/main" id="{67037022-FD4D-4517-903D-367543E7B485}"/>
+              </a:ext>
+            </a:extLst>
+          </p:cNvPr>
+          <p:cNvSpPr>
+            <a:spLocks xmlns:a="http://schemas.openxmlformats.org/drawingml/2006/main" noGrp="1"/>
+          </p:cNvSpPr>
+          <p:nvPr/>
+        </p:nvSpPr>
+        <p:spPr>
+          <a:xfrm xmlns:a="http://schemas.openxmlformats.org/drawingml/2006/main">
+            <a:off x="5149900" y="4672584"/>
+            <a:ext cx="822960" cy="256032"/>
+          </a:xfrm>
+          <a:prstGeom xmlns:a="http://schemas.openxmlformats.org/drawingml/2006/main" prst="roundRect">
+            <a:avLst/>
+          </a:prstGeom>
+          <a:solidFill xmlns:a="http://schemas.openxmlformats.org/drawingml/2006/main">
+            <a:srgbClr val="A6A6A6"/>
+          </a:solidFill>
+          <a:ln xmlns:a="http://schemas.openxmlformats.org/drawingml/2006/main" w="0">
+            <a:solidFill>
+              <a:srgbClr val="A6A6A6"/>
+            </a:solidFill>
+            <a:prstDash val="solid"/>
+          </a:ln>
+        </p:spPr>
+        <p:style>
+          <a:lnRef xmlns:a="http://schemas.openxmlformats.org/drawingml/2006/main" idx="1">
+            <a:schemeClr val="accent1"/>
+          </a:lnRef>
+          <a:fillRef xmlns:a="http://schemas.openxmlformats.org/drawingml/2006/main" idx="3">
+            <a:schemeClr val="accent1"/>
+          </a:fillRef>
+          <a:effectRef xmlns:a="http://schemas.openxmlformats.org/drawingml/2006/main" idx="2">
+            <a:schemeClr val="accent1"/>
+          </a:effectRef>
+          <a:fontRef xmlns:a="http://schemas.openxmlformats.org/drawingml/2006/main" idx="minor">
+            <a:schemeClr val="lt1"/>
+          </a:fontRef>
+        </p:style>
+        <p:txBody>
+          <a:bodyPr xmlns:a="http://schemas.openxmlformats.org/drawingml/2006/main" anchor="ctr"/>
+          <a:lstStyle xmlns:a="http://schemas.openxmlformats.org/drawingml/2006/main"/>
+          <a:p xmlns:a="http://schemas.openxmlformats.org/drawingml/2006/main">
+            <a:pPr algn="ctr">
+              <a:buNone/>
+            </a:pPr>
+          </a:p>
+        </p:txBody>
+      </p:sp>
+      <p:sp>
+        <p:nvSpPr>
+          <p:cNvPr id="43" name="TextBox 42">
+            <a:extLst xmlns:a="http://schemas.openxmlformats.org/drawingml/2006/main">
+              <a:ext uri="{FF2B5EF4-FFF2-40B4-BE49-F238E27FC236}">
+                <a16:creationId xmlns:a16="http://schemas.microsoft.com/office/drawing/2014/main" id="{61D05615-695E-42B9-ADEB-EBE7592924A6}"/>
+              </a:ext>
+            </a:extLst>
+          </p:cNvPr>
+          <p:cNvSpPr>
+            <a:spLocks xmlns:a="http://schemas.openxmlformats.org/drawingml/2006/main" noGrp="1"/>
+          </p:cNvSpPr>
+          <p:nvPr/>
+        </p:nvSpPr>
+        <p:spPr>
+          <a:xfrm xmlns:a="http://schemas.openxmlformats.org/drawingml/2006/main">
+            <a:off x="5216702" y="4687036"/>
+            <a:ext cx="689356" cy="163122"/>
+          </a:xfrm>
+          <a:prstGeom xmlns:a="http://schemas.openxmlformats.org/drawingml/2006/main" prst="rect">
+            <a:avLst/>
+          </a:prstGeom>
+          <a:noFill xmlns:a="http://schemas.openxmlformats.org/drawingml/2006/main"/>
+        </p:spPr>
+        <p:txBody>
+          <a:bodyPr xmlns:a="http://schemas.openxmlformats.org/drawingml/2006/main" wrap="none" lIns="18288" tIns="4572" rIns="18288" bIns="4572" anchor="ctr">
+            <a:spAutoFit/>
+          </a:bodyPr>
+          <a:lstStyle xmlns:a="http://schemas.openxmlformats.org/drawingml/2006/main"/>
+          <a:p xmlns:a="http://schemas.openxmlformats.org/drawingml/2006/main">
+            <a:pPr algn="ctr">
+              <a:buNone/>
+            </a:pPr>
+            <a:r>
+              <a:rPr sz="1000" b="1" i="0">
+                <a:solidFill>
+                  <a:srgbClr val="FFFFFF"/>
+                </a:solidFill>
+                <a:latin typeface="Aptos"/>
+                <a:ea typeface="Aptos"/>
+                <a:cs typeface="Aptos"/>
+              </a:rPr>
+              <a:t>On Track</a:t>
+            </a:r>
+          </a:p>
+        </p:txBody>
+      </p:sp>
+      <p:sp>
+        <p:nvSpPr>
+          <p:cNvPr id="56" name="Rectangle 55">
+            <a:extLst xmlns:a="http://schemas.openxmlformats.org/drawingml/2006/main">
+              <a:ext uri="{FF2B5EF4-FFF2-40B4-BE49-F238E27FC236}">
+                <a16:creationId xmlns:a16="http://schemas.microsoft.com/office/drawing/2014/main" id="{DA0642D8-B542-43FF-9A04-69AC6221B9FD}"/>
+              </a:ext>
+            </a:extLst>
+          </p:cNvPr>
+          <p:cNvSpPr>
+            <a:spLocks xmlns:a="http://schemas.openxmlformats.org/drawingml/2006/main" noGrp="1"/>
+          </p:cNvSpPr>
+          <p:nvPr/>
+        </p:nvSpPr>
+        <p:spPr>
+          <a:xfrm xmlns:a="http://schemas.openxmlformats.org/drawingml/2006/main">
+            <a:off x="6263640" y="1508760"/>
+            <a:ext cx="5532120" cy="274320"/>
+          </a:xfrm>
+          <a:prstGeom xmlns:a="http://schemas.openxmlformats.org/drawingml/2006/main" prst="rect">
+            <a:avLst/>
+          </a:prstGeom>
+          <a:solidFill xmlns:a="http://schemas.openxmlformats.org/drawingml/2006/main">
+            <a:srgbClr val="E8EFF7"/>
+          </a:solidFill>
+          <a:ln xmlns:a="http://schemas.openxmlformats.org/drawingml/2006/main">
+            <a:solidFill>
+              <a:srgbClr val="D9D9D9"/>
+            </a:solidFill>
+          </a:ln>
+        </p:spPr>
+        <p:style>
+          <a:lnRef xmlns:a="http://schemas.openxmlformats.org/drawingml/2006/main" idx="1">
+            <a:schemeClr val="accent1"/>
+          </a:lnRef>
+          <a:fillRef xmlns:a="http://schemas.openxmlformats.org/drawingml/2006/main" idx="3">
+            <a:schemeClr val="accent1"/>
+          </a:fillRef>
+          <a:effectRef xmlns:a="http://schemas.openxmlformats.org/drawingml/2006/main" idx="2">
+            <a:schemeClr val="accent1"/>
+          </a:effectRef>
+          <a:fontRef xmlns:a="http://schemas.openxmlformats.org/drawingml/2006/main" idx="minor">
+            <a:schemeClr val="lt1"/>
+          </a:fontRef>
+        </p:style>
+        <p:txBody>
+          <a:bodyPr xmlns:a="http://schemas.openxmlformats.org/drawingml/2006/main" anchor="ctr"/>
+          <a:lstStyle xmlns:a="http://schemas.openxmlformats.org/drawingml/2006/main"/>
+          <a:p xmlns:a="http://schemas.openxmlformats.org/drawingml/2006/main">
+            <a:pPr algn="ctr">
+              <a:buNone/>
+            </a:pPr>
+          </a:p>
+        </p:txBody>
+      </p:sp>
+      <p:sp>
+        <p:nvSpPr>
+          <p:cNvPr id="57" name="TextBox 56">
+            <a:extLst xmlns:a="http://schemas.openxmlformats.org/drawingml/2006/main">
+              <a:ext uri="{FF2B5EF4-FFF2-40B4-BE49-F238E27FC236}">
+                <a16:creationId xmlns:a16="http://schemas.microsoft.com/office/drawing/2014/main" id="{B656BA7B-152B-44DE-B3E7-B92BAAE2D80B}"/>
+              </a:ext>
+            </a:extLst>
+          </p:cNvPr>
+          <p:cNvSpPr>
+            <a:spLocks xmlns:a="http://schemas.openxmlformats.org/drawingml/2006/main" noGrp="1"/>
+          </p:cNvSpPr>
+          <p:nvPr/>
+        </p:nvSpPr>
+        <p:spPr>
+          <a:xfrm xmlns:a="http://schemas.openxmlformats.org/drawingml/2006/main">
+            <a:off x="6373368" y="1541499"/>
+            <a:ext cx="679738" cy="163122"/>
+          </a:xfrm>
+          <a:prstGeom xmlns:a="http://schemas.openxmlformats.org/drawingml/2006/main" prst="rect">
+            <a:avLst/>
+          </a:prstGeom>
+          <a:noFill xmlns:a="http://schemas.openxmlformats.org/drawingml/2006/main"/>
+        </p:spPr>
+        <p:txBody>
+          <a:bodyPr xmlns:a="http://schemas.openxmlformats.org/drawingml/2006/main" wrap="none" lIns="18288" tIns="4572" rIns="18288" bIns="4572" anchor="ctr">
+            <a:spAutoFit/>
+          </a:bodyPr>
+          <a:lstStyle xmlns:a="http://schemas.openxmlformats.org/drawingml/2006/main"/>
+          <a:p xmlns:a="http://schemas.openxmlformats.org/drawingml/2006/main">
+            <a:pPr algn="l">
+              <a:buNone/>
+            </a:pPr>
+            <a:r>
+              <a:rPr sz="1000" b="1" i="0">
+                <a:solidFill>
+                  <a:srgbClr val="202020"/>
+                </a:solidFill>
+                <a:latin typeface="Aptos"/>
+                <a:ea typeface="Aptos"/>
+                <a:cs typeface="Aptos"/>
+              </a:rPr>
+              <a:t>Task Name</a:t>
+            </a:r>
+          </a:p>
+        </p:txBody>
+      </p:sp>
+      <p:sp>
+        <p:nvSpPr>
+          <p:cNvPr id="58" name="TextBox 57">
+            <a:extLst xmlns:a="http://schemas.openxmlformats.org/drawingml/2006/main">
+              <a:ext uri="{FF2B5EF4-FFF2-40B4-BE49-F238E27FC236}">
+                <a16:creationId xmlns:a16="http://schemas.microsoft.com/office/drawing/2014/main" id="{4BBB7264-7FD5-410B-A67E-C3E19D7B9C38}"/>
+              </a:ext>
+            </a:extLst>
+          </p:cNvPr>
+          <p:cNvSpPr>
+            <a:spLocks xmlns:a="http://schemas.openxmlformats.org/drawingml/2006/main" noGrp="1"/>
+          </p:cNvSpPr>
+          <p:nvPr/>
+        </p:nvSpPr>
+        <p:spPr>
+          <a:xfrm xmlns:a="http://schemas.openxmlformats.org/drawingml/2006/main">
+            <a:off x="9506332" y="1541499"/>
+            <a:ext cx="485774" cy="163122"/>
+          </a:xfrm>
+          <a:prstGeom xmlns:a="http://schemas.openxmlformats.org/drawingml/2006/main" prst="rect">
+            <a:avLst/>
+          </a:prstGeom>
+          <a:noFill xmlns:a="http://schemas.openxmlformats.org/drawingml/2006/main"/>
+        </p:spPr>
+        <p:txBody>
+          <a:bodyPr xmlns:a="http://schemas.openxmlformats.org/drawingml/2006/main" wrap="none" lIns="18288" tIns="4572" rIns="18288" bIns="4572" anchor="ctr">
+            <a:spAutoFit/>
+          </a:bodyPr>
+          <a:lstStyle xmlns:a="http://schemas.openxmlformats.org/drawingml/2006/main"/>
+          <a:p xmlns:a="http://schemas.openxmlformats.org/drawingml/2006/main">
+            <a:pPr algn="r">
+              <a:buNone/>
+            </a:pPr>
+            <a:r>
+              <a:rPr sz="1000" b="1" i="0">
+                <a:solidFill>
+                  <a:srgbClr val="202020"/>
+                </a:solidFill>
+                <a:latin typeface="Aptos"/>
+                <a:ea typeface="Aptos"/>
+                <a:cs typeface="Aptos"/>
+              </a:rPr>
+              <a:t>Savings</a:t>
+            </a:r>
+          </a:p>
+        </p:txBody>
+      </p:sp>
+      <p:sp>
+        <p:nvSpPr>
+          <p:cNvPr id="59" name="TextBox 58">
+            <a:extLst xmlns:a="http://schemas.openxmlformats.org/drawingml/2006/main">
+              <a:ext uri="{FF2B5EF4-FFF2-40B4-BE49-F238E27FC236}">
+                <a16:creationId xmlns:a16="http://schemas.microsoft.com/office/drawing/2014/main" id="{13116DE6-6CC0-4E7E-851A-841928A994EF}"/>
+              </a:ext>
+            </a:extLst>
+          </p:cNvPr>
+          <p:cNvSpPr>
+            <a:spLocks xmlns:a="http://schemas.openxmlformats.org/drawingml/2006/main" noGrp="1"/>
+          </p:cNvSpPr>
+          <p:nvPr/>
+        </p:nvSpPr>
+        <p:spPr>
+          <a:xfrm xmlns:a="http://schemas.openxmlformats.org/drawingml/2006/main">
+            <a:off x="10335432" y="1541499"/>
+            <a:ext cx="259751" cy="163122"/>
+          </a:xfrm>
+          <a:prstGeom xmlns:a="http://schemas.openxmlformats.org/drawingml/2006/main" prst="rect">
+            <a:avLst/>
+          </a:prstGeom>
+          <a:noFill xmlns:a="http://schemas.openxmlformats.org/drawingml/2006/main"/>
+        </p:spPr>
+        <p:txBody>
+          <a:bodyPr xmlns:a="http://schemas.openxmlformats.org/drawingml/2006/main" wrap="none" lIns="18288" tIns="4572" rIns="18288" bIns="4572" anchor="ctr">
+            <a:spAutoFit/>
+          </a:bodyPr>
+          <a:lstStyle xmlns:a="http://schemas.openxmlformats.org/drawingml/2006/main"/>
+          <a:p xmlns:a="http://schemas.openxmlformats.org/drawingml/2006/main">
+            <a:pPr algn="ctr">
+              <a:buNone/>
+            </a:pPr>
+            <a:r>
+              <a:rPr sz="1000" b="1" i="0">
+                <a:solidFill>
+                  <a:srgbClr val="202020"/>
+                </a:solidFill>
+                <a:latin typeface="Aptos"/>
+                <a:ea typeface="Aptos"/>
+                <a:cs typeface="Aptos"/>
+              </a:rPr>
+              <a:t>End</a:t>
+            </a:r>
+          </a:p>
+        </p:txBody>
+      </p:sp>
+      <p:sp>
+        <p:nvSpPr>
+          <p:cNvPr id="60" name="TextBox 59">
+            <a:extLst xmlns:a="http://schemas.openxmlformats.org/drawingml/2006/main">
+              <a:ext uri="{FF2B5EF4-FFF2-40B4-BE49-F238E27FC236}">
+                <a16:creationId xmlns:a16="http://schemas.microsoft.com/office/drawing/2014/main" id="{F21CBF41-2B58-4A41-A4A9-42E8F9E9FE4C}"/>
+              </a:ext>
+            </a:extLst>
+          </p:cNvPr>
+          <p:cNvSpPr>
+            <a:spLocks xmlns:a="http://schemas.openxmlformats.org/drawingml/2006/main" noGrp="1"/>
+          </p:cNvSpPr>
+          <p:nvPr/>
+        </p:nvSpPr>
+        <p:spPr>
+          <a:xfrm xmlns:a="http://schemas.openxmlformats.org/drawingml/2006/main">
+            <a:off x="11077903" y="1541499"/>
+            <a:ext cx="415242" cy="163122"/>
+          </a:xfrm>
+          <a:prstGeom xmlns:a="http://schemas.openxmlformats.org/drawingml/2006/main" prst="rect">
+            <a:avLst/>
+          </a:prstGeom>
+          <a:noFill xmlns:a="http://schemas.openxmlformats.org/drawingml/2006/main"/>
+        </p:spPr>
+        <p:txBody>
+          <a:bodyPr xmlns:a="http://schemas.openxmlformats.org/drawingml/2006/main" wrap="none" lIns="18288" tIns="4572" rIns="18288" bIns="4572" anchor="ctr">
+            <a:spAutoFit/>
+          </a:bodyPr>
+          <a:lstStyle xmlns:a="http://schemas.openxmlformats.org/drawingml/2006/main"/>
+          <a:p xmlns:a="http://schemas.openxmlformats.org/drawingml/2006/main">
+            <a:pPr algn="ctr">
+              <a:buNone/>
+            </a:pPr>
+            <a:r>
+              <a:rPr sz="1000" b="1" i="0">
+                <a:solidFill>
+                  <a:srgbClr val="202020"/>
+                </a:solidFill>
+                <a:latin typeface="Aptos"/>
+                <a:ea typeface="Aptos"/>
+                <a:cs typeface="Aptos"/>
+              </a:rPr>
+              <a:t>Status</a:t>
+            </a:r>
+          </a:p>
+        </p:txBody>
+      </p:sp>
+      <p:sp>
+        <p:nvSpPr>
+          <p:cNvPr id="61" name="Rectangle 60">
+            <a:extLst xmlns:a="http://schemas.openxmlformats.org/drawingml/2006/main">
+              <a:ext uri="{FF2B5EF4-FFF2-40B4-BE49-F238E27FC236}">
+                <a16:creationId xmlns:a16="http://schemas.microsoft.com/office/drawing/2014/main" id="{B3CA1FE7-3B4D-4596-B587-7BC75523FC7C}"/>
+              </a:ext>
+            </a:extLst>
+          </p:cNvPr>
+          <p:cNvSpPr>
+            <a:spLocks xmlns:a="http://schemas.openxmlformats.org/drawingml/2006/main" noGrp="1"/>
+          </p:cNvSpPr>
+          <p:nvPr/>
+        </p:nvSpPr>
+        <p:spPr>
+          <a:xfrm xmlns:a="http://schemas.openxmlformats.org/drawingml/2006/main">
+            <a:off x="6263640" y="1865376"/>
+            <a:ext cx="5532120" cy="585216"/>
+          </a:xfrm>
+          <a:prstGeom xmlns:a="http://schemas.openxmlformats.org/drawingml/2006/main" prst="rect">
+            <a:avLst/>
+          </a:prstGeom>
+          <a:solidFill xmlns:a="http://schemas.openxmlformats.org/drawingml/2006/main">
+            <a:srgbClr val="F2F5FA"/>
+          </a:solidFill>
+          <a:ln xmlns:a="http://schemas.openxmlformats.org/drawingml/2006/main">
+            <a:solidFill>
+              <a:srgbClr val="F2F5FA"/>
+            </a:solidFill>
+          </a:ln>
+        </p:spPr>
+        <p:style>
+          <a:lnRef xmlns:a="http://schemas.openxmlformats.org/drawingml/2006/main" idx="1">
+            <a:schemeClr val="accent1"/>
+          </a:lnRef>
+          <a:fillRef xmlns:a="http://schemas.openxmlformats.org/drawingml/2006/main" idx="3">
+            <a:schemeClr val="accent1"/>
+          </a:fillRef>
+          <a:effectRef xmlns:a="http://schemas.openxmlformats.org/drawingml/2006/main" idx="2">
+            <a:schemeClr val="accent1"/>
+          </a:effectRef>
+          <a:fontRef xmlns:a="http://schemas.openxmlformats.org/drawingml/2006/main" idx="minor">
+            <a:schemeClr val="lt1"/>
+          </a:fontRef>
+        </p:style>
+        <p:txBody>
+          <a:bodyPr xmlns:a="http://schemas.openxmlformats.org/drawingml/2006/main" anchor="ctr"/>
+          <a:lstStyle xmlns:a="http://schemas.openxmlformats.org/drawingml/2006/main"/>
+          <a:p xmlns:a="http://schemas.openxmlformats.org/drawingml/2006/main">
+            <a:pPr algn="ctr">
+              <a:buNone/>
+            </a:pPr>
+          </a:p>
+        </p:txBody>
+      </p:sp>
+      <p:sp>
+        <p:nvSpPr>
+          <p:cNvPr id="62" name="TextBox 61">
+            <a:extLst xmlns:a="http://schemas.openxmlformats.org/drawingml/2006/main">
+              <a:ext uri="{FF2B5EF4-FFF2-40B4-BE49-F238E27FC236}">
+                <a16:creationId xmlns:a16="http://schemas.microsoft.com/office/drawing/2014/main" id="{B3660ADC-DFC8-48F0-BC82-1795AFE273F7}"/>
+              </a:ext>
+            </a:extLst>
+          </p:cNvPr>
+          <p:cNvSpPr>
+            <a:spLocks xmlns:a="http://schemas.openxmlformats.org/drawingml/2006/main" noGrp="1"/>
+          </p:cNvSpPr>
+          <p:nvPr/>
+        </p:nvSpPr>
+        <p:spPr>
+          <a:xfrm xmlns:a="http://schemas.openxmlformats.org/drawingml/2006/main">
+            <a:off x="6373368" y="2094712"/>
+            <a:ext cx="957057" cy="163122"/>
+          </a:xfrm>
+          <a:prstGeom xmlns:a="http://schemas.openxmlformats.org/drawingml/2006/main" prst="rect">
+            <a:avLst/>
+          </a:prstGeom>
+          <a:noFill xmlns:a="http://schemas.openxmlformats.org/drawingml/2006/main"/>
+        </p:spPr>
+        <p:txBody>
+          <a:bodyPr xmlns:a="http://schemas.openxmlformats.org/drawingml/2006/main" wrap="none" lIns="18288" tIns="4572" rIns="18288" bIns="4572" anchor="ctr">
+            <a:spAutoFit/>
+          </a:bodyPr>
+          <a:lstStyle xmlns:a="http://schemas.openxmlformats.org/drawingml/2006/main"/>
+          <a:p xmlns:a="http://schemas.openxmlformats.org/drawingml/2006/main">
+            <a:pPr algn="l">
+              <a:buNone/>
+            </a:pPr>
+            <a:r>
+              <a:rPr sz="1000" b="0" i="0">
+                <a:solidFill>
+                  <a:srgbClr val="202020"/>
+                </a:solidFill>
+                <a:latin typeface="Aptos"/>
+                <a:ea typeface="Aptos"/>
+                <a:cs typeface="Aptos"/>
+              </a:rPr>
+              <a:t>Aluminum coil</a:t>
+            </a:r>
+          </a:p>
+        </p:txBody>
+      </p:sp>
+      <p:sp>
+        <p:nvSpPr>
+          <p:cNvPr id="63" name="TextBox 62">
+            <a:extLst xmlns:a="http://schemas.openxmlformats.org/drawingml/2006/main">
+              <a:ext uri="{FF2B5EF4-FFF2-40B4-BE49-F238E27FC236}">
+                <a16:creationId xmlns:a16="http://schemas.microsoft.com/office/drawing/2014/main" id="{F65AD8FD-9B76-4BA9-99FB-9663F23B3F83}"/>
+              </a:ext>
+            </a:extLst>
+          </p:cNvPr>
+          <p:cNvSpPr>
+            <a:spLocks xmlns:a="http://schemas.openxmlformats.org/drawingml/2006/main" noGrp="1"/>
+          </p:cNvSpPr>
+          <p:nvPr/>
+        </p:nvSpPr>
+        <p:spPr>
+          <a:xfrm xmlns:a="http://schemas.openxmlformats.org/drawingml/2006/main">
+            <a:off x="9640983" y="2021560"/>
+            <a:ext cx="351123" cy="163122"/>
+          </a:xfrm>
+          <a:prstGeom xmlns:a="http://schemas.openxmlformats.org/drawingml/2006/main" prst="rect">
+            <a:avLst/>
+          </a:prstGeom>
+          <a:noFill xmlns:a="http://schemas.openxmlformats.org/drawingml/2006/main"/>
+        </p:spPr>
+        <p:txBody>
+          <a:bodyPr xmlns:a="http://schemas.openxmlformats.org/drawingml/2006/main" wrap="none" lIns="18288" tIns="4572" rIns="18288" bIns="4572" anchor="ctr">
+            <a:spAutoFit/>
+          </a:bodyPr>
+          <a:lstStyle xmlns:a="http://schemas.openxmlformats.org/drawingml/2006/main"/>
+          <a:p xmlns:a="http://schemas.openxmlformats.org/drawingml/2006/main">
+            <a:pPr algn="r">
+              <a:buNone/>
+            </a:pPr>
+            <a:r>
+              <a:rPr sz="1000" b="1" i="0">
+                <a:solidFill>
+                  <a:srgbClr val="202020"/>
+                </a:solidFill>
+                <a:latin typeface="Aptos"/>
+                <a:ea typeface="Aptos"/>
+                <a:cs typeface="Aptos"/>
+              </a:rPr>
+              <a:t>$40.00</a:t>
+            </a:r>
+          </a:p>
+        </p:txBody>
+      </p:sp>
+      <p:sp>
+        <p:nvSpPr>
+          <p:cNvPr id="64" name="TextBox 63">
+            <a:extLst xmlns:a="http://schemas.openxmlformats.org/drawingml/2006/main">
+              <a:ext uri="{FF2B5EF4-FFF2-40B4-BE49-F238E27FC236}">
+                <a16:creationId xmlns:a16="http://schemas.microsoft.com/office/drawing/2014/main" id="{D22FBEC1-15DB-410F-854F-6D0FCCC100DD}"/>
+              </a:ext>
+            </a:extLst>
+          </p:cNvPr>
+          <p:cNvSpPr>
+            <a:spLocks xmlns:a="http://schemas.openxmlformats.org/drawingml/2006/main" noGrp="1"/>
+          </p:cNvSpPr>
+          <p:nvPr/>
+        </p:nvSpPr>
+        <p:spPr>
+          <a:xfrm xmlns:a="http://schemas.openxmlformats.org/drawingml/2006/main">
+            <a:off x="10189741" y="2021560"/>
+            <a:ext cx="606000" cy="163122"/>
+          </a:xfrm>
+          <a:prstGeom xmlns:a="http://schemas.openxmlformats.org/drawingml/2006/main" prst="rect">
+            <a:avLst/>
+          </a:prstGeom>
+          <a:noFill xmlns:a="http://schemas.openxmlformats.org/drawingml/2006/main"/>
+        </p:spPr>
+        <p:txBody>
+          <a:bodyPr xmlns:a="http://schemas.openxmlformats.org/drawingml/2006/main" wrap="none" lIns="18288" tIns="4572" rIns="18288" bIns="4572" anchor="ctr">
+            <a:spAutoFit/>
+          </a:bodyPr>
+          <a:lstStyle xmlns:a="http://schemas.openxmlformats.org/drawingml/2006/main"/>
+          <a:p xmlns:a="http://schemas.openxmlformats.org/drawingml/2006/main">
+            <a:pPr algn="ctr">
+              <a:buNone/>
+            </a:pPr>
+            <a:r>
+              <a:rPr sz="1000" b="0" i="0">
+                <a:solidFill>
+                  <a:srgbClr val="202020"/>
+                </a:solidFill>
+                <a:latin typeface="Aptos"/>
+                <a:ea typeface="Aptos"/>
+                <a:cs typeface="Aptos"/>
+              </a:rPr>
+              <a:t>2/12/2027</a:t>
+            </a:r>
+          </a:p>
+        </p:txBody>
+      </p:sp>
+      <p:sp>
+        <p:nvSpPr>
+          <p:cNvPr id="65" name="Rounded Rectangle 64">
+            <a:extLst xmlns:a="http://schemas.openxmlformats.org/drawingml/2006/main">
+              <a:ext uri="{FF2B5EF4-FFF2-40B4-BE49-F238E27FC236}">
+                <a16:creationId xmlns:a16="http://schemas.microsoft.com/office/drawing/2014/main" id="{7305B2CF-B7E3-40E7-A2A5-73ED0148247A}"/>
+              </a:ext>
+            </a:extLst>
+          </p:cNvPr>
+          <p:cNvSpPr>
+            <a:spLocks xmlns:a="http://schemas.openxmlformats.org/drawingml/2006/main" noGrp="1"/>
+          </p:cNvSpPr>
+          <p:nvPr/>
+        </p:nvSpPr>
+        <p:spPr>
+          <a:xfrm xmlns:a="http://schemas.openxmlformats.org/drawingml/2006/main">
+            <a:off x="10910620" y="2002536"/>
+            <a:ext cx="822960" cy="256032"/>
+          </a:xfrm>
+          <a:prstGeom xmlns:a="http://schemas.openxmlformats.org/drawingml/2006/main" prst="roundRect">
+            <a:avLst/>
+          </a:prstGeom>
+          <a:solidFill xmlns:a="http://schemas.openxmlformats.org/drawingml/2006/main">
+            <a:srgbClr val="A6A6A6"/>
+          </a:solidFill>
+          <a:ln xmlns:a="http://schemas.openxmlformats.org/drawingml/2006/main" w="0">
+            <a:solidFill>
+              <a:srgbClr val="A6A6A6"/>
+            </a:solidFill>
+            <a:prstDash val="solid"/>
+          </a:ln>
+        </p:spPr>
+        <p:style>
+          <a:lnRef xmlns:a="http://schemas.openxmlformats.org/drawingml/2006/main" idx="1">
+            <a:schemeClr val="accent1"/>
+          </a:lnRef>
+          <a:fillRef xmlns:a="http://schemas.openxmlformats.org/drawingml/2006/main" idx="3">
+            <a:schemeClr val="accent1"/>
+          </a:fillRef>
+          <a:effectRef xmlns:a="http://schemas.openxmlformats.org/drawingml/2006/main" idx="2">
+            <a:schemeClr val="accent1"/>
+          </a:effectRef>
+          <a:fontRef xmlns:a="http://schemas.openxmlformats.org/drawingml/2006/main" idx="minor">
+            <a:schemeClr val="lt1"/>
+          </a:fontRef>
+        </p:style>
+        <p:txBody>
+          <a:bodyPr xmlns:a="http://schemas.openxmlformats.org/drawingml/2006/main" anchor="ctr"/>
+          <a:lstStyle xmlns:a="http://schemas.openxmlformats.org/drawingml/2006/main"/>
+          <a:p xmlns:a="http://schemas.openxmlformats.org/drawingml/2006/main">
+            <a:pPr algn="ctr">
+              <a:buNone/>
+            </a:pPr>
+          </a:p>
+        </p:txBody>
+      </p:sp>
+      <p:sp>
+        <p:nvSpPr>
+          <p:cNvPr id="66" name="TextBox 65">
+            <a:extLst xmlns:a="http://schemas.openxmlformats.org/drawingml/2006/main">
+              <a:ext uri="{FF2B5EF4-FFF2-40B4-BE49-F238E27FC236}">
+                <a16:creationId xmlns:a16="http://schemas.microsoft.com/office/drawing/2014/main" id="{A9972CAA-88A8-4E7E-96E1-A6BE8898976C}"/>
+              </a:ext>
+            </a:extLst>
+          </p:cNvPr>
+          <p:cNvSpPr>
+            <a:spLocks xmlns:a="http://schemas.openxmlformats.org/drawingml/2006/main" noGrp="1"/>
+          </p:cNvSpPr>
+          <p:nvPr/>
+        </p:nvSpPr>
+        <p:spPr>
+          <a:xfrm xmlns:a="http://schemas.openxmlformats.org/drawingml/2006/main">
+            <a:off x="10977422" y="2016988"/>
+            <a:ext cx="689356" cy="163122"/>
+          </a:xfrm>
+          <a:prstGeom xmlns:a="http://schemas.openxmlformats.org/drawingml/2006/main" prst="rect">
+            <a:avLst/>
+          </a:prstGeom>
+          <a:noFill xmlns:a="http://schemas.openxmlformats.org/drawingml/2006/main"/>
+        </p:spPr>
+        <p:txBody>
+          <a:bodyPr xmlns:a="http://schemas.openxmlformats.org/drawingml/2006/main" wrap="none" lIns="18288" tIns="4572" rIns="18288" bIns="4572" anchor="ctr">
+            <a:spAutoFit/>
+          </a:bodyPr>
+          <a:lstStyle xmlns:a="http://schemas.openxmlformats.org/drawingml/2006/main"/>
+          <a:p xmlns:a="http://schemas.openxmlformats.org/drawingml/2006/main">
+            <a:pPr algn="ctr">
+              <a:buNone/>
+            </a:pPr>
+            <a:r>
+              <a:rPr sz="1000" b="1" i="0">
+                <a:solidFill>
+                  <a:srgbClr val="FFFFFF"/>
+                </a:solidFill>
+                <a:latin typeface="Aptos"/>
+                <a:ea typeface="Aptos"/>
+                <a:cs typeface="Aptos"/>
+              </a:rPr>
+              <a:t>On Track</a:t>
+            </a:r>
+          </a:p>
+        </p:txBody>
+      </p:sp>
+      <p:sp>
+        <p:nvSpPr>
+          <p:cNvPr id="67" name="Rectangle 66">
+            <a:extLst xmlns:a="http://schemas.openxmlformats.org/drawingml/2006/main">
+              <a:ext uri="{FF2B5EF4-FFF2-40B4-BE49-F238E27FC236}">
+                <a16:creationId xmlns:a16="http://schemas.microsoft.com/office/drawing/2014/main" id="{4FF469F7-2A87-4235-80C4-73B0A811F1B7}"/>
+              </a:ext>
+            </a:extLst>
+          </p:cNvPr>
+          <p:cNvSpPr>
+            <a:spLocks xmlns:a="http://schemas.openxmlformats.org/drawingml/2006/main" noGrp="1"/>
+          </p:cNvSpPr>
+          <p:nvPr/>
+        </p:nvSpPr>
+        <p:spPr>
+          <a:xfrm xmlns:a="http://schemas.openxmlformats.org/drawingml/2006/main">
+            <a:off x="6263640" y="2532888"/>
+            <a:ext cx="5532120" cy="585216"/>
+          </a:xfrm>
+          <a:prstGeom xmlns:a="http://schemas.openxmlformats.org/drawingml/2006/main" prst="rect">
+            <a:avLst/>
+          </a:prstGeom>
+          <a:solidFill xmlns:a="http://schemas.openxmlformats.org/drawingml/2006/main">
+            <a:srgbClr val="FFFFFF"/>
+          </a:solidFill>
+          <a:ln xmlns:a="http://schemas.openxmlformats.org/drawingml/2006/main">
+            <a:solidFill>
+              <a:srgbClr val="FFFFFF"/>
+            </a:solidFill>
+          </a:ln>
+        </p:spPr>
+        <p:style>
+          <a:lnRef xmlns:a="http://schemas.openxmlformats.org/drawingml/2006/main" idx="1">
+            <a:schemeClr val="accent1"/>
+          </a:lnRef>
+          <a:fillRef xmlns:a="http://schemas.openxmlformats.org/drawingml/2006/main" idx="3">
+            <a:schemeClr val="accent1"/>
+          </a:fillRef>
+          <a:effectRef xmlns:a="http://schemas.openxmlformats.org/drawingml/2006/main" idx="2">
+            <a:schemeClr val="accent1"/>
+          </a:effectRef>
+          <a:fontRef xmlns:a="http://schemas.openxmlformats.org/drawingml/2006/main" idx="minor">
+            <a:schemeClr val="lt1"/>
+          </a:fontRef>
+        </p:style>
+        <p:txBody>
+          <a:bodyPr xmlns:a="http://schemas.openxmlformats.org/drawingml/2006/main" anchor="ctr"/>
+          <a:lstStyle xmlns:a="http://schemas.openxmlformats.org/drawingml/2006/main"/>
+          <a:p xmlns:a="http://schemas.openxmlformats.org/drawingml/2006/main">
+            <a:pPr algn="ctr">
+              <a:buNone/>
+            </a:pPr>
+          </a:p>
+        </p:txBody>
+      </p:sp>
+      <p:sp>
+        <p:nvSpPr>
+          <p:cNvPr id="68" name="TextBox 67">
+            <a:extLst xmlns:a="http://schemas.openxmlformats.org/drawingml/2006/main">
+              <a:ext uri="{FF2B5EF4-FFF2-40B4-BE49-F238E27FC236}">
+                <a16:creationId xmlns:a16="http://schemas.microsoft.com/office/drawing/2014/main" id="{27D19985-3C94-41D9-BC8D-62F24AE717B2}"/>
+              </a:ext>
+            </a:extLst>
+          </p:cNvPr>
+          <p:cNvSpPr>
+            <a:spLocks xmlns:a="http://schemas.openxmlformats.org/drawingml/2006/main" noGrp="1"/>
+          </p:cNvSpPr>
+          <p:nvPr/>
+        </p:nvSpPr>
+        <p:spPr>
+          <a:xfrm xmlns:a="http://schemas.openxmlformats.org/drawingml/2006/main">
+            <a:off x="6373368" y="2762224"/>
+            <a:ext cx="894540" cy="163122"/>
+          </a:xfrm>
+          <a:prstGeom xmlns:a="http://schemas.openxmlformats.org/drawingml/2006/main" prst="rect">
+            <a:avLst/>
+          </a:prstGeom>
+          <a:noFill xmlns:a="http://schemas.openxmlformats.org/drawingml/2006/main"/>
+        </p:spPr>
+        <p:txBody>
+          <a:bodyPr xmlns:a="http://schemas.openxmlformats.org/drawingml/2006/main" wrap="none" lIns="18288" tIns="4572" rIns="18288" bIns="4572" anchor="ctr">
+            <a:spAutoFit/>
+          </a:bodyPr>
+          <a:lstStyle xmlns:a="http://schemas.openxmlformats.org/drawingml/2006/main"/>
+          <a:p xmlns:a="http://schemas.openxmlformats.org/drawingml/2006/main">
+            <a:pPr algn="l">
+              <a:buNone/>
+            </a:pPr>
+            <a:r>
+              <a:rPr sz="1000" b="0" i="0">
+                <a:solidFill>
+                  <a:srgbClr val="202020"/>
+                </a:solidFill>
+                <a:latin typeface="Aptos"/>
+                <a:ea typeface="Aptos"/>
+                <a:cs typeface="Aptos"/>
+              </a:rPr>
+              <a:t>Cheaper Carel controller</a:t>
+            </a:r>
+          </a:p>
+        </p:txBody>
+      </p:sp>
+      <p:sp>
+        <p:nvSpPr>
+          <p:cNvPr id="69" name="TextBox 68">
+            <a:extLst xmlns:a="http://schemas.openxmlformats.org/drawingml/2006/main">
+              <a:ext uri="{FF2B5EF4-FFF2-40B4-BE49-F238E27FC236}">
+                <a16:creationId xmlns:a16="http://schemas.microsoft.com/office/drawing/2014/main" id="{D3F00B53-5BBC-4783-9A16-71ACDFC092BD}"/>
+              </a:ext>
+            </a:extLst>
+          </p:cNvPr>
+          <p:cNvSpPr>
+            <a:spLocks xmlns:a="http://schemas.openxmlformats.org/drawingml/2006/main" noGrp="1"/>
+          </p:cNvSpPr>
+          <p:nvPr/>
+        </p:nvSpPr>
+        <p:spPr>
+          <a:xfrm xmlns:a="http://schemas.openxmlformats.org/drawingml/2006/main">
+            <a:off x="9572055" y="2689072"/>
+            <a:ext cx="420051" cy="163122"/>
+          </a:xfrm>
+          <a:prstGeom xmlns:a="http://schemas.openxmlformats.org/drawingml/2006/main" prst="rect">
+            <a:avLst/>
+          </a:prstGeom>
+          <a:noFill xmlns:a="http://schemas.openxmlformats.org/drawingml/2006/main"/>
+        </p:spPr>
+        <p:txBody>
+          <a:bodyPr xmlns:a="http://schemas.openxmlformats.org/drawingml/2006/main" wrap="none" lIns="18288" tIns="4572" rIns="18288" bIns="4572" anchor="ctr">
+            <a:spAutoFit/>
+          </a:bodyPr>
+          <a:lstStyle xmlns:a="http://schemas.openxmlformats.org/drawingml/2006/main"/>
+          <a:p xmlns:a="http://schemas.openxmlformats.org/drawingml/2006/main">
+            <a:pPr algn="r">
+              <a:buNone/>
+            </a:pPr>
+            <a:r>
+              <a:rPr sz="1000" b="1" i="0">
+                <a:solidFill>
+                  <a:srgbClr val="202020"/>
+                </a:solidFill>
+                <a:latin typeface="Aptos"/>
+                <a:ea typeface="Aptos"/>
+                <a:cs typeface="Aptos"/>
+              </a:rPr>
+              <a:t>$15.00</a:t>
+            </a:r>
+          </a:p>
+        </p:txBody>
+      </p:sp>
+      <p:sp>
+        <p:nvSpPr>
+          <p:cNvPr id="70" name="TextBox 69">
+            <a:extLst xmlns:a="http://schemas.openxmlformats.org/drawingml/2006/main">
+              <a:ext uri="{FF2B5EF4-FFF2-40B4-BE49-F238E27FC236}">
+                <a16:creationId xmlns:a16="http://schemas.microsoft.com/office/drawing/2014/main" id="{85D7212E-99DB-49EF-8B44-BEF8A85F59CE}"/>
+              </a:ext>
+            </a:extLst>
+          </p:cNvPr>
+          <p:cNvSpPr>
+            <a:spLocks xmlns:a="http://schemas.openxmlformats.org/drawingml/2006/main" noGrp="1"/>
+          </p:cNvSpPr>
+          <p:nvPr/>
+        </p:nvSpPr>
+        <p:spPr>
+          <a:xfrm xmlns:a="http://schemas.openxmlformats.org/drawingml/2006/main">
+            <a:off x="10189741" y="2689072"/>
+            <a:ext cx="606000" cy="163122"/>
+          </a:xfrm>
+          <a:prstGeom xmlns:a="http://schemas.openxmlformats.org/drawingml/2006/main" prst="rect">
+            <a:avLst/>
+          </a:prstGeom>
+          <a:noFill xmlns:a="http://schemas.openxmlformats.org/drawingml/2006/main"/>
+        </p:spPr>
+        <p:txBody>
+          <a:bodyPr xmlns:a="http://schemas.openxmlformats.org/drawingml/2006/main" wrap="none" lIns="18288" tIns="4572" rIns="18288" bIns="4572" anchor="ctr">
+            <a:spAutoFit/>
+          </a:bodyPr>
+          <a:lstStyle xmlns:a="http://schemas.openxmlformats.org/drawingml/2006/main"/>
+          <a:p xmlns:a="http://schemas.openxmlformats.org/drawingml/2006/main">
+            <a:pPr algn="ctr">
+              <a:buNone/>
+            </a:pPr>
+            <a:r>
+              <a:rPr sz="1000" b="0" i="0">
+                <a:solidFill>
+                  <a:srgbClr val="202020"/>
+                </a:solidFill>
+                <a:latin typeface="Aptos"/>
+                <a:ea typeface="Aptos"/>
+                <a:cs typeface="Aptos"/>
+              </a:rPr>
+              <a:t>9/7/2026</a:t>
+            </a:r>
+          </a:p>
+        </p:txBody>
+      </p:sp>
+      <p:sp>
+        <p:nvSpPr>
+          <p:cNvPr id="71" name="Rounded Rectangle 70">
+            <a:extLst xmlns:a="http://schemas.openxmlformats.org/drawingml/2006/main">
+              <a:ext uri="{FF2B5EF4-FFF2-40B4-BE49-F238E27FC236}">
+                <a16:creationId xmlns:a16="http://schemas.microsoft.com/office/drawing/2014/main" id="{140EB830-F344-48F9-95B6-6CF395AB335D}"/>
+              </a:ext>
+            </a:extLst>
+          </p:cNvPr>
+          <p:cNvSpPr>
+            <a:spLocks xmlns:a="http://schemas.openxmlformats.org/drawingml/2006/main" noGrp="1"/>
+          </p:cNvSpPr>
+          <p:nvPr/>
+        </p:nvSpPr>
+        <p:spPr>
+          <a:xfrm xmlns:a="http://schemas.openxmlformats.org/drawingml/2006/main">
+            <a:off x="10910620" y="2670048"/>
+            <a:ext cx="822960" cy="256032"/>
+          </a:xfrm>
+          <a:prstGeom xmlns:a="http://schemas.openxmlformats.org/drawingml/2006/main" prst="roundRect">
+            <a:avLst/>
+          </a:prstGeom>
+          <a:solidFill xmlns:a="http://schemas.openxmlformats.org/drawingml/2006/main">
+            <a:srgbClr val="A6A6A6"/>
+          </a:solidFill>
+          <a:ln xmlns:a="http://schemas.openxmlformats.org/drawingml/2006/main" w="0">
+            <a:solidFill>
+              <a:srgbClr val="A6A6A6"/>
+            </a:solidFill>
+            <a:prstDash val="solid"/>
+          </a:ln>
+        </p:spPr>
+        <p:style>
+          <a:lnRef xmlns:a="http://schemas.openxmlformats.org/drawingml/2006/main" idx="1">
+            <a:schemeClr val="accent1"/>
+          </a:lnRef>
+          <a:fillRef xmlns:a="http://schemas.openxmlformats.org/drawingml/2006/main" idx="3">
+            <a:schemeClr val="accent1"/>
+          </a:fillRef>
+          <a:effectRef xmlns:a="http://schemas.openxmlformats.org/drawingml/2006/main" idx="2">
+            <a:schemeClr val="accent1"/>
+          </a:effectRef>
+          <a:fontRef xmlns:a="http://schemas.openxmlformats.org/drawingml/2006/main" idx="minor">
+            <a:schemeClr val="lt1"/>
+          </a:fontRef>
+        </p:style>
+        <p:txBody>
+          <a:bodyPr xmlns:a="http://schemas.openxmlformats.org/drawingml/2006/main" anchor="ctr"/>
+          <a:lstStyle xmlns:a="http://schemas.openxmlformats.org/drawingml/2006/main"/>
+          <a:p xmlns:a="http://schemas.openxmlformats.org/drawingml/2006/main">
+            <a:pPr algn="ctr">
+              <a:buNone/>
+            </a:pPr>
+          </a:p>
+        </p:txBody>
+      </p:sp>
+      <p:sp>
+        <p:nvSpPr>
+          <p:cNvPr id="72" name="TextBox 71">
+            <a:extLst xmlns:a="http://schemas.openxmlformats.org/drawingml/2006/main">
+              <a:ext uri="{FF2B5EF4-FFF2-40B4-BE49-F238E27FC236}">
+                <a16:creationId xmlns:a16="http://schemas.microsoft.com/office/drawing/2014/main" id="{5E95B0AD-0B3A-4DD7-9B0D-486EA85CCBA3}"/>
+              </a:ext>
+            </a:extLst>
+          </p:cNvPr>
+          <p:cNvSpPr>
+            <a:spLocks xmlns:a="http://schemas.openxmlformats.org/drawingml/2006/main" noGrp="1"/>
+          </p:cNvSpPr>
+          <p:nvPr/>
+        </p:nvSpPr>
+        <p:spPr>
+          <a:xfrm xmlns:a="http://schemas.openxmlformats.org/drawingml/2006/main">
+            <a:off x="10977422" y="2684500"/>
+            <a:ext cx="689356" cy="163122"/>
+          </a:xfrm>
+          <a:prstGeom xmlns:a="http://schemas.openxmlformats.org/drawingml/2006/main" prst="rect">
+            <a:avLst/>
+          </a:prstGeom>
+          <a:noFill xmlns:a="http://schemas.openxmlformats.org/drawingml/2006/main"/>
+        </p:spPr>
+        <p:txBody>
+          <a:bodyPr xmlns:a="http://schemas.openxmlformats.org/drawingml/2006/main" wrap="none" lIns="18288" tIns="4572" rIns="18288" bIns="4572" anchor="ctr">
+            <a:spAutoFit/>
+          </a:bodyPr>
+          <a:lstStyle xmlns:a="http://schemas.openxmlformats.org/drawingml/2006/main"/>
+          <a:p xmlns:a="http://schemas.openxmlformats.org/drawingml/2006/main">
+            <a:pPr algn="ctr">
+              <a:buNone/>
+            </a:pPr>
+            <a:r>
+              <a:rPr sz="1000" b="1" i="0">
+                <a:solidFill>
+                  <a:srgbClr val="FFFFFF"/>
+                </a:solidFill>
+                <a:latin typeface="Aptos"/>
+                <a:ea typeface="Aptos"/>
+                <a:cs typeface="Aptos"/>
+              </a:rPr>
+              <a:t>On Track</a:t>
+            </a:r>
+          </a:p>
+        </p:txBody>
+      </p:sp>
+      <p:sp>
+        <p:nvSpPr>
+          <p:cNvPr id="73" name="Rectangle 72">
+            <a:extLst xmlns:a="http://schemas.openxmlformats.org/drawingml/2006/main">
+              <a:ext uri="{FF2B5EF4-FFF2-40B4-BE49-F238E27FC236}">
+                <a16:creationId xmlns:a16="http://schemas.microsoft.com/office/drawing/2014/main" id="{12E9407A-5F16-4849-A26D-2C0D2BC8071E}"/>
+              </a:ext>
+            </a:extLst>
+          </p:cNvPr>
+          <p:cNvSpPr>
+            <a:spLocks xmlns:a="http://schemas.openxmlformats.org/drawingml/2006/main" noGrp="1"/>
+          </p:cNvSpPr>
+          <p:nvPr/>
+        </p:nvSpPr>
+        <p:spPr>
+          <a:xfrm xmlns:a="http://schemas.openxmlformats.org/drawingml/2006/main">
+            <a:off x="6263640" y="3200400"/>
+            <a:ext cx="5532120" cy="585216"/>
+          </a:xfrm>
+          <a:prstGeom xmlns:a="http://schemas.openxmlformats.org/drawingml/2006/main" prst="rect">
+            <a:avLst/>
+          </a:prstGeom>
+          <a:solidFill xmlns:a="http://schemas.openxmlformats.org/drawingml/2006/main">
+            <a:srgbClr val="F2F5FA"/>
+          </a:solidFill>
+          <a:ln xmlns:a="http://schemas.openxmlformats.org/drawingml/2006/main">
+            <a:solidFill>
+              <a:srgbClr val="F2F5FA"/>
+            </a:solidFill>
+          </a:ln>
+        </p:spPr>
+        <p:style>
+          <a:lnRef xmlns:a="http://schemas.openxmlformats.org/drawingml/2006/main" idx="1">
+            <a:schemeClr val="accent1"/>
+          </a:lnRef>
+          <a:fillRef xmlns:a="http://schemas.openxmlformats.org/drawingml/2006/main" idx="3">
+            <a:schemeClr val="accent1"/>
+          </a:fillRef>
+          <a:effectRef xmlns:a="http://schemas.openxmlformats.org/drawingml/2006/main" idx="2">
+            <a:schemeClr val="accent1"/>
+          </a:effectRef>
+          <a:fontRef xmlns:a="http://schemas.openxmlformats.org/drawingml/2006/main" idx="minor">
+            <a:schemeClr val="lt1"/>
+          </a:fontRef>
+        </p:style>
+        <p:txBody>
+          <a:bodyPr xmlns:a="http://schemas.openxmlformats.org/drawingml/2006/main" anchor="ctr"/>
+          <a:lstStyle xmlns:a="http://schemas.openxmlformats.org/drawingml/2006/main"/>
+          <a:p xmlns:a="http://schemas.openxmlformats.org/drawingml/2006/main">
+            <a:pPr algn="ctr">
+              <a:buNone/>
+            </a:pPr>
+          </a:p>
+        </p:txBody>
+      </p:sp>
+      <p:sp>
+        <p:nvSpPr>
+          <p:cNvPr id="74" name="TextBox 73">
+            <a:extLst xmlns:a="http://schemas.openxmlformats.org/drawingml/2006/main">
+              <a:ext uri="{FF2B5EF4-FFF2-40B4-BE49-F238E27FC236}">
+                <a16:creationId xmlns:a16="http://schemas.microsoft.com/office/drawing/2014/main" id="{8CD53E24-40D0-4C24-95A0-0256F81EAF66}"/>
+              </a:ext>
+            </a:extLst>
+          </p:cNvPr>
+          <p:cNvSpPr>
+            <a:spLocks xmlns:a="http://schemas.openxmlformats.org/drawingml/2006/main" noGrp="1"/>
+          </p:cNvSpPr>
+          <p:nvPr/>
+        </p:nvSpPr>
+        <p:spPr>
+          <a:xfrm xmlns:a="http://schemas.openxmlformats.org/drawingml/2006/main">
+            <a:off x="6373368" y="3429736"/>
+            <a:ext cx="1551771" cy="163122"/>
+          </a:xfrm>
+          <a:prstGeom xmlns:a="http://schemas.openxmlformats.org/drawingml/2006/main" prst="rect">
+            <a:avLst/>
+          </a:prstGeom>
+          <a:noFill xmlns:a="http://schemas.openxmlformats.org/drawingml/2006/main"/>
+        </p:spPr>
+        <p:txBody>
+          <a:bodyPr xmlns:a="http://schemas.openxmlformats.org/drawingml/2006/main" wrap="none" lIns="18288" tIns="4572" rIns="18288" bIns="4572" anchor="ctr">
+            <a:spAutoFit/>
+          </a:bodyPr>
+          <a:lstStyle xmlns:a="http://schemas.openxmlformats.org/drawingml/2006/main"/>
+          <a:p xmlns:a="http://schemas.openxmlformats.org/drawingml/2006/main">
+            <a:pPr algn="l">
+              <a:buNone/>
+            </a:pPr>
+            <a:r>
+              <a:rPr sz="1000" b="0" i="0">
+                <a:solidFill>
+                  <a:srgbClr val="202020"/>
+                </a:solidFill>
+                <a:latin typeface="Aptos"/>
+                <a:ea typeface="Aptos"/>
+                <a:cs typeface="Aptos"/>
+              </a:rPr>
+              <a:t>Tube on drip tray</a:t>
+            </a:r>
+          </a:p>
+        </p:txBody>
+      </p:sp>
+      <p:sp>
+        <p:nvSpPr>
+          <p:cNvPr id="75" name="TextBox 74">
+            <a:extLst xmlns:a="http://schemas.openxmlformats.org/drawingml/2006/main">
+              <a:ext uri="{FF2B5EF4-FFF2-40B4-BE49-F238E27FC236}">
+                <a16:creationId xmlns:a16="http://schemas.microsoft.com/office/drawing/2014/main" id="{A0F6F07D-99E1-453F-B933-6D027997EB0A}"/>
+              </a:ext>
+            </a:extLst>
+          </p:cNvPr>
+          <p:cNvSpPr>
+            <a:spLocks xmlns:a="http://schemas.openxmlformats.org/drawingml/2006/main" noGrp="1"/>
+          </p:cNvSpPr>
+          <p:nvPr/>
+        </p:nvSpPr>
+        <p:spPr>
+          <a:xfrm xmlns:a="http://schemas.openxmlformats.org/drawingml/2006/main">
+            <a:off x="9572055" y="3356584"/>
+            <a:ext cx="420051" cy="163122"/>
+          </a:xfrm>
+          <a:prstGeom xmlns:a="http://schemas.openxmlformats.org/drawingml/2006/main" prst="rect">
+            <a:avLst/>
+          </a:prstGeom>
+          <a:noFill xmlns:a="http://schemas.openxmlformats.org/drawingml/2006/main"/>
+        </p:spPr>
+        <p:txBody>
+          <a:bodyPr xmlns:a="http://schemas.openxmlformats.org/drawingml/2006/main" wrap="none" lIns="18288" tIns="4572" rIns="18288" bIns="4572" anchor="ctr">
+            <a:spAutoFit/>
+          </a:bodyPr>
+          <a:lstStyle xmlns:a="http://schemas.openxmlformats.org/drawingml/2006/main"/>
+          <a:p xmlns:a="http://schemas.openxmlformats.org/drawingml/2006/main">
+            <a:pPr algn="r">
+              <a:buNone/>
+            </a:pPr>
+            <a:r>
+              <a:rPr sz="1000" b="1" i="0">
+                <a:solidFill>
+                  <a:srgbClr val="202020"/>
+                </a:solidFill>
+                <a:latin typeface="Aptos"/>
+                <a:ea typeface="Aptos"/>
+                <a:cs typeface="Aptos"/>
+              </a:rPr>
+              <a:t>$0.00</a:t>
+            </a:r>
+          </a:p>
+        </p:txBody>
+      </p:sp>
+      <p:sp>
+        <p:nvSpPr>
+          <p:cNvPr id="76" name="TextBox 75">
+            <a:extLst xmlns:a="http://schemas.openxmlformats.org/drawingml/2006/main">
+              <a:ext uri="{FF2B5EF4-FFF2-40B4-BE49-F238E27FC236}">
+                <a16:creationId xmlns:a16="http://schemas.microsoft.com/office/drawing/2014/main" id="{B69BF7F2-011B-40D0-B94F-997259B5B961}"/>
+              </a:ext>
+            </a:extLst>
+          </p:cNvPr>
+          <p:cNvSpPr>
+            <a:spLocks xmlns:a="http://schemas.openxmlformats.org/drawingml/2006/main" noGrp="1"/>
+          </p:cNvSpPr>
+          <p:nvPr/>
+        </p:nvSpPr>
+        <p:spPr>
+          <a:xfrm xmlns:a="http://schemas.openxmlformats.org/drawingml/2006/main">
+            <a:off x="10189741" y="3356584"/>
+            <a:ext cx="606000" cy="163122"/>
+          </a:xfrm>
+          <a:prstGeom xmlns:a="http://schemas.openxmlformats.org/drawingml/2006/main" prst="rect">
+            <a:avLst/>
+          </a:prstGeom>
+          <a:noFill xmlns:a="http://schemas.openxmlformats.org/drawingml/2006/main"/>
+        </p:spPr>
+        <p:txBody>
+          <a:bodyPr xmlns:a="http://schemas.openxmlformats.org/drawingml/2006/main" wrap="none" lIns="18288" tIns="4572" rIns="18288" bIns="4572" anchor="ctr">
+            <a:spAutoFit/>
+          </a:bodyPr>
+          <a:lstStyle xmlns:a="http://schemas.openxmlformats.org/drawingml/2006/main"/>
+          <a:p xmlns:a="http://schemas.openxmlformats.org/drawingml/2006/main">
+            <a:pPr algn="ctr">
+              <a:buNone/>
+            </a:pPr>
+            <a:r>
+              <a:rPr sz="1000" b="0" i="0">
+                <a:solidFill>
+                  <a:srgbClr val="202020"/>
+                </a:solidFill>
+                <a:latin typeface="Aptos"/>
+                <a:ea typeface="Aptos"/>
+                <a:cs typeface="Aptos"/>
+              </a:rPr>
+              <a:t>7/30/2026</a:t>
+            </a:r>
+          </a:p>
+        </p:txBody>
+      </p:sp>
+      <p:sp>
+        <p:nvSpPr>
+          <p:cNvPr id="77" name="Rounded Rectangle 76">
+            <a:extLst xmlns:a="http://schemas.openxmlformats.org/drawingml/2006/main">
+              <a:ext uri="{FF2B5EF4-FFF2-40B4-BE49-F238E27FC236}">
+                <a16:creationId xmlns:a16="http://schemas.microsoft.com/office/drawing/2014/main" id="{1DA9E4BC-83D6-48AB-ACC4-469294B5ABF4}"/>
+              </a:ext>
+            </a:extLst>
+          </p:cNvPr>
+          <p:cNvSpPr>
+            <a:spLocks xmlns:a="http://schemas.openxmlformats.org/drawingml/2006/main" noGrp="1"/>
+          </p:cNvSpPr>
+          <p:nvPr/>
+        </p:nvSpPr>
+        <p:spPr>
+          <a:xfrm xmlns:a="http://schemas.openxmlformats.org/drawingml/2006/main">
+            <a:off x="10910620" y="3337560"/>
+            <a:ext cx="822960" cy="256032"/>
+          </a:xfrm>
+          <a:prstGeom xmlns:a="http://schemas.openxmlformats.org/drawingml/2006/main" prst="roundRect">
+            <a:avLst/>
+          </a:prstGeom>
+          <a:solidFill xmlns:a="http://schemas.openxmlformats.org/drawingml/2006/main">
+            <a:srgbClr val="70AD47"/>
+          </a:solidFill>
+          <a:ln xmlns:a="http://schemas.openxmlformats.org/drawingml/2006/main" w="0">
+            <a:solidFill>
+              <a:srgbClr val="70AD47"/>
+            </a:solidFill>
+            <a:prstDash val="solid"/>
+          </a:ln>
+        </p:spPr>
+        <p:style>
+          <a:lnRef xmlns:a="http://schemas.openxmlformats.org/drawingml/2006/main" idx="1">
+            <a:schemeClr val="accent1"/>
+          </a:lnRef>
+          <a:fillRef xmlns:a="http://schemas.openxmlformats.org/drawingml/2006/main" idx="3">
+            <a:schemeClr val="accent1"/>
+          </a:fillRef>
+          <a:effectRef xmlns:a="http://schemas.openxmlformats.org/drawingml/2006/main" idx="2">
+            <a:schemeClr val="accent1"/>
+          </a:effectRef>
+          <a:fontRef xmlns:a="http://schemas.openxmlformats.org/drawingml/2006/main" idx="minor">
+            <a:schemeClr val="lt1"/>
+          </a:fontRef>
+        </p:style>
+        <p:txBody>
+          <a:bodyPr xmlns:a="http://schemas.openxmlformats.org/drawingml/2006/main" anchor="ctr"/>
+          <a:lstStyle xmlns:a="http://schemas.openxmlformats.org/drawingml/2006/main"/>
+          <a:p xmlns:a="http://schemas.openxmlformats.org/drawingml/2006/main">
+            <a:pPr algn="ctr">
+              <a:buNone/>
+            </a:pPr>
+          </a:p>
+        </p:txBody>
+      </p:sp>
+      <p:sp>
+        <p:nvSpPr>
+          <p:cNvPr id="78" name="TextBox 77">
+            <a:extLst xmlns:a="http://schemas.openxmlformats.org/drawingml/2006/main">
+              <a:ext uri="{FF2B5EF4-FFF2-40B4-BE49-F238E27FC236}">
+                <a16:creationId xmlns:a16="http://schemas.microsoft.com/office/drawing/2014/main" id="{57806EF5-3960-4DFE-9924-C296D2F31C17}"/>
+              </a:ext>
+            </a:extLst>
+          </p:cNvPr>
+          <p:cNvSpPr>
+            <a:spLocks xmlns:a="http://schemas.openxmlformats.org/drawingml/2006/main" noGrp="1"/>
+          </p:cNvSpPr>
+          <p:nvPr/>
+        </p:nvSpPr>
+        <p:spPr>
+          <a:xfrm xmlns:a="http://schemas.openxmlformats.org/drawingml/2006/main">
+            <a:off x="10977422" y="3352012"/>
+            <a:ext cx="689356" cy="163122"/>
+          </a:xfrm>
+          <a:prstGeom xmlns:a="http://schemas.openxmlformats.org/drawingml/2006/main" prst="rect">
+            <a:avLst/>
+          </a:prstGeom>
+          <a:noFill xmlns:a="http://schemas.openxmlformats.org/drawingml/2006/main"/>
+        </p:spPr>
+        <p:txBody>
+          <a:bodyPr xmlns:a="http://schemas.openxmlformats.org/drawingml/2006/main" wrap="none" lIns="18288" tIns="4572" rIns="18288" bIns="4572" anchor="ctr">
+            <a:spAutoFit/>
+          </a:bodyPr>
+          <a:lstStyle xmlns:a="http://schemas.openxmlformats.org/drawingml/2006/main"/>
+          <a:p xmlns:a="http://schemas.openxmlformats.org/drawingml/2006/main">
+            <a:pPr algn="ctr">
+              <a:buNone/>
+            </a:pPr>
+            <a:r>
+              <a:rPr sz="1000" b="1" i="0">
+                <a:solidFill>
+                  <a:srgbClr val="FFFFFF"/>
+                </a:solidFill>
+                <a:latin typeface="Aptos"/>
+                <a:ea typeface="Aptos"/>
+                <a:cs typeface="Aptos"/>
+              </a:rPr>
+              <a:t>On Track</a:t>
+            </a:r>
+          </a:p>
+        </p:txBody>
+      </p:sp>
+      <p:sp>
+        <p:nvSpPr>
+          <p:cNvPr id="79" name="Rectangle 78">
+            <a:extLst xmlns:a="http://schemas.openxmlformats.org/drawingml/2006/main">
+              <a:ext uri="{FF2B5EF4-FFF2-40B4-BE49-F238E27FC236}">
+                <a16:creationId xmlns:a16="http://schemas.microsoft.com/office/drawing/2014/main" id="{80EB1DD3-EE81-43EA-B459-EB0BEF38026C}"/>
+              </a:ext>
+            </a:extLst>
+          </p:cNvPr>
+          <p:cNvSpPr>
+            <a:spLocks xmlns:a="http://schemas.openxmlformats.org/drawingml/2006/main" noGrp="1"/>
+          </p:cNvSpPr>
+          <p:nvPr/>
+        </p:nvSpPr>
+        <p:spPr>
+          <a:xfrm xmlns:a="http://schemas.openxmlformats.org/drawingml/2006/main">
+            <a:off x="6263640" y="3867912"/>
+            <a:ext cx="5532120" cy="585216"/>
+          </a:xfrm>
+          <a:prstGeom xmlns:a="http://schemas.openxmlformats.org/drawingml/2006/main" prst="rect">
+            <a:avLst/>
+          </a:prstGeom>
+          <a:solidFill xmlns:a="http://schemas.openxmlformats.org/drawingml/2006/main">
+            <a:srgbClr val="FFFFFF"/>
+          </a:solidFill>
+          <a:ln xmlns:a="http://schemas.openxmlformats.org/drawingml/2006/main">
+            <a:solidFill>
+              <a:srgbClr val="FFFFFF"/>
+            </a:solidFill>
+          </a:ln>
+        </p:spPr>
+        <p:style>
+          <a:lnRef xmlns:a="http://schemas.openxmlformats.org/drawingml/2006/main" idx="1">
+            <a:schemeClr val="accent1"/>
+          </a:lnRef>
+          <a:fillRef xmlns:a="http://schemas.openxmlformats.org/drawingml/2006/main" idx="3">
+            <a:schemeClr val="accent1"/>
+          </a:fillRef>
+          <a:effectRef xmlns:a="http://schemas.openxmlformats.org/drawingml/2006/main" idx="2">
+            <a:schemeClr val="accent1"/>
+          </a:effectRef>
+          <a:fontRef xmlns:a="http://schemas.openxmlformats.org/drawingml/2006/main" idx="minor">
+            <a:schemeClr val="lt1"/>
+          </a:fontRef>
+        </p:style>
+        <p:txBody>
+          <a:bodyPr xmlns:a="http://schemas.openxmlformats.org/drawingml/2006/main" anchor="ctr"/>
+          <a:lstStyle xmlns:a="http://schemas.openxmlformats.org/drawingml/2006/main"/>
+          <a:p xmlns:a="http://schemas.openxmlformats.org/drawingml/2006/main">
+            <a:pPr algn="ctr">
+              <a:buNone/>
+            </a:pPr>
+          </a:p>
+        </p:txBody>
+      </p:sp>
+      <p:sp>
+        <p:nvSpPr>
+          <p:cNvPr id="80" name="TextBox 79">
+            <a:extLst xmlns:a="http://schemas.openxmlformats.org/drawingml/2006/main">
+              <a:ext uri="{FF2B5EF4-FFF2-40B4-BE49-F238E27FC236}">
+                <a16:creationId xmlns:a16="http://schemas.microsoft.com/office/drawing/2014/main" id="{3CA1BB1B-F033-4463-B6CC-FBB79CA7E598}"/>
+              </a:ext>
+            </a:extLst>
+          </p:cNvPr>
+          <p:cNvSpPr>
+            <a:spLocks xmlns:a="http://schemas.openxmlformats.org/drawingml/2006/main" noGrp="1"/>
+          </p:cNvSpPr>
+          <p:nvPr/>
+        </p:nvSpPr>
+        <p:spPr>
+          <a:xfrm xmlns:a="http://schemas.openxmlformats.org/drawingml/2006/main">
+            <a:off x="6373368" y="4097248"/>
+            <a:ext cx="1447576" cy="163122"/>
+          </a:xfrm>
+          <a:prstGeom xmlns:a="http://schemas.openxmlformats.org/drawingml/2006/main" prst="rect">
+            <a:avLst/>
+          </a:prstGeom>
+          <a:noFill xmlns:a="http://schemas.openxmlformats.org/drawingml/2006/main"/>
+        </p:spPr>
+        <p:txBody>
+          <a:bodyPr xmlns:a="http://schemas.openxmlformats.org/drawingml/2006/main" wrap="none" lIns="18288" tIns="4572" rIns="18288" bIns="4572" anchor="ctr">
+            <a:spAutoFit/>
+          </a:bodyPr>
+          <a:lstStyle xmlns:a="http://schemas.openxmlformats.org/drawingml/2006/main"/>
+          <a:p xmlns:a="http://schemas.openxmlformats.org/drawingml/2006/main">
+            <a:pPr algn="l">
+              <a:buNone/>
+            </a:pPr>
+            <a:r>
+              <a:rPr sz="1000" b="0" i="0">
+                <a:solidFill>
+                  <a:srgbClr val="202020"/>
+                </a:solidFill>
+                <a:latin typeface="Aptos"/>
+                <a:ea typeface="Aptos"/>
+                <a:cs typeface="Aptos"/>
+              </a:rPr>
+              <a:t>Harness design</a:t>
+            </a:r>
+          </a:p>
+        </p:txBody>
+      </p:sp>
+      <p:sp>
+        <p:nvSpPr>
+          <p:cNvPr id="81" name="TextBox 80">
+            <a:extLst xmlns:a="http://schemas.openxmlformats.org/drawingml/2006/main">
+              <a:ext uri="{FF2B5EF4-FFF2-40B4-BE49-F238E27FC236}">
+                <a16:creationId xmlns:a16="http://schemas.microsoft.com/office/drawing/2014/main" id="{61B66CC6-BF82-48C2-ABE2-8C68104003EA}"/>
+              </a:ext>
+            </a:extLst>
+          </p:cNvPr>
+          <p:cNvSpPr>
+            <a:spLocks xmlns:a="http://schemas.openxmlformats.org/drawingml/2006/main" noGrp="1"/>
+          </p:cNvSpPr>
+          <p:nvPr/>
+        </p:nvSpPr>
+        <p:spPr>
+          <a:xfrm xmlns:a="http://schemas.openxmlformats.org/drawingml/2006/main">
+            <a:off x="9572055" y="4024096"/>
+            <a:ext cx="420051" cy="163122"/>
+          </a:xfrm>
+          <a:prstGeom xmlns:a="http://schemas.openxmlformats.org/drawingml/2006/main" prst="rect">
+            <a:avLst/>
+          </a:prstGeom>
+          <a:noFill xmlns:a="http://schemas.openxmlformats.org/drawingml/2006/main"/>
+        </p:spPr>
+        <p:txBody>
+          <a:bodyPr xmlns:a="http://schemas.openxmlformats.org/drawingml/2006/main" wrap="none" lIns="18288" tIns="4572" rIns="18288" bIns="4572" anchor="ctr">
+            <a:spAutoFit/>
+          </a:bodyPr>
+          <a:lstStyle xmlns:a="http://schemas.openxmlformats.org/drawingml/2006/main"/>
+          <a:p xmlns:a="http://schemas.openxmlformats.org/drawingml/2006/main">
+            <a:pPr algn="r">
+              <a:buNone/>
+            </a:pPr>
+            <a:r>
+              <a:rPr sz="1000" b="1" i="0">
+                <a:solidFill>
+                  <a:srgbClr val="202020"/>
+                </a:solidFill>
+                <a:latin typeface="Aptos"/>
+                <a:ea typeface="Aptos"/>
+                <a:cs typeface="Aptos"/>
+              </a:rPr>
+              <a:t>$20.00</a:t>
+            </a:r>
+          </a:p>
+        </p:txBody>
+      </p:sp>
+      <p:sp>
+        <p:nvSpPr>
+          <p:cNvPr id="82" name="TextBox 81">
+            <a:extLst xmlns:a="http://schemas.openxmlformats.org/drawingml/2006/main">
+              <a:ext uri="{FF2B5EF4-FFF2-40B4-BE49-F238E27FC236}">
+                <a16:creationId xmlns:a16="http://schemas.microsoft.com/office/drawing/2014/main" id="{B20544AC-96C6-4A8C-8CCF-16A621B9283F}"/>
+              </a:ext>
+            </a:extLst>
+          </p:cNvPr>
+          <p:cNvSpPr>
+            <a:spLocks xmlns:a="http://schemas.openxmlformats.org/drawingml/2006/main" noGrp="1"/>
+          </p:cNvSpPr>
+          <p:nvPr/>
+        </p:nvSpPr>
+        <p:spPr>
+          <a:xfrm xmlns:a="http://schemas.openxmlformats.org/drawingml/2006/main">
+            <a:off x="10189741" y="4024096"/>
+            <a:ext cx="606000" cy="163122"/>
+          </a:xfrm>
+          <a:prstGeom xmlns:a="http://schemas.openxmlformats.org/drawingml/2006/main" prst="rect">
+            <a:avLst/>
+          </a:prstGeom>
+          <a:noFill xmlns:a="http://schemas.openxmlformats.org/drawingml/2006/main"/>
+        </p:spPr>
+        <p:txBody>
+          <a:bodyPr xmlns:a="http://schemas.openxmlformats.org/drawingml/2006/main" wrap="none" lIns="18288" tIns="4572" rIns="18288" bIns="4572" anchor="ctr">
+            <a:spAutoFit/>
+          </a:bodyPr>
+          <a:lstStyle xmlns:a="http://schemas.openxmlformats.org/drawingml/2006/main"/>
+          <a:p xmlns:a="http://schemas.openxmlformats.org/drawingml/2006/main">
+            <a:pPr algn="ctr">
+              <a:buNone/>
+            </a:pPr>
+            <a:r>
+              <a:rPr sz="1000" b="0" i="0">
+                <a:solidFill>
+                  <a:srgbClr val="202020"/>
+                </a:solidFill>
+                <a:latin typeface="Aptos"/>
+                <a:ea typeface="Aptos"/>
+                <a:cs typeface="Aptos"/>
+              </a:rPr>
+              <a:t>10/5/2026</a:t>
+            </a:r>
+          </a:p>
+        </p:txBody>
+      </p:sp>
+      <p:sp>
+        <p:nvSpPr>
+          <p:cNvPr id="83" name="Rounded Rectangle 82">
+            <a:extLst xmlns:a="http://schemas.openxmlformats.org/drawingml/2006/main">
+              <a:ext uri="{FF2B5EF4-FFF2-40B4-BE49-F238E27FC236}">
+                <a16:creationId xmlns:a16="http://schemas.microsoft.com/office/drawing/2014/main" id="{99158F97-F7E6-48DA-91C7-09E741FD911B}"/>
+              </a:ext>
+            </a:extLst>
+          </p:cNvPr>
+          <p:cNvSpPr>
+            <a:spLocks xmlns:a="http://schemas.openxmlformats.org/drawingml/2006/main" noGrp="1"/>
+          </p:cNvSpPr>
+          <p:nvPr/>
+        </p:nvSpPr>
+        <p:spPr>
+          <a:xfrm xmlns:a="http://schemas.openxmlformats.org/drawingml/2006/main">
+            <a:off x="10910620" y="4005072"/>
+            <a:ext cx="822960" cy="256032"/>
+          </a:xfrm>
+          <a:prstGeom xmlns:a="http://schemas.openxmlformats.org/drawingml/2006/main" prst="roundRect">
+            <a:avLst/>
+          </a:prstGeom>
+          <a:solidFill xmlns:a="http://schemas.openxmlformats.org/drawingml/2006/main">
+            <a:srgbClr val="70AD47"/>
+          </a:solidFill>
+          <a:ln xmlns:a="http://schemas.openxmlformats.org/drawingml/2006/main" w="0">
+            <a:solidFill>
+              <a:srgbClr val="70AD47"/>
+            </a:solidFill>
+            <a:prstDash val="solid"/>
+          </a:ln>
+        </p:spPr>
+        <p:style>
+          <a:lnRef xmlns:a="http://schemas.openxmlformats.org/drawingml/2006/main" idx="1">
+            <a:schemeClr val="accent1"/>
+          </a:lnRef>
+          <a:fillRef xmlns:a="http://schemas.openxmlformats.org/drawingml/2006/main" idx="3">
+            <a:schemeClr val="accent1"/>
+          </a:fillRef>
+          <a:effectRef xmlns:a="http://schemas.openxmlformats.org/drawingml/2006/main" idx="2">
+            <a:schemeClr val="accent1"/>
+          </a:effectRef>
+          <a:fontRef xmlns:a="http://schemas.openxmlformats.org/drawingml/2006/main" idx="minor">
+            <a:schemeClr val="lt1"/>
+          </a:fontRef>
+        </p:style>
+        <p:txBody>
+          <a:bodyPr xmlns:a="http://schemas.openxmlformats.org/drawingml/2006/main" anchor="ctr"/>
+          <a:lstStyle xmlns:a="http://schemas.openxmlformats.org/drawingml/2006/main"/>
+          <a:p xmlns:a="http://schemas.openxmlformats.org/drawingml/2006/main">
+            <a:pPr algn="ctr">
+              <a:buNone/>
+            </a:pPr>
+          </a:p>
+        </p:txBody>
+      </p:sp>
+      <p:sp>
+        <p:nvSpPr>
+          <p:cNvPr id="84" name="TextBox 83">
+            <a:extLst xmlns:a="http://schemas.openxmlformats.org/drawingml/2006/main">
+              <a:ext uri="{FF2B5EF4-FFF2-40B4-BE49-F238E27FC236}">
+                <a16:creationId xmlns:a16="http://schemas.microsoft.com/office/drawing/2014/main" id="{83E2A428-A006-4D83-A6B3-3D4011EA03A3}"/>
+              </a:ext>
+            </a:extLst>
+          </p:cNvPr>
+          <p:cNvSpPr>
+            <a:spLocks xmlns:a="http://schemas.openxmlformats.org/drawingml/2006/main" noGrp="1"/>
+          </p:cNvSpPr>
+          <p:nvPr/>
+        </p:nvSpPr>
+        <p:spPr>
+          <a:xfrm xmlns:a="http://schemas.openxmlformats.org/drawingml/2006/main">
+            <a:off x="10977422" y="4019524"/>
+            <a:ext cx="689356" cy="163122"/>
+          </a:xfrm>
+          <a:prstGeom xmlns:a="http://schemas.openxmlformats.org/drawingml/2006/main" prst="rect">
+            <a:avLst/>
+          </a:prstGeom>
+          <a:noFill xmlns:a="http://schemas.openxmlformats.org/drawingml/2006/main"/>
+        </p:spPr>
+        <p:txBody>
+          <a:bodyPr xmlns:a="http://schemas.openxmlformats.org/drawingml/2006/main" wrap="none" lIns="18288" tIns="4572" rIns="18288" bIns="4572" anchor="ctr">
+            <a:spAutoFit/>
+          </a:bodyPr>
+          <a:lstStyle xmlns:a="http://schemas.openxmlformats.org/drawingml/2006/main"/>
+          <a:p xmlns:a="http://schemas.openxmlformats.org/drawingml/2006/main">
+            <a:pPr algn="ctr">
+              <a:buNone/>
+            </a:pPr>
+            <a:r>
+              <a:rPr sz="1000" b="1" i="0">
+                <a:solidFill>
+                  <a:srgbClr val="FFFFFF"/>
+                </a:solidFill>
+                <a:latin typeface="Aptos"/>
+                <a:ea typeface="Aptos"/>
+                <a:cs typeface="Aptos"/>
+              </a:rPr>
+              <a:t>On Track</a:t>
+            </a:r>
+          </a:p>
+        </p:txBody>
+      </p:sp>
+      <p:sp>
+        <p:nvSpPr>
+          <p:cNvPr id="85" name="Rectangle 84">
+            <a:extLst xmlns:a="http://schemas.openxmlformats.org/drawingml/2006/main">
+              <a:ext uri="{FF2B5EF4-FFF2-40B4-BE49-F238E27FC236}">
+                <a16:creationId xmlns:a16="http://schemas.microsoft.com/office/drawing/2014/main" id="{0A7BF2DE-72BB-451A-8395-DDE0E2F93BC4}"/>
+              </a:ext>
+            </a:extLst>
+          </p:cNvPr>
+          <p:cNvSpPr>
+            <a:spLocks xmlns:a="http://schemas.openxmlformats.org/drawingml/2006/main" noGrp="1"/>
+          </p:cNvSpPr>
+          <p:nvPr/>
+        </p:nvSpPr>
+        <p:spPr>
+          <a:xfrm xmlns:a="http://schemas.openxmlformats.org/drawingml/2006/main">
+            <a:off x="6263640" y="4535424"/>
+            <a:ext cx="5532120" cy="585216"/>
+          </a:xfrm>
+          <a:prstGeom xmlns:a="http://schemas.openxmlformats.org/drawingml/2006/main" prst="rect">
+            <a:avLst/>
+          </a:prstGeom>
+          <a:solidFill xmlns:a="http://schemas.openxmlformats.org/drawingml/2006/main">
+            <a:srgbClr val="F2F5FA"/>
+          </a:solidFill>
+          <a:ln xmlns:a="http://schemas.openxmlformats.org/drawingml/2006/main">
+            <a:solidFill>
+              <a:srgbClr val="F2F5FA"/>
+            </a:solidFill>
+          </a:ln>
+        </p:spPr>
+        <p:style>
+          <a:lnRef xmlns:a="http://schemas.openxmlformats.org/drawingml/2006/main" idx="1">
+            <a:schemeClr val="accent1"/>
+          </a:lnRef>
+          <a:fillRef xmlns:a="http://schemas.openxmlformats.org/drawingml/2006/main" idx="3">
+            <a:schemeClr val="accent1"/>
+          </a:fillRef>
+          <a:effectRef xmlns:a="http://schemas.openxmlformats.org/drawingml/2006/main" idx="2">
+            <a:schemeClr val="accent1"/>
+          </a:effectRef>
+          <a:fontRef xmlns:a="http://schemas.openxmlformats.org/drawingml/2006/main" idx="minor">
+            <a:schemeClr val="lt1"/>
+          </a:fontRef>
+        </p:style>
+        <p:txBody>
+          <a:bodyPr xmlns:a="http://schemas.openxmlformats.org/drawingml/2006/main" anchor="ctr"/>
+          <a:lstStyle xmlns:a="http://schemas.openxmlformats.org/drawingml/2006/main"/>
+          <a:p xmlns:a="http://schemas.openxmlformats.org/drawingml/2006/main">
+            <a:pPr algn="ctr">
+              <a:buNone/>
+            </a:pPr>
+          </a:p>
+        </p:txBody>
+      </p:sp>
+      <p:sp>
+        <p:nvSpPr>
+          <p:cNvPr id="86" name="TextBox 85">
+            <a:extLst xmlns:a="http://schemas.openxmlformats.org/drawingml/2006/main">
+              <a:ext uri="{FF2B5EF4-FFF2-40B4-BE49-F238E27FC236}">
+                <a16:creationId xmlns:a16="http://schemas.microsoft.com/office/drawing/2014/main" id="{3F678ED5-1B55-42E5-AC98-6979209D449D}"/>
+              </a:ext>
+            </a:extLst>
+          </p:cNvPr>
+          <p:cNvSpPr>
+            <a:spLocks xmlns:a="http://schemas.openxmlformats.org/drawingml/2006/main" noGrp="1"/>
+          </p:cNvSpPr>
+          <p:nvPr/>
+        </p:nvSpPr>
+        <p:spPr>
+          <a:xfrm xmlns:a="http://schemas.openxmlformats.org/drawingml/2006/main">
+            <a:off x="6373368" y="4764760"/>
+            <a:ext cx="573940" cy="163122"/>
+          </a:xfrm>
+          <a:prstGeom xmlns:a="http://schemas.openxmlformats.org/drawingml/2006/main" prst="rect">
+            <a:avLst/>
+          </a:prstGeom>
+          <a:noFill xmlns:a="http://schemas.openxmlformats.org/drawingml/2006/main"/>
+        </p:spPr>
+        <p:txBody>
+          <a:bodyPr xmlns:a="http://schemas.openxmlformats.org/drawingml/2006/main" wrap="none" lIns="18288" tIns="4572" rIns="18288" bIns="4572" anchor="ctr">
+            <a:spAutoFit/>
+          </a:bodyPr>
+          <a:lstStyle xmlns:a="http://schemas.openxmlformats.org/drawingml/2006/main"/>
+          <a:p xmlns:a="http://schemas.openxmlformats.org/drawingml/2006/main">
+            <a:pPr algn="l">
+              <a:buNone/>
+            </a:pPr>
+            <a:r>
+              <a:rPr sz="1000" b="0" i="0">
+                <a:solidFill>
+                  <a:srgbClr val="202020"/>
+                </a:solidFill>
+                <a:latin typeface="Aptos"/>
+                <a:ea typeface="Aptos"/>
+                <a:cs typeface="Aptos"/>
+              </a:rPr>
+              <a:t>Evap/ Condenser fan - 3 qty</a:t>
+            </a:r>
+          </a:p>
+        </p:txBody>
+      </p:sp>
+      <p:sp>
+        <p:nvSpPr>
+          <p:cNvPr id="87" name="TextBox 86">
+            <a:extLst xmlns:a="http://schemas.openxmlformats.org/drawingml/2006/main">
+              <a:ext uri="{FF2B5EF4-FFF2-40B4-BE49-F238E27FC236}">
+                <a16:creationId xmlns:a16="http://schemas.microsoft.com/office/drawing/2014/main" id="{253D9CE3-6BE9-455A-A8FE-2C3A9812CBBC}"/>
+              </a:ext>
+            </a:extLst>
+          </p:cNvPr>
+          <p:cNvSpPr>
+            <a:spLocks xmlns:a="http://schemas.openxmlformats.org/drawingml/2006/main" noGrp="1"/>
+          </p:cNvSpPr>
+          <p:nvPr/>
+        </p:nvSpPr>
+        <p:spPr>
+          <a:xfrm xmlns:a="http://schemas.openxmlformats.org/drawingml/2006/main">
+            <a:off x="9572055" y="4691608"/>
+            <a:ext cx="420051" cy="163122"/>
+          </a:xfrm>
+          <a:prstGeom xmlns:a="http://schemas.openxmlformats.org/drawingml/2006/main" prst="rect">
+            <a:avLst/>
+          </a:prstGeom>
+          <a:noFill xmlns:a="http://schemas.openxmlformats.org/drawingml/2006/main"/>
+        </p:spPr>
+        <p:txBody>
+          <a:bodyPr xmlns:a="http://schemas.openxmlformats.org/drawingml/2006/main" wrap="none" lIns="18288" tIns="4572" rIns="18288" bIns="4572" anchor="ctr">
+            <a:spAutoFit/>
+          </a:bodyPr>
+          <a:lstStyle xmlns:a="http://schemas.openxmlformats.org/drawingml/2006/main"/>
+          <a:p xmlns:a="http://schemas.openxmlformats.org/drawingml/2006/main">
+            <a:pPr algn="r">
+              <a:buNone/>
+            </a:pPr>
+            <a:r>
+              <a:rPr sz="1000" b="1" i="0">
+                <a:solidFill>
+                  <a:srgbClr val="202020"/>
+                </a:solidFill>
+                <a:latin typeface="Aptos"/>
+                <a:ea typeface="Aptos"/>
+                <a:cs typeface="Aptos"/>
+              </a:rPr>
+              <a:t>$42.00</a:t>
+            </a:r>
+          </a:p>
+        </p:txBody>
+      </p:sp>
+      <p:sp>
+        <p:nvSpPr>
+          <p:cNvPr id="88" name="TextBox 87">
+            <a:extLst xmlns:a="http://schemas.openxmlformats.org/drawingml/2006/main">
+              <a:ext uri="{FF2B5EF4-FFF2-40B4-BE49-F238E27FC236}">
+                <a16:creationId xmlns:a16="http://schemas.microsoft.com/office/drawing/2014/main" id="{3B2B4085-0517-4AD3-8CD0-9DD21BC4E9E3}"/>
+              </a:ext>
+            </a:extLst>
+          </p:cNvPr>
+          <p:cNvSpPr>
+            <a:spLocks xmlns:a="http://schemas.openxmlformats.org/drawingml/2006/main" noGrp="1"/>
+          </p:cNvSpPr>
+          <p:nvPr/>
+        </p:nvSpPr>
+        <p:spPr>
+          <a:xfrm xmlns:a="http://schemas.openxmlformats.org/drawingml/2006/main">
+            <a:off x="10189741" y="4691608"/>
+            <a:ext cx="606000" cy="163122"/>
+          </a:xfrm>
+          <a:prstGeom xmlns:a="http://schemas.openxmlformats.org/drawingml/2006/main" prst="rect">
+            <a:avLst/>
+          </a:prstGeom>
+          <a:noFill xmlns:a="http://schemas.openxmlformats.org/drawingml/2006/main"/>
+        </p:spPr>
+        <p:txBody>
+          <a:bodyPr xmlns:a="http://schemas.openxmlformats.org/drawingml/2006/main" wrap="none" lIns="18288" tIns="4572" rIns="18288" bIns="4572" anchor="ctr">
+            <a:spAutoFit/>
+          </a:bodyPr>
+          <a:lstStyle xmlns:a="http://schemas.openxmlformats.org/drawingml/2006/main"/>
+          <a:p xmlns:a="http://schemas.openxmlformats.org/drawingml/2006/main">
+            <a:pPr algn="ctr">
+              <a:buNone/>
+            </a:pPr>
+            <a:r>
+              <a:rPr sz="1000" b="0" i="0">
+                <a:solidFill>
+                  <a:srgbClr val="202020"/>
+                </a:solidFill>
+                <a:latin typeface="Aptos"/>
+                <a:ea typeface="Aptos"/>
+                <a:cs typeface="Aptos"/>
+              </a:rPr>
+              <a:t>9/18/2026</a:t>
+            </a:r>
+          </a:p>
+        </p:txBody>
+      </p:sp>
+      <p:sp>
+        <p:nvSpPr>
+          <p:cNvPr id="89" name="Rounded Rectangle 88">
+            <a:extLst xmlns:a="http://schemas.openxmlformats.org/drawingml/2006/main">
+              <a:ext uri="{FF2B5EF4-FFF2-40B4-BE49-F238E27FC236}">
+                <a16:creationId xmlns:a16="http://schemas.microsoft.com/office/drawing/2014/main" id="{D502E9AD-319E-4BFF-AC3F-ADD2A7429138}"/>
+              </a:ext>
+            </a:extLst>
+          </p:cNvPr>
+          <p:cNvSpPr>
+            <a:spLocks xmlns:a="http://schemas.openxmlformats.org/drawingml/2006/main" noGrp="1"/>
+          </p:cNvSpPr>
+          <p:nvPr/>
+        </p:nvSpPr>
+        <p:spPr>
+          <a:xfrm xmlns:a="http://schemas.openxmlformats.org/drawingml/2006/main">
+            <a:off x="10910620" y="4672584"/>
             <a:ext cx="822960" cy="256032"/>
           </a:xfrm>
           <a:prstGeom xmlns:a="http://schemas.openxmlformats.org/drawingml/2006/main" prst="roundRect">
@@ -2644,2978 +5094,6 @@
       </p:sp>
       <p:sp>
         <p:nvSpPr>
-          <p:cNvPr id="31" name="TextBox 30">
-            <a:extLst xmlns:a="http://schemas.openxmlformats.org/drawingml/2006/main">
-              <a:ext uri="{FF2B5EF4-FFF2-40B4-BE49-F238E27FC236}">
-                <a16:creationId xmlns:a16="http://schemas.microsoft.com/office/drawing/2014/main" id="{B16EE97C-3AE6-4353-A7E8-89ED0011E895}"/>
-              </a:ext>
-            </a:extLst>
-          </p:cNvPr>
-          <p:cNvSpPr>
-            <a:spLocks xmlns:a="http://schemas.openxmlformats.org/drawingml/2006/main" noGrp="1"/>
-          </p:cNvSpPr>
-          <p:nvPr/>
-        </p:nvSpPr>
-        <p:spPr>
-          <a:xfrm xmlns:a="http://schemas.openxmlformats.org/drawingml/2006/main">
-            <a:off x="5215901" y="3352012"/>
-            <a:ext cx="690959" cy="163122"/>
-          </a:xfrm>
-          <a:prstGeom xmlns:a="http://schemas.openxmlformats.org/drawingml/2006/main" prst="rect">
-            <a:avLst/>
-          </a:prstGeom>
-          <a:noFill xmlns:a="http://schemas.openxmlformats.org/drawingml/2006/main"/>
-        </p:spPr>
-        <p:txBody>
-          <a:bodyPr xmlns:a="http://schemas.openxmlformats.org/drawingml/2006/main" wrap="none" lIns="18288" tIns="4572" rIns="18288" bIns="4572" anchor="ctr">
-            <a:spAutoFit/>
-          </a:bodyPr>
-          <a:lstStyle xmlns:a="http://schemas.openxmlformats.org/drawingml/2006/main"/>
-          <a:p xmlns:a="http://schemas.openxmlformats.org/drawingml/2006/main">
-            <a:pPr algn="ctr">
-              <a:buNone/>
-            </a:pPr>
-            <a:r>
-              <a:rPr sz="1000" b="1" i="0">
-                <a:solidFill>
-                  <a:srgbClr val="FFFFFF"/>
-                </a:solidFill>
-                <a:latin typeface="Aptos"/>
-                <a:ea typeface="Aptos"/>
-                <a:cs typeface="Aptos"/>
-              </a:rPr>
-              <a:t>On Track</a:t>
-            </a:r>
-          </a:p>
-        </p:txBody>
-      </p:sp>
-      <p:sp>
-        <p:nvSpPr>
-          <p:cNvPr id="32" name="Rectangle 31">
-            <a:extLst xmlns:a="http://schemas.openxmlformats.org/drawingml/2006/main">
-              <a:ext uri="{FF2B5EF4-FFF2-40B4-BE49-F238E27FC236}">
-                <a16:creationId xmlns:a16="http://schemas.microsoft.com/office/drawing/2014/main" id="{E1A1E86E-02AB-4A19-A753-F6663635B6EC}"/>
-              </a:ext>
-            </a:extLst>
-          </p:cNvPr>
-          <p:cNvSpPr>
-            <a:spLocks xmlns:a="http://schemas.openxmlformats.org/drawingml/2006/main" noGrp="1"/>
-          </p:cNvSpPr>
-          <p:nvPr/>
-        </p:nvSpPr>
-        <p:spPr>
-          <a:xfrm xmlns:a="http://schemas.openxmlformats.org/drawingml/2006/main">
-            <a:off x="502920" y="3867912"/>
-            <a:ext cx="5532120" cy="585216"/>
-          </a:xfrm>
-          <a:prstGeom xmlns:a="http://schemas.openxmlformats.org/drawingml/2006/main" prst="rect">
-            <a:avLst/>
-          </a:prstGeom>
-          <a:solidFill xmlns:a="http://schemas.openxmlformats.org/drawingml/2006/main">
-            <a:srgbClr val="FFFFFF"/>
-          </a:solidFill>
-          <a:ln xmlns:a="http://schemas.openxmlformats.org/drawingml/2006/main">
-            <a:solidFill>
-              <a:srgbClr val="FFFFFF"/>
-            </a:solidFill>
-          </a:ln>
-        </p:spPr>
-        <p:style>
-          <a:lnRef xmlns:a="http://schemas.openxmlformats.org/drawingml/2006/main" idx="1">
-            <a:schemeClr val="accent1"/>
-          </a:lnRef>
-          <a:fillRef xmlns:a="http://schemas.openxmlformats.org/drawingml/2006/main" idx="3">
-            <a:schemeClr val="accent1"/>
-          </a:fillRef>
-          <a:effectRef xmlns:a="http://schemas.openxmlformats.org/drawingml/2006/main" idx="2">
-            <a:schemeClr val="accent1"/>
-          </a:effectRef>
-          <a:fontRef xmlns:a="http://schemas.openxmlformats.org/drawingml/2006/main" idx="minor">
-            <a:schemeClr val="lt1"/>
-          </a:fontRef>
-        </p:style>
-        <p:txBody>
-          <a:bodyPr xmlns:a="http://schemas.openxmlformats.org/drawingml/2006/main" anchor="ctr"/>
-          <a:lstStyle xmlns:a="http://schemas.openxmlformats.org/drawingml/2006/main"/>
-          <a:p xmlns:a="http://schemas.openxmlformats.org/drawingml/2006/main">
-            <a:pPr algn="ctr">
-              <a:buNone/>
-            </a:pPr>
-          </a:p>
-        </p:txBody>
-      </p:sp>
-      <p:sp>
-        <p:nvSpPr>
-          <p:cNvPr id="33" name="TextBox 32">
-            <a:extLst xmlns:a="http://schemas.openxmlformats.org/drawingml/2006/main">
-              <a:ext uri="{FF2B5EF4-FFF2-40B4-BE49-F238E27FC236}">
-                <a16:creationId xmlns:a16="http://schemas.microsoft.com/office/drawing/2014/main" id="{609D2D58-E815-451C-88B1-C0D9CD009572}"/>
-              </a:ext>
-            </a:extLst>
-          </p:cNvPr>
-          <p:cNvSpPr>
-            <a:spLocks xmlns:a="http://schemas.openxmlformats.org/drawingml/2006/main" noGrp="1"/>
-          </p:cNvSpPr>
-          <p:nvPr/>
-        </p:nvSpPr>
-        <p:spPr>
-          <a:xfrm xmlns:a="http://schemas.openxmlformats.org/drawingml/2006/main">
-            <a:off x="612648" y="4020304"/>
-            <a:ext cx="2414187" cy="317010"/>
-          </a:xfrm>
-          <a:prstGeom xmlns:a="http://schemas.openxmlformats.org/drawingml/2006/main" prst="rect">
-            <a:avLst/>
-          </a:prstGeom>
-          <a:noFill xmlns:a="http://schemas.openxmlformats.org/drawingml/2006/main"/>
-        </p:spPr>
-        <p:txBody>
-          <a:bodyPr xmlns:a="http://schemas.openxmlformats.org/drawingml/2006/main" wrap="none" lIns="18288" tIns="4572" rIns="18288" bIns="4572" anchor="ctr">
-            <a:spAutoFit/>
-          </a:bodyPr>
-          <a:lstStyle xmlns:a="http://schemas.openxmlformats.org/drawingml/2006/main"/>
-          <a:p xmlns:a="http://schemas.openxmlformats.org/drawingml/2006/main">
-            <a:pPr algn="l">
-              <a:buNone/>
-            </a:pPr>
-            <a:r>
-              <a:rPr sz="1000" b="0" i="0">
-                <a:solidFill>
-                  <a:srgbClr val="202020"/>
-                </a:solidFill>
-                <a:latin typeface="Aptos"/>
-                <a:ea typeface="Aptos"/>
-                <a:cs typeface="Aptos"/>
-              </a:rPr>
-              <a:t>S/m - 2 (Control box redesign, </a:t>
-            </a:r>
-            <a:r>
-              <a:rPr sz="1000" b="0" i="0">
-                <a:solidFill>
-                  <a:srgbClr val="202020"/>
-                </a:solidFill>
-                <a:latin typeface="Aptos"/>
-                <a:ea typeface="Aptos"/>
-                <a:cs typeface="Aptos"/>
-              </a:rPr>
-              <a:t>evap</a:t>
-            </a:r>
-            <a:r>
-              <a:rPr sz="1000" b="0" i="0">
-                <a:solidFill>
-                  <a:srgbClr val="202020"/>
-                </a:solidFill>
-                <a:latin typeface="Aptos"/>
-                <a:ea typeface="Aptos"/>
-                <a:cs typeface="Aptos"/>
-              </a:rPr>
-              <a:t> shroud,</a:t>
-            </a:r>
-          </a:p>
-          <a:p xmlns:a="http://schemas.openxmlformats.org/drawingml/2006/main">
-            <a:pPr algn="l">
-              <a:buNone/>
-            </a:pPr>
-            <a:r>
-              <a:rPr sz="1000" b="0" i="0">
-                <a:solidFill>
-                  <a:srgbClr val="202020"/>
-                </a:solidFill>
-                <a:latin typeface="Aptos"/>
-                <a:ea typeface="Aptos"/>
-                <a:cs typeface="Aptos"/>
-              </a:rPr>
-              <a:t> compress base, cond. shroud)</a:t>
-            </a:r>
-          </a:p>
-        </p:txBody>
-      </p:sp>
-      <p:sp>
-        <p:nvSpPr>
-          <p:cNvPr id="34" name="TextBox 33">
-            <a:extLst xmlns:a="http://schemas.openxmlformats.org/drawingml/2006/main">
-              <a:ext uri="{FF2B5EF4-FFF2-40B4-BE49-F238E27FC236}">
-                <a16:creationId xmlns:a16="http://schemas.microsoft.com/office/drawing/2014/main" id="{A296F264-219A-400A-BD6C-F22A158AB125}"/>
-              </a:ext>
-            </a:extLst>
-          </p:cNvPr>
-          <p:cNvSpPr>
-            <a:spLocks xmlns:a="http://schemas.openxmlformats.org/drawingml/2006/main" noGrp="1"/>
-          </p:cNvSpPr>
-          <p:nvPr/>
-        </p:nvSpPr>
-        <p:spPr>
-          <a:xfrm xmlns:a="http://schemas.openxmlformats.org/drawingml/2006/main">
-            <a:off x="3811335" y="4024096"/>
-            <a:ext cx="420051" cy="163122"/>
-          </a:xfrm>
-          <a:prstGeom xmlns:a="http://schemas.openxmlformats.org/drawingml/2006/main" prst="rect">
-            <a:avLst/>
-          </a:prstGeom>
-          <a:noFill xmlns:a="http://schemas.openxmlformats.org/drawingml/2006/main"/>
-        </p:spPr>
-        <p:txBody>
-          <a:bodyPr xmlns:a="http://schemas.openxmlformats.org/drawingml/2006/main" wrap="none" lIns="18288" tIns="4572" rIns="18288" bIns="4572" anchor="ctr">
-            <a:spAutoFit/>
-          </a:bodyPr>
-          <a:lstStyle xmlns:a="http://schemas.openxmlformats.org/drawingml/2006/main"/>
-          <a:p xmlns:a="http://schemas.openxmlformats.org/drawingml/2006/main">
-            <a:pPr algn="r">
-              <a:buNone/>
-            </a:pPr>
-            <a:r>
-              <a:rPr sz="1000" b="1" i="0">
-                <a:solidFill>
-                  <a:srgbClr val="202020"/>
-                </a:solidFill>
-                <a:latin typeface="Aptos"/>
-                <a:ea typeface="Aptos"/>
-                <a:cs typeface="Aptos"/>
-              </a:rPr>
-              <a:t>$25.00</a:t>
-            </a:r>
-          </a:p>
-        </p:txBody>
-      </p:sp>
-      <p:sp>
-        <p:nvSpPr>
-          <p:cNvPr id="35" name="TextBox 34">
-            <a:extLst xmlns:a="http://schemas.openxmlformats.org/drawingml/2006/main">
-              <a:ext uri="{FF2B5EF4-FFF2-40B4-BE49-F238E27FC236}">
-                <a16:creationId xmlns:a16="http://schemas.microsoft.com/office/drawing/2014/main" id="{3582A80F-F6A8-4183-8901-E68043A686FE}"/>
-              </a:ext>
-            </a:extLst>
-          </p:cNvPr>
-          <p:cNvSpPr>
-            <a:spLocks xmlns:a="http://schemas.openxmlformats.org/drawingml/2006/main" noGrp="1"/>
-          </p:cNvSpPr>
-          <p:nvPr/>
-        </p:nvSpPr>
-        <p:spPr>
-          <a:xfrm xmlns:a="http://schemas.openxmlformats.org/drawingml/2006/main">
-            <a:off x="4429020" y="4024096"/>
-            <a:ext cx="606000" cy="163122"/>
-          </a:xfrm>
-          <a:prstGeom xmlns:a="http://schemas.openxmlformats.org/drawingml/2006/main" prst="rect">
-            <a:avLst/>
-          </a:prstGeom>
-          <a:noFill xmlns:a="http://schemas.openxmlformats.org/drawingml/2006/main"/>
-        </p:spPr>
-        <p:txBody>
-          <a:bodyPr xmlns:a="http://schemas.openxmlformats.org/drawingml/2006/main" wrap="none" lIns="18288" tIns="4572" rIns="18288" bIns="4572" anchor="ctr">
-            <a:spAutoFit/>
-          </a:bodyPr>
-          <a:lstStyle xmlns:a="http://schemas.openxmlformats.org/drawingml/2006/main"/>
-          <a:p xmlns:a="http://schemas.openxmlformats.org/drawingml/2006/main">
-            <a:pPr algn="ctr">
-              <a:buNone/>
-            </a:pPr>
-            <a:r>
-              <a:rPr sz="1000" b="0" i="0">
-                <a:solidFill>
-                  <a:srgbClr val="202020"/>
-                </a:solidFill>
-                <a:latin typeface="Aptos"/>
-                <a:ea typeface="Aptos"/>
-                <a:cs typeface="Aptos"/>
-              </a:rPr>
-              <a:t>10/21/2026</a:t>
-            </a:r>
-          </a:p>
-        </p:txBody>
-      </p:sp>
-      <p:sp>
-        <p:nvSpPr>
-          <p:cNvPr id="36" name="Rounded Rectangle 35">
-            <a:extLst xmlns:a="http://schemas.openxmlformats.org/drawingml/2006/main">
-              <a:ext uri="{FF2B5EF4-FFF2-40B4-BE49-F238E27FC236}">
-                <a16:creationId xmlns:a16="http://schemas.microsoft.com/office/drawing/2014/main" id="{DCE43CBC-76E8-4F66-BD17-6D9C57A1EA6A}"/>
-              </a:ext>
-            </a:extLst>
-          </p:cNvPr>
-          <p:cNvSpPr>
-            <a:spLocks xmlns:a="http://schemas.openxmlformats.org/drawingml/2006/main" noGrp="1"/>
-          </p:cNvSpPr>
-          <p:nvPr/>
-        </p:nvSpPr>
-        <p:spPr>
-          <a:xfrm xmlns:a="http://schemas.openxmlformats.org/drawingml/2006/main">
-            <a:off x="5149900" y="4005072"/>
-            <a:ext cx="822960" cy="256032"/>
-          </a:xfrm>
-          <a:prstGeom xmlns:a="http://schemas.openxmlformats.org/drawingml/2006/main" prst="roundRect">
-            <a:avLst/>
-          </a:prstGeom>
-          <a:solidFill xmlns:a="http://schemas.openxmlformats.org/drawingml/2006/main">
-            <a:srgbClr val="ED7D31"/>
-          </a:solidFill>
-          <a:ln xmlns:a="http://schemas.openxmlformats.org/drawingml/2006/main" w="0">
-            <a:solidFill>
-              <a:srgbClr val="ED7D31"/>
-            </a:solidFill>
-            <a:prstDash val="solid"/>
-          </a:ln>
-        </p:spPr>
-        <p:style>
-          <a:lnRef xmlns:a="http://schemas.openxmlformats.org/drawingml/2006/main" idx="1">
-            <a:schemeClr val="accent1"/>
-          </a:lnRef>
-          <a:fillRef xmlns:a="http://schemas.openxmlformats.org/drawingml/2006/main" idx="3">
-            <a:schemeClr val="accent1"/>
-          </a:fillRef>
-          <a:effectRef xmlns:a="http://schemas.openxmlformats.org/drawingml/2006/main" idx="2">
-            <a:schemeClr val="accent1"/>
-          </a:effectRef>
-          <a:fontRef xmlns:a="http://schemas.openxmlformats.org/drawingml/2006/main" idx="minor">
-            <a:schemeClr val="lt1"/>
-          </a:fontRef>
-        </p:style>
-        <p:txBody>
-          <a:bodyPr xmlns:a="http://schemas.openxmlformats.org/drawingml/2006/main" anchor="ctr"/>
-          <a:lstStyle xmlns:a="http://schemas.openxmlformats.org/drawingml/2006/main"/>
-          <a:p xmlns:a="http://schemas.openxmlformats.org/drawingml/2006/main">
-            <a:pPr algn="ctr">
-              <a:buNone/>
-            </a:pPr>
-          </a:p>
-        </p:txBody>
-      </p:sp>
-      <p:sp>
-        <p:nvSpPr>
-          <p:cNvPr id="37" name="TextBox 36">
-            <a:extLst xmlns:a="http://schemas.openxmlformats.org/drawingml/2006/main">
-              <a:ext uri="{FF2B5EF4-FFF2-40B4-BE49-F238E27FC236}">
-                <a16:creationId xmlns:a16="http://schemas.microsoft.com/office/drawing/2014/main" id="{8C0E9E66-321E-4090-9244-1CBF4CDFF844}"/>
-              </a:ext>
-            </a:extLst>
-          </p:cNvPr>
-          <p:cNvSpPr>
-            <a:spLocks xmlns:a="http://schemas.openxmlformats.org/drawingml/2006/main" noGrp="1"/>
-          </p:cNvSpPr>
-          <p:nvPr/>
-        </p:nvSpPr>
-        <p:spPr>
-          <a:xfrm xmlns:a="http://schemas.openxmlformats.org/drawingml/2006/main">
-            <a:off x="5216702" y="4019524"/>
-            <a:ext cx="689356" cy="163122"/>
-          </a:xfrm>
-          <a:prstGeom xmlns:a="http://schemas.openxmlformats.org/drawingml/2006/main" prst="rect">
-            <a:avLst/>
-          </a:prstGeom>
-          <a:noFill xmlns:a="http://schemas.openxmlformats.org/drawingml/2006/main"/>
-        </p:spPr>
-        <p:txBody>
-          <a:bodyPr xmlns:a="http://schemas.openxmlformats.org/drawingml/2006/main" wrap="none" lIns="18288" tIns="4572" rIns="18288" bIns="4572" anchor="ctr">
-            <a:spAutoFit/>
-          </a:bodyPr>
-          <a:lstStyle xmlns:a="http://schemas.openxmlformats.org/drawingml/2006/main"/>
-          <a:p xmlns:a="http://schemas.openxmlformats.org/drawingml/2006/main">
-            <a:pPr algn="ctr">
-              <a:buNone/>
-            </a:pPr>
-            <a:r>
-              <a:rPr sz="1000" b="1" i="0">
-                <a:solidFill>
-                  <a:srgbClr val="FFFFFF"/>
-                </a:solidFill>
-                <a:latin typeface="Aptos"/>
-                <a:ea typeface="Aptos"/>
-                <a:cs typeface="Aptos"/>
-              </a:rPr>
-              <a:t>On Track</a:t>
-            </a:r>
-          </a:p>
-        </p:txBody>
-      </p:sp>
-      <p:sp>
-        <p:nvSpPr>
-          <p:cNvPr id="38" name="Rectangle 37">
-            <a:extLst xmlns:a="http://schemas.openxmlformats.org/drawingml/2006/main">
-              <a:ext uri="{FF2B5EF4-FFF2-40B4-BE49-F238E27FC236}">
-                <a16:creationId xmlns:a16="http://schemas.microsoft.com/office/drawing/2014/main" id="{1D6CC113-D710-4DB9-B50D-94895BE24F34}"/>
-              </a:ext>
-            </a:extLst>
-          </p:cNvPr>
-          <p:cNvSpPr>
-            <a:spLocks xmlns:a="http://schemas.openxmlformats.org/drawingml/2006/main" noGrp="1"/>
-          </p:cNvSpPr>
-          <p:nvPr/>
-        </p:nvSpPr>
-        <p:spPr>
-          <a:xfrm xmlns:a="http://schemas.openxmlformats.org/drawingml/2006/main">
-            <a:off x="502920" y="4535424"/>
-            <a:ext cx="5532120" cy="585216"/>
-          </a:xfrm>
-          <a:prstGeom xmlns:a="http://schemas.openxmlformats.org/drawingml/2006/main" prst="rect">
-            <a:avLst/>
-          </a:prstGeom>
-          <a:solidFill xmlns:a="http://schemas.openxmlformats.org/drawingml/2006/main">
-            <a:srgbClr val="F2F5FA"/>
-          </a:solidFill>
-          <a:ln xmlns:a="http://schemas.openxmlformats.org/drawingml/2006/main">
-            <a:solidFill>
-              <a:srgbClr val="F2F5FA"/>
-            </a:solidFill>
-          </a:ln>
-        </p:spPr>
-        <p:style>
-          <a:lnRef xmlns:a="http://schemas.openxmlformats.org/drawingml/2006/main" idx="1">
-            <a:schemeClr val="accent1"/>
-          </a:lnRef>
-          <a:fillRef xmlns:a="http://schemas.openxmlformats.org/drawingml/2006/main" idx="3">
-            <a:schemeClr val="accent1"/>
-          </a:fillRef>
-          <a:effectRef xmlns:a="http://schemas.openxmlformats.org/drawingml/2006/main" idx="2">
-            <a:schemeClr val="accent1"/>
-          </a:effectRef>
-          <a:fontRef xmlns:a="http://schemas.openxmlformats.org/drawingml/2006/main" idx="minor">
-            <a:schemeClr val="lt1"/>
-          </a:fontRef>
-        </p:style>
-        <p:txBody>
-          <a:bodyPr xmlns:a="http://schemas.openxmlformats.org/drawingml/2006/main" anchor="ctr"/>
-          <a:lstStyle xmlns:a="http://schemas.openxmlformats.org/drawingml/2006/main"/>
-          <a:p xmlns:a="http://schemas.openxmlformats.org/drawingml/2006/main">
-            <a:pPr algn="ctr">
-              <a:buNone/>
-            </a:pPr>
-          </a:p>
-        </p:txBody>
-      </p:sp>
-      <p:sp>
-        <p:nvSpPr>
-          <p:cNvPr id="39" name="TextBox 38">
-            <a:extLst xmlns:a="http://schemas.openxmlformats.org/drawingml/2006/main">
-              <a:ext uri="{FF2B5EF4-FFF2-40B4-BE49-F238E27FC236}">
-                <a16:creationId xmlns:a16="http://schemas.microsoft.com/office/drawing/2014/main" id="{B3A8F3CC-740B-4352-A533-F6803D1F9EA8}"/>
-              </a:ext>
-            </a:extLst>
-          </p:cNvPr>
-          <p:cNvSpPr>
-            <a:spLocks xmlns:a="http://schemas.openxmlformats.org/drawingml/2006/main" noGrp="1"/>
-          </p:cNvSpPr>
-          <p:nvPr/>
-        </p:nvSpPr>
-        <p:spPr>
-          <a:xfrm xmlns:a="http://schemas.openxmlformats.org/drawingml/2006/main">
-            <a:off x="612648" y="4764760"/>
-            <a:ext cx="2758832" cy="163122"/>
-          </a:xfrm>
-          <a:prstGeom xmlns:a="http://schemas.openxmlformats.org/drawingml/2006/main" prst="rect">
-            <a:avLst/>
-          </a:prstGeom>
-          <a:noFill xmlns:a="http://schemas.openxmlformats.org/drawingml/2006/main"/>
-        </p:spPr>
-        <p:txBody>
-          <a:bodyPr xmlns:a="http://schemas.openxmlformats.org/drawingml/2006/main" wrap="none" lIns="18288" tIns="4572" rIns="18288" bIns="4572" anchor="ctr">
-            <a:spAutoFit/>
-          </a:bodyPr>
-          <a:lstStyle xmlns:a="http://schemas.openxmlformats.org/drawingml/2006/main"/>
-          <a:p xmlns:a="http://schemas.openxmlformats.org/drawingml/2006/main">
-            <a:pPr algn="l">
-              <a:buNone/>
-            </a:pPr>
-            <a:r>
-              <a:rPr sz="1000" b="0" i="0">
-                <a:solidFill>
-                  <a:srgbClr val="202020"/>
-                </a:solidFill>
-                <a:latin typeface="Aptos"/>
-                <a:ea typeface="Aptos"/>
-                <a:cs typeface="Aptos"/>
-              </a:rPr>
-              <a:t>New enclosure for 2.0 (Molded foam/ Sm/ gasket)</a:t>
-            </a:r>
-          </a:p>
-        </p:txBody>
-      </p:sp>
-      <p:sp>
-        <p:nvSpPr>
-          <p:cNvPr id="40" name="TextBox 39">
-            <a:extLst xmlns:a="http://schemas.openxmlformats.org/drawingml/2006/main">
-              <a:ext uri="{FF2B5EF4-FFF2-40B4-BE49-F238E27FC236}">
-                <a16:creationId xmlns:a16="http://schemas.microsoft.com/office/drawing/2014/main" id="{71B6A305-ADB7-47AB-BC84-8A8BE68B417C}"/>
-              </a:ext>
-            </a:extLst>
-          </p:cNvPr>
-          <p:cNvSpPr>
-            <a:spLocks xmlns:a="http://schemas.openxmlformats.org/drawingml/2006/main" noGrp="1"/>
-          </p:cNvSpPr>
-          <p:nvPr/>
-        </p:nvSpPr>
-        <p:spPr>
-          <a:xfrm xmlns:a="http://schemas.openxmlformats.org/drawingml/2006/main">
-            <a:off x="3811335" y="4691608"/>
-            <a:ext cx="420051" cy="163122"/>
-          </a:xfrm>
-          <a:prstGeom xmlns:a="http://schemas.openxmlformats.org/drawingml/2006/main" prst="rect">
-            <a:avLst/>
-          </a:prstGeom>
-          <a:noFill xmlns:a="http://schemas.openxmlformats.org/drawingml/2006/main"/>
-        </p:spPr>
-        <p:txBody>
-          <a:bodyPr xmlns:a="http://schemas.openxmlformats.org/drawingml/2006/main" wrap="none" lIns="18288" tIns="4572" rIns="18288" bIns="4572" anchor="ctr">
-            <a:spAutoFit/>
-          </a:bodyPr>
-          <a:lstStyle xmlns:a="http://schemas.openxmlformats.org/drawingml/2006/main"/>
-          <a:p xmlns:a="http://schemas.openxmlformats.org/drawingml/2006/main">
-            <a:pPr algn="r">
-              <a:buNone/>
-            </a:pPr>
-            <a:r>
-              <a:rPr sz="1000" b="1" i="0">
-                <a:solidFill>
-                  <a:srgbClr val="202020"/>
-                </a:solidFill>
-                <a:latin typeface="Aptos"/>
-                <a:ea typeface="Aptos"/>
-                <a:cs typeface="Aptos"/>
-              </a:rPr>
-              <a:t>$20.00</a:t>
-            </a:r>
-          </a:p>
-        </p:txBody>
-      </p:sp>
-      <p:sp>
-        <p:nvSpPr>
-          <p:cNvPr id="41" name="TextBox 40">
-            <a:extLst xmlns:a="http://schemas.openxmlformats.org/drawingml/2006/main">
-              <a:ext uri="{FF2B5EF4-FFF2-40B4-BE49-F238E27FC236}">
-                <a16:creationId xmlns:a16="http://schemas.microsoft.com/office/drawing/2014/main" id="{FE60127C-CA66-4A04-BB7E-11398B1C1A41}"/>
-              </a:ext>
-            </a:extLst>
-          </p:cNvPr>
-          <p:cNvSpPr>
-            <a:spLocks xmlns:a="http://schemas.openxmlformats.org/drawingml/2006/main" noGrp="1"/>
-          </p:cNvSpPr>
-          <p:nvPr/>
-        </p:nvSpPr>
-        <p:spPr>
-          <a:xfrm xmlns:a="http://schemas.openxmlformats.org/drawingml/2006/main">
-            <a:off x="4394555" y="4691608"/>
-            <a:ext cx="674929" cy="163122"/>
-          </a:xfrm>
-          <a:prstGeom xmlns:a="http://schemas.openxmlformats.org/drawingml/2006/main" prst="rect">
-            <a:avLst/>
-          </a:prstGeom>
-          <a:noFill xmlns:a="http://schemas.openxmlformats.org/drawingml/2006/main"/>
-        </p:spPr>
-        <p:txBody>
-          <a:bodyPr xmlns:a="http://schemas.openxmlformats.org/drawingml/2006/main" wrap="none" lIns="18288" tIns="4572" rIns="18288" bIns="4572" anchor="ctr">
-            <a:spAutoFit/>
-          </a:bodyPr>
-          <a:lstStyle xmlns:a="http://schemas.openxmlformats.org/drawingml/2006/main"/>
-          <a:p xmlns:a="http://schemas.openxmlformats.org/drawingml/2006/main">
-            <a:pPr algn="ctr">
-              <a:buNone/>
-            </a:pPr>
-            <a:r>
-              <a:rPr sz="1000" b="0" i="0">
-                <a:solidFill>
-                  <a:srgbClr val="202020"/>
-                </a:solidFill>
-                <a:latin typeface="Aptos"/>
-                <a:ea typeface="Aptos"/>
-                <a:cs typeface="Aptos"/>
-              </a:rPr>
-              <a:t>10/30/2026</a:t>
-            </a:r>
-          </a:p>
-        </p:txBody>
-      </p:sp>
-      <p:sp>
-        <p:nvSpPr>
-          <p:cNvPr id="42" name="Rounded Rectangle 41">
-            <a:extLst xmlns:a="http://schemas.openxmlformats.org/drawingml/2006/main">
-              <a:ext uri="{FF2B5EF4-FFF2-40B4-BE49-F238E27FC236}">
-                <a16:creationId xmlns:a16="http://schemas.microsoft.com/office/drawing/2014/main" id="{67037022-FD4D-4517-903D-367543E7B485}"/>
-              </a:ext>
-            </a:extLst>
-          </p:cNvPr>
-          <p:cNvSpPr>
-            <a:spLocks xmlns:a="http://schemas.openxmlformats.org/drawingml/2006/main" noGrp="1"/>
-          </p:cNvSpPr>
-          <p:nvPr/>
-        </p:nvSpPr>
-        <p:spPr>
-          <a:xfrm xmlns:a="http://schemas.openxmlformats.org/drawingml/2006/main">
-            <a:off x="5149900" y="4672584"/>
-            <a:ext cx="822960" cy="256032"/>
-          </a:xfrm>
-          <a:prstGeom xmlns:a="http://schemas.openxmlformats.org/drawingml/2006/main" prst="roundRect">
-            <a:avLst/>
-          </a:prstGeom>
-          <a:solidFill xmlns:a="http://schemas.openxmlformats.org/drawingml/2006/main">
-            <a:srgbClr val="ED7D31"/>
-          </a:solidFill>
-          <a:ln xmlns:a="http://schemas.openxmlformats.org/drawingml/2006/main" w="0">
-            <a:solidFill>
-              <a:srgbClr val="ED7D31"/>
-            </a:solidFill>
-            <a:prstDash val="solid"/>
-          </a:ln>
-        </p:spPr>
-        <p:style>
-          <a:lnRef xmlns:a="http://schemas.openxmlformats.org/drawingml/2006/main" idx="1">
-            <a:schemeClr val="accent1"/>
-          </a:lnRef>
-          <a:fillRef xmlns:a="http://schemas.openxmlformats.org/drawingml/2006/main" idx="3">
-            <a:schemeClr val="accent1"/>
-          </a:fillRef>
-          <a:effectRef xmlns:a="http://schemas.openxmlformats.org/drawingml/2006/main" idx="2">
-            <a:schemeClr val="accent1"/>
-          </a:effectRef>
-          <a:fontRef xmlns:a="http://schemas.openxmlformats.org/drawingml/2006/main" idx="minor">
-            <a:schemeClr val="lt1"/>
-          </a:fontRef>
-        </p:style>
-        <p:txBody>
-          <a:bodyPr xmlns:a="http://schemas.openxmlformats.org/drawingml/2006/main" anchor="ctr"/>
-          <a:lstStyle xmlns:a="http://schemas.openxmlformats.org/drawingml/2006/main"/>
-          <a:p xmlns:a="http://schemas.openxmlformats.org/drawingml/2006/main">
-            <a:pPr algn="ctr">
-              <a:buNone/>
-            </a:pPr>
-          </a:p>
-        </p:txBody>
-      </p:sp>
-      <p:sp>
-        <p:nvSpPr>
-          <p:cNvPr id="43" name="TextBox 42">
-            <a:extLst xmlns:a="http://schemas.openxmlformats.org/drawingml/2006/main">
-              <a:ext uri="{FF2B5EF4-FFF2-40B4-BE49-F238E27FC236}">
-                <a16:creationId xmlns:a16="http://schemas.microsoft.com/office/drawing/2014/main" id="{61D05615-695E-42B9-ADEB-EBE7592924A6}"/>
-              </a:ext>
-            </a:extLst>
-          </p:cNvPr>
-          <p:cNvSpPr>
-            <a:spLocks xmlns:a="http://schemas.openxmlformats.org/drawingml/2006/main" noGrp="1"/>
-          </p:cNvSpPr>
-          <p:nvPr/>
-        </p:nvSpPr>
-        <p:spPr>
-          <a:xfrm xmlns:a="http://schemas.openxmlformats.org/drawingml/2006/main">
-            <a:off x="5216702" y="4687036"/>
-            <a:ext cx="689356" cy="163122"/>
-          </a:xfrm>
-          <a:prstGeom xmlns:a="http://schemas.openxmlformats.org/drawingml/2006/main" prst="rect">
-            <a:avLst/>
-          </a:prstGeom>
-          <a:noFill xmlns:a="http://schemas.openxmlformats.org/drawingml/2006/main"/>
-        </p:spPr>
-        <p:txBody>
-          <a:bodyPr xmlns:a="http://schemas.openxmlformats.org/drawingml/2006/main" wrap="none" lIns="18288" tIns="4572" rIns="18288" bIns="4572" anchor="ctr">
-            <a:spAutoFit/>
-          </a:bodyPr>
-          <a:lstStyle xmlns:a="http://schemas.openxmlformats.org/drawingml/2006/main"/>
-          <a:p xmlns:a="http://schemas.openxmlformats.org/drawingml/2006/main">
-            <a:pPr algn="ctr">
-              <a:buNone/>
-            </a:pPr>
-            <a:r>
-              <a:rPr sz="1000" b="1" i="0">
-                <a:solidFill>
-                  <a:srgbClr val="FFFFFF"/>
-                </a:solidFill>
-                <a:latin typeface="Aptos"/>
-                <a:ea typeface="Aptos"/>
-                <a:cs typeface="Aptos"/>
-              </a:rPr>
-              <a:t>On Track</a:t>
-            </a:r>
-          </a:p>
-        </p:txBody>
-      </p:sp>
-      <p:sp>
-        <p:nvSpPr>
-          <p:cNvPr id="44" name="Rectangle 43">
-            <a:extLst xmlns:a="http://schemas.openxmlformats.org/drawingml/2006/main">
-              <a:ext uri="{FF2B5EF4-FFF2-40B4-BE49-F238E27FC236}">
-                <a16:creationId xmlns:a16="http://schemas.microsoft.com/office/drawing/2014/main" id="{2904A170-4D9D-42C4-A7F7-A7D9047CACDE}"/>
-              </a:ext>
-            </a:extLst>
-          </p:cNvPr>
-          <p:cNvSpPr>
-            <a:spLocks xmlns:a="http://schemas.openxmlformats.org/drawingml/2006/main" noGrp="1"/>
-          </p:cNvSpPr>
-          <p:nvPr/>
-        </p:nvSpPr>
-        <p:spPr>
-          <a:xfrm xmlns:a="http://schemas.openxmlformats.org/drawingml/2006/main">
-            <a:off x="502920" y="5202936"/>
-            <a:ext cx="5532120" cy="585216"/>
-          </a:xfrm>
-          <a:prstGeom xmlns:a="http://schemas.openxmlformats.org/drawingml/2006/main" prst="rect">
-            <a:avLst/>
-          </a:prstGeom>
-          <a:solidFill xmlns:a="http://schemas.openxmlformats.org/drawingml/2006/main">
-            <a:srgbClr val="FFFFFF"/>
-          </a:solidFill>
-          <a:ln xmlns:a="http://schemas.openxmlformats.org/drawingml/2006/main">
-            <a:solidFill>
-              <a:srgbClr val="FFFFFF"/>
-            </a:solidFill>
-          </a:ln>
-        </p:spPr>
-        <p:style>
-          <a:lnRef xmlns:a="http://schemas.openxmlformats.org/drawingml/2006/main" idx="1">
-            <a:schemeClr val="accent1"/>
-          </a:lnRef>
-          <a:fillRef xmlns:a="http://schemas.openxmlformats.org/drawingml/2006/main" idx="3">
-            <a:schemeClr val="accent1"/>
-          </a:fillRef>
-          <a:effectRef xmlns:a="http://schemas.openxmlformats.org/drawingml/2006/main" idx="2">
-            <a:schemeClr val="accent1"/>
-          </a:effectRef>
-          <a:fontRef xmlns:a="http://schemas.openxmlformats.org/drawingml/2006/main" idx="minor">
-            <a:schemeClr val="lt1"/>
-          </a:fontRef>
-        </p:style>
-        <p:txBody>
-          <a:bodyPr xmlns:a="http://schemas.openxmlformats.org/drawingml/2006/main" anchor="ctr"/>
-          <a:lstStyle xmlns:a="http://schemas.openxmlformats.org/drawingml/2006/main"/>
-          <a:p xmlns:a="http://schemas.openxmlformats.org/drawingml/2006/main">
-            <a:pPr algn="ctr">
-              <a:buNone/>
-            </a:pPr>
-          </a:p>
-        </p:txBody>
-      </p:sp>
-      <p:sp>
-        <p:nvSpPr>
-          <p:cNvPr id="45" name="TextBox 44">
-            <a:extLst xmlns:a="http://schemas.openxmlformats.org/drawingml/2006/main">
-              <a:ext uri="{FF2B5EF4-FFF2-40B4-BE49-F238E27FC236}">
-                <a16:creationId xmlns:a16="http://schemas.microsoft.com/office/drawing/2014/main" id="{DDA463D6-3AF5-44C3-99D0-59601359210C}"/>
-              </a:ext>
-            </a:extLst>
-          </p:cNvPr>
-          <p:cNvSpPr>
-            <a:spLocks xmlns:a="http://schemas.openxmlformats.org/drawingml/2006/main" noGrp="1"/>
-          </p:cNvSpPr>
-          <p:nvPr/>
-        </p:nvSpPr>
-        <p:spPr>
-          <a:xfrm xmlns:a="http://schemas.openxmlformats.org/drawingml/2006/main">
-            <a:off x="612648" y="5432272"/>
-            <a:ext cx="836832" cy="163122"/>
-          </a:xfrm>
-          <a:prstGeom xmlns:a="http://schemas.openxmlformats.org/drawingml/2006/main" prst="rect">
-            <a:avLst/>
-          </a:prstGeom>
-          <a:noFill xmlns:a="http://schemas.openxmlformats.org/drawingml/2006/main"/>
-        </p:spPr>
-        <p:txBody>
-          <a:bodyPr xmlns:a="http://schemas.openxmlformats.org/drawingml/2006/main" wrap="none" lIns="18288" tIns="4572" rIns="18288" bIns="4572" anchor="ctr">
-            <a:spAutoFit/>
-          </a:bodyPr>
-          <a:lstStyle xmlns:a="http://schemas.openxmlformats.org/drawingml/2006/main"/>
-          <a:p xmlns:a="http://schemas.openxmlformats.org/drawingml/2006/main">
-            <a:pPr algn="l">
-              <a:buNone/>
-            </a:pPr>
-            <a:r>
-              <a:rPr sz="1000" b="0" i="0">
-                <a:solidFill>
-                  <a:srgbClr val="202020"/>
-                </a:solidFill>
-                <a:latin typeface="Aptos"/>
-                <a:ea typeface="Aptos"/>
-                <a:cs typeface="Aptos"/>
-              </a:rPr>
-              <a:t>Aluminum coil</a:t>
-            </a:r>
-          </a:p>
-        </p:txBody>
-      </p:sp>
-      <p:sp>
-        <p:nvSpPr>
-          <p:cNvPr id="46" name="TextBox 45">
-            <a:extLst xmlns:a="http://schemas.openxmlformats.org/drawingml/2006/main">
-              <a:ext uri="{FF2B5EF4-FFF2-40B4-BE49-F238E27FC236}">
-                <a16:creationId xmlns:a16="http://schemas.microsoft.com/office/drawing/2014/main" id="{EA0C5791-D303-4E8E-8EB8-15037689E5C7}"/>
-              </a:ext>
-            </a:extLst>
-          </p:cNvPr>
-          <p:cNvSpPr>
-            <a:spLocks xmlns:a="http://schemas.openxmlformats.org/drawingml/2006/main" noGrp="1"/>
-          </p:cNvSpPr>
-          <p:nvPr/>
-        </p:nvSpPr>
-        <p:spPr>
-          <a:xfrm xmlns:a="http://schemas.openxmlformats.org/drawingml/2006/main">
-            <a:off x="3811335" y="5359120"/>
-            <a:ext cx="420051" cy="163122"/>
-          </a:xfrm>
-          <a:prstGeom xmlns:a="http://schemas.openxmlformats.org/drawingml/2006/main" prst="rect">
-            <a:avLst/>
-          </a:prstGeom>
-          <a:noFill xmlns:a="http://schemas.openxmlformats.org/drawingml/2006/main"/>
-        </p:spPr>
-        <p:txBody>
-          <a:bodyPr xmlns:a="http://schemas.openxmlformats.org/drawingml/2006/main" wrap="none" lIns="18288" tIns="4572" rIns="18288" bIns="4572" anchor="ctr">
-            <a:spAutoFit/>
-          </a:bodyPr>
-          <a:lstStyle xmlns:a="http://schemas.openxmlformats.org/drawingml/2006/main"/>
-          <a:p xmlns:a="http://schemas.openxmlformats.org/drawingml/2006/main">
-            <a:pPr algn="r">
-              <a:buNone/>
-            </a:pPr>
-            <a:r>
-              <a:rPr sz="1000" b="1" i="0">
-                <a:solidFill>
-                  <a:srgbClr val="202020"/>
-                </a:solidFill>
-                <a:latin typeface="Aptos"/>
-                <a:ea typeface="Aptos"/>
-                <a:cs typeface="Aptos"/>
-              </a:rPr>
-              <a:t>$40.00</a:t>
-            </a:r>
-          </a:p>
-        </p:txBody>
-      </p:sp>
-      <p:sp>
-        <p:nvSpPr>
-          <p:cNvPr id="47" name="TextBox 46">
-            <a:extLst xmlns:a="http://schemas.openxmlformats.org/drawingml/2006/main">
-              <a:ext uri="{FF2B5EF4-FFF2-40B4-BE49-F238E27FC236}">
-                <a16:creationId xmlns:a16="http://schemas.microsoft.com/office/drawing/2014/main" id="{8590AC91-ABF1-44A8-B317-1CC4E53657DD}"/>
-              </a:ext>
-            </a:extLst>
-          </p:cNvPr>
-          <p:cNvSpPr>
-            <a:spLocks xmlns:a="http://schemas.openxmlformats.org/drawingml/2006/main" noGrp="1"/>
-          </p:cNvSpPr>
-          <p:nvPr/>
-        </p:nvSpPr>
-        <p:spPr>
-          <a:xfrm xmlns:a="http://schemas.openxmlformats.org/drawingml/2006/main">
-            <a:off x="4463484" y="5359120"/>
-            <a:ext cx="537071" cy="163122"/>
-          </a:xfrm>
-          <a:prstGeom xmlns:a="http://schemas.openxmlformats.org/drawingml/2006/main" prst="rect">
-            <a:avLst/>
-          </a:prstGeom>
-          <a:noFill xmlns:a="http://schemas.openxmlformats.org/drawingml/2006/main"/>
-        </p:spPr>
-        <p:txBody>
-          <a:bodyPr xmlns:a="http://schemas.openxmlformats.org/drawingml/2006/main" wrap="none" lIns="18288" tIns="4572" rIns="18288" bIns="4572" anchor="ctr">
-            <a:spAutoFit/>
-          </a:bodyPr>
-          <a:lstStyle xmlns:a="http://schemas.openxmlformats.org/drawingml/2006/main"/>
-          <a:p xmlns:a="http://schemas.openxmlformats.org/drawingml/2006/main">
-            <a:pPr algn="ctr">
-              <a:buNone/>
-            </a:pPr>
-            <a:r>
-              <a:rPr sz="1000" b="0" i="0">
-                <a:solidFill>
-                  <a:srgbClr val="202020"/>
-                </a:solidFill>
-                <a:latin typeface="Aptos"/>
-                <a:ea typeface="Aptos"/>
-                <a:cs typeface="Aptos"/>
-              </a:rPr>
-              <a:t>2/12/2027</a:t>
-            </a:r>
-          </a:p>
-        </p:txBody>
-      </p:sp>
-      <p:sp>
-        <p:nvSpPr>
-          <p:cNvPr id="48" name="Rounded Rectangle 47">
-            <a:extLst xmlns:a="http://schemas.openxmlformats.org/drawingml/2006/main">
-              <a:ext uri="{FF2B5EF4-FFF2-40B4-BE49-F238E27FC236}">
-                <a16:creationId xmlns:a16="http://schemas.microsoft.com/office/drawing/2014/main" id="{2BBE9836-113B-4915-8DB3-C4C741BA8E1C}"/>
-              </a:ext>
-            </a:extLst>
-          </p:cNvPr>
-          <p:cNvSpPr>
-            <a:spLocks xmlns:a="http://schemas.openxmlformats.org/drawingml/2006/main" noGrp="1"/>
-          </p:cNvSpPr>
-          <p:nvPr/>
-        </p:nvSpPr>
-        <p:spPr>
-          <a:xfrm xmlns:a="http://schemas.openxmlformats.org/drawingml/2006/main">
-            <a:off x="5149900" y="5340096"/>
-            <a:ext cx="822960" cy="256032"/>
-          </a:xfrm>
-          <a:prstGeom xmlns:a="http://schemas.openxmlformats.org/drawingml/2006/main" prst="roundRect">
-            <a:avLst/>
-          </a:prstGeom>
-          <a:solidFill xmlns:a="http://schemas.openxmlformats.org/drawingml/2006/main">
-            <a:srgbClr val="ED7D31"/>
-          </a:solidFill>
-          <a:ln xmlns:a="http://schemas.openxmlformats.org/drawingml/2006/main" w="0">
-            <a:solidFill>
-              <a:srgbClr val="ED7D31"/>
-            </a:solidFill>
-            <a:prstDash val="solid"/>
-          </a:ln>
-        </p:spPr>
-        <p:style>
-          <a:lnRef xmlns:a="http://schemas.openxmlformats.org/drawingml/2006/main" idx="1">
-            <a:schemeClr val="accent1"/>
-          </a:lnRef>
-          <a:fillRef xmlns:a="http://schemas.openxmlformats.org/drawingml/2006/main" idx="3">
-            <a:schemeClr val="accent1"/>
-          </a:fillRef>
-          <a:effectRef xmlns:a="http://schemas.openxmlformats.org/drawingml/2006/main" idx="2">
-            <a:schemeClr val="accent1"/>
-          </a:effectRef>
-          <a:fontRef xmlns:a="http://schemas.openxmlformats.org/drawingml/2006/main" idx="minor">
-            <a:schemeClr val="lt1"/>
-          </a:fontRef>
-        </p:style>
-        <p:txBody>
-          <a:bodyPr xmlns:a="http://schemas.openxmlformats.org/drawingml/2006/main" anchor="ctr"/>
-          <a:lstStyle xmlns:a="http://schemas.openxmlformats.org/drawingml/2006/main"/>
-          <a:p xmlns:a="http://schemas.openxmlformats.org/drawingml/2006/main">
-            <a:pPr algn="ctr">
-              <a:buNone/>
-            </a:pPr>
-          </a:p>
-        </p:txBody>
-      </p:sp>
-      <p:sp>
-        <p:nvSpPr>
-          <p:cNvPr id="49" name="TextBox 48">
-            <a:extLst xmlns:a="http://schemas.openxmlformats.org/drawingml/2006/main">
-              <a:ext uri="{FF2B5EF4-FFF2-40B4-BE49-F238E27FC236}">
-                <a16:creationId xmlns:a16="http://schemas.microsoft.com/office/drawing/2014/main" id="{2B4D1378-BC0B-4263-A891-B6836E6D373A}"/>
-              </a:ext>
-            </a:extLst>
-          </p:cNvPr>
-          <p:cNvSpPr>
-            <a:spLocks xmlns:a="http://schemas.openxmlformats.org/drawingml/2006/main" noGrp="1"/>
-          </p:cNvSpPr>
-          <p:nvPr/>
-        </p:nvSpPr>
-        <p:spPr>
-          <a:xfrm xmlns:a="http://schemas.openxmlformats.org/drawingml/2006/main">
-            <a:off x="5216702" y="5354548"/>
-            <a:ext cx="689356" cy="163122"/>
-          </a:xfrm>
-          <a:prstGeom xmlns:a="http://schemas.openxmlformats.org/drawingml/2006/main" prst="rect">
-            <a:avLst/>
-          </a:prstGeom>
-          <a:noFill xmlns:a="http://schemas.openxmlformats.org/drawingml/2006/main"/>
-        </p:spPr>
-        <p:txBody>
-          <a:bodyPr xmlns:a="http://schemas.openxmlformats.org/drawingml/2006/main" wrap="none" lIns="18288" tIns="4572" rIns="18288" bIns="4572" anchor="ctr">
-            <a:spAutoFit/>
-          </a:bodyPr>
-          <a:lstStyle xmlns:a="http://schemas.openxmlformats.org/drawingml/2006/main"/>
-          <a:p xmlns:a="http://schemas.openxmlformats.org/drawingml/2006/main">
-            <a:pPr algn="ctr">
-              <a:buNone/>
-            </a:pPr>
-            <a:r>
-              <a:rPr sz="1000" b="1" i="0">
-                <a:solidFill>
-                  <a:srgbClr val="FFFFFF"/>
-                </a:solidFill>
-                <a:latin typeface="Aptos"/>
-                <a:ea typeface="Aptos"/>
-                <a:cs typeface="Aptos"/>
-              </a:rPr>
-              <a:t>On Track</a:t>
-            </a:r>
-          </a:p>
-        </p:txBody>
-      </p:sp>
-      <p:sp>
-        <p:nvSpPr>
-          <p:cNvPr id="50" name="Rectangle 49">
-            <a:extLst xmlns:a="http://schemas.openxmlformats.org/drawingml/2006/main">
-              <a:ext uri="{FF2B5EF4-FFF2-40B4-BE49-F238E27FC236}">
-                <a16:creationId xmlns:a16="http://schemas.microsoft.com/office/drawing/2014/main" id="{387D8B89-F686-421E-B575-79614FAEED3F}"/>
-              </a:ext>
-            </a:extLst>
-          </p:cNvPr>
-          <p:cNvSpPr>
-            <a:spLocks xmlns:a="http://schemas.openxmlformats.org/drawingml/2006/main" noGrp="1"/>
-          </p:cNvSpPr>
-          <p:nvPr/>
-        </p:nvSpPr>
-        <p:spPr>
-          <a:xfrm xmlns:a="http://schemas.openxmlformats.org/drawingml/2006/main">
-            <a:off x="502920" y="5870448"/>
-            <a:ext cx="5532120" cy="585216"/>
-          </a:xfrm>
-          <a:prstGeom xmlns:a="http://schemas.openxmlformats.org/drawingml/2006/main" prst="rect">
-            <a:avLst/>
-          </a:prstGeom>
-          <a:solidFill xmlns:a="http://schemas.openxmlformats.org/drawingml/2006/main">
-            <a:srgbClr val="F2F5FA"/>
-          </a:solidFill>
-          <a:ln xmlns:a="http://schemas.openxmlformats.org/drawingml/2006/main">
-            <a:solidFill>
-              <a:srgbClr val="F2F5FA"/>
-            </a:solidFill>
-          </a:ln>
-        </p:spPr>
-        <p:style>
-          <a:lnRef xmlns:a="http://schemas.openxmlformats.org/drawingml/2006/main" idx="1">
-            <a:schemeClr val="accent1"/>
-          </a:lnRef>
-          <a:fillRef xmlns:a="http://schemas.openxmlformats.org/drawingml/2006/main" idx="3">
-            <a:schemeClr val="accent1"/>
-          </a:fillRef>
-          <a:effectRef xmlns:a="http://schemas.openxmlformats.org/drawingml/2006/main" idx="2">
-            <a:schemeClr val="accent1"/>
-          </a:effectRef>
-          <a:fontRef xmlns:a="http://schemas.openxmlformats.org/drawingml/2006/main" idx="minor">
-            <a:schemeClr val="lt1"/>
-          </a:fontRef>
-        </p:style>
-        <p:txBody>
-          <a:bodyPr xmlns:a="http://schemas.openxmlformats.org/drawingml/2006/main" anchor="ctr"/>
-          <a:lstStyle xmlns:a="http://schemas.openxmlformats.org/drawingml/2006/main"/>
-          <a:p xmlns:a="http://schemas.openxmlformats.org/drawingml/2006/main">
-            <a:pPr algn="ctr">
-              <a:buNone/>
-            </a:pPr>
-          </a:p>
-        </p:txBody>
-      </p:sp>
-      <p:sp>
-        <p:nvSpPr>
-          <p:cNvPr id="51" name="TextBox 50">
-            <a:extLst xmlns:a="http://schemas.openxmlformats.org/drawingml/2006/main">
-              <a:ext uri="{FF2B5EF4-FFF2-40B4-BE49-F238E27FC236}">
-                <a16:creationId xmlns:a16="http://schemas.microsoft.com/office/drawing/2014/main" id="{9F3898C3-91D1-4A80-8517-D740FE054B51}"/>
-              </a:ext>
-            </a:extLst>
-          </p:cNvPr>
-          <p:cNvSpPr>
-            <a:spLocks xmlns:a="http://schemas.openxmlformats.org/drawingml/2006/main" noGrp="1"/>
-          </p:cNvSpPr>
-          <p:nvPr/>
-        </p:nvSpPr>
-        <p:spPr>
-          <a:xfrm xmlns:a="http://schemas.openxmlformats.org/drawingml/2006/main">
-            <a:off x="612648" y="6099784"/>
-            <a:ext cx="1409104" cy="163122"/>
-          </a:xfrm>
-          <a:prstGeom xmlns:a="http://schemas.openxmlformats.org/drawingml/2006/main" prst="rect">
-            <a:avLst/>
-          </a:prstGeom>
-          <a:noFill xmlns:a="http://schemas.openxmlformats.org/drawingml/2006/main"/>
-        </p:spPr>
-        <p:txBody>
-          <a:bodyPr xmlns:a="http://schemas.openxmlformats.org/drawingml/2006/main" wrap="none" lIns="18288" tIns="4572" rIns="18288" bIns="4572" anchor="ctr">
-            <a:spAutoFit/>
-          </a:bodyPr>
-          <a:lstStyle xmlns:a="http://schemas.openxmlformats.org/drawingml/2006/main"/>
-          <a:p xmlns:a="http://schemas.openxmlformats.org/drawingml/2006/main">
-            <a:pPr algn="l">
-              <a:buNone/>
-            </a:pPr>
-            <a:r>
-              <a:rPr sz="1000" b="0" i="0">
-                <a:solidFill>
-                  <a:srgbClr val="202020"/>
-                </a:solidFill>
-                <a:latin typeface="Aptos"/>
-                <a:ea typeface="Aptos"/>
-                <a:cs typeface="Aptos"/>
-              </a:rPr>
-              <a:t>Cheaper Carel controller</a:t>
-            </a:r>
-          </a:p>
-        </p:txBody>
-      </p:sp>
-      <p:sp>
-        <p:nvSpPr>
-          <p:cNvPr id="52" name="TextBox 51">
-            <a:extLst xmlns:a="http://schemas.openxmlformats.org/drawingml/2006/main">
-              <a:ext uri="{FF2B5EF4-FFF2-40B4-BE49-F238E27FC236}">
-                <a16:creationId xmlns:a16="http://schemas.microsoft.com/office/drawing/2014/main" id="{B5963DCD-4193-4D69-AFC0-45EA0DD05ADD}"/>
-              </a:ext>
-            </a:extLst>
-          </p:cNvPr>
-          <p:cNvSpPr>
-            <a:spLocks xmlns:a="http://schemas.openxmlformats.org/drawingml/2006/main" noGrp="1"/>
-          </p:cNvSpPr>
-          <p:nvPr/>
-        </p:nvSpPr>
-        <p:spPr>
-          <a:xfrm xmlns:a="http://schemas.openxmlformats.org/drawingml/2006/main">
-            <a:off x="3811335" y="6026632"/>
-            <a:ext cx="420051" cy="163122"/>
-          </a:xfrm>
-          <a:prstGeom xmlns:a="http://schemas.openxmlformats.org/drawingml/2006/main" prst="rect">
-            <a:avLst/>
-          </a:prstGeom>
-          <a:noFill xmlns:a="http://schemas.openxmlformats.org/drawingml/2006/main"/>
-        </p:spPr>
-        <p:txBody>
-          <a:bodyPr xmlns:a="http://schemas.openxmlformats.org/drawingml/2006/main" wrap="none" lIns="18288" tIns="4572" rIns="18288" bIns="4572" anchor="ctr">
-            <a:spAutoFit/>
-          </a:bodyPr>
-          <a:lstStyle xmlns:a="http://schemas.openxmlformats.org/drawingml/2006/main"/>
-          <a:p xmlns:a="http://schemas.openxmlformats.org/drawingml/2006/main">
-            <a:pPr algn="r">
-              <a:buNone/>
-            </a:pPr>
-            <a:r>
-              <a:rPr sz="1000" b="1" i="0">
-                <a:solidFill>
-                  <a:srgbClr val="202020"/>
-                </a:solidFill>
-                <a:latin typeface="Aptos"/>
-                <a:ea typeface="Aptos"/>
-                <a:cs typeface="Aptos"/>
-              </a:rPr>
-              <a:t>$15.00</a:t>
-            </a:r>
-          </a:p>
-        </p:txBody>
-      </p:sp>
-      <p:sp>
-        <p:nvSpPr>
-          <p:cNvPr id="53" name="TextBox 52">
-            <a:extLst xmlns:a="http://schemas.openxmlformats.org/drawingml/2006/main">
-              <a:ext uri="{FF2B5EF4-FFF2-40B4-BE49-F238E27FC236}">
-                <a16:creationId xmlns:a16="http://schemas.microsoft.com/office/drawing/2014/main" id="{B7984FA9-54F0-4BD9-9693-E15A185F79E5}"/>
-              </a:ext>
-            </a:extLst>
-          </p:cNvPr>
-          <p:cNvSpPr>
-            <a:spLocks xmlns:a="http://schemas.openxmlformats.org/drawingml/2006/main" noGrp="1"/>
-          </p:cNvSpPr>
-          <p:nvPr/>
-        </p:nvSpPr>
-        <p:spPr>
-          <a:xfrm xmlns:a="http://schemas.openxmlformats.org/drawingml/2006/main">
-            <a:off x="4429020" y="6026632"/>
-            <a:ext cx="606000" cy="163122"/>
-          </a:xfrm>
-          <a:prstGeom xmlns:a="http://schemas.openxmlformats.org/drawingml/2006/main" prst="rect">
-            <a:avLst/>
-          </a:prstGeom>
-          <a:noFill xmlns:a="http://schemas.openxmlformats.org/drawingml/2006/main"/>
-        </p:spPr>
-        <p:txBody>
-          <a:bodyPr xmlns:a="http://schemas.openxmlformats.org/drawingml/2006/main" wrap="none" lIns="18288" tIns="4572" rIns="18288" bIns="4572" anchor="ctr">
-            <a:spAutoFit/>
-          </a:bodyPr>
-          <a:lstStyle xmlns:a="http://schemas.openxmlformats.org/drawingml/2006/main"/>
-          <a:p xmlns:a="http://schemas.openxmlformats.org/drawingml/2006/main">
-            <a:pPr algn="ctr">
-              <a:buNone/>
-            </a:pPr>
-            <a:r>
-              <a:rPr sz="1000" b="0" i="0">
-                <a:solidFill>
-                  <a:srgbClr val="202020"/>
-                </a:solidFill>
-                <a:latin typeface="Aptos"/>
-                <a:ea typeface="Aptos"/>
-                <a:cs typeface="Aptos"/>
-              </a:rPr>
-              <a:t>9/7/2026</a:t>
-            </a:r>
-          </a:p>
-        </p:txBody>
-      </p:sp>
-      <p:sp>
-        <p:nvSpPr>
-          <p:cNvPr id="54" name="Rounded Rectangle 53">
-            <a:extLst xmlns:a="http://schemas.openxmlformats.org/drawingml/2006/main">
-              <a:ext uri="{FF2B5EF4-FFF2-40B4-BE49-F238E27FC236}">
-                <a16:creationId xmlns:a16="http://schemas.microsoft.com/office/drawing/2014/main" id="{F7413198-BD96-462E-BA08-14E98B366C66}"/>
-              </a:ext>
-            </a:extLst>
-          </p:cNvPr>
-          <p:cNvSpPr>
-            <a:spLocks xmlns:a="http://schemas.openxmlformats.org/drawingml/2006/main" noGrp="1"/>
-          </p:cNvSpPr>
-          <p:nvPr/>
-        </p:nvSpPr>
-        <p:spPr>
-          <a:xfrm xmlns:a="http://schemas.openxmlformats.org/drawingml/2006/main">
-            <a:off x="5149900" y="6007608"/>
-            <a:ext cx="822960" cy="256032"/>
-          </a:xfrm>
-          <a:prstGeom xmlns:a="http://schemas.openxmlformats.org/drawingml/2006/main" prst="roundRect">
-            <a:avLst/>
-          </a:prstGeom>
-          <a:solidFill xmlns:a="http://schemas.openxmlformats.org/drawingml/2006/main">
-            <a:srgbClr val="ED7D31"/>
-          </a:solidFill>
-          <a:ln xmlns:a="http://schemas.openxmlformats.org/drawingml/2006/main" w="0">
-            <a:solidFill>
-              <a:srgbClr val="ED7D31"/>
-            </a:solidFill>
-            <a:prstDash val="solid"/>
-          </a:ln>
-        </p:spPr>
-        <p:style>
-          <a:lnRef xmlns:a="http://schemas.openxmlformats.org/drawingml/2006/main" idx="1">
-            <a:schemeClr val="accent1"/>
-          </a:lnRef>
-          <a:fillRef xmlns:a="http://schemas.openxmlformats.org/drawingml/2006/main" idx="3">
-            <a:schemeClr val="accent1"/>
-          </a:fillRef>
-          <a:effectRef xmlns:a="http://schemas.openxmlformats.org/drawingml/2006/main" idx="2">
-            <a:schemeClr val="accent1"/>
-          </a:effectRef>
-          <a:fontRef xmlns:a="http://schemas.openxmlformats.org/drawingml/2006/main" idx="minor">
-            <a:schemeClr val="lt1"/>
-          </a:fontRef>
-        </p:style>
-        <p:txBody>
-          <a:bodyPr xmlns:a="http://schemas.openxmlformats.org/drawingml/2006/main" anchor="ctr"/>
-          <a:lstStyle xmlns:a="http://schemas.openxmlformats.org/drawingml/2006/main"/>
-          <a:p xmlns:a="http://schemas.openxmlformats.org/drawingml/2006/main">
-            <a:pPr algn="ctr">
-              <a:buNone/>
-            </a:pPr>
-          </a:p>
-        </p:txBody>
-      </p:sp>
-      <p:sp>
-        <p:nvSpPr>
-          <p:cNvPr id="55" name="TextBox 54">
-            <a:extLst xmlns:a="http://schemas.openxmlformats.org/drawingml/2006/main">
-              <a:ext uri="{FF2B5EF4-FFF2-40B4-BE49-F238E27FC236}">
-                <a16:creationId xmlns:a16="http://schemas.microsoft.com/office/drawing/2014/main" id="{758A10F8-A7C8-44A4-B45C-EB98B62FD46F}"/>
-              </a:ext>
-            </a:extLst>
-          </p:cNvPr>
-          <p:cNvSpPr>
-            <a:spLocks xmlns:a="http://schemas.openxmlformats.org/drawingml/2006/main" noGrp="1"/>
-          </p:cNvSpPr>
-          <p:nvPr/>
-        </p:nvSpPr>
-        <p:spPr>
-          <a:xfrm xmlns:a="http://schemas.openxmlformats.org/drawingml/2006/main">
-            <a:off x="5216702" y="6022060"/>
-            <a:ext cx="689356" cy="163122"/>
-          </a:xfrm>
-          <a:prstGeom xmlns:a="http://schemas.openxmlformats.org/drawingml/2006/main" prst="rect">
-            <a:avLst/>
-          </a:prstGeom>
-          <a:noFill xmlns:a="http://schemas.openxmlformats.org/drawingml/2006/main"/>
-        </p:spPr>
-        <p:txBody>
-          <a:bodyPr xmlns:a="http://schemas.openxmlformats.org/drawingml/2006/main" wrap="none" lIns="18288" tIns="4572" rIns="18288" bIns="4572" anchor="ctr">
-            <a:spAutoFit/>
-          </a:bodyPr>
-          <a:lstStyle xmlns:a="http://schemas.openxmlformats.org/drawingml/2006/main"/>
-          <a:p xmlns:a="http://schemas.openxmlformats.org/drawingml/2006/main">
-            <a:pPr algn="ctr">
-              <a:buNone/>
-            </a:pPr>
-            <a:r>
-              <a:rPr sz="1000" b="1" i="0">
-                <a:solidFill>
-                  <a:srgbClr val="FFFFFF"/>
-                </a:solidFill>
-                <a:latin typeface="Aptos"/>
-                <a:ea typeface="Aptos"/>
-                <a:cs typeface="Aptos"/>
-              </a:rPr>
-              <a:t>On Track</a:t>
-            </a:r>
-          </a:p>
-        </p:txBody>
-      </p:sp>
-      <p:sp>
-        <p:nvSpPr>
-          <p:cNvPr id="56" name="Rectangle 55">
-            <a:extLst xmlns:a="http://schemas.openxmlformats.org/drawingml/2006/main">
-              <a:ext uri="{FF2B5EF4-FFF2-40B4-BE49-F238E27FC236}">
-                <a16:creationId xmlns:a16="http://schemas.microsoft.com/office/drawing/2014/main" id="{DA0642D8-B542-43FF-9A04-69AC6221B9FD}"/>
-              </a:ext>
-            </a:extLst>
-          </p:cNvPr>
-          <p:cNvSpPr>
-            <a:spLocks xmlns:a="http://schemas.openxmlformats.org/drawingml/2006/main" noGrp="1"/>
-          </p:cNvSpPr>
-          <p:nvPr/>
-        </p:nvSpPr>
-        <p:spPr>
-          <a:xfrm xmlns:a="http://schemas.openxmlformats.org/drawingml/2006/main">
-            <a:off x="6263640" y="1508760"/>
-            <a:ext cx="5532120" cy="274320"/>
-          </a:xfrm>
-          <a:prstGeom xmlns:a="http://schemas.openxmlformats.org/drawingml/2006/main" prst="rect">
-            <a:avLst/>
-          </a:prstGeom>
-          <a:solidFill xmlns:a="http://schemas.openxmlformats.org/drawingml/2006/main">
-            <a:srgbClr val="E8EFF7"/>
-          </a:solidFill>
-          <a:ln xmlns:a="http://schemas.openxmlformats.org/drawingml/2006/main">
-            <a:solidFill>
-              <a:srgbClr val="D9D9D9"/>
-            </a:solidFill>
-          </a:ln>
-        </p:spPr>
-        <p:style>
-          <a:lnRef xmlns:a="http://schemas.openxmlformats.org/drawingml/2006/main" idx="1">
-            <a:schemeClr val="accent1"/>
-          </a:lnRef>
-          <a:fillRef xmlns:a="http://schemas.openxmlformats.org/drawingml/2006/main" idx="3">
-            <a:schemeClr val="accent1"/>
-          </a:fillRef>
-          <a:effectRef xmlns:a="http://schemas.openxmlformats.org/drawingml/2006/main" idx="2">
-            <a:schemeClr val="accent1"/>
-          </a:effectRef>
-          <a:fontRef xmlns:a="http://schemas.openxmlformats.org/drawingml/2006/main" idx="minor">
-            <a:schemeClr val="lt1"/>
-          </a:fontRef>
-        </p:style>
-        <p:txBody>
-          <a:bodyPr xmlns:a="http://schemas.openxmlformats.org/drawingml/2006/main" anchor="ctr"/>
-          <a:lstStyle xmlns:a="http://schemas.openxmlformats.org/drawingml/2006/main"/>
-          <a:p xmlns:a="http://schemas.openxmlformats.org/drawingml/2006/main">
-            <a:pPr algn="ctr">
-              <a:buNone/>
-            </a:pPr>
-          </a:p>
-        </p:txBody>
-      </p:sp>
-      <p:sp>
-        <p:nvSpPr>
-          <p:cNvPr id="57" name="TextBox 56">
-            <a:extLst xmlns:a="http://schemas.openxmlformats.org/drawingml/2006/main">
-              <a:ext uri="{FF2B5EF4-FFF2-40B4-BE49-F238E27FC236}">
-                <a16:creationId xmlns:a16="http://schemas.microsoft.com/office/drawing/2014/main" id="{B656BA7B-152B-44DE-B3E7-B92BAAE2D80B}"/>
-              </a:ext>
-            </a:extLst>
-          </p:cNvPr>
-          <p:cNvSpPr>
-            <a:spLocks xmlns:a="http://schemas.openxmlformats.org/drawingml/2006/main" noGrp="1"/>
-          </p:cNvSpPr>
-          <p:nvPr/>
-        </p:nvSpPr>
-        <p:spPr>
-          <a:xfrm xmlns:a="http://schemas.openxmlformats.org/drawingml/2006/main">
-            <a:off x="6373368" y="1541499"/>
-            <a:ext cx="679738" cy="163122"/>
-          </a:xfrm>
-          <a:prstGeom xmlns:a="http://schemas.openxmlformats.org/drawingml/2006/main" prst="rect">
-            <a:avLst/>
-          </a:prstGeom>
-          <a:noFill xmlns:a="http://schemas.openxmlformats.org/drawingml/2006/main"/>
-        </p:spPr>
-        <p:txBody>
-          <a:bodyPr xmlns:a="http://schemas.openxmlformats.org/drawingml/2006/main" wrap="none" lIns="18288" tIns="4572" rIns="18288" bIns="4572" anchor="ctr">
-            <a:spAutoFit/>
-          </a:bodyPr>
-          <a:lstStyle xmlns:a="http://schemas.openxmlformats.org/drawingml/2006/main"/>
-          <a:p xmlns:a="http://schemas.openxmlformats.org/drawingml/2006/main">
-            <a:pPr algn="l">
-              <a:buNone/>
-            </a:pPr>
-            <a:r>
-              <a:rPr sz="1000" b="1" i="0">
-                <a:solidFill>
-                  <a:srgbClr val="202020"/>
-                </a:solidFill>
-                <a:latin typeface="Aptos"/>
-                <a:ea typeface="Aptos"/>
-                <a:cs typeface="Aptos"/>
-              </a:rPr>
-              <a:t>Task Name</a:t>
-            </a:r>
-          </a:p>
-        </p:txBody>
-      </p:sp>
-      <p:sp>
-        <p:nvSpPr>
-          <p:cNvPr id="58" name="TextBox 57">
-            <a:extLst xmlns:a="http://schemas.openxmlformats.org/drawingml/2006/main">
-              <a:ext uri="{FF2B5EF4-FFF2-40B4-BE49-F238E27FC236}">
-                <a16:creationId xmlns:a16="http://schemas.microsoft.com/office/drawing/2014/main" id="{4BBB7264-7FD5-410B-A67E-C3E19D7B9C38}"/>
-              </a:ext>
-            </a:extLst>
-          </p:cNvPr>
-          <p:cNvSpPr>
-            <a:spLocks xmlns:a="http://schemas.openxmlformats.org/drawingml/2006/main" noGrp="1"/>
-          </p:cNvSpPr>
-          <p:nvPr/>
-        </p:nvSpPr>
-        <p:spPr>
-          <a:xfrm xmlns:a="http://schemas.openxmlformats.org/drawingml/2006/main">
-            <a:off x="9506332" y="1541499"/>
-            <a:ext cx="485774" cy="163122"/>
-          </a:xfrm>
-          <a:prstGeom xmlns:a="http://schemas.openxmlformats.org/drawingml/2006/main" prst="rect">
-            <a:avLst/>
-          </a:prstGeom>
-          <a:noFill xmlns:a="http://schemas.openxmlformats.org/drawingml/2006/main"/>
-        </p:spPr>
-        <p:txBody>
-          <a:bodyPr xmlns:a="http://schemas.openxmlformats.org/drawingml/2006/main" wrap="none" lIns="18288" tIns="4572" rIns="18288" bIns="4572" anchor="ctr">
-            <a:spAutoFit/>
-          </a:bodyPr>
-          <a:lstStyle xmlns:a="http://schemas.openxmlformats.org/drawingml/2006/main"/>
-          <a:p xmlns:a="http://schemas.openxmlformats.org/drawingml/2006/main">
-            <a:pPr algn="r">
-              <a:buNone/>
-            </a:pPr>
-            <a:r>
-              <a:rPr sz="1000" b="1" i="0">
-                <a:solidFill>
-                  <a:srgbClr val="202020"/>
-                </a:solidFill>
-                <a:latin typeface="Aptos"/>
-                <a:ea typeface="Aptos"/>
-                <a:cs typeface="Aptos"/>
-              </a:rPr>
-              <a:t>Savings</a:t>
-            </a:r>
-          </a:p>
-        </p:txBody>
-      </p:sp>
-      <p:sp>
-        <p:nvSpPr>
-          <p:cNvPr id="59" name="TextBox 58">
-            <a:extLst xmlns:a="http://schemas.openxmlformats.org/drawingml/2006/main">
-              <a:ext uri="{FF2B5EF4-FFF2-40B4-BE49-F238E27FC236}">
-                <a16:creationId xmlns:a16="http://schemas.microsoft.com/office/drawing/2014/main" id="{13116DE6-6CC0-4E7E-851A-841928A994EF}"/>
-              </a:ext>
-            </a:extLst>
-          </p:cNvPr>
-          <p:cNvSpPr>
-            <a:spLocks xmlns:a="http://schemas.openxmlformats.org/drawingml/2006/main" noGrp="1"/>
-          </p:cNvSpPr>
-          <p:nvPr/>
-        </p:nvSpPr>
-        <p:spPr>
-          <a:xfrm xmlns:a="http://schemas.openxmlformats.org/drawingml/2006/main">
-            <a:off x="10335432" y="1541499"/>
-            <a:ext cx="259751" cy="163122"/>
-          </a:xfrm>
-          <a:prstGeom xmlns:a="http://schemas.openxmlformats.org/drawingml/2006/main" prst="rect">
-            <a:avLst/>
-          </a:prstGeom>
-          <a:noFill xmlns:a="http://schemas.openxmlformats.org/drawingml/2006/main"/>
-        </p:spPr>
-        <p:txBody>
-          <a:bodyPr xmlns:a="http://schemas.openxmlformats.org/drawingml/2006/main" wrap="none" lIns="18288" tIns="4572" rIns="18288" bIns="4572" anchor="ctr">
-            <a:spAutoFit/>
-          </a:bodyPr>
-          <a:lstStyle xmlns:a="http://schemas.openxmlformats.org/drawingml/2006/main"/>
-          <a:p xmlns:a="http://schemas.openxmlformats.org/drawingml/2006/main">
-            <a:pPr algn="ctr">
-              <a:buNone/>
-            </a:pPr>
-            <a:r>
-              <a:rPr sz="1000" b="1" i="0">
-                <a:solidFill>
-                  <a:srgbClr val="202020"/>
-                </a:solidFill>
-                <a:latin typeface="Aptos"/>
-                <a:ea typeface="Aptos"/>
-                <a:cs typeface="Aptos"/>
-              </a:rPr>
-              <a:t>End</a:t>
-            </a:r>
-          </a:p>
-        </p:txBody>
-      </p:sp>
-      <p:sp>
-        <p:nvSpPr>
-          <p:cNvPr id="60" name="TextBox 59">
-            <a:extLst xmlns:a="http://schemas.openxmlformats.org/drawingml/2006/main">
-              <a:ext uri="{FF2B5EF4-FFF2-40B4-BE49-F238E27FC236}">
-                <a16:creationId xmlns:a16="http://schemas.microsoft.com/office/drawing/2014/main" id="{F21CBF41-2B58-4A41-A4A9-42E8F9E9FE4C}"/>
-              </a:ext>
-            </a:extLst>
-          </p:cNvPr>
-          <p:cNvSpPr>
-            <a:spLocks xmlns:a="http://schemas.openxmlformats.org/drawingml/2006/main" noGrp="1"/>
-          </p:cNvSpPr>
-          <p:nvPr/>
-        </p:nvSpPr>
-        <p:spPr>
-          <a:xfrm xmlns:a="http://schemas.openxmlformats.org/drawingml/2006/main">
-            <a:off x="11077903" y="1541499"/>
-            <a:ext cx="415242" cy="163122"/>
-          </a:xfrm>
-          <a:prstGeom xmlns:a="http://schemas.openxmlformats.org/drawingml/2006/main" prst="rect">
-            <a:avLst/>
-          </a:prstGeom>
-          <a:noFill xmlns:a="http://schemas.openxmlformats.org/drawingml/2006/main"/>
-        </p:spPr>
-        <p:txBody>
-          <a:bodyPr xmlns:a="http://schemas.openxmlformats.org/drawingml/2006/main" wrap="none" lIns="18288" tIns="4572" rIns="18288" bIns="4572" anchor="ctr">
-            <a:spAutoFit/>
-          </a:bodyPr>
-          <a:lstStyle xmlns:a="http://schemas.openxmlformats.org/drawingml/2006/main"/>
-          <a:p xmlns:a="http://schemas.openxmlformats.org/drawingml/2006/main">
-            <a:pPr algn="ctr">
-              <a:buNone/>
-            </a:pPr>
-            <a:r>
-              <a:rPr sz="1000" b="1" i="0">
-                <a:solidFill>
-                  <a:srgbClr val="202020"/>
-                </a:solidFill>
-                <a:latin typeface="Aptos"/>
-                <a:ea typeface="Aptos"/>
-                <a:cs typeface="Aptos"/>
-              </a:rPr>
-              <a:t>Status</a:t>
-            </a:r>
-          </a:p>
-        </p:txBody>
-      </p:sp>
-      <p:sp>
-        <p:nvSpPr>
-          <p:cNvPr id="61" name="Rectangle 60">
-            <a:extLst xmlns:a="http://schemas.openxmlformats.org/drawingml/2006/main">
-              <a:ext uri="{FF2B5EF4-FFF2-40B4-BE49-F238E27FC236}">
-                <a16:creationId xmlns:a16="http://schemas.microsoft.com/office/drawing/2014/main" id="{B3CA1FE7-3B4D-4596-B587-7BC75523FC7C}"/>
-              </a:ext>
-            </a:extLst>
-          </p:cNvPr>
-          <p:cNvSpPr>
-            <a:spLocks xmlns:a="http://schemas.openxmlformats.org/drawingml/2006/main" noGrp="1"/>
-          </p:cNvSpPr>
-          <p:nvPr/>
-        </p:nvSpPr>
-        <p:spPr>
-          <a:xfrm xmlns:a="http://schemas.openxmlformats.org/drawingml/2006/main">
-            <a:off x="6263640" y="1865376"/>
-            <a:ext cx="5532120" cy="585216"/>
-          </a:xfrm>
-          <a:prstGeom xmlns:a="http://schemas.openxmlformats.org/drawingml/2006/main" prst="rect">
-            <a:avLst/>
-          </a:prstGeom>
-          <a:solidFill xmlns:a="http://schemas.openxmlformats.org/drawingml/2006/main">
-            <a:srgbClr val="F2F5FA"/>
-          </a:solidFill>
-          <a:ln xmlns:a="http://schemas.openxmlformats.org/drawingml/2006/main">
-            <a:solidFill>
-              <a:srgbClr val="F2F5FA"/>
-            </a:solidFill>
-          </a:ln>
-        </p:spPr>
-        <p:style>
-          <a:lnRef xmlns:a="http://schemas.openxmlformats.org/drawingml/2006/main" idx="1">
-            <a:schemeClr val="accent1"/>
-          </a:lnRef>
-          <a:fillRef xmlns:a="http://schemas.openxmlformats.org/drawingml/2006/main" idx="3">
-            <a:schemeClr val="accent1"/>
-          </a:fillRef>
-          <a:effectRef xmlns:a="http://schemas.openxmlformats.org/drawingml/2006/main" idx="2">
-            <a:schemeClr val="accent1"/>
-          </a:effectRef>
-          <a:fontRef xmlns:a="http://schemas.openxmlformats.org/drawingml/2006/main" idx="minor">
-            <a:schemeClr val="lt1"/>
-          </a:fontRef>
-        </p:style>
-        <p:txBody>
-          <a:bodyPr xmlns:a="http://schemas.openxmlformats.org/drawingml/2006/main" anchor="ctr"/>
-          <a:lstStyle xmlns:a="http://schemas.openxmlformats.org/drawingml/2006/main"/>
-          <a:p xmlns:a="http://schemas.openxmlformats.org/drawingml/2006/main">
-            <a:pPr algn="ctr">
-              <a:buNone/>
-            </a:pPr>
-          </a:p>
-        </p:txBody>
-      </p:sp>
-      <p:sp>
-        <p:nvSpPr>
-          <p:cNvPr id="62" name="TextBox 61">
-            <a:extLst xmlns:a="http://schemas.openxmlformats.org/drawingml/2006/main">
-              <a:ext uri="{FF2B5EF4-FFF2-40B4-BE49-F238E27FC236}">
-                <a16:creationId xmlns:a16="http://schemas.microsoft.com/office/drawing/2014/main" id="{B3660ADC-DFC8-48F0-BC82-1795AFE273F7}"/>
-              </a:ext>
-            </a:extLst>
-          </p:cNvPr>
-          <p:cNvSpPr>
-            <a:spLocks xmlns:a="http://schemas.openxmlformats.org/drawingml/2006/main" noGrp="1"/>
-          </p:cNvSpPr>
-          <p:nvPr/>
-        </p:nvSpPr>
-        <p:spPr>
-          <a:xfrm xmlns:a="http://schemas.openxmlformats.org/drawingml/2006/main">
-            <a:off x="6373368" y="2094712"/>
-            <a:ext cx="957057" cy="163122"/>
-          </a:xfrm>
-          <a:prstGeom xmlns:a="http://schemas.openxmlformats.org/drawingml/2006/main" prst="rect">
-            <a:avLst/>
-          </a:prstGeom>
-          <a:noFill xmlns:a="http://schemas.openxmlformats.org/drawingml/2006/main"/>
-        </p:spPr>
-        <p:txBody>
-          <a:bodyPr xmlns:a="http://schemas.openxmlformats.org/drawingml/2006/main" wrap="none" lIns="18288" tIns="4572" rIns="18288" bIns="4572" anchor="ctr">
-            <a:spAutoFit/>
-          </a:bodyPr>
-          <a:lstStyle xmlns:a="http://schemas.openxmlformats.org/drawingml/2006/main"/>
-          <a:p xmlns:a="http://schemas.openxmlformats.org/drawingml/2006/main">
-            <a:pPr algn="l">
-              <a:buNone/>
-            </a:pPr>
-            <a:r>
-              <a:rPr sz="1000" b="0" i="0">
-                <a:solidFill>
-                  <a:srgbClr val="202020"/>
-                </a:solidFill>
-                <a:latin typeface="Aptos"/>
-                <a:ea typeface="Aptos"/>
-                <a:cs typeface="Aptos"/>
-              </a:rPr>
-              <a:t>Tube on drip tray</a:t>
-            </a:r>
-          </a:p>
-        </p:txBody>
-      </p:sp>
-      <p:sp>
-        <p:nvSpPr>
-          <p:cNvPr id="63" name="TextBox 62">
-            <a:extLst xmlns:a="http://schemas.openxmlformats.org/drawingml/2006/main">
-              <a:ext uri="{FF2B5EF4-FFF2-40B4-BE49-F238E27FC236}">
-                <a16:creationId xmlns:a16="http://schemas.microsoft.com/office/drawing/2014/main" id="{F65AD8FD-9B76-4BA9-99FB-9663F23B3F83}"/>
-              </a:ext>
-            </a:extLst>
-          </p:cNvPr>
-          <p:cNvSpPr>
-            <a:spLocks xmlns:a="http://schemas.openxmlformats.org/drawingml/2006/main" noGrp="1"/>
-          </p:cNvSpPr>
-          <p:nvPr/>
-        </p:nvSpPr>
-        <p:spPr>
-          <a:xfrm xmlns:a="http://schemas.openxmlformats.org/drawingml/2006/main">
-            <a:off x="9640983" y="2021560"/>
-            <a:ext cx="351123" cy="163122"/>
-          </a:xfrm>
-          <a:prstGeom xmlns:a="http://schemas.openxmlformats.org/drawingml/2006/main" prst="rect">
-            <a:avLst/>
-          </a:prstGeom>
-          <a:noFill xmlns:a="http://schemas.openxmlformats.org/drawingml/2006/main"/>
-        </p:spPr>
-        <p:txBody>
-          <a:bodyPr xmlns:a="http://schemas.openxmlformats.org/drawingml/2006/main" wrap="none" lIns="18288" tIns="4572" rIns="18288" bIns="4572" anchor="ctr">
-            <a:spAutoFit/>
-          </a:bodyPr>
-          <a:lstStyle xmlns:a="http://schemas.openxmlformats.org/drawingml/2006/main"/>
-          <a:p xmlns:a="http://schemas.openxmlformats.org/drawingml/2006/main">
-            <a:pPr algn="r">
-              <a:buNone/>
-            </a:pPr>
-            <a:r>
-              <a:rPr sz="1000" b="1" i="0">
-                <a:solidFill>
-                  <a:srgbClr val="202020"/>
-                </a:solidFill>
-                <a:latin typeface="Aptos"/>
-                <a:ea typeface="Aptos"/>
-                <a:cs typeface="Aptos"/>
-              </a:rPr>
-              <a:t>$0.00</a:t>
-            </a:r>
-          </a:p>
-        </p:txBody>
-      </p:sp>
-      <p:sp>
-        <p:nvSpPr>
-          <p:cNvPr id="64" name="TextBox 63">
-            <a:extLst xmlns:a="http://schemas.openxmlformats.org/drawingml/2006/main">
-              <a:ext uri="{FF2B5EF4-FFF2-40B4-BE49-F238E27FC236}">
-                <a16:creationId xmlns:a16="http://schemas.microsoft.com/office/drawing/2014/main" id="{D22FBEC1-15DB-410F-854F-6D0FCCC100DD}"/>
-              </a:ext>
-            </a:extLst>
-          </p:cNvPr>
-          <p:cNvSpPr>
-            <a:spLocks xmlns:a="http://schemas.openxmlformats.org/drawingml/2006/main" noGrp="1"/>
-          </p:cNvSpPr>
-          <p:nvPr/>
-        </p:nvSpPr>
-        <p:spPr>
-          <a:xfrm xmlns:a="http://schemas.openxmlformats.org/drawingml/2006/main">
-            <a:off x="10189741" y="2021560"/>
-            <a:ext cx="606000" cy="163122"/>
-          </a:xfrm>
-          <a:prstGeom xmlns:a="http://schemas.openxmlformats.org/drawingml/2006/main" prst="rect">
-            <a:avLst/>
-          </a:prstGeom>
-          <a:noFill xmlns:a="http://schemas.openxmlformats.org/drawingml/2006/main"/>
-        </p:spPr>
-        <p:txBody>
-          <a:bodyPr xmlns:a="http://schemas.openxmlformats.org/drawingml/2006/main" wrap="none" lIns="18288" tIns="4572" rIns="18288" bIns="4572" anchor="ctr">
-            <a:spAutoFit/>
-          </a:bodyPr>
-          <a:lstStyle xmlns:a="http://schemas.openxmlformats.org/drawingml/2006/main"/>
-          <a:p xmlns:a="http://schemas.openxmlformats.org/drawingml/2006/main">
-            <a:pPr algn="ctr">
-              <a:buNone/>
-            </a:pPr>
-            <a:r>
-              <a:rPr sz="1000" b="0" i="0">
-                <a:solidFill>
-                  <a:srgbClr val="202020"/>
-                </a:solidFill>
-                <a:latin typeface="Aptos"/>
-                <a:ea typeface="Aptos"/>
-                <a:cs typeface="Aptos"/>
-              </a:rPr>
-              <a:t>7/30/2026</a:t>
-            </a:r>
-          </a:p>
-        </p:txBody>
-      </p:sp>
-      <p:sp>
-        <p:nvSpPr>
-          <p:cNvPr id="65" name="Rounded Rectangle 64">
-            <a:extLst xmlns:a="http://schemas.openxmlformats.org/drawingml/2006/main">
-              <a:ext uri="{FF2B5EF4-FFF2-40B4-BE49-F238E27FC236}">
-                <a16:creationId xmlns:a16="http://schemas.microsoft.com/office/drawing/2014/main" id="{7305B2CF-B7E3-40E7-A2A5-73ED0148247A}"/>
-              </a:ext>
-            </a:extLst>
-          </p:cNvPr>
-          <p:cNvSpPr>
-            <a:spLocks xmlns:a="http://schemas.openxmlformats.org/drawingml/2006/main" noGrp="1"/>
-          </p:cNvSpPr>
-          <p:nvPr/>
-        </p:nvSpPr>
-        <p:spPr>
-          <a:xfrm xmlns:a="http://schemas.openxmlformats.org/drawingml/2006/main">
-            <a:off x="10910620" y="2002536"/>
-            <a:ext cx="822960" cy="256032"/>
-          </a:xfrm>
-          <a:prstGeom xmlns:a="http://schemas.openxmlformats.org/drawingml/2006/main" prst="roundRect">
-            <a:avLst/>
-          </a:prstGeom>
-          <a:solidFill xmlns:a="http://schemas.openxmlformats.org/drawingml/2006/main">
-            <a:srgbClr val="ED7D31"/>
-          </a:solidFill>
-          <a:ln xmlns:a="http://schemas.openxmlformats.org/drawingml/2006/main" w="0">
-            <a:solidFill>
-              <a:srgbClr val="ED7D31"/>
-            </a:solidFill>
-            <a:prstDash val="solid"/>
-          </a:ln>
-        </p:spPr>
-        <p:style>
-          <a:lnRef xmlns:a="http://schemas.openxmlformats.org/drawingml/2006/main" idx="1">
-            <a:schemeClr val="accent1"/>
-          </a:lnRef>
-          <a:fillRef xmlns:a="http://schemas.openxmlformats.org/drawingml/2006/main" idx="3">
-            <a:schemeClr val="accent1"/>
-          </a:fillRef>
-          <a:effectRef xmlns:a="http://schemas.openxmlformats.org/drawingml/2006/main" idx="2">
-            <a:schemeClr val="accent1"/>
-          </a:effectRef>
-          <a:fontRef xmlns:a="http://schemas.openxmlformats.org/drawingml/2006/main" idx="minor">
-            <a:schemeClr val="lt1"/>
-          </a:fontRef>
-        </p:style>
-        <p:txBody>
-          <a:bodyPr xmlns:a="http://schemas.openxmlformats.org/drawingml/2006/main" anchor="ctr"/>
-          <a:lstStyle xmlns:a="http://schemas.openxmlformats.org/drawingml/2006/main"/>
-          <a:p xmlns:a="http://schemas.openxmlformats.org/drawingml/2006/main">
-            <a:pPr algn="ctr">
-              <a:buNone/>
-            </a:pPr>
-          </a:p>
-        </p:txBody>
-      </p:sp>
-      <p:sp>
-        <p:nvSpPr>
-          <p:cNvPr id="66" name="TextBox 65">
-            <a:extLst xmlns:a="http://schemas.openxmlformats.org/drawingml/2006/main">
-              <a:ext uri="{FF2B5EF4-FFF2-40B4-BE49-F238E27FC236}">
-                <a16:creationId xmlns:a16="http://schemas.microsoft.com/office/drawing/2014/main" id="{A9972CAA-88A8-4E7E-96E1-A6BE8898976C}"/>
-              </a:ext>
-            </a:extLst>
-          </p:cNvPr>
-          <p:cNvSpPr>
-            <a:spLocks xmlns:a="http://schemas.openxmlformats.org/drawingml/2006/main" noGrp="1"/>
-          </p:cNvSpPr>
-          <p:nvPr/>
-        </p:nvSpPr>
-        <p:spPr>
-          <a:xfrm xmlns:a="http://schemas.openxmlformats.org/drawingml/2006/main">
-            <a:off x="10977422" y="2016988"/>
-            <a:ext cx="689356" cy="163122"/>
-          </a:xfrm>
-          <a:prstGeom xmlns:a="http://schemas.openxmlformats.org/drawingml/2006/main" prst="rect">
-            <a:avLst/>
-          </a:prstGeom>
-          <a:noFill xmlns:a="http://schemas.openxmlformats.org/drawingml/2006/main"/>
-        </p:spPr>
-        <p:txBody>
-          <a:bodyPr xmlns:a="http://schemas.openxmlformats.org/drawingml/2006/main" wrap="none" lIns="18288" tIns="4572" rIns="18288" bIns="4572" anchor="ctr">
-            <a:spAutoFit/>
-          </a:bodyPr>
-          <a:lstStyle xmlns:a="http://schemas.openxmlformats.org/drawingml/2006/main"/>
-          <a:p xmlns:a="http://schemas.openxmlformats.org/drawingml/2006/main">
-            <a:pPr algn="ctr">
-              <a:buNone/>
-            </a:pPr>
-            <a:r>
-              <a:rPr sz="1000" b="1" i="0">
-                <a:solidFill>
-                  <a:srgbClr val="FFFFFF"/>
-                </a:solidFill>
-                <a:latin typeface="Aptos"/>
-                <a:ea typeface="Aptos"/>
-                <a:cs typeface="Aptos"/>
-              </a:rPr>
-              <a:t>On Track</a:t>
-            </a:r>
-          </a:p>
-        </p:txBody>
-      </p:sp>
-      <p:sp>
-        <p:nvSpPr>
-          <p:cNvPr id="67" name="Rectangle 66">
-            <a:extLst xmlns:a="http://schemas.openxmlformats.org/drawingml/2006/main">
-              <a:ext uri="{FF2B5EF4-FFF2-40B4-BE49-F238E27FC236}">
-                <a16:creationId xmlns:a16="http://schemas.microsoft.com/office/drawing/2014/main" id="{4FF469F7-2A87-4235-80C4-73B0A811F1B7}"/>
-              </a:ext>
-            </a:extLst>
-          </p:cNvPr>
-          <p:cNvSpPr>
-            <a:spLocks xmlns:a="http://schemas.openxmlformats.org/drawingml/2006/main" noGrp="1"/>
-          </p:cNvSpPr>
-          <p:nvPr/>
-        </p:nvSpPr>
-        <p:spPr>
-          <a:xfrm xmlns:a="http://schemas.openxmlformats.org/drawingml/2006/main">
-            <a:off x="6263640" y="2532888"/>
-            <a:ext cx="5532120" cy="585216"/>
-          </a:xfrm>
-          <a:prstGeom xmlns:a="http://schemas.openxmlformats.org/drawingml/2006/main" prst="rect">
-            <a:avLst/>
-          </a:prstGeom>
-          <a:solidFill xmlns:a="http://schemas.openxmlformats.org/drawingml/2006/main">
-            <a:srgbClr val="FFFFFF"/>
-          </a:solidFill>
-          <a:ln xmlns:a="http://schemas.openxmlformats.org/drawingml/2006/main">
-            <a:solidFill>
-              <a:srgbClr val="FFFFFF"/>
-            </a:solidFill>
-          </a:ln>
-        </p:spPr>
-        <p:style>
-          <a:lnRef xmlns:a="http://schemas.openxmlformats.org/drawingml/2006/main" idx="1">
-            <a:schemeClr val="accent1"/>
-          </a:lnRef>
-          <a:fillRef xmlns:a="http://schemas.openxmlformats.org/drawingml/2006/main" idx="3">
-            <a:schemeClr val="accent1"/>
-          </a:fillRef>
-          <a:effectRef xmlns:a="http://schemas.openxmlformats.org/drawingml/2006/main" idx="2">
-            <a:schemeClr val="accent1"/>
-          </a:effectRef>
-          <a:fontRef xmlns:a="http://schemas.openxmlformats.org/drawingml/2006/main" idx="minor">
-            <a:schemeClr val="lt1"/>
-          </a:fontRef>
-        </p:style>
-        <p:txBody>
-          <a:bodyPr xmlns:a="http://schemas.openxmlformats.org/drawingml/2006/main" anchor="ctr"/>
-          <a:lstStyle xmlns:a="http://schemas.openxmlformats.org/drawingml/2006/main"/>
-          <a:p xmlns:a="http://schemas.openxmlformats.org/drawingml/2006/main">
-            <a:pPr algn="ctr">
-              <a:buNone/>
-            </a:pPr>
-          </a:p>
-        </p:txBody>
-      </p:sp>
-      <p:sp>
-        <p:nvSpPr>
-          <p:cNvPr id="68" name="TextBox 67">
-            <a:extLst xmlns:a="http://schemas.openxmlformats.org/drawingml/2006/main">
-              <a:ext uri="{FF2B5EF4-FFF2-40B4-BE49-F238E27FC236}">
-                <a16:creationId xmlns:a16="http://schemas.microsoft.com/office/drawing/2014/main" id="{27D19985-3C94-41D9-BC8D-62F24AE717B2}"/>
-              </a:ext>
-            </a:extLst>
-          </p:cNvPr>
-          <p:cNvSpPr>
-            <a:spLocks xmlns:a="http://schemas.openxmlformats.org/drawingml/2006/main" noGrp="1"/>
-          </p:cNvSpPr>
-          <p:nvPr/>
-        </p:nvSpPr>
-        <p:spPr>
-          <a:xfrm xmlns:a="http://schemas.openxmlformats.org/drawingml/2006/main">
-            <a:off x="6373368" y="2762224"/>
-            <a:ext cx="894540" cy="163122"/>
-          </a:xfrm>
-          <a:prstGeom xmlns:a="http://schemas.openxmlformats.org/drawingml/2006/main" prst="rect">
-            <a:avLst/>
-          </a:prstGeom>
-          <a:noFill xmlns:a="http://schemas.openxmlformats.org/drawingml/2006/main"/>
-        </p:spPr>
-        <p:txBody>
-          <a:bodyPr xmlns:a="http://schemas.openxmlformats.org/drawingml/2006/main" wrap="none" lIns="18288" tIns="4572" rIns="18288" bIns="4572" anchor="ctr">
-            <a:spAutoFit/>
-          </a:bodyPr>
-          <a:lstStyle xmlns:a="http://schemas.openxmlformats.org/drawingml/2006/main"/>
-          <a:p xmlns:a="http://schemas.openxmlformats.org/drawingml/2006/main">
-            <a:pPr algn="l">
-              <a:buNone/>
-            </a:pPr>
-            <a:r>
-              <a:rPr sz="1000" b="0" i="0">
-                <a:solidFill>
-                  <a:srgbClr val="202020"/>
-                </a:solidFill>
-                <a:latin typeface="Aptos"/>
-                <a:ea typeface="Aptos"/>
-                <a:cs typeface="Aptos"/>
-              </a:rPr>
-              <a:t>Harness design</a:t>
-            </a:r>
-          </a:p>
-        </p:txBody>
-      </p:sp>
-      <p:sp>
-        <p:nvSpPr>
-          <p:cNvPr id="69" name="TextBox 68">
-            <a:extLst xmlns:a="http://schemas.openxmlformats.org/drawingml/2006/main">
-              <a:ext uri="{FF2B5EF4-FFF2-40B4-BE49-F238E27FC236}">
-                <a16:creationId xmlns:a16="http://schemas.microsoft.com/office/drawing/2014/main" id="{D3F00B53-5BBC-4783-9A16-71ACDFC092BD}"/>
-              </a:ext>
-            </a:extLst>
-          </p:cNvPr>
-          <p:cNvSpPr>
-            <a:spLocks xmlns:a="http://schemas.openxmlformats.org/drawingml/2006/main" noGrp="1"/>
-          </p:cNvSpPr>
-          <p:nvPr/>
-        </p:nvSpPr>
-        <p:spPr>
-          <a:xfrm xmlns:a="http://schemas.openxmlformats.org/drawingml/2006/main">
-            <a:off x="9572055" y="2689072"/>
-            <a:ext cx="420051" cy="163122"/>
-          </a:xfrm>
-          <a:prstGeom xmlns:a="http://schemas.openxmlformats.org/drawingml/2006/main" prst="rect">
-            <a:avLst/>
-          </a:prstGeom>
-          <a:noFill xmlns:a="http://schemas.openxmlformats.org/drawingml/2006/main"/>
-        </p:spPr>
-        <p:txBody>
-          <a:bodyPr xmlns:a="http://schemas.openxmlformats.org/drawingml/2006/main" wrap="none" lIns="18288" tIns="4572" rIns="18288" bIns="4572" anchor="ctr">
-            <a:spAutoFit/>
-          </a:bodyPr>
-          <a:lstStyle xmlns:a="http://schemas.openxmlformats.org/drawingml/2006/main"/>
-          <a:p xmlns:a="http://schemas.openxmlformats.org/drawingml/2006/main">
-            <a:pPr algn="r">
-              <a:buNone/>
-            </a:pPr>
-            <a:r>
-              <a:rPr sz="1000" b="1" i="0">
-                <a:solidFill>
-                  <a:srgbClr val="202020"/>
-                </a:solidFill>
-                <a:latin typeface="Aptos"/>
-                <a:ea typeface="Aptos"/>
-                <a:cs typeface="Aptos"/>
-              </a:rPr>
-              <a:t>$20.00</a:t>
-            </a:r>
-          </a:p>
-        </p:txBody>
-      </p:sp>
-      <p:sp>
-        <p:nvSpPr>
-          <p:cNvPr id="70" name="TextBox 69">
-            <a:extLst xmlns:a="http://schemas.openxmlformats.org/drawingml/2006/main">
-              <a:ext uri="{FF2B5EF4-FFF2-40B4-BE49-F238E27FC236}">
-                <a16:creationId xmlns:a16="http://schemas.microsoft.com/office/drawing/2014/main" id="{85D7212E-99DB-49EF-8B44-BEF8A85F59CE}"/>
-              </a:ext>
-            </a:extLst>
-          </p:cNvPr>
-          <p:cNvSpPr>
-            <a:spLocks xmlns:a="http://schemas.openxmlformats.org/drawingml/2006/main" noGrp="1"/>
-          </p:cNvSpPr>
-          <p:nvPr/>
-        </p:nvSpPr>
-        <p:spPr>
-          <a:xfrm xmlns:a="http://schemas.openxmlformats.org/drawingml/2006/main">
-            <a:off x="10189741" y="2689072"/>
-            <a:ext cx="606000" cy="163122"/>
-          </a:xfrm>
-          <a:prstGeom xmlns:a="http://schemas.openxmlformats.org/drawingml/2006/main" prst="rect">
-            <a:avLst/>
-          </a:prstGeom>
-          <a:noFill xmlns:a="http://schemas.openxmlformats.org/drawingml/2006/main"/>
-        </p:spPr>
-        <p:txBody>
-          <a:bodyPr xmlns:a="http://schemas.openxmlformats.org/drawingml/2006/main" wrap="none" lIns="18288" tIns="4572" rIns="18288" bIns="4572" anchor="ctr">
-            <a:spAutoFit/>
-          </a:bodyPr>
-          <a:lstStyle xmlns:a="http://schemas.openxmlformats.org/drawingml/2006/main"/>
-          <a:p xmlns:a="http://schemas.openxmlformats.org/drawingml/2006/main">
-            <a:pPr algn="ctr">
-              <a:buNone/>
-            </a:pPr>
-            <a:r>
-              <a:rPr sz="1000" b="0" i="0">
-                <a:solidFill>
-                  <a:srgbClr val="202020"/>
-                </a:solidFill>
-                <a:latin typeface="Aptos"/>
-                <a:ea typeface="Aptos"/>
-                <a:cs typeface="Aptos"/>
-              </a:rPr>
-              <a:t>10/5/2026</a:t>
-            </a:r>
-          </a:p>
-        </p:txBody>
-      </p:sp>
-      <p:sp>
-        <p:nvSpPr>
-          <p:cNvPr id="71" name="Rounded Rectangle 70">
-            <a:extLst xmlns:a="http://schemas.openxmlformats.org/drawingml/2006/main">
-              <a:ext uri="{FF2B5EF4-FFF2-40B4-BE49-F238E27FC236}">
-                <a16:creationId xmlns:a16="http://schemas.microsoft.com/office/drawing/2014/main" id="{140EB830-F344-48F9-95B6-6CF395AB335D}"/>
-              </a:ext>
-            </a:extLst>
-          </p:cNvPr>
-          <p:cNvSpPr>
-            <a:spLocks xmlns:a="http://schemas.openxmlformats.org/drawingml/2006/main" noGrp="1"/>
-          </p:cNvSpPr>
-          <p:nvPr/>
-        </p:nvSpPr>
-        <p:spPr>
-          <a:xfrm xmlns:a="http://schemas.openxmlformats.org/drawingml/2006/main">
-            <a:off x="10910620" y="2670048"/>
-            <a:ext cx="822960" cy="256032"/>
-          </a:xfrm>
-          <a:prstGeom xmlns:a="http://schemas.openxmlformats.org/drawingml/2006/main" prst="roundRect">
-            <a:avLst/>
-          </a:prstGeom>
-          <a:solidFill xmlns:a="http://schemas.openxmlformats.org/drawingml/2006/main">
-            <a:srgbClr val="ED7D31"/>
-          </a:solidFill>
-          <a:ln xmlns:a="http://schemas.openxmlformats.org/drawingml/2006/main" w="0">
-            <a:solidFill>
-              <a:srgbClr val="ED7D31"/>
-            </a:solidFill>
-            <a:prstDash val="solid"/>
-          </a:ln>
-        </p:spPr>
-        <p:style>
-          <a:lnRef xmlns:a="http://schemas.openxmlformats.org/drawingml/2006/main" idx="1">
-            <a:schemeClr val="accent1"/>
-          </a:lnRef>
-          <a:fillRef xmlns:a="http://schemas.openxmlformats.org/drawingml/2006/main" idx="3">
-            <a:schemeClr val="accent1"/>
-          </a:fillRef>
-          <a:effectRef xmlns:a="http://schemas.openxmlformats.org/drawingml/2006/main" idx="2">
-            <a:schemeClr val="accent1"/>
-          </a:effectRef>
-          <a:fontRef xmlns:a="http://schemas.openxmlformats.org/drawingml/2006/main" idx="minor">
-            <a:schemeClr val="lt1"/>
-          </a:fontRef>
-        </p:style>
-        <p:txBody>
-          <a:bodyPr xmlns:a="http://schemas.openxmlformats.org/drawingml/2006/main" anchor="ctr"/>
-          <a:lstStyle xmlns:a="http://schemas.openxmlformats.org/drawingml/2006/main"/>
-          <a:p xmlns:a="http://schemas.openxmlformats.org/drawingml/2006/main">
-            <a:pPr algn="ctr">
-              <a:buNone/>
-            </a:pPr>
-          </a:p>
-        </p:txBody>
-      </p:sp>
-      <p:sp>
-        <p:nvSpPr>
-          <p:cNvPr id="72" name="TextBox 71">
-            <a:extLst xmlns:a="http://schemas.openxmlformats.org/drawingml/2006/main">
-              <a:ext uri="{FF2B5EF4-FFF2-40B4-BE49-F238E27FC236}">
-                <a16:creationId xmlns:a16="http://schemas.microsoft.com/office/drawing/2014/main" id="{5E95B0AD-0B3A-4DD7-9B0D-486EA85CCBA3}"/>
-              </a:ext>
-            </a:extLst>
-          </p:cNvPr>
-          <p:cNvSpPr>
-            <a:spLocks xmlns:a="http://schemas.openxmlformats.org/drawingml/2006/main" noGrp="1"/>
-          </p:cNvSpPr>
-          <p:nvPr/>
-        </p:nvSpPr>
-        <p:spPr>
-          <a:xfrm xmlns:a="http://schemas.openxmlformats.org/drawingml/2006/main">
-            <a:off x="10977422" y="2684500"/>
-            <a:ext cx="689356" cy="163122"/>
-          </a:xfrm>
-          <a:prstGeom xmlns:a="http://schemas.openxmlformats.org/drawingml/2006/main" prst="rect">
-            <a:avLst/>
-          </a:prstGeom>
-          <a:noFill xmlns:a="http://schemas.openxmlformats.org/drawingml/2006/main"/>
-        </p:spPr>
-        <p:txBody>
-          <a:bodyPr xmlns:a="http://schemas.openxmlformats.org/drawingml/2006/main" wrap="none" lIns="18288" tIns="4572" rIns="18288" bIns="4572" anchor="ctr">
-            <a:spAutoFit/>
-          </a:bodyPr>
-          <a:lstStyle xmlns:a="http://schemas.openxmlformats.org/drawingml/2006/main"/>
-          <a:p xmlns:a="http://schemas.openxmlformats.org/drawingml/2006/main">
-            <a:pPr algn="ctr">
-              <a:buNone/>
-            </a:pPr>
-            <a:r>
-              <a:rPr sz="1000" b="1" i="0">
-                <a:solidFill>
-                  <a:srgbClr val="FFFFFF"/>
-                </a:solidFill>
-                <a:latin typeface="Aptos"/>
-                <a:ea typeface="Aptos"/>
-                <a:cs typeface="Aptos"/>
-              </a:rPr>
-              <a:t>On Track</a:t>
-            </a:r>
-          </a:p>
-        </p:txBody>
-      </p:sp>
-      <p:sp>
-        <p:nvSpPr>
-          <p:cNvPr id="73" name="Rectangle 72">
-            <a:extLst xmlns:a="http://schemas.openxmlformats.org/drawingml/2006/main">
-              <a:ext uri="{FF2B5EF4-FFF2-40B4-BE49-F238E27FC236}">
-                <a16:creationId xmlns:a16="http://schemas.microsoft.com/office/drawing/2014/main" id="{12E9407A-5F16-4849-A26D-2C0D2BC8071E}"/>
-              </a:ext>
-            </a:extLst>
-          </p:cNvPr>
-          <p:cNvSpPr>
-            <a:spLocks xmlns:a="http://schemas.openxmlformats.org/drawingml/2006/main" noGrp="1"/>
-          </p:cNvSpPr>
-          <p:nvPr/>
-        </p:nvSpPr>
-        <p:spPr>
-          <a:xfrm xmlns:a="http://schemas.openxmlformats.org/drawingml/2006/main">
-            <a:off x="6263640" y="3200400"/>
-            <a:ext cx="5532120" cy="585216"/>
-          </a:xfrm>
-          <a:prstGeom xmlns:a="http://schemas.openxmlformats.org/drawingml/2006/main" prst="rect">
-            <a:avLst/>
-          </a:prstGeom>
-          <a:solidFill xmlns:a="http://schemas.openxmlformats.org/drawingml/2006/main">
-            <a:srgbClr val="F2F5FA"/>
-          </a:solidFill>
-          <a:ln xmlns:a="http://schemas.openxmlformats.org/drawingml/2006/main">
-            <a:solidFill>
-              <a:srgbClr val="F2F5FA"/>
-            </a:solidFill>
-          </a:ln>
-        </p:spPr>
-        <p:style>
-          <a:lnRef xmlns:a="http://schemas.openxmlformats.org/drawingml/2006/main" idx="1">
-            <a:schemeClr val="accent1"/>
-          </a:lnRef>
-          <a:fillRef xmlns:a="http://schemas.openxmlformats.org/drawingml/2006/main" idx="3">
-            <a:schemeClr val="accent1"/>
-          </a:fillRef>
-          <a:effectRef xmlns:a="http://schemas.openxmlformats.org/drawingml/2006/main" idx="2">
-            <a:schemeClr val="accent1"/>
-          </a:effectRef>
-          <a:fontRef xmlns:a="http://schemas.openxmlformats.org/drawingml/2006/main" idx="minor">
-            <a:schemeClr val="lt1"/>
-          </a:fontRef>
-        </p:style>
-        <p:txBody>
-          <a:bodyPr xmlns:a="http://schemas.openxmlformats.org/drawingml/2006/main" anchor="ctr"/>
-          <a:lstStyle xmlns:a="http://schemas.openxmlformats.org/drawingml/2006/main"/>
-          <a:p xmlns:a="http://schemas.openxmlformats.org/drawingml/2006/main">
-            <a:pPr algn="ctr">
-              <a:buNone/>
-            </a:pPr>
-          </a:p>
-        </p:txBody>
-      </p:sp>
-      <p:sp>
-        <p:nvSpPr>
-          <p:cNvPr id="74" name="TextBox 73">
-            <a:extLst xmlns:a="http://schemas.openxmlformats.org/drawingml/2006/main">
-              <a:ext uri="{FF2B5EF4-FFF2-40B4-BE49-F238E27FC236}">
-                <a16:creationId xmlns:a16="http://schemas.microsoft.com/office/drawing/2014/main" id="{8CD53E24-40D0-4C24-95A0-0256F81EAF66}"/>
-              </a:ext>
-            </a:extLst>
-          </p:cNvPr>
-          <p:cNvSpPr>
-            <a:spLocks xmlns:a="http://schemas.openxmlformats.org/drawingml/2006/main" noGrp="1"/>
-          </p:cNvSpPr>
-          <p:nvPr/>
-        </p:nvSpPr>
-        <p:spPr>
-          <a:xfrm xmlns:a="http://schemas.openxmlformats.org/drawingml/2006/main">
-            <a:off x="6373368" y="3429736"/>
-            <a:ext cx="1551771" cy="163122"/>
-          </a:xfrm>
-          <a:prstGeom xmlns:a="http://schemas.openxmlformats.org/drawingml/2006/main" prst="rect">
-            <a:avLst/>
-          </a:prstGeom>
-          <a:noFill xmlns:a="http://schemas.openxmlformats.org/drawingml/2006/main"/>
-        </p:spPr>
-        <p:txBody>
-          <a:bodyPr xmlns:a="http://schemas.openxmlformats.org/drawingml/2006/main" wrap="none" lIns="18288" tIns="4572" rIns="18288" bIns="4572" anchor="ctr">
-            <a:spAutoFit/>
-          </a:bodyPr>
-          <a:lstStyle xmlns:a="http://schemas.openxmlformats.org/drawingml/2006/main"/>
-          <a:p xmlns:a="http://schemas.openxmlformats.org/drawingml/2006/main">
-            <a:pPr algn="l">
-              <a:buNone/>
-            </a:pPr>
-            <a:r>
-              <a:rPr sz="1000" b="0" i="0">
-                <a:solidFill>
-                  <a:srgbClr val="202020"/>
-                </a:solidFill>
-                <a:latin typeface="Aptos"/>
-                <a:ea typeface="Aptos"/>
-                <a:cs typeface="Aptos"/>
-              </a:rPr>
-              <a:t>Evap/ Condenser fan - 3 qty</a:t>
-            </a:r>
-          </a:p>
-        </p:txBody>
-      </p:sp>
-      <p:sp>
-        <p:nvSpPr>
-          <p:cNvPr id="75" name="TextBox 74">
-            <a:extLst xmlns:a="http://schemas.openxmlformats.org/drawingml/2006/main">
-              <a:ext uri="{FF2B5EF4-FFF2-40B4-BE49-F238E27FC236}">
-                <a16:creationId xmlns:a16="http://schemas.microsoft.com/office/drawing/2014/main" id="{A0F6F07D-99E1-453F-B933-6D027997EB0A}"/>
-              </a:ext>
-            </a:extLst>
-          </p:cNvPr>
-          <p:cNvSpPr>
-            <a:spLocks xmlns:a="http://schemas.openxmlformats.org/drawingml/2006/main" noGrp="1"/>
-          </p:cNvSpPr>
-          <p:nvPr/>
-        </p:nvSpPr>
-        <p:spPr>
-          <a:xfrm xmlns:a="http://schemas.openxmlformats.org/drawingml/2006/main">
-            <a:off x="9572055" y="3356584"/>
-            <a:ext cx="420051" cy="163122"/>
-          </a:xfrm>
-          <a:prstGeom xmlns:a="http://schemas.openxmlformats.org/drawingml/2006/main" prst="rect">
-            <a:avLst/>
-          </a:prstGeom>
-          <a:noFill xmlns:a="http://schemas.openxmlformats.org/drawingml/2006/main"/>
-        </p:spPr>
-        <p:txBody>
-          <a:bodyPr xmlns:a="http://schemas.openxmlformats.org/drawingml/2006/main" wrap="none" lIns="18288" tIns="4572" rIns="18288" bIns="4572" anchor="ctr">
-            <a:spAutoFit/>
-          </a:bodyPr>
-          <a:lstStyle xmlns:a="http://schemas.openxmlformats.org/drawingml/2006/main"/>
-          <a:p xmlns:a="http://schemas.openxmlformats.org/drawingml/2006/main">
-            <a:pPr algn="r">
-              <a:buNone/>
-            </a:pPr>
-            <a:r>
-              <a:rPr sz="1000" b="1" i="0">
-                <a:solidFill>
-                  <a:srgbClr val="202020"/>
-                </a:solidFill>
-                <a:latin typeface="Aptos"/>
-                <a:ea typeface="Aptos"/>
-                <a:cs typeface="Aptos"/>
-              </a:rPr>
-              <a:t>$42.00</a:t>
-            </a:r>
-          </a:p>
-        </p:txBody>
-      </p:sp>
-      <p:sp>
-        <p:nvSpPr>
-          <p:cNvPr id="76" name="TextBox 75">
-            <a:extLst xmlns:a="http://schemas.openxmlformats.org/drawingml/2006/main">
-              <a:ext uri="{FF2B5EF4-FFF2-40B4-BE49-F238E27FC236}">
-                <a16:creationId xmlns:a16="http://schemas.microsoft.com/office/drawing/2014/main" id="{B69BF7F2-011B-40D0-B94F-997259B5B961}"/>
-              </a:ext>
-            </a:extLst>
-          </p:cNvPr>
-          <p:cNvSpPr>
-            <a:spLocks xmlns:a="http://schemas.openxmlformats.org/drawingml/2006/main" noGrp="1"/>
-          </p:cNvSpPr>
-          <p:nvPr/>
-        </p:nvSpPr>
-        <p:spPr>
-          <a:xfrm xmlns:a="http://schemas.openxmlformats.org/drawingml/2006/main">
-            <a:off x="10189741" y="3356584"/>
-            <a:ext cx="606000" cy="163122"/>
-          </a:xfrm>
-          <a:prstGeom xmlns:a="http://schemas.openxmlformats.org/drawingml/2006/main" prst="rect">
-            <a:avLst/>
-          </a:prstGeom>
-          <a:noFill xmlns:a="http://schemas.openxmlformats.org/drawingml/2006/main"/>
-        </p:spPr>
-        <p:txBody>
-          <a:bodyPr xmlns:a="http://schemas.openxmlformats.org/drawingml/2006/main" wrap="none" lIns="18288" tIns="4572" rIns="18288" bIns="4572" anchor="ctr">
-            <a:spAutoFit/>
-          </a:bodyPr>
-          <a:lstStyle xmlns:a="http://schemas.openxmlformats.org/drawingml/2006/main"/>
-          <a:p xmlns:a="http://schemas.openxmlformats.org/drawingml/2006/main">
-            <a:pPr algn="ctr">
-              <a:buNone/>
-            </a:pPr>
-            <a:r>
-              <a:rPr sz="1000" b="0" i="0">
-                <a:solidFill>
-                  <a:srgbClr val="202020"/>
-                </a:solidFill>
-                <a:latin typeface="Aptos"/>
-                <a:ea typeface="Aptos"/>
-                <a:cs typeface="Aptos"/>
-              </a:rPr>
-              <a:t>9/18/2026</a:t>
-            </a:r>
-          </a:p>
-        </p:txBody>
-      </p:sp>
-      <p:sp>
-        <p:nvSpPr>
-          <p:cNvPr id="77" name="Rounded Rectangle 76">
-            <a:extLst xmlns:a="http://schemas.openxmlformats.org/drawingml/2006/main">
-              <a:ext uri="{FF2B5EF4-FFF2-40B4-BE49-F238E27FC236}">
-                <a16:creationId xmlns:a16="http://schemas.microsoft.com/office/drawing/2014/main" id="{1DA9E4BC-83D6-48AB-ACC4-469294B5ABF4}"/>
-              </a:ext>
-            </a:extLst>
-          </p:cNvPr>
-          <p:cNvSpPr>
-            <a:spLocks xmlns:a="http://schemas.openxmlformats.org/drawingml/2006/main" noGrp="1"/>
-          </p:cNvSpPr>
-          <p:nvPr/>
-        </p:nvSpPr>
-        <p:spPr>
-          <a:xfrm xmlns:a="http://schemas.openxmlformats.org/drawingml/2006/main">
-            <a:off x="10910620" y="3337560"/>
-            <a:ext cx="822960" cy="256032"/>
-          </a:xfrm>
-          <a:prstGeom xmlns:a="http://schemas.openxmlformats.org/drawingml/2006/main" prst="roundRect">
-            <a:avLst/>
-          </a:prstGeom>
-          <a:solidFill xmlns:a="http://schemas.openxmlformats.org/drawingml/2006/main">
-            <a:srgbClr val="ED7D31"/>
-          </a:solidFill>
-          <a:ln xmlns:a="http://schemas.openxmlformats.org/drawingml/2006/main" w="0">
-            <a:solidFill>
-              <a:srgbClr val="ED7D31"/>
-            </a:solidFill>
-            <a:prstDash val="solid"/>
-          </a:ln>
-        </p:spPr>
-        <p:style>
-          <a:lnRef xmlns:a="http://schemas.openxmlformats.org/drawingml/2006/main" idx="1">
-            <a:schemeClr val="accent1"/>
-          </a:lnRef>
-          <a:fillRef xmlns:a="http://schemas.openxmlformats.org/drawingml/2006/main" idx="3">
-            <a:schemeClr val="accent1"/>
-          </a:fillRef>
-          <a:effectRef xmlns:a="http://schemas.openxmlformats.org/drawingml/2006/main" idx="2">
-            <a:schemeClr val="accent1"/>
-          </a:effectRef>
-          <a:fontRef xmlns:a="http://schemas.openxmlformats.org/drawingml/2006/main" idx="minor">
-            <a:schemeClr val="lt1"/>
-          </a:fontRef>
-        </p:style>
-        <p:txBody>
-          <a:bodyPr xmlns:a="http://schemas.openxmlformats.org/drawingml/2006/main" anchor="ctr"/>
-          <a:lstStyle xmlns:a="http://schemas.openxmlformats.org/drawingml/2006/main"/>
-          <a:p xmlns:a="http://schemas.openxmlformats.org/drawingml/2006/main">
-            <a:pPr algn="ctr">
-              <a:buNone/>
-            </a:pPr>
-          </a:p>
-        </p:txBody>
-      </p:sp>
-      <p:sp>
-        <p:nvSpPr>
-          <p:cNvPr id="78" name="TextBox 77">
-            <a:extLst xmlns:a="http://schemas.openxmlformats.org/drawingml/2006/main">
-              <a:ext uri="{FF2B5EF4-FFF2-40B4-BE49-F238E27FC236}">
-                <a16:creationId xmlns:a16="http://schemas.microsoft.com/office/drawing/2014/main" id="{57806EF5-3960-4DFE-9924-C296D2F31C17}"/>
-              </a:ext>
-            </a:extLst>
-          </p:cNvPr>
-          <p:cNvSpPr>
-            <a:spLocks xmlns:a="http://schemas.openxmlformats.org/drawingml/2006/main" noGrp="1"/>
-          </p:cNvSpPr>
-          <p:nvPr/>
-        </p:nvSpPr>
-        <p:spPr>
-          <a:xfrm xmlns:a="http://schemas.openxmlformats.org/drawingml/2006/main">
-            <a:off x="10977422" y="3352012"/>
-            <a:ext cx="689356" cy="163122"/>
-          </a:xfrm>
-          <a:prstGeom xmlns:a="http://schemas.openxmlformats.org/drawingml/2006/main" prst="rect">
-            <a:avLst/>
-          </a:prstGeom>
-          <a:noFill xmlns:a="http://schemas.openxmlformats.org/drawingml/2006/main"/>
-        </p:spPr>
-        <p:txBody>
-          <a:bodyPr xmlns:a="http://schemas.openxmlformats.org/drawingml/2006/main" wrap="none" lIns="18288" tIns="4572" rIns="18288" bIns="4572" anchor="ctr">
-            <a:spAutoFit/>
-          </a:bodyPr>
-          <a:lstStyle xmlns:a="http://schemas.openxmlformats.org/drawingml/2006/main"/>
-          <a:p xmlns:a="http://schemas.openxmlformats.org/drawingml/2006/main">
-            <a:pPr algn="ctr">
-              <a:buNone/>
-            </a:pPr>
-            <a:r>
-              <a:rPr sz="1000" b="1" i="0">
-                <a:solidFill>
-                  <a:srgbClr val="FFFFFF"/>
-                </a:solidFill>
-                <a:latin typeface="Aptos"/>
-                <a:ea typeface="Aptos"/>
-                <a:cs typeface="Aptos"/>
-              </a:rPr>
-              <a:t>On Track</a:t>
-            </a:r>
-          </a:p>
-        </p:txBody>
-      </p:sp>
-      <p:sp>
-        <p:nvSpPr>
-          <p:cNvPr id="79" name="Rectangle 78">
-            <a:extLst xmlns:a="http://schemas.openxmlformats.org/drawingml/2006/main">
-              <a:ext uri="{FF2B5EF4-FFF2-40B4-BE49-F238E27FC236}">
-                <a16:creationId xmlns:a16="http://schemas.microsoft.com/office/drawing/2014/main" id="{80EB1DD3-EE81-43EA-B459-EB0BEF38026C}"/>
-              </a:ext>
-            </a:extLst>
-          </p:cNvPr>
-          <p:cNvSpPr>
-            <a:spLocks xmlns:a="http://schemas.openxmlformats.org/drawingml/2006/main" noGrp="1"/>
-          </p:cNvSpPr>
-          <p:nvPr/>
-        </p:nvSpPr>
-        <p:spPr>
-          <a:xfrm xmlns:a="http://schemas.openxmlformats.org/drawingml/2006/main">
-            <a:off x="6263640" y="3867912"/>
-            <a:ext cx="5532120" cy="585216"/>
-          </a:xfrm>
-          <a:prstGeom xmlns:a="http://schemas.openxmlformats.org/drawingml/2006/main" prst="rect">
-            <a:avLst/>
-          </a:prstGeom>
-          <a:solidFill xmlns:a="http://schemas.openxmlformats.org/drawingml/2006/main">
-            <a:srgbClr val="FFFFFF"/>
-          </a:solidFill>
-          <a:ln xmlns:a="http://schemas.openxmlformats.org/drawingml/2006/main">
-            <a:solidFill>
-              <a:srgbClr val="FFFFFF"/>
-            </a:solidFill>
-          </a:ln>
-        </p:spPr>
-        <p:style>
-          <a:lnRef xmlns:a="http://schemas.openxmlformats.org/drawingml/2006/main" idx="1">
-            <a:schemeClr val="accent1"/>
-          </a:lnRef>
-          <a:fillRef xmlns:a="http://schemas.openxmlformats.org/drawingml/2006/main" idx="3">
-            <a:schemeClr val="accent1"/>
-          </a:fillRef>
-          <a:effectRef xmlns:a="http://schemas.openxmlformats.org/drawingml/2006/main" idx="2">
-            <a:schemeClr val="accent1"/>
-          </a:effectRef>
-          <a:fontRef xmlns:a="http://schemas.openxmlformats.org/drawingml/2006/main" idx="minor">
-            <a:schemeClr val="lt1"/>
-          </a:fontRef>
-        </p:style>
-        <p:txBody>
-          <a:bodyPr xmlns:a="http://schemas.openxmlformats.org/drawingml/2006/main" anchor="ctr"/>
-          <a:lstStyle xmlns:a="http://schemas.openxmlformats.org/drawingml/2006/main"/>
-          <a:p xmlns:a="http://schemas.openxmlformats.org/drawingml/2006/main">
-            <a:pPr algn="ctr">
-              <a:buNone/>
-            </a:pPr>
-          </a:p>
-        </p:txBody>
-      </p:sp>
-      <p:sp>
-        <p:nvSpPr>
-          <p:cNvPr id="80" name="TextBox 79">
-            <a:extLst xmlns:a="http://schemas.openxmlformats.org/drawingml/2006/main">
-              <a:ext uri="{FF2B5EF4-FFF2-40B4-BE49-F238E27FC236}">
-                <a16:creationId xmlns:a16="http://schemas.microsoft.com/office/drawing/2014/main" id="{3CA1BB1B-F033-4463-B6CC-FBB79CA7E598}"/>
-              </a:ext>
-            </a:extLst>
-          </p:cNvPr>
-          <p:cNvSpPr>
-            <a:spLocks xmlns:a="http://schemas.openxmlformats.org/drawingml/2006/main" noGrp="1"/>
-          </p:cNvSpPr>
-          <p:nvPr/>
-        </p:nvSpPr>
-        <p:spPr>
-          <a:xfrm xmlns:a="http://schemas.openxmlformats.org/drawingml/2006/main">
-            <a:off x="6373368" y="4097248"/>
-            <a:ext cx="1447576" cy="163122"/>
-          </a:xfrm>
-          <a:prstGeom xmlns:a="http://schemas.openxmlformats.org/drawingml/2006/main" prst="rect">
-            <a:avLst/>
-          </a:prstGeom>
-          <a:noFill xmlns:a="http://schemas.openxmlformats.org/drawingml/2006/main"/>
-        </p:spPr>
-        <p:txBody>
-          <a:bodyPr xmlns:a="http://schemas.openxmlformats.org/drawingml/2006/main" wrap="none" lIns="18288" tIns="4572" rIns="18288" bIns="4572" anchor="ctr">
-            <a:spAutoFit/>
-          </a:bodyPr>
-          <a:lstStyle xmlns:a="http://schemas.openxmlformats.org/drawingml/2006/main"/>
-          <a:p xmlns:a="http://schemas.openxmlformats.org/drawingml/2006/main">
-            <a:pPr algn="l">
-              <a:buNone/>
-            </a:pPr>
-            <a:r>
-              <a:rPr sz="1000" b="0" i="0">
-                <a:solidFill>
-                  <a:srgbClr val="202020"/>
-                </a:solidFill>
-                <a:latin typeface="Aptos"/>
-                <a:ea typeface="Aptos"/>
-                <a:cs typeface="Aptos"/>
-              </a:rPr>
-              <a:t>Pallet - CArdboard design</a:t>
-            </a:r>
-          </a:p>
-        </p:txBody>
-      </p:sp>
-      <p:sp>
-        <p:nvSpPr>
-          <p:cNvPr id="81" name="TextBox 80">
-            <a:extLst xmlns:a="http://schemas.openxmlformats.org/drawingml/2006/main">
-              <a:ext uri="{FF2B5EF4-FFF2-40B4-BE49-F238E27FC236}">
-                <a16:creationId xmlns:a16="http://schemas.microsoft.com/office/drawing/2014/main" id="{61B66CC6-BF82-48C2-ABE2-8C68104003EA}"/>
-              </a:ext>
-            </a:extLst>
-          </p:cNvPr>
-          <p:cNvSpPr>
-            <a:spLocks xmlns:a="http://schemas.openxmlformats.org/drawingml/2006/main" noGrp="1"/>
-          </p:cNvSpPr>
-          <p:nvPr/>
-        </p:nvSpPr>
-        <p:spPr>
-          <a:xfrm xmlns:a="http://schemas.openxmlformats.org/drawingml/2006/main">
-            <a:off x="9572055" y="4024096"/>
-            <a:ext cx="420051" cy="163122"/>
-          </a:xfrm>
-          <a:prstGeom xmlns:a="http://schemas.openxmlformats.org/drawingml/2006/main" prst="rect">
-            <a:avLst/>
-          </a:prstGeom>
-          <a:noFill xmlns:a="http://schemas.openxmlformats.org/drawingml/2006/main"/>
-        </p:spPr>
-        <p:txBody>
-          <a:bodyPr xmlns:a="http://schemas.openxmlformats.org/drawingml/2006/main" wrap="none" lIns="18288" tIns="4572" rIns="18288" bIns="4572" anchor="ctr">
-            <a:spAutoFit/>
-          </a:bodyPr>
-          <a:lstStyle xmlns:a="http://schemas.openxmlformats.org/drawingml/2006/main"/>
-          <a:p xmlns:a="http://schemas.openxmlformats.org/drawingml/2006/main">
-            <a:pPr algn="r">
-              <a:buNone/>
-            </a:pPr>
-            <a:r>
-              <a:rPr sz="1000" b="1" i="0">
-                <a:solidFill>
-                  <a:srgbClr val="202020"/>
-                </a:solidFill>
-                <a:latin typeface="Aptos"/>
-                <a:ea typeface="Aptos"/>
-                <a:cs typeface="Aptos"/>
-              </a:rPr>
-              <a:t>$15.00</a:t>
-            </a:r>
-          </a:p>
-        </p:txBody>
-      </p:sp>
-      <p:sp>
-        <p:nvSpPr>
-          <p:cNvPr id="82" name="TextBox 81">
-            <a:extLst xmlns:a="http://schemas.openxmlformats.org/drawingml/2006/main">
-              <a:ext uri="{FF2B5EF4-FFF2-40B4-BE49-F238E27FC236}">
-                <a16:creationId xmlns:a16="http://schemas.microsoft.com/office/drawing/2014/main" id="{B20544AC-96C6-4A8C-8CCF-16A621B9283F}"/>
-              </a:ext>
-            </a:extLst>
-          </p:cNvPr>
-          <p:cNvSpPr>
-            <a:spLocks xmlns:a="http://schemas.openxmlformats.org/drawingml/2006/main" noGrp="1"/>
-          </p:cNvSpPr>
-          <p:nvPr/>
-        </p:nvSpPr>
-        <p:spPr>
-          <a:xfrm xmlns:a="http://schemas.openxmlformats.org/drawingml/2006/main">
-            <a:off x="10189741" y="4024096"/>
-            <a:ext cx="606000" cy="163122"/>
-          </a:xfrm>
-          <a:prstGeom xmlns:a="http://schemas.openxmlformats.org/drawingml/2006/main" prst="rect">
-            <a:avLst/>
-          </a:prstGeom>
-          <a:noFill xmlns:a="http://schemas.openxmlformats.org/drawingml/2006/main"/>
-        </p:spPr>
-        <p:txBody>
-          <a:bodyPr xmlns:a="http://schemas.openxmlformats.org/drawingml/2006/main" wrap="none" lIns="18288" tIns="4572" rIns="18288" bIns="4572" anchor="ctr">
-            <a:spAutoFit/>
-          </a:bodyPr>
-          <a:lstStyle xmlns:a="http://schemas.openxmlformats.org/drawingml/2006/main"/>
-          <a:p xmlns:a="http://schemas.openxmlformats.org/drawingml/2006/main">
-            <a:pPr algn="ctr">
-              <a:buNone/>
-            </a:pPr>
-            <a:r>
-              <a:rPr sz="1000" b="0" i="0">
-                <a:solidFill>
-                  <a:srgbClr val="202020"/>
-                </a:solidFill>
-                <a:latin typeface="Aptos"/>
-                <a:ea typeface="Aptos"/>
-                <a:cs typeface="Aptos"/>
-              </a:rPr>
-              <a:t>10/12/2026</a:t>
-            </a:r>
-          </a:p>
-        </p:txBody>
-      </p:sp>
-      <p:sp>
-        <p:nvSpPr>
-          <p:cNvPr id="83" name="Rounded Rectangle 82">
-            <a:extLst xmlns:a="http://schemas.openxmlformats.org/drawingml/2006/main">
-              <a:ext uri="{FF2B5EF4-FFF2-40B4-BE49-F238E27FC236}">
-                <a16:creationId xmlns:a16="http://schemas.microsoft.com/office/drawing/2014/main" id="{99158F97-F7E6-48DA-91C7-09E741FD911B}"/>
-              </a:ext>
-            </a:extLst>
-          </p:cNvPr>
-          <p:cNvSpPr>
-            <a:spLocks xmlns:a="http://schemas.openxmlformats.org/drawingml/2006/main" noGrp="1"/>
-          </p:cNvSpPr>
-          <p:nvPr/>
-        </p:nvSpPr>
-        <p:spPr>
-          <a:xfrm xmlns:a="http://schemas.openxmlformats.org/drawingml/2006/main">
-            <a:off x="10910620" y="4005072"/>
-            <a:ext cx="822960" cy="256032"/>
-          </a:xfrm>
-          <a:prstGeom xmlns:a="http://schemas.openxmlformats.org/drawingml/2006/main" prst="roundRect">
-            <a:avLst/>
-          </a:prstGeom>
-          <a:solidFill xmlns:a="http://schemas.openxmlformats.org/drawingml/2006/main">
-            <a:srgbClr val="ED7D31"/>
-          </a:solidFill>
-          <a:ln xmlns:a="http://schemas.openxmlformats.org/drawingml/2006/main" w="0">
-            <a:solidFill>
-              <a:srgbClr val="ED7D31"/>
-            </a:solidFill>
-            <a:prstDash val="solid"/>
-          </a:ln>
-        </p:spPr>
-        <p:style>
-          <a:lnRef xmlns:a="http://schemas.openxmlformats.org/drawingml/2006/main" idx="1">
-            <a:schemeClr val="accent1"/>
-          </a:lnRef>
-          <a:fillRef xmlns:a="http://schemas.openxmlformats.org/drawingml/2006/main" idx="3">
-            <a:schemeClr val="accent1"/>
-          </a:fillRef>
-          <a:effectRef xmlns:a="http://schemas.openxmlformats.org/drawingml/2006/main" idx="2">
-            <a:schemeClr val="accent1"/>
-          </a:effectRef>
-          <a:fontRef xmlns:a="http://schemas.openxmlformats.org/drawingml/2006/main" idx="minor">
-            <a:schemeClr val="lt1"/>
-          </a:fontRef>
-        </p:style>
-        <p:txBody>
-          <a:bodyPr xmlns:a="http://schemas.openxmlformats.org/drawingml/2006/main" anchor="ctr"/>
-          <a:lstStyle xmlns:a="http://schemas.openxmlformats.org/drawingml/2006/main"/>
-          <a:p xmlns:a="http://schemas.openxmlformats.org/drawingml/2006/main">
-            <a:pPr algn="ctr">
-              <a:buNone/>
-            </a:pPr>
-          </a:p>
-        </p:txBody>
-      </p:sp>
-      <p:sp>
-        <p:nvSpPr>
-          <p:cNvPr id="84" name="TextBox 83">
-            <a:extLst xmlns:a="http://schemas.openxmlformats.org/drawingml/2006/main">
-              <a:ext uri="{FF2B5EF4-FFF2-40B4-BE49-F238E27FC236}">
-                <a16:creationId xmlns:a16="http://schemas.microsoft.com/office/drawing/2014/main" id="{83E2A428-A006-4D83-A6B3-3D4011EA03A3}"/>
-              </a:ext>
-            </a:extLst>
-          </p:cNvPr>
-          <p:cNvSpPr>
-            <a:spLocks xmlns:a="http://schemas.openxmlformats.org/drawingml/2006/main" noGrp="1"/>
-          </p:cNvSpPr>
-          <p:nvPr/>
-        </p:nvSpPr>
-        <p:spPr>
-          <a:xfrm xmlns:a="http://schemas.openxmlformats.org/drawingml/2006/main">
-            <a:off x="10977422" y="4019524"/>
-            <a:ext cx="689356" cy="163122"/>
-          </a:xfrm>
-          <a:prstGeom xmlns:a="http://schemas.openxmlformats.org/drawingml/2006/main" prst="rect">
-            <a:avLst/>
-          </a:prstGeom>
-          <a:noFill xmlns:a="http://schemas.openxmlformats.org/drawingml/2006/main"/>
-        </p:spPr>
-        <p:txBody>
-          <a:bodyPr xmlns:a="http://schemas.openxmlformats.org/drawingml/2006/main" wrap="none" lIns="18288" tIns="4572" rIns="18288" bIns="4572" anchor="ctr">
-            <a:spAutoFit/>
-          </a:bodyPr>
-          <a:lstStyle xmlns:a="http://schemas.openxmlformats.org/drawingml/2006/main"/>
-          <a:p xmlns:a="http://schemas.openxmlformats.org/drawingml/2006/main">
-            <a:pPr algn="ctr">
-              <a:buNone/>
-            </a:pPr>
-            <a:r>
-              <a:rPr sz="1000" b="1" i="0">
-                <a:solidFill>
-                  <a:srgbClr val="FFFFFF"/>
-                </a:solidFill>
-                <a:latin typeface="Aptos"/>
-                <a:ea typeface="Aptos"/>
-                <a:cs typeface="Aptos"/>
-              </a:rPr>
-              <a:t>On Track</a:t>
-            </a:r>
-          </a:p>
-        </p:txBody>
-      </p:sp>
-      <p:sp>
-        <p:nvSpPr>
-          <p:cNvPr id="85" name="Rectangle 84">
-            <a:extLst xmlns:a="http://schemas.openxmlformats.org/drawingml/2006/main">
-              <a:ext uri="{FF2B5EF4-FFF2-40B4-BE49-F238E27FC236}">
-                <a16:creationId xmlns:a16="http://schemas.microsoft.com/office/drawing/2014/main" id="{0A7BF2DE-72BB-451A-8395-DDE0E2F93BC4}"/>
-              </a:ext>
-            </a:extLst>
-          </p:cNvPr>
-          <p:cNvSpPr>
-            <a:spLocks xmlns:a="http://schemas.openxmlformats.org/drawingml/2006/main" noGrp="1"/>
-          </p:cNvSpPr>
-          <p:nvPr/>
-        </p:nvSpPr>
-        <p:spPr>
-          <a:xfrm xmlns:a="http://schemas.openxmlformats.org/drawingml/2006/main">
-            <a:off x="6263640" y="4535424"/>
-            <a:ext cx="5532120" cy="585216"/>
-          </a:xfrm>
-          <a:prstGeom xmlns:a="http://schemas.openxmlformats.org/drawingml/2006/main" prst="rect">
-            <a:avLst/>
-          </a:prstGeom>
-          <a:solidFill xmlns:a="http://schemas.openxmlformats.org/drawingml/2006/main">
-            <a:srgbClr val="F2F5FA"/>
-          </a:solidFill>
-          <a:ln xmlns:a="http://schemas.openxmlformats.org/drawingml/2006/main">
-            <a:solidFill>
-              <a:srgbClr val="F2F5FA"/>
-            </a:solidFill>
-          </a:ln>
-        </p:spPr>
-        <p:style>
-          <a:lnRef xmlns:a="http://schemas.openxmlformats.org/drawingml/2006/main" idx="1">
-            <a:schemeClr val="accent1"/>
-          </a:lnRef>
-          <a:fillRef xmlns:a="http://schemas.openxmlformats.org/drawingml/2006/main" idx="3">
-            <a:schemeClr val="accent1"/>
-          </a:fillRef>
-          <a:effectRef xmlns:a="http://schemas.openxmlformats.org/drawingml/2006/main" idx="2">
-            <a:schemeClr val="accent1"/>
-          </a:effectRef>
-          <a:fontRef xmlns:a="http://schemas.openxmlformats.org/drawingml/2006/main" idx="minor">
-            <a:schemeClr val="lt1"/>
-          </a:fontRef>
-        </p:style>
-        <p:txBody>
-          <a:bodyPr xmlns:a="http://schemas.openxmlformats.org/drawingml/2006/main" anchor="ctr"/>
-          <a:lstStyle xmlns:a="http://schemas.openxmlformats.org/drawingml/2006/main"/>
-          <a:p xmlns:a="http://schemas.openxmlformats.org/drawingml/2006/main">
-            <a:pPr algn="ctr">
-              <a:buNone/>
-            </a:pPr>
-          </a:p>
-        </p:txBody>
-      </p:sp>
-      <p:sp>
-        <p:nvSpPr>
-          <p:cNvPr id="86" name="TextBox 85">
-            <a:extLst xmlns:a="http://schemas.openxmlformats.org/drawingml/2006/main">
-              <a:ext uri="{FF2B5EF4-FFF2-40B4-BE49-F238E27FC236}">
-                <a16:creationId xmlns:a16="http://schemas.microsoft.com/office/drawing/2014/main" id="{3F678ED5-1B55-42E5-AC98-6979209D449D}"/>
-              </a:ext>
-            </a:extLst>
-          </p:cNvPr>
-          <p:cNvSpPr>
-            <a:spLocks xmlns:a="http://schemas.openxmlformats.org/drawingml/2006/main" noGrp="1"/>
-          </p:cNvSpPr>
-          <p:nvPr/>
-        </p:nvSpPr>
-        <p:spPr>
-          <a:xfrm xmlns:a="http://schemas.openxmlformats.org/drawingml/2006/main">
-            <a:off x="6373368" y="4764760"/>
-            <a:ext cx="573940" cy="163122"/>
-          </a:xfrm>
-          <a:prstGeom xmlns:a="http://schemas.openxmlformats.org/drawingml/2006/main" prst="rect">
-            <a:avLst/>
-          </a:prstGeom>
-          <a:noFill xmlns:a="http://schemas.openxmlformats.org/drawingml/2006/main"/>
-        </p:spPr>
-        <p:txBody>
-          <a:bodyPr xmlns:a="http://schemas.openxmlformats.org/drawingml/2006/main" wrap="none" lIns="18288" tIns="4572" rIns="18288" bIns="4572" anchor="ctr">
-            <a:spAutoFit/>
-          </a:bodyPr>
-          <a:lstStyle xmlns:a="http://schemas.openxmlformats.org/drawingml/2006/main"/>
-          <a:p xmlns:a="http://schemas.openxmlformats.org/drawingml/2006/main">
-            <a:pPr algn="l">
-              <a:buNone/>
-            </a:pPr>
-            <a:r>
-              <a:rPr sz="1000" b="0" i="0">
-                <a:solidFill>
-                  <a:srgbClr val="202020"/>
-                </a:solidFill>
-                <a:latin typeface="Aptos"/>
-                <a:ea typeface="Aptos"/>
-                <a:cs typeface="Aptos"/>
-              </a:rPr>
-              <a:t>New HP Switch- Danfoss</a:t>
-            </a:r>
-          </a:p>
-        </p:txBody>
-      </p:sp>
-      <p:sp>
-        <p:nvSpPr>
-          <p:cNvPr id="87" name="TextBox 86">
-            <a:extLst xmlns:a="http://schemas.openxmlformats.org/drawingml/2006/main">
-              <a:ext uri="{FF2B5EF4-FFF2-40B4-BE49-F238E27FC236}">
-                <a16:creationId xmlns:a16="http://schemas.microsoft.com/office/drawing/2014/main" id="{253D9CE3-6BE9-455A-A8FE-2C3A9812CBBC}"/>
-              </a:ext>
-            </a:extLst>
-          </p:cNvPr>
-          <p:cNvSpPr>
-            <a:spLocks xmlns:a="http://schemas.openxmlformats.org/drawingml/2006/main" noGrp="1"/>
-          </p:cNvSpPr>
-          <p:nvPr/>
-        </p:nvSpPr>
-        <p:spPr>
-          <a:xfrm xmlns:a="http://schemas.openxmlformats.org/drawingml/2006/main">
-            <a:off x="9572055" y="4691608"/>
-            <a:ext cx="420051" cy="163122"/>
-          </a:xfrm>
-          <a:prstGeom xmlns:a="http://schemas.openxmlformats.org/drawingml/2006/main" prst="rect">
-            <a:avLst/>
-          </a:prstGeom>
-          <a:noFill xmlns:a="http://schemas.openxmlformats.org/drawingml/2006/main"/>
-        </p:spPr>
-        <p:txBody>
-          <a:bodyPr xmlns:a="http://schemas.openxmlformats.org/drawingml/2006/main" wrap="none" lIns="18288" tIns="4572" rIns="18288" bIns="4572" anchor="ctr">
-            <a:spAutoFit/>
-          </a:bodyPr>
-          <a:lstStyle xmlns:a="http://schemas.openxmlformats.org/drawingml/2006/main"/>
-          <a:p xmlns:a="http://schemas.openxmlformats.org/drawingml/2006/main">
-            <a:pPr algn="r">
-              <a:buNone/>
-            </a:pPr>
-            <a:r>
-              <a:rPr sz="1000" b="1" i="0">
-                <a:solidFill>
-                  <a:srgbClr val="202020"/>
-                </a:solidFill>
-                <a:latin typeface="Aptos"/>
-                <a:ea typeface="Aptos"/>
-                <a:cs typeface="Aptos"/>
-              </a:rPr>
-              <a:t>$7.00</a:t>
-            </a:r>
-          </a:p>
-        </p:txBody>
-      </p:sp>
-      <p:sp>
-        <p:nvSpPr>
-          <p:cNvPr id="88" name="TextBox 87">
-            <a:extLst xmlns:a="http://schemas.openxmlformats.org/drawingml/2006/main">
-              <a:ext uri="{FF2B5EF4-FFF2-40B4-BE49-F238E27FC236}">
-                <a16:creationId xmlns:a16="http://schemas.microsoft.com/office/drawing/2014/main" id="{3B2B4085-0517-4AD3-8CD0-9DD21BC4E9E3}"/>
-              </a:ext>
-            </a:extLst>
-          </p:cNvPr>
-          <p:cNvSpPr>
-            <a:spLocks xmlns:a="http://schemas.openxmlformats.org/drawingml/2006/main" noGrp="1"/>
-          </p:cNvSpPr>
-          <p:nvPr/>
-        </p:nvSpPr>
-        <p:spPr>
-          <a:xfrm xmlns:a="http://schemas.openxmlformats.org/drawingml/2006/main">
-            <a:off x="10189741" y="4691608"/>
-            <a:ext cx="606000" cy="163122"/>
-          </a:xfrm>
-          <a:prstGeom xmlns:a="http://schemas.openxmlformats.org/drawingml/2006/main" prst="rect">
-            <a:avLst/>
-          </a:prstGeom>
-          <a:noFill xmlns:a="http://schemas.openxmlformats.org/drawingml/2006/main"/>
-        </p:spPr>
-        <p:txBody>
-          <a:bodyPr xmlns:a="http://schemas.openxmlformats.org/drawingml/2006/main" wrap="none" lIns="18288" tIns="4572" rIns="18288" bIns="4572" anchor="ctr">
-            <a:spAutoFit/>
-          </a:bodyPr>
-          <a:lstStyle xmlns:a="http://schemas.openxmlformats.org/drawingml/2006/main"/>
-          <a:p xmlns:a="http://schemas.openxmlformats.org/drawingml/2006/main">
-            <a:pPr algn="ctr">
-              <a:buNone/>
-            </a:pPr>
-            <a:r>
-              <a:rPr sz="1000" b="0" i="0">
-                <a:solidFill>
-                  <a:srgbClr val="202020"/>
-                </a:solidFill>
-                <a:latin typeface="Aptos"/>
-                <a:ea typeface="Aptos"/>
-                <a:cs typeface="Aptos"/>
-              </a:rPr>
-              <a:t>10/19/2026</a:t>
-            </a:r>
-          </a:p>
-        </p:txBody>
-      </p:sp>
-      <p:sp>
-        <p:nvSpPr>
-          <p:cNvPr id="89" name="Rounded Rectangle 88">
-            <a:extLst xmlns:a="http://schemas.openxmlformats.org/drawingml/2006/main">
-              <a:ext uri="{FF2B5EF4-FFF2-40B4-BE49-F238E27FC236}">
-                <a16:creationId xmlns:a16="http://schemas.microsoft.com/office/drawing/2014/main" id="{D502E9AD-319E-4BFF-AC3F-ADD2A7429138}"/>
-              </a:ext>
-            </a:extLst>
-          </p:cNvPr>
-          <p:cNvSpPr>
-            <a:spLocks xmlns:a="http://schemas.openxmlformats.org/drawingml/2006/main" noGrp="1"/>
-          </p:cNvSpPr>
-          <p:nvPr/>
-        </p:nvSpPr>
-        <p:spPr>
-          <a:xfrm xmlns:a="http://schemas.openxmlformats.org/drawingml/2006/main">
-            <a:off x="10910620" y="4672584"/>
-            <a:ext cx="822960" cy="256032"/>
-          </a:xfrm>
-          <a:prstGeom xmlns:a="http://schemas.openxmlformats.org/drawingml/2006/main" prst="roundRect">
-            <a:avLst/>
-          </a:prstGeom>
-          <a:solidFill xmlns:a="http://schemas.openxmlformats.org/drawingml/2006/main">
-            <a:srgbClr val="A6A6A6"/>
-          </a:solidFill>
-          <a:ln xmlns:a="http://schemas.openxmlformats.org/drawingml/2006/main" w="0">
-            <a:solidFill>
-              <a:srgbClr val="A6A6A6"/>
-            </a:solidFill>
-            <a:prstDash val="solid"/>
-          </a:ln>
-        </p:spPr>
-        <p:style>
-          <a:lnRef xmlns:a="http://schemas.openxmlformats.org/drawingml/2006/main" idx="1">
-            <a:schemeClr val="accent1"/>
-          </a:lnRef>
-          <a:fillRef xmlns:a="http://schemas.openxmlformats.org/drawingml/2006/main" idx="3">
-            <a:schemeClr val="accent1"/>
-          </a:fillRef>
-          <a:effectRef xmlns:a="http://schemas.openxmlformats.org/drawingml/2006/main" idx="2">
-            <a:schemeClr val="accent1"/>
-          </a:effectRef>
-          <a:fontRef xmlns:a="http://schemas.openxmlformats.org/drawingml/2006/main" idx="minor">
-            <a:schemeClr val="lt1"/>
-          </a:fontRef>
-        </p:style>
-        <p:txBody>
-          <a:bodyPr xmlns:a="http://schemas.openxmlformats.org/drawingml/2006/main" anchor="ctr"/>
-          <a:lstStyle xmlns:a="http://schemas.openxmlformats.org/drawingml/2006/main"/>
-          <a:p xmlns:a="http://schemas.openxmlformats.org/drawingml/2006/main">
-            <a:pPr algn="ctr">
-              <a:buNone/>
-            </a:pPr>
-          </a:p>
-        </p:txBody>
-      </p:sp>
-      <p:sp>
-        <p:nvSpPr>
           <p:cNvPr id="90" name="TextBox 89">
             <a:extLst xmlns:a="http://schemas.openxmlformats.org/drawingml/2006/main">
               <a:ext uri="{FF2B5EF4-FFF2-40B4-BE49-F238E27FC236}">
@@ -5656,570 +5134,7 @@
                 <a:ea typeface="Aptos"/>
                 <a:cs typeface="Aptos"/>
               </a:rPr>
-              <a:t>Not Started</a:t>
-            </a:r>
-          </a:p>
-        </p:txBody>
-      </p:sp>
-      <p:sp>
-        <p:nvSpPr>
-          <p:cNvPr id="91" name="Rectangle 90">
-            <a:extLst xmlns:a="http://schemas.openxmlformats.org/drawingml/2006/main">
-              <a:ext uri="{FF2B5EF4-FFF2-40B4-BE49-F238E27FC236}">
-                <a16:creationId xmlns:a16="http://schemas.microsoft.com/office/drawing/2014/main" id="{0DF6237E-F613-4792-9C9A-FCCD149717D2}"/>
-              </a:ext>
-            </a:extLst>
-          </p:cNvPr>
-          <p:cNvSpPr>
-            <a:spLocks xmlns:a="http://schemas.openxmlformats.org/drawingml/2006/main" noGrp="1"/>
-          </p:cNvSpPr>
-          <p:nvPr/>
-        </p:nvSpPr>
-        <p:spPr>
-          <a:xfrm xmlns:a="http://schemas.openxmlformats.org/drawingml/2006/main">
-            <a:off x="6263640" y="5202936"/>
-            <a:ext cx="5532120" cy="585216"/>
-          </a:xfrm>
-          <a:prstGeom xmlns:a="http://schemas.openxmlformats.org/drawingml/2006/main" prst="rect">
-            <a:avLst/>
-          </a:prstGeom>
-          <a:solidFill xmlns:a="http://schemas.openxmlformats.org/drawingml/2006/main">
-            <a:srgbClr val="FFFFFF"/>
-          </a:solidFill>
-          <a:ln xmlns:a="http://schemas.openxmlformats.org/drawingml/2006/main">
-            <a:solidFill>
-              <a:srgbClr val="FFFFFF"/>
-            </a:solidFill>
-          </a:ln>
-        </p:spPr>
-        <p:style>
-          <a:lnRef xmlns:a="http://schemas.openxmlformats.org/drawingml/2006/main" idx="1">
-            <a:schemeClr val="accent1"/>
-          </a:lnRef>
-          <a:fillRef xmlns:a="http://schemas.openxmlformats.org/drawingml/2006/main" idx="3">
-            <a:schemeClr val="accent1"/>
-          </a:fillRef>
-          <a:effectRef xmlns:a="http://schemas.openxmlformats.org/drawingml/2006/main" idx="2">
-            <a:schemeClr val="accent1"/>
-          </a:effectRef>
-          <a:fontRef xmlns:a="http://schemas.openxmlformats.org/drawingml/2006/main" idx="minor">
-            <a:schemeClr val="lt1"/>
-          </a:fontRef>
-        </p:style>
-        <p:txBody>
-          <a:bodyPr xmlns:a="http://schemas.openxmlformats.org/drawingml/2006/main" anchor="ctr"/>
-          <a:lstStyle xmlns:a="http://schemas.openxmlformats.org/drawingml/2006/main"/>
-          <a:p xmlns:a="http://schemas.openxmlformats.org/drawingml/2006/main">
-            <a:pPr algn="ctr">
-              <a:buNone/>
-            </a:pPr>
-          </a:p>
-        </p:txBody>
-      </p:sp>
-      <p:sp>
-        <p:nvSpPr>
-          <p:cNvPr id="92" name="TextBox 91">
-            <a:extLst xmlns:a="http://schemas.openxmlformats.org/drawingml/2006/main">
-              <a:ext uri="{FF2B5EF4-FFF2-40B4-BE49-F238E27FC236}">
-                <a16:creationId xmlns:a16="http://schemas.microsoft.com/office/drawing/2014/main" id="{BF430143-3C61-4896-9494-ABF695842D4F}"/>
-              </a:ext>
-            </a:extLst>
-          </p:cNvPr>
-          <p:cNvSpPr>
-            <a:spLocks xmlns:a="http://schemas.openxmlformats.org/drawingml/2006/main" noGrp="1"/>
-          </p:cNvSpPr>
-          <p:nvPr/>
-        </p:nvSpPr>
-        <p:spPr>
-          <a:xfrm xmlns:a="http://schemas.openxmlformats.org/drawingml/2006/main">
-            <a:off x="6373368" y="5432272"/>
-            <a:ext cx="537070" cy="163122"/>
-          </a:xfrm>
-          <a:prstGeom xmlns:a="http://schemas.openxmlformats.org/drawingml/2006/main" prst="rect">
-            <a:avLst/>
-          </a:prstGeom>
-          <a:noFill xmlns:a="http://schemas.openxmlformats.org/drawingml/2006/main"/>
-        </p:spPr>
-        <p:txBody>
-          <a:bodyPr xmlns:a="http://schemas.openxmlformats.org/drawingml/2006/main" wrap="none" lIns="18288" tIns="4572" rIns="18288" bIns="4572" anchor="ctr">
-            <a:spAutoFit/>
-          </a:bodyPr>
-          <a:lstStyle xmlns:a="http://schemas.openxmlformats.org/drawingml/2006/main"/>
-          <a:p xmlns:a="http://schemas.openxmlformats.org/drawingml/2006/main">
-            <a:pPr algn="l">
-              <a:buNone/>
-            </a:pPr>
-            <a:r>
-              <a:rPr sz="1000" b="0" i="0">
-                <a:solidFill>
-                  <a:srgbClr val="202020"/>
-                </a:solidFill>
-                <a:latin typeface="Aptos"/>
-                <a:ea typeface="Aptos"/>
-                <a:cs typeface="Aptos"/>
-              </a:rPr>
-              <a:t>Tariff - MT</a:t>
-            </a:r>
-          </a:p>
-        </p:txBody>
-      </p:sp>
-      <p:sp>
-        <p:nvSpPr>
-          <p:cNvPr id="93" name="TextBox 92">
-            <a:extLst xmlns:a="http://schemas.openxmlformats.org/drawingml/2006/main">
-              <a:ext uri="{FF2B5EF4-FFF2-40B4-BE49-F238E27FC236}">
-                <a16:creationId xmlns:a16="http://schemas.microsoft.com/office/drawing/2014/main" id="{1189A05C-0D36-45A3-B41F-A50E2BCFF5B7}"/>
-              </a:ext>
-            </a:extLst>
-          </p:cNvPr>
-          <p:cNvSpPr>
-            <a:spLocks xmlns:a="http://schemas.openxmlformats.org/drawingml/2006/main" noGrp="1"/>
-          </p:cNvSpPr>
-          <p:nvPr/>
-        </p:nvSpPr>
-        <p:spPr>
-          <a:xfrm xmlns:a="http://schemas.openxmlformats.org/drawingml/2006/main">
-            <a:off x="9572055" y="5359120"/>
-            <a:ext cx="420051" cy="163122"/>
-          </a:xfrm>
-          <a:prstGeom xmlns:a="http://schemas.openxmlformats.org/drawingml/2006/main" prst="rect">
-            <a:avLst/>
-          </a:prstGeom>
-          <a:noFill xmlns:a="http://schemas.openxmlformats.org/drawingml/2006/main"/>
-        </p:spPr>
-        <p:txBody>
-          <a:bodyPr xmlns:a="http://schemas.openxmlformats.org/drawingml/2006/main" wrap="none" lIns="18288" tIns="4572" rIns="18288" bIns="4572" anchor="ctr">
-            <a:spAutoFit/>
-          </a:bodyPr>
-          <a:lstStyle xmlns:a="http://schemas.openxmlformats.org/drawingml/2006/main"/>
-          <a:p xmlns:a="http://schemas.openxmlformats.org/drawingml/2006/main">
-            <a:pPr algn="r">
-              <a:buNone/>
-            </a:pPr>
-            <a:r>
-              <a:rPr sz="1000" b="1" i="0">
-                <a:solidFill>
-                  <a:srgbClr val="202020"/>
-                </a:solidFill>
-                <a:latin typeface="Aptos"/>
-                <a:ea typeface="Aptos"/>
-                <a:cs typeface="Aptos"/>
-              </a:rPr>
-              <a:t>$43.70</a:t>
-            </a:r>
-          </a:p>
-        </p:txBody>
-      </p:sp>
-      <p:sp>
-        <p:nvSpPr>
-          <p:cNvPr id="94" name="TextBox 93">
-            <a:extLst xmlns:a="http://schemas.openxmlformats.org/drawingml/2006/main">
-              <a:ext uri="{FF2B5EF4-FFF2-40B4-BE49-F238E27FC236}">
-                <a16:creationId xmlns:a16="http://schemas.microsoft.com/office/drawing/2014/main" id="{3DF65F50-A6F5-4B43-BA02-317493C976CF}"/>
-              </a:ext>
-            </a:extLst>
-          </p:cNvPr>
-          <p:cNvSpPr>
-            <a:spLocks xmlns:a="http://schemas.openxmlformats.org/drawingml/2006/main" noGrp="1"/>
-          </p:cNvSpPr>
-          <p:nvPr/>
-        </p:nvSpPr>
-        <p:spPr>
-          <a:xfrm xmlns:a="http://schemas.openxmlformats.org/drawingml/2006/main">
-            <a:off x="10189741" y="5359120"/>
-            <a:ext cx="606000" cy="163122"/>
-          </a:xfrm>
-          <a:prstGeom xmlns:a="http://schemas.openxmlformats.org/drawingml/2006/main" prst="rect">
-            <a:avLst/>
-          </a:prstGeom>
-          <a:noFill xmlns:a="http://schemas.openxmlformats.org/drawingml/2006/main"/>
-        </p:spPr>
-        <p:txBody>
-          <a:bodyPr xmlns:a="http://schemas.openxmlformats.org/drawingml/2006/main" wrap="none" lIns="18288" tIns="4572" rIns="18288" bIns="4572" anchor="ctr">
-            <a:spAutoFit/>
-          </a:bodyPr>
-          <a:lstStyle xmlns:a="http://schemas.openxmlformats.org/drawingml/2006/main"/>
-          <a:p xmlns:a="http://schemas.openxmlformats.org/drawingml/2006/main">
-            <a:pPr algn="ctr">
-              <a:buNone/>
-            </a:pPr>
-            <a:r>
-              <a:rPr sz="1000" b="0" i="0">
-                <a:solidFill>
-                  <a:srgbClr val="202020"/>
-                </a:solidFill>
-                <a:latin typeface="Aptos"/>
-                <a:ea typeface="Aptos"/>
-                <a:cs typeface="Aptos"/>
-              </a:rPr>
-              <a:t>6/15/2026</a:t>
-            </a:r>
-          </a:p>
-        </p:txBody>
-      </p:sp>
-      <p:sp>
-        <p:nvSpPr>
-          <p:cNvPr id="95" name="Rounded Rectangle 94">
-            <a:extLst xmlns:a="http://schemas.openxmlformats.org/drawingml/2006/main">
-              <a:ext uri="{FF2B5EF4-FFF2-40B4-BE49-F238E27FC236}">
-                <a16:creationId xmlns:a16="http://schemas.microsoft.com/office/drawing/2014/main" id="{3BDD55DB-80CA-4712-AC44-4F3311C36CA8}"/>
-              </a:ext>
-            </a:extLst>
-          </p:cNvPr>
-          <p:cNvSpPr>
-            <a:spLocks xmlns:a="http://schemas.openxmlformats.org/drawingml/2006/main" noGrp="1"/>
-          </p:cNvSpPr>
-          <p:nvPr/>
-        </p:nvSpPr>
-        <p:spPr>
-          <a:xfrm xmlns:a="http://schemas.openxmlformats.org/drawingml/2006/main">
-            <a:off x="10910620" y="5340096"/>
-            <a:ext cx="822960" cy="256032"/>
-          </a:xfrm>
-          <a:prstGeom xmlns:a="http://schemas.openxmlformats.org/drawingml/2006/main" prst="roundRect">
-            <a:avLst/>
-          </a:prstGeom>
-          <a:solidFill xmlns:a="http://schemas.openxmlformats.org/drawingml/2006/main">
-            <a:srgbClr val="70AD47"/>
-          </a:solidFill>
-          <a:ln xmlns:a="http://schemas.openxmlformats.org/drawingml/2006/main" w="0">
-            <a:solidFill>
-              <a:srgbClr val="70AD47"/>
-            </a:solidFill>
-            <a:prstDash val="solid"/>
-          </a:ln>
-        </p:spPr>
-        <p:style>
-          <a:lnRef xmlns:a="http://schemas.openxmlformats.org/drawingml/2006/main" idx="1">
-            <a:schemeClr val="accent1"/>
-          </a:lnRef>
-          <a:fillRef xmlns:a="http://schemas.openxmlformats.org/drawingml/2006/main" idx="3">
-            <a:schemeClr val="accent1"/>
-          </a:fillRef>
-          <a:effectRef xmlns:a="http://schemas.openxmlformats.org/drawingml/2006/main" idx="2">
-            <a:schemeClr val="accent1"/>
-          </a:effectRef>
-          <a:fontRef xmlns:a="http://schemas.openxmlformats.org/drawingml/2006/main" idx="minor">
-            <a:schemeClr val="lt1"/>
-          </a:fontRef>
-        </p:style>
-        <p:txBody>
-          <a:bodyPr xmlns:a="http://schemas.openxmlformats.org/drawingml/2006/main" anchor="ctr"/>
-          <a:lstStyle xmlns:a="http://schemas.openxmlformats.org/drawingml/2006/main"/>
-          <a:p xmlns:a="http://schemas.openxmlformats.org/drawingml/2006/main">
-            <a:pPr algn="ctr">
-              <a:buNone/>
-            </a:pPr>
-          </a:p>
-        </p:txBody>
-      </p:sp>
-      <p:sp>
-        <p:nvSpPr>
-          <p:cNvPr id="96" name="TextBox 95">
-            <a:extLst xmlns:a="http://schemas.openxmlformats.org/drawingml/2006/main">
-              <a:ext uri="{FF2B5EF4-FFF2-40B4-BE49-F238E27FC236}">
-                <a16:creationId xmlns:a16="http://schemas.microsoft.com/office/drawing/2014/main" id="{84CC21C4-EC75-450D-AA03-152A354EEF91}"/>
-              </a:ext>
-            </a:extLst>
-          </p:cNvPr>
-          <p:cNvSpPr>
-            <a:spLocks xmlns:a="http://schemas.openxmlformats.org/drawingml/2006/main" noGrp="1"/>
-          </p:cNvSpPr>
-          <p:nvPr/>
-        </p:nvSpPr>
-        <p:spPr>
-          <a:xfrm xmlns:a="http://schemas.openxmlformats.org/drawingml/2006/main">
-            <a:off x="11015894" y="5354548"/>
-            <a:ext cx="612412" cy="163122"/>
-          </a:xfrm>
-          <a:prstGeom xmlns:a="http://schemas.openxmlformats.org/drawingml/2006/main" prst="rect">
-            <a:avLst/>
-          </a:prstGeom>
-          <a:noFill xmlns:a="http://schemas.openxmlformats.org/drawingml/2006/main"/>
-        </p:spPr>
-        <p:txBody>
-          <a:bodyPr xmlns:a="http://schemas.openxmlformats.org/drawingml/2006/main" wrap="none" lIns="18288" tIns="4572" rIns="18288" bIns="4572" anchor="ctr">
-            <a:spAutoFit/>
-          </a:bodyPr>
-          <a:lstStyle xmlns:a="http://schemas.openxmlformats.org/drawingml/2006/main"/>
-          <a:p xmlns:a="http://schemas.openxmlformats.org/drawingml/2006/main">
-            <a:pPr algn="ctr">
-              <a:buNone/>
-            </a:pPr>
-            <a:r>
-              <a:rPr sz="1000" b="1" i="0">
-                <a:solidFill>
-                  <a:srgbClr val="FFFFFF"/>
-                </a:solidFill>
-                <a:latin typeface="Aptos"/>
-                <a:ea typeface="Aptos"/>
-                <a:cs typeface="Aptos"/>
-              </a:rPr>
-              <a:t>Completed</a:t>
-            </a:r>
-          </a:p>
-        </p:txBody>
-      </p:sp>
-      <p:sp>
-        <p:nvSpPr>
-          <p:cNvPr id="97" name="Generated Right Row 7">
-            <a:extLst xmlns:a="http://schemas.openxmlformats.org/drawingml/2006/main">
-              <a:ext uri="{FF2B5EF4-FFF2-40B4-BE49-F238E27FC236}">
-                <a16:creationId xmlns:a16="http://schemas.microsoft.com/office/drawing/2014/main" id="{FE4A94E6-0D09-4E27-8504-3FE06B2C5B68}"/>
-              </a:ext>
-            </a:extLst>
-          </p:cNvPr>
-          <p:cNvSpPr>
-            <a:spLocks xmlns:a="http://schemas.openxmlformats.org/drawingml/2006/main" noGrp="1"/>
-          </p:cNvSpPr>
-          <p:nvPr/>
-        </p:nvSpPr>
-        <p:spPr>
-          <a:xfrm xmlns:a="http://schemas.openxmlformats.org/drawingml/2006/main">
-            <a:off x="6263640" y="5870448"/>
-            <a:ext cx="5532120" cy="585216"/>
-          </a:xfrm>
-          <a:prstGeom xmlns:a="http://schemas.openxmlformats.org/drawingml/2006/main" prst="rect">
-            <a:avLst/>
-          </a:prstGeom>
-          <a:solidFill xmlns:a="http://schemas.openxmlformats.org/drawingml/2006/main">
-            <a:srgbClr val="F2F5FA"/>
-          </a:solidFill>
-          <a:ln xmlns:a="http://schemas.openxmlformats.org/drawingml/2006/main" w="0">
-            <a:solidFill>
-              <a:srgbClr val="F2F5FA"/>
-            </a:solidFill>
-            <a:prstDash val="solid"/>
-          </a:ln>
-        </p:spPr>
-      </p:sp>
-      <p:sp>
-        <p:nvSpPr>
-          <p:cNvPr id="98" name="Generated Right Task 7">
-            <a:extLst xmlns:a="http://schemas.openxmlformats.org/drawingml/2006/main">
-              <a:ext uri="{FF2B5EF4-FFF2-40B4-BE49-F238E27FC236}">
-                <a16:creationId xmlns:a16="http://schemas.microsoft.com/office/drawing/2014/main" id="{4A73104B-0ED4-422A-8447-A3EFABBB9869}"/>
-              </a:ext>
-            </a:extLst>
-          </p:cNvPr>
-          <p:cNvSpPr>
-            <a:spLocks xmlns:a="http://schemas.openxmlformats.org/drawingml/2006/main" noGrp="1"/>
-          </p:cNvSpPr>
-          <p:nvPr/>
-        </p:nvSpPr>
-        <p:spPr>
-          <a:xfrm xmlns:a="http://schemas.openxmlformats.org/drawingml/2006/main">
-            <a:off x="6373368" y="6020753"/>
-            <a:ext cx="3009900" cy="317183"/>
-          </a:xfrm>
-          <a:prstGeom xmlns:a="http://schemas.openxmlformats.org/drawingml/2006/main" prst="rect">
-            <a:avLst/>
-          </a:prstGeom>
-          <a:noFill xmlns:a="http://schemas.openxmlformats.org/drawingml/2006/main"/>
-          <a:ln xmlns:a="http://schemas.openxmlformats.org/drawingml/2006/main" w="0">
-            <a:noFill/>
-            <a:prstDash val="solid"/>
-          </a:ln>
-        </p:spPr>
-        <p:txBody>
-          <a:bodyPr xmlns:a="http://schemas.openxmlformats.org/drawingml/2006/main" wrap="square" lIns="19050" tIns="4763" rIns="19050" bIns="4763" anchor="ctr">
-            <a:normAutofit fontScale="100000"/>
-          </a:bodyPr>
-          <a:lstStyle xmlns:a="http://schemas.openxmlformats.org/drawingml/2006/main"/>
-          <a:p xmlns:a="http://schemas.openxmlformats.org/drawingml/2006/main">
-            <a:pPr algn="l"/>
-            <a:r>
-              <a:rPr sz="1000" b="0">
-                <a:solidFill>
-                  <a:srgbClr val="202020"/>
-                </a:solidFill>
-                <a:latin typeface="Aptos"/>
-                <a:ea typeface="Aptos"/>
-                <a:cs typeface="Aptos"/>
-              </a:rPr>
-              <a:t>Tariff - LT</a:t>
-            </a:r>
-          </a:p>
-        </p:txBody>
-      </p:sp>
-      <p:sp>
-        <p:nvSpPr>
-          <p:cNvPr id="99" name="Generated Right Savings 7">
-            <a:extLst xmlns:a="http://schemas.openxmlformats.org/drawingml/2006/main">
-              <a:ext uri="{FF2B5EF4-FFF2-40B4-BE49-F238E27FC236}">
-                <a16:creationId xmlns:a16="http://schemas.microsoft.com/office/drawing/2014/main" id="{6E6D311C-306F-4152-B55B-31F6B410B0A6}"/>
-              </a:ext>
-            </a:extLst>
-          </p:cNvPr>
-          <p:cNvSpPr>
-            <a:spLocks xmlns:a="http://schemas.openxmlformats.org/drawingml/2006/main" noGrp="1"/>
-          </p:cNvSpPr>
-          <p:nvPr/>
-        </p:nvSpPr>
-        <p:spPr>
-          <a:xfrm xmlns:a="http://schemas.openxmlformats.org/drawingml/2006/main">
-            <a:off x="9486900" y="6026658"/>
-            <a:ext cx="514350" cy="163163"/>
-          </a:xfrm>
-          <a:prstGeom xmlns:a="http://schemas.openxmlformats.org/drawingml/2006/main" prst="rect">
-            <a:avLst/>
-          </a:prstGeom>
-          <a:noFill xmlns:a="http://schemas.openxmlformats.org/drawingml/2006/main"/>
-          <a:ln xmlns:a="http://schemas.openxmlformats.org/drawingml/2006/main" w="0">
-            <a:noFill/>
-            <a:prstDash val="solid"/>
-          </a:ln>
-        </p:spPr>
-        <p:txBody>
-          <a:bodyPr xmlns:a="http://schemas.openxmlformats.org/drawingml/2006/main" wrap="none" lIns="19050" tIns="4763" rIns="19050" bIns="4763" anchor="ctr">
-            <a:normAutofit fontScale="100000"/>
-          </a:bodyPr>
-          <a:lstStyle xmlns:a="http://schemas.openxmlformats.org/drawingml/2006/main"/>
-          <a:p xmlns:a="http://schemas.openxmlformats.org/drawingml/2006/main">
-            <a:pPr algn="r"/>
-            <a:r>
-              <a:rPr sz="1000" b="1">
-                <a:solidFill>
-                  <a:srgbClr val="202020"/>
-                </a:solidFill>
-                <a:latin typeface="Aptos"/>
-                <a:ea typeface="Aptos"/>
-                <a:cs typeface="Aptos"/>
-              </a:rPr>
-              <a:t>$0.00</a:t>
-            </a:r>
-          </a:p>
-        </p:txBody>
-      </p:sp>
-      <p:sp>
-        <p:nvSpPr>
-          <p:cNvPr id="100" name="Generated Right Date 7">
-            <a:extLst xmlns:a="http://schemas.openxmlformats.org/drawingml/2006/main">
-              <a:ext uri="{FF2B5EF4-FFF2-40B4-BE49-F238E27FC236}">
-                <a16:creationId xmlns:a16="http://schemas.microsoft.com/office/drawing/2014/main" id="{0BB42F30-EAA0-4D7E-8CFB-F8B2CE2252C4}"/>
-              </a:ext>
-            </a:extLst>
-          </p:cNvPr>
-          <p:cNvSpPr>
-            <a:spLocks xmlns:a="http://schemas.openxmlformats.org/drawingml/2006/main" noGrp="1"/>
-          </p:cNvSpPr>
-          <p:nvPr/>
-        </p:nvSpPr>
-        <p:spPr>
-          <a:xfrm xmlns:a="http://schemas.openxmlformats.org/drawingml/2006/main">
-            <a:off x="10163175" y="6026658"/>
-            <a:ext cx="666750" cy="163163"/>
-          </a:xfrm>
-          <a:prstGeom xmlns:a="http://schemas.openxmlformats.org/drawingml/2006/main" prst="rect">
-            <a:avLst/>
-          </a:prstGeom>
-          <a:noFill xmlns:a="http://schemas.openxmlformats.org/drawingml/2006/main"/>
-          <a:ln xmlns:a="http://schemas.openxmlformats.org/drawingml/2006/main" w="0">
-            <a:noFill/>
-            <a:prstDash val="solid"/>
-          </a:ln>
-        </p:spPr>
-        <p:txBody>
-          <a:bodyPr xmlns:a="http://schemas.openxmlformats.org/drawingml/2006/main" wrap="none" lIns="19050" tIns="4763" rIns="19050" bIns="4763" anchor="ctr">
-            <a:normAutofit fontScale="100000"/>
-          </a:bodyPr>
-          <a:lstStyle xmlns:a="http://schemas.openxmlformats.org/drawingml/2006/main"/>
-          <a:p xmlns:a="http://schemas.openxmlformats.org/drawingml/2006/main">
-            <a:pPr algn="ctr"/>
-            <a:r>
-              <a:rPr sz="1000" b="0">
-                <a:solidFill>
-                  <a:srgbClr val="202020"/>
-                </a:solidFill>
-                <a:latin typeface="Aptos"/>
-                <a:ea typeface="Aptos"/>
-                <a:cs typeface="Aptos"/>
-              </a:rPr>
-              <a:t>6/15/2026</a:t>
-            </a:r>
-          </a:p>
-        </p:txBody>
-      </p:sp>
-      <p:sp>
-        <p:nvSpPr>
-          <p:cNvPr id="101" name="Generated Right Status Pill 7">
-            <a:extLst xmlns:a="http://schemas.openxmlformats.org/drawingml/2006/main">
-              <a:ext uri="{FF2B5EF4-FFF2-40B4-BE49-F238E27FC236}">
-                <a16:creationId xmlns:a16="http://schemas.microsoft.com/office/drawing/2014/main" id="{3C3323C6-DBD9-4377-8915-8EF007806E94}"/>
-              </a:ext>
-            </a:extLst>
-          </p:cNvPr>
-          <p:cNvSpPr>
-            <a:spLocks xmlns:a="http://schemas.openxmlformats.org/drawingml/2006/main" noGrp="1"/>
-          </p:cNvSpPr>
-          <p:nvPr/>
-        </p:nvSpPr>
-        <p:spPr>
-          <a:xfrm xmlns:a="http://schemas.openxmlformats.org/drawingml/2006/main">
-            <a:off x="10910602" y="6007608"/>
-            <a:ext cx="822960" cy="256032"/>
-          </a:xfrm>
-          <a:prstGeom xmlns:a="http://schemas.openxmlformats.org/drawingml/2006/main" prst="roundRect">
-            <a:avLst>
-              <a:gd name="adj" fmla="val 29762"/>
-            </a:avLst>
-          </a:prstGeom>
-          <a:solidFill xmlns:a="http://schemas.openxmlformats.org/drawingml/2006/main">
-            <a:srgbClr val="70AD47"/>
-          </a:solidFill>
-          <a:ln xmlns:a="http://schemas.openxmlformats.org/drawingml/2006/main" w="0">
-            <a:solidFill>
-              <a:srgbClr val="70AD47"/>
-            </a:solidFill>
-            <a:prstDash val="solid"/>
-          </a:ln>
-        </p:spPr>
-      </p:sp>
-      <p:sp>
-        <p:nvSpPr>
-          <p:cNvPr id="102" name="Generated Right Status 7">
-            <a:extLst xmlns:a="http://schemas.openxmlformats.org/drawingml/2006/main">
-              <a:ext uri="{FF2B5EF4-FFF2-40B4-BE49-F238E27FC236}">
-                <a16:creationId xmlns:a16="http://schemas.microsoft.com/office/drawing/2014/main" id="{6518C32D-C1F4-4F7F-91D9-940004E1E82B}"/>
-              </a:ext>
-            </a:extLst>
-          </p:cNvPr>
-          <p:cNvSpPr>
-            <a:spLocks xmlns:a="http://schemas.openxmlformats.org/drawingml/2006/main" noGrp="1"/>
-          </p:cNvSpPr>
-          <p:nvPr/>
-        </p:nvSpPr>
-        <p:spPr>
-          <a:xfrm xmlns:a="http://schemas.openxmlformats.org/drawingml/2006/main">
-            <a:off x="10963275" y="6022086"/>
-            <a:ext cx="714375" cy="163163"/>
-          </a:xfrm>
-          <a:prstGeom xmlns:a="http://schemas.openxmlformats.org/drawingml/2006/main" prst="rect">
-            <a:avLst/>
-          </a:prstGeom>
-          <a:noFill xmlns:a="http://schemas.openxmlformats.org/drawingml/2006/main"/>
-          <a:ln xmlns:a="http://schemas.openxmlformats.org/drawingml/2006/main" w="0">
-            <a:noFill/>
-            <a:prstDash val="solid"/>
-          </a:ln>
-        </p:spPr>
-        <p:txBody>
-          <a:bodyPr xmlns:a="http://schemas.openxmlformats.org/drawingml/2006/main" wrap="none" lIns="19050" tIns="4763" rIns="19050" bIns="4763" anchor="ctr">
-            <a:normAutofit fontScale="100000"/>
-          </a:bodyPr>
-          <a:lstStyle xmlns:a="http://schemas.openxmlformats.org/drawingml/2006/main"/>
-          <a:p xmlns:a="http://schemas.openxmlformats.org/drawingml/2006/main">
-            <a:pPr algn="ctr"/>
-            <a:r>
-              <a:rPr sz="1000" b="1">
-                <a:solidFill>
-                  <a:srgbClr val="FFFFFF"/>
-                </a:solidFill>
-                <a:latin typeface="Aptos"/>
-                <a:ea typeface="Aptos"/>
-                <a:cs typeface="Aptos"/>
-              </a:rPr>
-              <a:t>Completed</a:t>
+              <a:t>On Track</a:t>
             </a:r>
           </a:p>
         </p:txBody>
@@ -6235,6 +5150,3502 @@
 </file>
 
 <file path=ppt/slides/slide2.xml><?xml version="1.0" encoding="utf-8"?>
+<p:sld xmlns:p="http://schemas.openxmlformats.org/presentationml/2006/main">
+  <p:cSld>
+    <p:bg>
+      <p:bgPr>
+        <a:solidFill xmlns:a="http://schemas.openxmlformats.org/drawingml/2006/main">
+          <a:srgbClr val="FFFFFF"/>
+        </a:solidFill>
+      </p:bgPr>
+    </p:bg>
+    <p:spTree>
+      <p:nvGrpSpPr>
+        <p:cNvPr id="1" name=""/>
+        <p:cNvGrpSpPr/>
+        <p:nvPr/>
+      </p:nvGrpSpPr>
+      <p:grpSpPr>
+        <a:xfrm xmlns:a="http://schemas.openxmlformats.org/drawingml/2006/main"/>
+      </p:grpSpPr>
+      <p:sp>
+        <p:nvSpPr>
+          <p:cNvPr id="2" name="Rectangle 1">
+            <a:extLst xmlns:a="http://schemas.openxmlformats.org/drawingml/2006/main">
+              <a:ext uri="{FF2B5EF4-FFF2-40B4-BE49-F238E27FC236}">
+                <a16:creationId xmlns:a16="http://schemas.microsoft.com/office/drawing/2014/main" id="{C39ACC8F-9CA7-4AC4-9F23-E074ABCA20A8}"/>
+              </a:ext>
+            </a:extLst>
+          </p:cNvPr>
+          <p:cNvSpPr>
+            <a:spLocks xmlns:a="http://schemas.openxmlformats.org/drawingml/2006/main" noGrp="1"/>
+          </p:cNvSpPr>
+          <p:nvPr/>
+        </p:nvSpPr>
+        <p:spPr>
+          <a:xfrm xmlns:a="http://schemas.openxmlformats.org/drawingml/2006/main">
+            <a:off x="0" y="0"/>
+            <a:ext cx="12191695" cy="621792"/>
+          </a:xfrm>
+          <a:prstGeom xmlns:a="http://schemas.openxmlformats.org/drawingml/2006/main" prst="rect">
+            <a:avLst/>
+          </a:prstGeom>
+          <a:solidFill xmlns:a="http://schemas.openxmlformats.org/drawingml/2006/main">
+            <a:srgbClr val="1F4E79"/>
+          </a:solidFill>
+          <a:ln xmlns:a="http://schemas.openxmlformats.org/drawingml/2006/main">
+            <a:solidFill>
+              <a:srgbClr val="1F4E79"/>
+            </a:solidFill>
+          </a:ln>
+        </p:spPr>
+        <p:style>
+          <a:lnRef xmlns:a="http://schemas.openxmlformats.org/drawingml/2006/main" idx="1">
+            <a:schemeClr val="accent1"/>
+          </a:lnRef>
+          <a:fillRef xmlns:a="http://schemas.openxmlformats.org/drawingml/2006/main" idx="3">
+            <a:schemeClr val="accent1"/>
+          </a:fillRef>
+          <a:effectRef xmlns:a="http://schemas.openxmlformats.org/drawingml/2006/main" idx="2">
+            <a:schemeClr val="accent1"/>
+          </a:effectRef>
+          <a:fontRef xmlns:a="http://schemas.openxmlformats.org/drawingml/2006/main" idx="minor">
+            <a:schemeClr val="lt1"/>
+          </a:fontRef>
+        </p:style>
+        <p:txBody>
+          <a:bodyPr xmlns:a="http://schemas.openxmlformats.org/drawingml/2006/main" anchor="ctr"/>
+          <a:lstStyle xmlns:a="http://schemas.openxmlformats.org/drawingml/2006/main"/>
+          <a:p xmlns:a="http://schemas.openxmlformats.org/drawingml/2006/main">
+            <a:pPr algn="ctr">
+              <a:buNone/>
+            </a:pPr>
+          </a:p>
+        </p:txBody>
+      </p:sp>
+      <p:sp>
+        <p:nvSpPr>
+          <p:cNvPr id="3" name="TextBox 2">
+            <a:extLst xmlns:a="http://schemas.openxmlformats.org/drawingml/2006/main">
+              <a:ext uri="{FF2B5EF4-FFF2-40B4-BE49-F238E27FC236}">
+                <a16:creationId xmlns:a16="http://schemas.microsoft.com/office/drawing/2014/main" id="{C85C7C12-7896-4E34-B169-ED89CA6A535F}"/>
+              </a:ext>
+            </a:extLst>
+          </p:cNvPr>
+          <p:cNvSpPr>
+            <a:spLocks xmlns:a="http://schemas.openxmlformats.org/drawingml/2006/main" noGrp="1"/>
+          </p:cNvSpPr>
+          <p:nvPr/>
+        </p:nvSpPr>
+        <p:spPr>
+          <a:xfrm xmlns:a="http://schemas.openxmlformats.org/drawingml/2006/main">
+            <a:off x="320040" y="137160"/>
+            <a:ext cx="7406640" cy="283464"/>
+          </a:xfrm>
+          <a:prstGeom xmlns:a="http://schemas.openxmlformats.org/drawingml/2006/main" prst="rect">
+            <a:avLst/>
+          </a:prstGeom>
+          <a:noFill xmlns:a="http://schemas.openxmlformats.org/drawingml/2006/main"/>
+        </p:spPr>
+        <p:txBody>
+          <a:bodyPr xmlns:a="http://schemas.openxmlformats.org/drawingml/2006/main" wrap="none" lIns="18288" tIns="4572" rIns="18288" bIns="4572" anchor="ctr">
+            <a:spAutoFit/>
+          </a:bodyPr>
+          <a:lstStyle xmlns:a="http://schemas.openxmlformats.org/drawingml/2006/main"/>
+          <a:p xmlns:a="http://schemas.openxmlformats.org/drawingml/2006/main">
+            <a:pPr algn="l">
+              <a:buNone/>
+            </a:pPr>
+            <a:r>
+              <a:rPr sz="1800" b="1" i="0">
+                <a:solidFill>
+                  <a:srgbClr val="FFFFFF"/>
+                </a:solidFill>
+                <a:latin typeface="Aptos Display"/>
+                <a:ea typeface="Aptos Display"/>
+                <a:cs typeface="Aptos Display"/>
+              </a:rPr>
+              <a:t>Cassette VAVE activities · 2 of 2</a:t>
+            </a:r>
+          </a:p>
+        </p:txBody>
+      </p:sp>
+      <p:sp>
+        <p:nvSpPr>
+          <p:cNvPr id="6" name="Rectangle 5">
+            <a:extLst xmlns:a="http://schemas.openxmlformats.org/drawingml/2006/main">
+              <a:ext uri="{FF2B5EF4-FFF2-40B4-BE49-F238E27FC236}">
+                <a16:creationId xmlns:a16="http://schemas.microsoft.com/office/drawing/2014/main" id="{9E23528D-3FDB-43D3-A55B-8DBF031CD8DF}"/>
+              </a:ext>
+            </a:extLst>
+          </p:cNvPr>
+          <p:cNvSpPr>
+            <a:spLocks xmlns:a="http://schemas.openxmlformats.org/drawingml/2006/main" noGrp="1"/>
+          </p:cNvSpPr>
+          <p:nvPr/>
+        </p:nvSpPr>
+        <p:spPr>
+          <a:xfrm xmlns:a="http://schemas.openxmlformats.org/drawingml/2006/main">
+            <a:off x="411480" y="914400"/>
+            <a:ext cx="11365992" cy="329184"/>
+          </a:xfrm>
+          <a:prstGeom xmlns:a="http://schemas.openxmlformats.org/drawingml/2006/main" prst="rect">
+            <a:avLst/>
+          </a:prstGeom>
+          <a:solidFill xmlns:a="http://schemas.openxmlformats.org/drawingml/2006/main">
+            <a:srgbClr val="4472C4"/>
+          </a:solidFill>
+          <a:ln xmlns:a="http://schemas.openxmlformats.org/drawingml/2006/main" w="0">
+            <a:solidFill>
+              <a:srgbClr val="4472C4"/>
+            </a:solidFill>
+            <a:prstDash val="solid"/>
+          </a:ln>
+        </p:spPr>
+        <p:style>
+          <a:lnRef xmlns:a="http://schemas.openxmlformats.org/drawingml/2006/main" idx="1">
+            <a:schemeClr val="accent1"/>
+          </a:lnRef>
+          <a:fillRef xmlns:a="http://schemas.openxmlformats.org/drawingml/2006/main" idx="3">
+            <a:schemeClr val="accent1"/>
+          </a:fillRef>
+          <a:effectRef xmlns:a="http://schemas.openxmlformats.org/drawingml/2006/main" idx="2">
+            <a:schemeClr val="accent1"/>
+          </a:effectRef>
+          <a:fontRef xmlns:a="http://schemas.openxmlformats.org/drawingml/2006/main" idx="minor">
+            <a:schemeClr val="lt1"/>
+          </a:fontRef>
+        </p:style>
+        <p:txBody>
+          <a:bodyPr xmlns:a="http://schemas.openxmlformats.org/drawingml/2006/main" anchor="ctr"/>
+          <a:lstStyle xmlns:a="http://schemas.openxmlformats.org/drawingml/2006/main"/>
+          <a:p xmlns:a="http://schemas.openxmlformats.org/drawingml/2006/main">
+            <a:pPr algn="ctr">
+              <a:buNone/>
+            </a:pPr>
+          </a:p>
+        </p:txBody>
+      </p:sp>
+      <p:sp>
+        <p:nvSpPr>
+          <p:cNvPr id="7" name="TextBox 6">
+            <a:extLst xmlns:a="http://schemas.openxmlformats.org/drawingml/2006/main">
+              <a:ext uri="{FF2B5EF4-FFF2-40B4-BE49-F238E27FC236}">
+                <a16:creationId xmlns:a16="http://schemas.microsoft.com/office/drawing/2014/main" id="{29624941-14AE-457B-A633-73B4FE02B6BB}"/>
+              </a:ext>
+            </a:extLst>
+          </p:cNvPr>
+          <p:cNvSpPr>
+            <a:spLocks xmlns:a="http://schemas.openxmlformats.org/drawingml/2006/main" noGrp="1"/>
+          </p:cNvSpPr>
+          <p:nvPr/>
+        </p:nvSpPr>
+        <p:spPr>
+          <a:xfrm xmlns:a="http://schemas.openxmlformats.org/drawingml/2006/main">
+            <a:off x="566928" y="968327"/>
+            <a:ext cx="1738425" cy="193899"/>
+          </a:xfrm>
+          <a:prstGeom xmlns:a="http://schemas.openxmlformats.org/drawingml/2006/main" prst="rect">
+            <a:avLst/>
+          </a:prstGeom>
+          <a:noFill xmlns:a="http://schemas.openxmlformats.org/drawingml/2006/main"/>
+        </p:spPr>
+        <p:txBody>
+          <a:bodyPr xmlns:a="http://schemas.openxmlformats.org/drawingml/2006/main" wrap="none" lIns="18288" tIns="4572" rIns="18288" bIns="4572" anchor="ctr">
+            <a:spAutoFit/>
+          </a:bodyPr>
+          <a:lstStyle xmlns:a="http://schemas.openxmlformats.org/drawingml/2006/main"/>
+          <a:p xmlns:a="http://schemas.openxmlformats.org/drawingml/2006/main">
+            <a:pPr algn="l">
+              <a:buNone/>
+            </a:pPr>
+            <a:r>
+              <a:rPr sz="1200" b="1" i="0">
+                <a:solidFill>
+                  <a:srgbClr val="FFFFFF"/>
+                </a:solidFill>
+                <a:latin typeface="Aptos"/>
+                <a:ea typeface="Aptos"/>
+                <a:cs typeface="Aptos"/>
+              </a:rPr>
+              <a:t>19 savings opportunities</a:t>
+            </a:r>
+          </a:p>
+        </p:txBody>
+      </p:sp>
+      <p:sp>
+        <p:nvSpPr>
+          <p:cNvPr id="8" name="TextBox 7">
+            <a:extLst xmlns:a="http://schemas.openxmlformats.org/drawingml/2006/main">
+              <a:ext uri="{FF2B5EF4-FFF2-40B4-BE49-F238E27FC236}">
+                <a16:creationId xmlns:a16="http://schemas.microsoft.com/office/drawing/2014/main" id="{E6D5209A-53C3-4868-B8BC-50BF92AB149E}"/>
+              </a:ext>
+            </a:extLst>
+          </p:cNvPr>
+          <p:cNvSpPr>
+            <a:spLocks xmlns:a="http://schemas.openxmlformats.org/drawingml/2006/main" noGrp="1"/>
+          </p:cNvSpPr>
+          <p:nvPr/>
+        </p:nvSpPr>
+        <p:spPr>
+          <a:xfrm xmlns:a="http://schemas.openxmlformats.org/drawingml/2006/main">
+            <a:off x="9784080" y="996696"/>
+            <a:ext cx="1737360" cy="153924"/>
+          </a:xfrm>
+          <a:prstGeom xmlns:a="http://schemas.openxmlformats.org/drawingml/2006/main" prst="rect">
+            <a:avLst/>
+          </a:prstGeom>
+          <a:noFill xmlns:a="http://schemas.openxmlformats.org/drawingml/2006/main"/>
+        </p:spPr>
+        <p:txBody>
+          <a:bodyPr xmlns:a="http://schemas.openxmlformats.org/drawingml/2006/main" wrap="none" lIns="18288" tIns="4572" rIns="18288" bIns="4572" anchor="ctr">
+            <a:spAutoFit/>
+          </a:bodyPr>
+          <a:lstStyle xmlns:a="http://schemas.openxmlformats.org/drawingml/2006/main"/>
+          <a:p xmlns:a="http://schemas.openxmlformats.org/drawingml/2006/main">
+            <a:pPr algn="r">
+              <a:buNone/>
+            </a:pPr>
+            <a:r>
+              <a:rPr sz="950" b="1" i="0">
+                <a:solidFill>
+                  <a:srgbClr val="FFFFFF"/>
+                </a:solidFill>
+                <a:latin typeface="Aptos"/>
+                <a:ea typeface="Aptos"/>
+                <a:cs typeface="Aptos"/>
+              </a:rPr>
+              <a:t>Total: $283.20</a:t>
+            </a:r>
+          </a:p>
+        </p:txBody>
+      </p:sp>
+      <p:sp>
+        <p:nvSpPr>
+          <p:cNvPr id="9" name="Rectangle 8">
+            <a:extLst xmlns:a="http://schemas.openxmlformats.org/drawingml/2006/main">
+              <a:ext uri="{FF2B5EF4-FFF2-40B4-BE49-F238E27FC236}">
+                <a16:creationId xmlns:a16="http://schemas.microsoft.com/office/drawing/2014/main" id="{2AF1FD03-0C86-4327-A42D-503B2BF5FAE4}"/>
+              </a:ext>
+            </a:extLst>
+          </p:cNvPr>
+          <p:cNvSpPr>
+            <a:spLocks xmlns:a="http://schemas.openxmlformats.org/drawingml/2006/main" noGrp="1"/>
+          </p:cNvSpPr>
+          <p:nvPr/>
+        </p:nvSpPr>
+        <p:spPr>
+          <a:xfrm xmlns:a="http://schemas.openxmlformats.org/drawingml/2006/main">
+            <a:off x="502920" y="1508760"/>
+            <a:ext cx="5532120" cy="274320"/>
+          </a:xfrm>
+          <a:prstGeom xmlns:a="http://schemas.openxmlformats.org/drawingml/2006/main" prst="rect">
+            <a:avLst/>
+          </a:prstGeom>
+          <a:solidFill xmlns:a="http://schemas.openxmlformats.org/drawingml/2006/main">
+            <a:srgbClr val="E8EFF7"/>
+          </a:solidFill>
+          <a:ln xmlns:a="http://schemas.openxmlformats.org/drawingml/2006/main">
+            <a:solidFill>
+              <a:srgbClr val="D9D9D9"/>
+            </a:solidFill>
+          </a:ln>
+        </p:spPr>
+        <p:style>
+          <a:lnRef xmlns:a="http://schemas.openxmlformats.org/drawingml/2006/main" idx="1">
+            <a:schemeClr val="accent1"/>
+          </a:lnRef>
+          <a:fillRef xmlns:a="http://schemas.openxmlformats.org/drawingml/2006/main" idx="3">
+            <a:schemeClr val="accent1"/>
+          </a:fillRef>
+          <a:effectRef xmlns:a="http://schemas.openxmlformats.org/drawingml/2006/main" idx="2">
+            <a:schemeClr val="accent1"/>
+          </a:effectRef>
+          <a:fontRef xmlns:a="http://schemas.openxmlformats.org/drawingml/2006/main" idx="minor">
+            <a:schemeClr val="lt1"/>
+          </a:fontRef>
+        </p:style>
+        <p:txBody>
+          <a:bodyPr xmlns:a="http://schemas.openxmlformats.org/drawingml/2006/main" anchor="ctr"/>
+          <a:lstStyle xmlns:a="http://schemas.openxmlformats.org/drawingml/2006/main"/>
+          <a:p xmlns:a="http://schemas.openxmlformats.org/drawingml/2006/main">
+            <a:pPr algn="ctr">
+              <a:buNone/>
+            </a:pPr>
+          </a:p>
+        </p:txBody>
+      </p:sp>
+      <p:sp>
+        <p:nvSpPr>
+          <p:cNvPr id="10" name="TextBox 9">
+            <a:extLst xmlns:a="http://schemas.openxmlformats.org/drawingml/2006/main">
+              <a:ext uri="{FF2B5EF4-FFF2-40B4-BE49-F238E27FC236}">
+                <a16:creationId xmlns:a16="http://schemas.microsoft.com/office/drawing/2014/main" id="{99D4BDBA-26BA-4D15-92B4-53D335F265E2}"/>
+              </a:ext>
+            </a:extLst>
+          </p:cNvPr>
+          <p:cNvSpPr>
+            <a:spLocks xmlns:a="http://schemas.openxmlformats.org/drawingml/2006/main" noGrp="1"/>
+          </p:cNvSpPr>
+          <p:nvPr/>
+        </p:nvSpPr>
+        <p:spPr>
+          <a:xfrm xmlns:a="http://schemas.openxmlformats.org/drawingml/2006/main">
+            <a:off x="612648" y="1541499"/>
+            <a:ext cx="679738" cy="163122"/>
+          </a:xfrm>
+          <a:prstGeom xmlns:a="http://schemas.openxmlformats.org/drawingml/2006/main" prst="rect">
+            <a:avLst/>
+          </a:prstGeom>
+          <a:noFill xmlns:a="http://schemas.openxmlformats.org/drawingml/2006/main"/>
+        </p:spPr>
+        <p:txBody>
+          <a:bodyPr xmlns:a="http://schemas.openxmlformats.org/drawingml/2006/main" wrap="none" lIns="18288" tIns="4572" rIns="18288" bIns="4572" anchor="ctr">
+            <a:spAutoFit/>
+          </a:bodyPr>
+          <a:lstStyle xmlns:a="http://schemas.openxmlformats.org/drawingml/2006/main"/>
+          <a:p xmlns:a="http://schemas.openxmlformats.org/drawingml/2006/main">
+            <a:pPr algn="l">
+              <a:buNone/>
+            </a:pPr>
+            <a:r>
+              <a:rPr sz="1000" b="1" i="0">
+                <a:solidFill>
+                  <a:srgbClr val="202020"/>
+                </a:solidFill>
+                <a:latin typeface="Aptos"/>
+                <a:ea typeface="Aptos"/>
+                <a:cs typeface="Aptos"/>
+              </a:rPr>
+              <a:t>Task Name</a:t>
+            </a:r>
+          </a:p>
+        </p:txBody>
+      </p:sp>
+      <p:sp>
+        <p:nvSpPr>
+          <p:cNvPr id="11" name="TextBox 10">
+            <a:extLst xmlns:a="http://schemas.openxmlformats.org/drawingml/2006/main">
+              <a:ext uri="{FF2B5EF4-FFF2-40B4-BE49-F238E27FC236}">
+                <a16:creationId xmlns:a16="http://schemas.microsoft.com/office/drawing/2014/main" id="{6901B249-CCFD-4644-90FC-D764F759F91C}"/>
+              </a:ext>
+            </a:extLst>
+          </p:cNvPr>
+          <p:cNvSpPr>
+            <a:spLocks xmlns:a="http://schemas.openxmlformats.org/drawingml/2006/main" noGrp="1"/>
+          </p:cNvSpPr>
+          <p:nvPr/>
+        </p:nvSpPr>
+        <p:spPr>
+          <a:xfrm xmlns:a="http://schemas.openxmlformats.org/drawingml/2006/main">
+            <a:off x="3745612" y="1541499"/>
+            <a:ext cx="485774" cy="163122"/>
+          </a:xfrm>
+          <a:prstGeom xmlns:a="http://schemas.openxmlformats.org/drawingml/2006/main" prst="rect">
+            <a:avLst/>
+          </a:prstGeom>
+          <a:noFill xmlns:a="http://schemas.openxmlformats.org/drawingml/2006/main"/>
+        </p:spPr>
+        <p:txBody>
+          <a:bodyPr xmlns:a="http://schemas.openxmlformats.org/drawingml/2006/main" wrap="none" lIns="18288" tIns="4572" rIns="18288" bIns="4572" anchor="ctr">
+            <a:spAutoFit/>
+          </a:bodyPr>
+          <a:lstStyle xmlns:a="http://schemas.openxmlformats.org/drawingml/2006/main"/>
+          <a:p xmlns:a="http://schemas.openxmlformats.org/drawingml/2006/main">
+            <a:pPr algn="r">
+              <a:buNone/>
+            </a:pPr>
+            <a:r>
+              <a:rPr sz="1000" b="1" i="0">
+                <a:solidFill>
+                  <a:srgbClr val="202020"/>
+                </a:solidFill>
+                <a:latin typeface="Aptos"/>
+                <a:ea typeface="Aptos"/>
+                <a:cs typeface="Aptos"/>
+              </a:rPr>
+              <a:t>Savings</a:t>
+            </a:r>
+          </a:p>
+        </p:txBody>
+      </p:sp>
+      <p:sp>
+        <p:nvSpPr>
+          <p:cNvPr id="12" name="TextBox 11">
+            <a:extLst xmlns:a="http://schemas.openxmlformats.org/drawingml/2006/main">
+              <a:ext uri="{FF2B5EF4-FFF2-40B4-BE49-F238E27FC236}">
+                <a16:creationId xmlns:a16="http://schemas.microsoft.com/office/drawing/2014/main" id="{3172212E-F5C0-4A0A-BB19-F960E114F458}"/>
+              </a:ext>
+            </a:extLst>
+          </p:cNvPr>
+          <p:cNvSpPr>
+            <a:spLocks xmlns:a="http://schemas.openxmlformats.org/drawingml/2006/main" noGrp="1"/>
+          </p:cNvSpPr>
+          <p:nvPr/>
+        </p:nvSpPr>
+        <p:spPr>
+          <a:xfrm xmlns:a="http://schemas.openxmlformats.org/drawingml/2006/main">
+            <a:off x="4574711" y="1541499"/>
+            <a:ext cx="259751" cy="163122"/>
+          </a:xfrm>
+          <a:prstGeom xmlns:a="http://schemas.openxmlformats.org/drawingml/2006/main" prst="rect">
+            <a:avLst/>
+          </a:prstGeom>
+          <a:noFill xmlns:a="http://schemas.openxmlformats.org/drawingml/2006/main"/>
+        </p:spPr>
+        <p:txBody>
+          <a:bodyPr xmlns:a="http://schemas.openxmlformats.org/drawingml/2006/main" wrap="none" lIns="18288" tIns="4572" rIns="18288" bIns="4572" anchor="ctr">
+            <a:spAutoFit/>
+          </a:bodyPr>
+          <a:lstStyle xmlns:a="http://schemas.openxmlformats.org/drawingml/2006/main"/>
+          <a:p xmlns:a="http://schemas.openxmlformats.org/drawingml/2006/main">
+            <a:pPr algn="ctr">
+              <a:buNone/>
+            </a:pPr>
+            <a:r>
+              <a:rPr sz="1000" b="1" i="0">
+                <a:solidFill>
+                  <a:srgbClr val="202020"/>
+                </a:solidFill>
+                <a:latin typeface="Aptos"/>
+                <a:ea typeface="Aptos"/>
+                <a:cs typeface="Aptos"/>
+              </a:rPr>
+              <a:t>End</a:t>
+            </a:r>
+          </a:p>
+        </p:txBody>
+      </p:sp>
+      <p:sp>
+        <p:nvSpPr>
+          <p:cNvPr id="13" name="TextBox 12">
+            <a:extLst xmlns:a="http://schemas.openxmlformats.org/drawingml/2006/main">
+              <a:ext uri="{FF2B5EF4-FFF2-40B4-BE49-F238E27FC236}">
+                <a16:creationId xmlns:a16="http://schemas.microsoft.com/office/drawing/2014/main" id="{0401440E-DB0B-4B81-A981-1EA7042BBDE2}"/>
+              </a:ext>
+            </a:extLst>
+          </p:cNvPr>
+          <p:cNvSpPr>
+            <a:spLocks xmlns:a="http://schemas.openxmlformats.org/drawingml/2006/main" noGrp="1"/>
+          </p:cNvSpPr>
+          <p:nvPr/>
+        </p:nvSpPr>
+        <p:spPr>
+          <a:xfrm xmlns:a="http://schemas.openxmlformats.org/drawingml/2006/main">
+            <a:off x="5317183" y="1541499"/>
+            <a:ext cx="415242" cy="163122"/>
+          </a:xfrm>
+          <a:prstGeom xmlns:a="http://schemas.openxmlformats.org/drawingml/2006/main" prst="rect">
+            <a:avLst/>
+          </a:prstGeom>
+          <a:noFill xmlns:a="http://schemas.openxmlformats.org/drawingml/2006/main"/>
+        </p:spPr>
+        <p:txBody>
+          <a:bodyPr xmlns:a="http://schemas.openxmlformats.org/drawingml/2006/main" wrap="none" lIns="18288" tIns="4572" rIns="18288" bIns="4572" anchor="ctr">
+            <a:spAutoFit/>
+          </a:bodyPr>
+          <a:lstStyle xmlns:a="http://schemas.openxmlformats.org/drawingml/2006/main"/>
+          <a:p xmlns:a="http://schemas.openxmlformats.org/drawingml/2006/main">
+            <a:pPr algn="ctr">
+              <a:buNone/>
+            </a:pPr>
+            <a:r>
+              <a:rPr sz="1000" b="1" i="0">
+                <a:solidFill>
+                  <a:srgbClr val="202020"/>
+                </a:solidFill>
+                <a:latin typeface="Aptos"/>
+                <a:ea typeface="Aptos"/>
+                <a:cs typeface="Aptos"/>
+              </a:rPr>
+              <a:t>Status</a:t>
+            </a:r>
+          </a:p>
+        </p:txBody>
+      </p:sp>
+      <p:sp>
+        <p:nvSpPr>
+          <p:cNvPr id="14" name="Rectangle 13">
+            <a:extLst xmlns:a="http://schemas.openxmlformats.org/drawingml/2006/main">
+              <a:ext uri="{FF2B5EF4-FFF2-40B4-BE49-F238E27FC236}">
+                <a16:creationId xmlns:a16="http://schemas.microsoft.com/office/drawing/2014/main" id="{021B47AC-06AA-4EB5-A177-799851FF7B2A}"/>
+              </a:ext>
+            </a:extLst>
+          </p:cNvPr>
+          <p:cNvSpPr>
+            <a:spLocks xmlns:a="http://schemas.openxmlformats.org/drawingml/2006/main" noGrp="1"/>
+          </p:cNvSpPr>
+          <p:nvPr/>
+        </p:nvSpPr>
+        <p:spPr>
+          <a:xfrm xmlns:a="http://schemas.openxmlformats.org/drawingml/2006/main">
+            <a:off x="502920" y="1865376"/>
+            <a:ext cx="5532120" cy="585216"/>
+          </a:xfrm>
+          <a:prstGeom xmlns:a="http://schemas.openxmlformats.org/drawingml/2006/main" prst="rect">
+            <a:avLst/>
+          </a:prstGeom>
+          <a:solidFill xmlns:a="http://schemas.openxmlformats.org/drawingml/2006/main">
+            <a:srgbClr val="F2F5FA"/>
+          </a:solidFill>
+          <a:ln xmlns:a="http://schemas.openxmlformats.org/drawingml/2006/main">
+            <a:solidFill>
+              <a:srgbClr val="F2F5FA"/>
+            </a:solidFill>
+          </a:ln>
+        </p:spPr>
+        <p:style>
+          <a:lnRef xmlns:a="http://schemas.openxmlformats.org/drawingml/2006/main" idx="1">
+            <a:schemeClr val="accent1"/>
+          </a:lnRef>
+          <a:fillRef xmlns:a="http://schemas.openxmlformats.org/drawingml/2006/main" idx="3">
+            <a:schemeClr val="accent1"/>
+          </a:fillRef>
+          <a:effectRef xmlns:a="http://schemas.openxmlformats.org/drawingml/2006/main" idx="2">
+            <a:schemeClr val="accent1"/>
+          </a:effectRef>
+          <a:fontRef xmlns:a="http://schemas.openxmlformats.org/drawingml/2006/main" idx="minor">
+            <a:schemeClr val="lt1"/>
+          </a:fontRef>
+        </p:style>
+        <p:txBody>
+          <a:bodyPr xmlns:a="http://schemas.openxmlformats.org/drawingml/2006/main" anchor="ctr"/>
+          <a:lstStyle xmlns:a="http://schemas.openxmlformats.org/drawingml/2006/main"/>
+          <a:p xmlns:a="http://schemas.openxmlformats.org/drawingml/2006/main">
+            <a:pPr algn="ctr">
+              <a:buNone/>
+            </a:pPr>
+          </a:p>
+        </p:txBody>
+      </p:sp>
+      <p:sp>
+        <p:nvSpPr>
+          <p:cNvPr id="15" name="TextBox 14">
+            <a:extLst xmlns:a="http://schemas.openxmlformats.org/drawingml/2006/main">
+              <a:ext uri="{FF2B5EF4-FFF2-40B4-BE49-F238E27FC236}">
+                <a16:creationId xmlns:a16="http://schemas.microsoft.com/office/drawing/2014/main" id="{3D39A9C7-D72E-4D53-BF52-4A4579D29158}"/>
+              </a:ext>
+            </a:extLst>
+          </p:cNvPr>
+          <p:cNvSpPr>
+            <a:spLocks xmlns:a="http://schemas.openxmlformats.org/drawingml/2006/main" noGrp="1"/>
+          </p:cNvSpPr>
+          <p:nvPr/>
+        </p:nvSpPr>
+        <p:spPr>
+          <a:xfrm xmlns:a="http://schemas.openxmlformats.org/drawingml/2006/main">
+            <a:off x="612648" y="2094712"/>
+            <a:ext cx="1231171" cy="163122"/>
+          </a:xfrm>
+          <a:prstGeom xmlns:a="http://schemas.openxmlformats.org/drawingml/2006/main" prst="rect">
+            <a:avLst/>
+          </a:prstGeom>
+          <a:noFill xmlns:a="http://schemas.openxmlformats.org/drawingml/2006/main"/>
+        </p:spPr>
+        <p:txBody>
+          <a:bodyPr xmlns:a="http://schemas.openxmlformats.org/drawingml/2006/main" wrap="none" lIns="18288" tIns="4572" rIns="18288" bIns="4572" anchor="ctr">
+            <a:spAutoFit/>
+          </a:bodyPr>
+          <a:lstStyle xmlns:a="http://schemas.openxmlformats.org/drawingml/2006/main"/>
+          <a:p xmlns:a="http://schemas.openxmlformats.org/drawingml/2006/main">
+            <a:pPr algn="l">
+              <a:buNone/>
+            </a:pPr>
+            <a:r>
+              <a:rPr sz="1000" b="0" i="0">
+                <a:solidFill>
+                  <a:srgbClr val="202020"/>
+                </a:solidFill>
+                <a:latin typeface="Aptos"/>
+                <a:ea typeface="Aptos"/>
+                <a:cs typeface="Aptos"/>
+              </a:rPr>
+              <a:t>Pallet - CArdboard design</a:t>
+            </a:r>
+          </a:p>
+        </p:txBody>
+      </p:sp>
+      <p:sp>
+        <p:nvSpPr>
+          <p:cNvPr id="16" name="TextBox 15">
+            <a:extLst xmlns:a="http://schemas.openxmlformats.org/drawingml/2006/main">
+              <a:ext uri="{FF2B5EF4-FFF2-40B4-BE49-F238E27FC236}">
+                <a16:creationId xmlns:a16="http://schemas.microsoft.com/office/drawing/2014/main" id="{8AB50D52-A2F7-44E5-B4EC-E5CCED7785E7}"/>
+              </a:ext>
+            </a:extLst>
+          </p:cNvPr>
+          <p:cNvSpPr>
+            <a:spLocks xmlns:a="http://schemas.openxmlformats.org/drawingml/2006/main" noGrp="1"/>
+          </p:cNvSpPr>
+          <p:nvPr/>
+        </p:nvSpPr>
+        <p:spPr>
+          <a:xfrm xmlns:a="http://schemas.openxmlformats.org/drawingml/2006/main">
+            <a:off x="3811335" y="2021560"/>
+            <a:ext cx="420051" cy="163122"/>
+          </a:xfrm>
+          <a:prstGeom xmlns:a="http://schemas.openxmlformats.org/drawingml/2006/main" prst="rect">
+            <a:avLst/>
+          </a:prstGeom>
+          <a:noFill xmlns:a="http://schemas.openxmlformats.org/drawingml/2006/main"/>
+        </p:spPr>
+        <p:txBody>
+          <a:bodyPr xmlns:a="http://schemas.openxmlformats.org/drawingml/2006/main" wrap="none" lIns="18288" tIns="4572" rIns="18288" bIns="4572" anchor="ctr">
+            <a:spAutoFit/>
+          </a:bodyPr>
+          <a:lstStyle xmlns:a="http://schemas.openxmlformats.org/drawingml/2006/main"/>
+          <a:p xmlns:a="http://schemas.openxmlformats.org/drawingml/2006/main">
+            <a:pPr algn="r">
+              <a:buNone/>
+            </a:pPr>
+            <a:r>
+              <a:rPr sz="1000" b="1" i="0">
+                <a:solidFill>
+                  <a:srgbClr val="202020"/>
+                </a:solidFill>
+                <a:latin typeface="Aptos"/>
+                <a:ea typeface="Aptos"/>
+                <a:cs typeface="Aptos"/>
+              </a:rPr>
+              <a:t>$15.00</a:t>
+            </a:r>
+          </a:p>
+        </p:txBody>
+      </p:sp>
+      <p:sp>
+        <p:nvSpPr>
+          <p:cNvPr id="17" name="TextBox 16">
+            <a:extLst xmlns:a="http://schemas.openxmlformats.org/drawingml/2006/main">
+              <a:ext uri="{FF2B5EF4-FFF2-40B4-BE49-F238E27FC236}">
+                <a16:creationId xmlns:a16="http://schemas.microsoft.com/office/drawing/2014/main" id="{C942FF68-2BB1-4128-A314-8FBDE568E389}"/>
+              </a:ext>
+            </a:extLst>
+          </p:cNvPr>
+          <p:cNvSpPr>
+            <a:spLocks xmlns:a="http://schemas.openxmlformats.org/drawingml/2006/main" noGrp="1"/>
+          </p:cNvSpPr>
+          <p:nvPr/>
+        </p:nvSpPr>
+        <p:spPr>
+          <a:xfrm xmlns:a="http://schemas.openxmlformats.org/drawingml/2006/main">
+            <a:off x="4463484" y="2021560"/>
+            <a:ext cx="537071" cy="163122"/>
+          </a:xfrm>
+          <a:prstGeom xmlns:a="http://schemas.openxmlformats.org/drawingml/2006/main" prst="rect">
+            <a:avLst/>
+          </a:prstGeom>
+          <a:noFill xmlns:a="http://schemas.openxmlformats.org/drawingml/2006/main"/>
+        </p:spPr>
+        <p:txBody>
+          <a:bodyPr xmlns:a="http://schemas.openxmlformats.org/drawingml/2006/main" wrap="none" lIns="18288" tIns="4572" rIns="18288" bIns="4572" anchor="ctr">
+            <a:spAutoFit/>
+          </a:bodyPr>
+          <a:lstStyle xmlns:a="http://schemas.openxmlformats.org/drawingml/2006/main"/>
+          <a:p xmlns:a="http://schemas.openxmlformats.org/drawingml/2006/main">
+            <a:pPr algn="ctr">
+              <a:buNone/>
+            </a:pPr>
+            <a:r>
+              <a:rPr sz="1000" b="0" i="0">
+                <a:solidFill>
+                  <a:srgbClr val="202020"/>
+                </a:solidFill>
+                <a:latin typeface="Aptos"/>
+                <a:ea typeface="Aptos"/>
+                <a:cs typeface="Aptos"/>
+              </a:rPr>
+              <a:t>10/12/2026</a:t>
+            </a:r>
+          </a:p>
+        </p:txBody>
+      </p:sp>
+      <p:sp>
+        <p:nvSpPr>
+          <p:cNvPr id="18" name="Rounded Rectangle 17">
+            <a:extLst xmlns:a="http://schemas.openxmlformats.org/drawingml/2006/main">
+              <a:ext uri="{FF2B5EF4-FFF2-40B4-BE49-F238E27FC236}">
+                <a16:creationId xmlns:a16="http://schemas.microsoft.com/office/drawing/2014/main" id="{00337626-B2F2-4B9F-AD2B-18C37E444F31}"/>
+              </a:ext>
+            </a:extLst>
+          </p:cNvPr>
+          <p:cNvSpPr>
+            <a:spLocks xmlns:a="http://schemas.openxmlformats.org/drawingml/2006/main" noGrp="1"/>
+          </p:cNvSpPr>
+          <p:nvPr/>
+        </p:nvSpPr>
+        <p:spPr>
+          <a:xfrm xmlns:a="http://schemas.openxmlformats.org/drawingml/2006/main">
+            <a:off x="5149900" y="2002536"/>
+            <a:ext cx="822960" cy="256032"/>
+          </a:xfrm>
+          <a:prstGeom xmlns:a="http://schemas.openxmlformats.org/drawingml/2006/main" prst="roundRect">
+            <a:avLst/>
+          </a:prstGeom>
+          <a:solidFill xmlns:a="http://schemas.openxmlformats.org/drawingml/2006/main">
+            <a:srgbClr val="ED7D31"/>
+          </a:solidFill>
+          <a:ln xmlns:a="http://schemas.openxmlformats.org/drawingml/2006/main" w="0">
+            <a:solidFill>
+              <a:srgbClr val="ED7D31"/>
+            </a:solidFill>
+            <a:prstDash val="solid"/>
+          </a:ln>
+        </p:spPr>
+        <p:style>
+          <a:lnRef xmlns:a="http://schemas.openxmlformats.org/drawingml/2006/main" idx="1">
+            <a:schemeClr val="accent1"/>
+          </a:lnRef>
+          <a:fillRef xmlns:a="http://schemas.openxmlformats.org/drawingml/2006/main" idx="3">
+            <a:schemeClr val="accent1"/>
+          </a:fillRef>
+          <a:effectRef xmlns:a="http://schemas.openxmlformats.org/drawingml/2006/main" idx="2">
+            <a:schemeClr val="accent1"/>
+          </a:effectRef>
+          <a:fontRef xmlns:a="http://schemas.openxmlformats.org/drawingml/2006/main" idx="minor">
+            <a:schemeClr val="lt1"/>
+          </a:fontRef>
+        </p:style>
+        <p:txBody>
+          <a:bodyPr xmlns:a="http://schemas.openxmlformats.org/drawingml/2006/main" anchor="ctr"/>
+          <a:lstStyle xmlns:a="http://schemas.openxmlformats.org/drawingml/2006/main"/>
+          <a:p xmlns:a="http://schemas.openxmlformats.org/drawingml/2006/main">
+            <a:pPr algn="ctr">
+              <a:buNone/>
+            </a:pPr>
+          </a:p>
+        </p:txBody>
+      </p:sp>
+      <p:sp>
+        <p:nvSpPr>
+          <p:cNvPr id="19" name="TextBox 18">
+            <a:extLst xmlns:a="http://schemas.openxmlformats.org/drawingml/2006/main">
+              <a:ext uri="{FF2B5EF4-FFF2-40B4-BE49-F238E27FC236}">
+                <a16:creationId xmlns:a16="http://schemas.microsoft.com/office/drawing/2014/main" id="{3A751BA9-B27F-4A6D-BB71-30F0F80AEB25}"/>
+              </a:ext>
+            </a:extLst>
+          </p:cNvPr>
+          <p:cNvSpPr>
+            <a:spLocks xmlns:a="http://schemas.openxmlformats.org/drawingml/2006/main" noGrp="1"/>
+          </p:cNvSpPr>
+          <p:nvPr/>
+        </p:nvSpPr>
+        <p:spPr>
+          <a:xfrm xmlns:a="http://schemas.openxmlformats.org/drawingml/2006/main">
+            <a:off x="5216702" y="2016988"/>
+            <a:ext cx="689356" cy="163122"/>
+          </a:xfrm>
+          <a:prstGeom xmlns:a="http://schemas.openxmlformats.org/drawingml/2006/main" prst="rect">
+            <a:avLst/>
+          </a:prstGeom>
+          <a:noFill xmlns:a="http://schemas.openxmlformats.org/drawingml/2006/main"/>
+        </p:spPr>
+        <p:txBody>
+          <a:bodyPr xmlns:a="http://schemas.openxmlformats.org/drawingml/2006/main" wrap="none" lIns="18288" tIns="4572" rIns="18288" bIns="4572" anchor="ctr">
+            <a:spAutoFit/>
+          </a:bodyPr>
+          <a:lstStyle xmlns:a="http://schemas.openxmlformats.org/drawingml/2006/main"/>
+          <a:p xmlns:a="http://schemas.openxmlformats.org/drawingml/2006/main">
+            <a:pPr algn="ctr">
+              <a:buNone/>
+            </a:pPr>
+            <a:r>
+              <a:rPr sz="1000" b="1" i="0">
+                <a:solidFill>
+                  <a:srgbClr val="FFFFFF"/>
+                </a:solidFill>
+                <a:latin typeface="Aptos"/>
+                <a:ea typeface="Aptos"/>
+                <a:cs typeface="Aptos"/>
+              </a:rPr>
+              <a:t>On Track</a:t>
+            </a:r>
+          </a:p>
+        </p:txBody>
+      </p:sp>
+      <p:sp>
+        <p:nvSpPr>
+          <p:cNvPr id="20" name="Rectangle 19">
+            <a:extLst xmlns:a="http://schemas.openxmlformats.org/drawingml/2006/main">
+              <a:ext uri="{FF2B5EF4-FFF2-40B4-BE49-F238E27FC236}">
+                <a16:creationId xmlns:a16="http://schemas.microsoft.com/office/drawing/2014/main" id="{3202AA9B-2FD9-484A-8BBE-DCD7F24A5D68}"/>
+              </a:ext>
+            </a:extLst>
+          </p:cNvPr>
+          <p:cNvSpPr>
+            <a:spLocks xmlns:a="http://schemas.openxmlformats.org/drawingml/2006/main" noGrp="1"/>
+          </p:cNvSpPr>
+          <p:nvPr/>
+        </p:nvSpPr>
+        <p:spPr>
+          <a:xfrm xmlns:a="http://schemas.openxmlformats.org/drawingml/2006/main">
+            <a:off x="502920" y="2532888"/>
+            <a:ext cx="5532120" cy="585216"/>
+          </a:xfrm>
+          <a:prstGeom xmlns:a="http://schemas.openxmlformats.org/drawingml/2006/main" prst="rect">
+            <a:avLst/>
+          </a:prstGeom>
+          <a:solidFill xmlns:a="http://schemas.openxmlformats.org/drawingml/2006/main">
+            <a:srgbClr val="FFFFFF"/>
+          </a:solidFill>
+          <a:ln xmlns:a="http://schemas.openxmlformats.org/drawingml/2006/main">
+            <a:solidFill>
+              <a:srgbClr val="FFFFFF"/>
+            </a:solidFill>
+          </a:ln>
+        </p:spPr>
+        <p:style>
+          <a:lnRef xmlns:a="http://schemas.openxmlformats.org/drawingml/2006/main" idx="1">
+            <a:schemeClr val="accent1"/>
+          </a:lnRef>
+          <a:fillRef xmlns:a="http://schemas.openxmlformats.org/drawingml/2006/main" idx="3">
+            <a:schemeClr val="accent1"/>
+          </a:fillRef>
+          <a:effectRef xmlns:a="http://schemas.openxmlformats.org/drawingml/2006/main" idx="2">
+            <a:schemeClr val="accent1"/>
+          </a:effectRef>
+          <a:fontRef xmlns:a="http://schemas.openxmlformats.org/drawingml/2006/main" idx="minor">
+            <a:schemeClr val="lt1"/>
+          </a:fontRef>
+        </p:style>
+        <p:txBody>
+          <a:bodyPr xmlns:a="http://schemas.openxmlformats.org/drawingml/2006/main" anchor="ctr"/>
+          <a:lstStyle xmlns:a="http://schemas.openxmlformats.org/drawingml/2006/main"/>
+          <a:p xmlns:a="http://schemas.openxmlformats.org/drawingml/2006/main">
+            <a:pPr algn="ctr">
+              <a:buNone/>
+            </a:pPr>
+          </a:p>
+        </p:txBody>
+      </p:sp>
+      <p:sp>
+        <p:nvSpPr>
+          <p:cNvPr id="21" name="TextBox 20">
+            <a:extLst xmlns:a="http://schemas.openxmlformats.org/drawingml/2006/main">
+              <a:ext uri="{FF2B5EF4-FFF2-40B4-BE49-F238E27FC236}">
+                <a16:creationId xmlns:a16="http://schemas.microsoft.com/office/drawing/2014/main" id="{A9FAB1EE-4294-45B1-BFA7-2FC075065502}"/>
+              </a:ext>
+            </a:extLst>
+          </p:cNvPr>
+          <p:cNvSpPr>
+            <a:spLocks xmlns:a="http://schemas.openxmlformats.org/drawingml/2006/main" noGrp="1"/>
+          </p:cNvSpPr>
+          <p:nvPr/>
+        </p:nvSpPr>
+        <p:spPr>
+          <a:xfrm xmlns:a="http://schemas.openxmlformats.org/drawingml/2006/main">
+            <a:off x="612648" y="2762224"/>
+            <a:ext cx="1179875" cy="163122"/>
+          </a:xfrm>
+          <a:prstGeom xmlns:a="http://schemas.openxmlformats.org/drawingml/2006/main" prst="rect">
+            <a:avLst/>
+          </a:prstGeom>
+          <a:noFill xmlns:a="http://schemas.openxmlformats.org/drawingml/2006/main"/>
+        </p:spPr>
+        <p:txBody>
+          <a:bodyPr xmlns:a="http://schemas.openxmlformats.org/drawingml/2006/main" wrap="none" lIns="18288" tIns="4572" rIns="18288" bIns="4572" anchor="ctr">
+            <a:spAutoFit/>
+          </a:bodyPr>
+          <a:lstStyle xmlns:a="http://schemas.openxmlformats.org/drawingml/2006/main"/>
+          <a:p xmlns:a="http://schemas.openxmlformats.org/drawingml/2006/main">
+            <a:pPr algn="l">
+              <a:buNone/>
+            </a:pPr>
+            <a:r>
+              <a:rPr sz="1000" b="0" i="0">
+                <a:solidFill>
+                  <a:srgbClr val="202020"/>
+                </a:solidFill>
+                <a:latin typeface="Aptos"/>
+                <a:ea typeface="Aptos"/>
+                <a:cs typeface="Aptos"/>
+              </a:rPr>
+              <a:t>Remove distributor from LT cassette</a:t>
+            </a:r>
+          </a:p>
+        </p:txBody>
+      </p:sp>
+      <p:sp>
+        <p:nvSpPr>
+          <p:cNvPr id="22" name="TextBox 21">
+            <a:extLst xmlns:a="http://schemas.openxmlformats.org/drawingml/2006/main">
+              <a:ext uri="{FF2B5EF4-FFF2-40B4-BE49-F238E27FC236}">
+                <a16:creationId xmlns:a16="http://schemas.microsoft.com/office/drawing/2014/main" id="{702A8F77-47E5-4D1B-97B1-A35C6F494488}"/>
+              </a:ext>
+            </a:extLst>
+          </p:cNvPr>
+          <p:cNvSpPr>
+            <a:spLocks xmlns:a="http://schemas.openxmlformats.org/drawingml/2006/main" noGrp="1"/>
+          </p:cNvSpPr>
+          <p:nvPr/>
+        </p:nvSpPr>
+        <p:spPr>
+          <a:xfrm xmlns:a="http://schemas.openxmlformats.org/drawingml/2006/main">
+            <a:off x="3880263" y="2689072"/>
+            <a:ext cx="351123" cy="163122"/>
+          </a:xfrm>
+          <a:prstGeom xmlns:a="http://schemas.openxmlformats.org/drawingml/2006/main" prst="rect">
+            <a:avLst/>
+          </a:prstGeom>
+          <a:noFill xmlns:a="http://schemas.openxmlformats.org/drawingml/2006/main"/>
+        </p:spPr>
+        <p:txBody>
+          <a:bodyPr xmlns:a="http://schemas.openxmlformats.org/drawingml/2006/main" wrap="none" lIns="18288" tIns="4572" rIns="18288" bIns="4572" anchor="ctr">
+            <a:spAutoFit/>
+          </a:bodyPr>
+          <a:lstStyle xmlns:a="http://schemas.openxmlformats.org/drawingml/2006/main"/>
+          <a:p xmlns:a="http://schemas.openxmlformats.org/drawingml/2006/main">
+            <a:pPr algn="r">
+              <a:buNone/>
+            </a:pPr>
+            <a:r>
+              <a:rPr sz="1000" b="1" i="0">
+                <a:solidFill>
+                  <a:srgbClr val="202020"/>
+                </a:solidFill>
+                <a:latin typeface="Aptos"/>
+                <a:ea typeface="Aptos"/>
+                <a:cs typeface="Aptos"/>
+              </a:rPr>
+              <a:t>$0.00</a:t>
+            </a:r>
+          </a:p>
+        </p:txBody>
+      </p:sp>
+      <p:sp>
+        <p:nvSpPr>
+          <p:cNvPr id="23" name="TextBox 22">
+            <a:extLst xmlns:a="http://schemas.openxmlformats.org/drawingml/2006/main">
+              <a:ext uri="{FF2B5EF4-FFF2-40B4-BE49-F238E27FC236}">
+                <a16:creationId xmlns:a16="http://schemas.microsoft.com/office/drawing/2014/main" id="{F6A6CE8D-36F9-4F69-96B9-6B3B78A04609}"/>
+              </a:ext>
+            </a:extLst>
+          </p:cNvPr>
+          <p:cNvSpPr>
+            <a:spLocks xmlns:a="http://schemas.openxmlformats.org/drawingml/2006/main" noGrp="1"/>
+          </p:cNvSpPr>
+          <p:nvPr/>
+        </p:nvSpPr>
+        <p:spPr>
+          <a:xfrm xmlns:a="http://schemas.openxmlformats.org/drawingml/2006/main">
+            <a:off x="4429020" y="2689072"/>
+            <a:ext cx="606000" cy="163122"/>
+          </a:xfrm>
+          <a:prstGeom xmlns:a="http://schemas.openxmlformats.org/drawingml/2006/main" prst="rect">
+            <a:avLst/>
+          </a:prstGeom>
+          <a:noFill xmlns:a="http://schemas.openxmlformats.org/drawingml/2006/main"/>
+        </p:spPr>
+        <p:txBody>
+          <a:bodyPr xmlns:a="http://schemas.openxmlformats.org/drawingml/2006/main" wrap="none" lIns="18288" tIns="4572" rIns="18288" bIns="4572" anchor="ctr">
+            <a:spAutoFit/>
+          </a:bodyPr>
+          <a:lstStyle xmlns:a="http://schemas.openxmlformats.org/drawingml/2006/main"/>
+          <a:p xmlns:a="http://schemas.openxmlformats.org/drawingml/2006/main">
+            <a:pPr algn="ctr">
+              <a:buNone/>
+            </a:pPr>
+            <a:r>
+              <a:rPr sz="1000" b="0" i="0">
+                <a:solidFill>
+                  <a:srgbClr val="202020"/>
+                </a:solidFill>
+                <a:latin typeface="Aptos"/>
+                <a:ea typeface="Aptos"/>
+                <a:cs typeface="Aptos"/>
+              </a:rPr>
+              <a:t>10/13/2026</a:t>
+            </a:r>
+          </a:p>
+        </p:txBody>
+      </p:sp>
+      <p:sp>
+        <p:nvSpPr>
+          <p:cNvPr id="24" name="Rounded Rectangle 23">
+            <a:extLst xmlns:a="http://schemas.openxmlformats.org/drawingml/2006/main">
+              <a:ext uri="{FF2B5EF4-FFF2-40B4-BE49-F238E27FC236}">
+                <a16:creationId xmlns:a16="http://schemas.microsoft.com/office/drawing/2014/main" id="{643BD10E-A46A-4FBB-8F05-FB12F007CC03}"/>
+              </a:ext>
+            </a:extLst>
+          </p:cNvPr>
+          <p:cNvSpPr>
+            <a:spLocks xmlns:a="http://schemas.openxmlformats.org/drawingml/2006/main" noGrp="1"/>
+          </p:cNvSpPr>
+          <p:nvPr/>
+        </p:nvSpPr>
+        <p:spPr>
+          <a:xfrm xmlns:a="http://schemas.openxmlformats.org/drawingml/2006/main">
+            <a:off x="5149900" y="2670048"/>
+            <a:ext cx="822960" cy="256032"/>
+          </a:xfrm>
+          <a:prstGeom xmlns:a="http://schemas.openxmlformats.org/drawingml/2006/main" prst="roundRect">
+            <a:avLst/>
+          </a:prstGeom>
+          <a:solidFill xmlns:a="http://schemas.openxmlformats.org/drawingml/2006/main">
+            <a:srgbClr val="A6A6A6"/>
+          </a:solidFill>
+          <a:ln xmlns:a="http://schemas.openxmlformats.org/drawingml/2006/main" w="0">
+            <a:solidFill>
+              <a:srgbClr val="A6A6A6"/>
+            </a:solidFill>
+            <a:prstDash val="solid"/>
+          </a:ln>
+        </p:spPr>
+        <p:style>
+          <a:lnRef xmlns:a="http://schemas.openxmlformats.org/drawingml/2006/main" idx="1">
+            <a:schemeClr val="accent1"/>
+          </a:lnRef>
+          <a:fillRef xmlns:a="http://schemas.openxmlformats.org/drawingml/2006/main" idx="3">
+            <a:schemeClr val="accent1"/>
+          </a:fillRef>
+          <a:effectRef xmlns:a="http://schemas.openxmlformats.org/drawingml/2006/main" idx="2">
+            <a:schemeClr val="accent1"/>
+          </a:effectRef>
+          <a:fontRef xmlns:a="http://schemas.openxmlformats.org/drawingml/2006/main" idx="minor">
+            <a:schemeClr val="lt1"/>
+          </a:fontRef>
+        </p:style>
+        <p:txBody>
+          <a:bodyPr xmlns:a="http://schemas.openxmlformats.org/drawingml/2006/main" anchor="ctr"/>
+          <a:lstStyle xmlns:a="http://schemas.openxmlformats.org/drawingml/2006/main"/>
+          <a:p xmlns:a="http://schemas.openxmlformats.org/drawingml/2006/main">
+            <a:pPr algn="ctr">
+              <a:buNone/>
+            </a:pPr>
+          </a:p>
+        </p:txBody>
+      </p:sp>
+      <p:sp>
+        <p:nvSpPr>
+          <p:cNvPr id="25" name="TextBox 24">
+            <a:extLst xmlns:a="http://schemas.openxmlformats.org/drawingml/2006/main">
+              <a:ext uri="{FF2B5EF4-FFF2-40B4-BE49-F238E27FC236}">
+                <a16:creationId xmlns:a16="http://schemas.microsoft.com/office/drawing/2014/main" id="{57E920EF-C4C3-465E-BDC2-15322173DC9D}"/>
+              </a:ext>
+            </a:extLst>
+          </p:cNvPr>
+          <p:cNvSpPr>
+            <a:spLocks xmlns:a="http://schemas.openxmlformats.org/drawingml/2006/main" noGrp="1"/>
+          </p:cNvSpPr>
+          <p:nvPr/>
+        </p:nvSpPr>
+        <p:spPr>
+          <a:xfrm xmlns:a="http://schemas.openxmlformats.org/drawingml/2006/main">
+            <a:off x="5208688" y="2684500"/>
+            <a:ext cx="705386" cy="163122"/>
+          </a:xfrm>
+          <a:prstGeom xmlns:a="http://schemas.openxmlformats.org/drawingml/2006/main" prst="rect">
+            <a:avLst/>
+          </a:prstGeom>
+          <a:noFill xmlns:a="http://schemas.openxmlformats.org/drawingml/2006/main"/>
+        </p:spPr>
+        <p:txBody>
+          <a:bodyPr xmlns:a="http://schemas.openxmlformats.org/drawingml/2006/main" wrap="none" lIns="18288" tIns="4572" rIns="18288" bIns="4572" anchor="ctr">
+            <a:spAutoFit/>
+          </a:bodyPr>
+          <a:lstStyle xmlns:a="http://schemas.openxmlformats.org/drawingml/2006/main"/>
+          <a:p xmlns:a="http://schemas.openxmlformats.org/drawingml/2006/main">
+            <a:pPr algn="ctr">
+              <a:buNone/>
+            </a:pPr>
+            <a:r>
+              <a:rPr sz="1000" b="1" i="0">
+                <a:solidFill>
+                  <a:srgbClr val="FFFFFF"/>
+                </a:solidFill>
+                <a:latin typeface="Aptos"/>
+                <a:ea typeface="Aptos"/>
+                <a:cs typeface="Aptos"/>
+              </a:rPr>
+              <a:t>Not Started</a:t>
+            </a:r>
+          </a:p>
+        </p:txBody>
+      </p:sp>
+      <p:sp>
+        <p:nvSpPr>
+          <p:cNvPr id="26" name="Rectangle 25">
+            <a:extLst xmlns:a="http://schemas.openxmlformats.org/drawingml/2006/main">
+              <a:ext uri="{FF2B5EF4-FFF2-40B4-BE49-F238E27FC236}">
+                <a16:creationId xmlns:a16="http://schemas.microsoft.com/office/drawing/2014/main" id="{AB621F92-F482-4B95-B841-D9FEB7B5E0B5}"/>
+              </a:ext>
+            </a:extLst>
+          </p:cNvPr>
+          <p:cNvSpPr>
+            <a:spLocks xmlns:a="http://schemas.openxmlformats.org/drawingml/2006/main" noGrp="1"/>
+          </p:cNvSpPr>
+          <p:nvPr/>
+        </p:nvSpPr>
+        <p:spPr>
+          <a:xfrm xmlns:a="http://schemas.openxmlformats.org/drawingml/2006/main">
+            <a:off x="502920" y="3200400"/>
+            <a:ext cx="5532120" cy="585216"/>
+          </a:xfrm>
+          <a:prstGeom xmlns:a="http://schemas.openxmlformats.org/drawingml/2006/main" prst="rect">
+            <a:avLst/>
+          </a:prstGeom>
+          <a:solidFill xmlns:a="http://schemas.openxmlformats.org/drawingml/2006/main">
+            <a:srgbClr val="F2F5FA"/>
+          </a:solidFill>
+          <a:ln xmlns:a="http://schemas.openxmlformats.org/drawingml/2006/main">
+            <a:solidFill>
+              <a:srgbClr val="F2F5FA"/>
+            </a:solidFill>
+          </a:ln>
+        </p:spPr>
+        <p:style>
+          <a:lnRef xmlns:a="http://schemas.openxmlformats.org/drawingml/2006/main" idx="1">
+            <a:schemeClr val="accent1"/>
+          </a:lnRef>
+          <a:fillRef xmlns:a="http://schemas.openxmlformats.org/drawingml/2006/main" idx="3">
+            <a:schemeClr val="accent1"/>
+          </a:fillRef>
+          <a:effectRef xmlns:a="http://schemas.openxmlformats.org/drawingml/2006/main" idx="2">
+            <a:schemeClr val="accent1"/>
+          </a:effectRef>
+          <a:fontRef xmlns:a="http://schemas.openxmlformats.org/drawingml/2006/main" idx="minor">
+            <a:schemeClr val="lt1"/>
+          </a:fontRef>
+        </p:style>
+        <p:txBody>
+          <a:bodyPr xmlns:a="http://schemas.openxmlformats.org/drawingml/2006/main" anchor="ctr"/>
+          <a:lstStyle xmlns:a="http://schemas.openxmlformats.org/drawingml/2006/main"/>
+          <a:p xmlns:a="http://schemas.openxmlformats.org/drawingml/2006/main">
+            <a:pPr algn="ctr">
+              <a:buNone/>
+            </a:pPr>
+          </a:p>
+        </p:txBody>
+      </p:sp>
+      <p:sp>
+        <p:nvSpPr>
+          <p:cNvPr id="27" name="TextBox 26">
+            <a:extLst xmlns:a="http://schemas.openxmlformats.org/drawingml/2006/main">
+              <a:ext uri="{FF2B5EF4-FFF2-40B4-BE49-F238E27FC236}">
+                <a16:creationId xmlns:a16="http://schemas.microsoft.com/office/drawing/2014/main" id="{2BD1E681-560D-4440-936B-534A283D2A5F}"/>
+              </a:ext>
+            </a:extLst>
+          </p:cNvPr>
+          <p:cNvSpPr>
+            <a:spLocks xmlns:a="http://schemas.openxmlformats.org/drawingml/2006/main" noGrp="1"/>
+          </p:cNvSpPr>
+          <p:nvPr/>
+        </p:nvSpPr>
+        <p:spPr>
+          <a:xfrm xmlns:a="http://schemas.openxmlformats.org/drawingml/2006/main">
+            <a:off x="612648" y="3429736"/>
+            <a:ext cx="2510367" cy="163122"/>
+          </a:xfrm>
+          <a:prstGeom xmlns:a="http://schemas.openxmlformats.org/drawingml/2006/main" prst="rect">
+            <a:avLst/>
+          </a:prstGeom>
+          <a:noFill xmlns:a="http://schemas.openxmlformats.org/drawingml/2006/main"/>
+        </p:spPr>
+        <p:txBody>
+          <a:bodyPr xmlns:a="http://schemas.openxmlformats.org/drawingml/2006/main" wrap="none" lIns="18288" tIns="4572" rIns="18288" bIns="4572" anchor="ctr">
+            <a:spAutoFit/>
+          </a:bodyPr>
+          <a:lstStyle xmlns:a="http://schemas.openxmlformats.org/drawingml/2006/main"/>
+          <a:p xmlns:a="http://schemas.openxmlformats.org/drawingml/2006/main">
+            <a:pPr algn="l">
+              <a:buNone/>
+            </a:pPr>
+            <a:r>
+              <a:rPr sz="1000" b="0" i="0">
+                <a:solidFill>
+                  <a:srgbClr val="202020"/>
+                </a:solidFill>
+                <a:latin typeface="Aptos"/>
+                <a:ea typeface="Aptos"/>
+                <a:cs typeface="Aptos"/>
+              </a:rPr>
+              <a:t>New plastic base injection foam</a:t>
+            </a:r>
+          </a:p>
+        </p:txBody>
+      </p:sp>
+      <p:sp>
+        <p:nvSpPr>
+          <p:cNvPr id="28" name="TextBox 27">
+            <a:extLst xmlns:a="http://schemas.openxmlformats.org/drawingml/2006/main">
+              <a:ext uri="{FF2B5EF4-FFF2-40B4-BE49-F238E27FC236}">
+                <a16:creationId xmlns:a16="http://schemas.microsoft.com/office/drawing/2014/main" id="{D43D701D-E6AC-4CEC-B33A-53ABE4835CB0}"/>
+              </a:ext>
+            </a:extLst>
+          </p:cNvPr>
+          <p:cNvSpPr>
+            <a:spLocks xmlns:a="http://schemas.openxmlformats.org/drawingml/2006/main" noGrp="1"/>
+          </p:cNvSpPr>
+          <p:nvPr/>
+        </p:nvSpPr>
+        <p:spPr>
+          <a:xfrm xmlns:a="http://schemas.openxmlformats.org/drawingml/2006/main">
+            <a:off x="3880263" y="3356584"/>
+            <a:ext cx="351123" cy="163122"/>
+          </a:xfrm>
+          <a:prstGeom xmlns:a="http://schemas.openxmlformats.org/drawingml/2006/main" prst="rect">
+            <a:avLst/>
+          </a:prstGeom>
+          <a:noFill xmlns:a="http://schemas.openxmlformats.org/drawingml/2006/main"/>
+        </p:spPr>
+        <p:txBody>
+          <a:bodyPr xmlns:a="http://schemas.openxmlformats.org/drawingml/2006/main" wrap="none" lIns="18288" tIns="4572" rIns="18288" bIns="4572" anchor="ctr">
+            <a:spAutoFit/>
+          </a:bodyPr>
+          <a:lstStyle xmlns:a="http://schemas.openxmlformats.org/drawingml/2006/main"/>
+          <a:p xmlns:a="http://schemas.openxmlformats.org/drawingml/2006/main">
+            <a:pPr algn="r">
+              <a:buNone/>
+            </a:pPr>
+            <a:r>
+              <a:rPr sz="1000" b="1" i="0">
+                <a:solidFill>
+                  <a:srgbClr val="202020"/>
+                </a:solidFill>
+                <a:latin typeface="Aptos"/>
+                <a:ea typeface="Aptos"/>
+                <a:cs typeface="Aptos"/>
+              </a:rPr>
+              <a:t>$0.00</a:t>
+            </a:r>
+          </a:p>
+        </p:txBody>
+      </p:sp>
+      <p:sp>
+        <p:nvSpPr>
+          <p:cNvPr id="29" name="TextBox 28">
+            <a:extLst xmlns:a="http://schemas.openxmlformats.org/drawingml/2006/main">
+              <a:ext uri="{FF2B5EF4-FFF2-40B4-BE49-F238E27FC236}">
+                <a16:creationId xmlns:a16="http://schemas.microsoft.com/office/drawing/2014/main" id="{D6CAD696-F691-41D3-A967-5E4D0DC7B8BE}"/>
+              </a:ext>
+            </a:extLst>
+          </p:cNvPr>
+          <p:cNvSpPr>
+            <a:spLocks xmlns:a="http://schemas.openxmlformats.org/drawingml/2006/main" noGrp="1"/>
+          </p:cNvSpPr>
+          <p:nvPr/>
+        </p:nvSpPr>
+        <p:spPr>
+          <a:xfrm xmlns:a="http://schemas.openxmlformats.org/drawingml/2006/main">
+            <a:off x="4463484" y="3356584"/>
+            <a:ext cx="537071" cy="163122"/>
+          </a:xfrm>
+          <a:prstGeom xmlns:a="http://schemas.openxmlformats.org/drawingml/2006/main" prst="rect">
+            <a:avLst/>
+          </a:prstGeom>
+          <a:noFill xmlns:a="http://schemas.openxmlformats.org/drawingml/2006/main"/>
+        </p:spPr>
+        <p:txBody>
+          <a:bodyPr xmlns:a="http://schemas.openxmlformats.org/drawingml/2006/main" wrap="none" lIns="18288" tIns="4572" rIns="18288" bIns="4572" anchor="ctr">
+            <a:spAutoFit/>
+          </a:bodyPr>
+          <a:lstStyle xmlns:a="http://schemas.openxmlformats.org/drawingml/2006/main"/>
+          <a:p xmlns:a="http://schemas.openxmlformats.org/drawingml/2006/main">
+            <a:pPr algn="ctr">
+              <a:buNone/>
+            </a:pPr>
+            <a:r>
+              <a:rPr sz="1000" b="0" i="0">
+                <a:solidFill>
+                  <a:srgbClr val="202020"/>
+                </a:solidFill>
+                <a:latin typeface="Aptos"/>
+                <a:ea typeface="Aptos"/>
+                <a:cs typeface="Aptos"/>
+              </a:rPr>
+              <a:t>10/14/2026</a:t>
+            </a:r>
+          </a:p>
+        </p:txBody>
+      </p:sp>
+      <p:sp>
+        <p:nvSpPr>
+          <p:cNvPr id="30" name="Rounded Rectangle 29">
+            <a:extLst xmlns:a="http://schemas.openxmlformats.org/drawingml/2006/main">
+              <a:ext uri="{FF2B5EF4-FFF2-40B4-BE49-F238E27FC236}">
+                <a16:creationId xmlns:a16="http://schemas.microsoft.com/office/drawing/2014/main" id="{7F771137-6F91-461B-83A9-57C3749AF60D}"/>
+              </a:ext>
+            </a:extLst>
+          </p:cNvPr>
+          <p:cNvSpPr>
+            <a:spLocks xmlns:a="http://schemas.openxmlformats.org/drawingml/2006/main" noGrp="1"/>
+          </p:cNvSpPr>
+          <p:nvPr/>
+        </p:nvSpPr>
+        <p:spPr>
+          <a:xfrm xmlns:a="http://schemas.openxmlformats.org/drawingml/2006/main">
+            <a:off x="5149900" y="3337560"/>
+            <a:ext cx="822960" cy="256032"/>
+          </a:xfrm>
+          <a:prstGeom xmlns:a="http://schemas.openxmlformats.org/drawingml/2006/main" prst="roundRect">
+            <a:avLst/>
+          </a:prstGeom>
+          <a:solidFill xmlns:a="http://schemas.openxmlformats.org/drawingml/2006/main">
+            <a:srgbClr val="A6A6A6"/>
+          </a:solidFill>
+          <a:ln xmlns:a="http://schemas.openxmlformats.org/drawingml/2006/main" w="0">
+            <a:solidFill>
+              <a:srgbClr val="A6A6A6"/>
+            </a:solidFill>
+            <a:prstDash val="solid"/>
+          </a:ln>
+        </p:spPr>
+        <p:style>
+          <a:lnRef xmlns:a="http://schemas.openxmlformats.org/drawingml/2006/main" idx="1">
+            <a:schemeClr val="accent1"/>
+          </a:lnRef>
+          <a:fillRef xmlns:a="http://schemas.openxmlformats.org/drawingml/2006/main" idx="3">
+            <a:schemeClr val="accent1"/>
+          </a:fillRef>
+          <a:effectRef xmlns:a="http://schemas.openxmlformats.org/drawingml/2006/main" idx="2">
+            <a:schemeClr val="accent1"/>
+          </a:effectRef>
+          <a:fontRef xmlns:a="http://schemas.openxmlformats.org/drawingml/2006/main" idx="minor">
+            <a:schemeClr val="lt1"/>
+          </a:fontRef>
+        </p:style>
+        <p:txBody>
+          <a:bodyPr xmlns:a="http://schemas.openxmlformats.org/drawingml/2006/main" anchor="ctr"/>
+          <a:lstStyle xmlns:a="http://schemas.openxmlformats.org/drawingml/2006/main"/>
+          <a:p xmlns:a="http://schemas.openxmlformats.org/drawingml/2006/main">
+            <a:pPr algn="ctr">
+              <a:buNone/>
+            </a:pPr>
+          </a:p>
+        </p:txBody>
+      </p:sp>
+      <p:sp>
+        <p:nvSpPr>
+          <p:cNvPr id="31" name="TextBox 30">
+            <a:extLst xmlns:a="http://schemas.openxmlformats.org/drawingml/2006/main">
+              <a:ext uri="{FF2B5EF4-FFF2-40B4-BE49-F238E27FC236}">
+                <a16:creationId xmlns:a16="http://schemas.microsoft.com/office/drawing/2014/main" id="{B16EE97C-3AE6-4353-A7E8-89ED0011E895}"/>
+              </a:ext>
+            </a:extLst>
+          </p:cNvPr>
+          <p:cNvSpPr>
+            <a:spLocks xmlns:a="http://schemas.openxmlformats.org/drawingml/2006/main" noGrp="1"/>
+          </p:cNvSpPr>
+          <p:nvPr/>
+        </p:nvSpPr>
+        <p:spPr>
+          <a:xfrm xmlns:a="http://schemas.openxmlformats.org/drawingml/2006/main">
+            <a:off x="5215901" y="3352012"/>
+            <a:ext cx="690959" cy="163122"/>
+          </a:xfrm>
+          <a:prstGeom xmlns:a="http://schemas.openxmlformats.org/drawingml/2006/main" prst="rect">
+            <a:avLst/>
+          </a:prstGeom>
+          <a:noFill xmlns:a="http://schemas.openxmlformats.org/drawingml/2006/main"/>
+        </p:spPr>
+        <p:txBody>
+          <a:bodyPr xmlns:a="http://schemas.openxmlformats.org/drawingml/2006/main" wrap="none" lIns="18288" tIns="4572" rIns="18288" bIns="4572" anchor="ctr">
+            <a:spAutoFit/>
+          </a:bodyPr>
+          <a:lstStyle xmlns:a="http://schemas.openxmlformats.org/drawingml/2006/main"/>
+          <a:p xmlns:a="http://schemas.openxmlformats.org/drawingml/2006/main">
+            <a:pPr algn="ctr">
+              <a:buNone/>
+            </a:pPr>
+            <a:r>
+              <a:rPr sz="1000" b="1" i="0">
+                <a:solidFill>
+                  <a:srgbClr val="FFFFFF"/>
+                </a:solidFill>
+                <a:latin typeface="Aptos"/>
+                <a:ea typeface="Aptos"/>
+                <a:cs typeface="Aptos"/>
+              </a:rPr>
+              <a:t>Not Started</a:t>
+            </a:r>
+          </a:p>
+        </p:txBody>
+      </p:sp>
+      <p:sp>
+        <p:nvSpPr>
+          <p:cNvPr id="32" name="Rectangle 31">
+            <a:extLst xmlns:a="http://schemas.openxmlformats.org/drawingml/2006/main">
+              <a:ext uri="{FF2B5EF4-FFF2-40B4-BE49-F238E27FC236}">
+                <a16:creationId xmlns:a16="http://schemas.microsoft.com/office/drawing/2014/main" id="{E1A1E86E-02AB-4A19-A753-F6663635B6EC}"/>
+              </a:ext>
+            </a:extLst>
+          </p:cNvPr>
+          <p:cNvSpPr>
+            <a:spLocks xmlns:a="http://schemas.openxmlformats.org/drawingml/2006/main" noGrp="1"/>
+          </p:cNvSpPr>
+          <p:nvPr/>
+        </p:nvSpPr>
+        <p:spPr>
+          <a:xfrm xmlns:a="http://schemas.openxmlformats.org/drawingml/2006/main">
+            <a:off x="502920" y="3867912"/>
+            <a:ext cx="5532120" cy="585216"/>
+          </a:xfrm>
+          <a:prstGeom xmlns:a="http://schemas.openxmlformats.org/drawingml/2006/main" prst="rect">
+            <a:avLst/>
+          </a:prstGeom>
+          <a:solidFill xmlns:a="http://schemas.openxmlformats.org/drawingml/2006/main">
+            <a:srgbClr val="FFFFFF"/>
+          </a:solidFill>
+          <a:ln xmlns:a="http://schemas.openxmlformats.org/drawingml/2006/main">
+            <a:solidFill>
+              <a:srgbClr val="FFFFFF"/>
+            </a:solidFill>
+          </a:ln>
+        </p:spPr>
+        <p:style>
+          <a:lnRef xmlns:a="http://schemas.openxmlformats.org/drawingml/2006/main" idx="1">
+            <a:schemeClr val="accent1"/>
+          </a:lnRef>
+          <a:fillRef xmlns:a="http://schemas.openxmlformats.org/drawingml/2006/main" idx="3">
+            <a:schemeClr val="accent1"/>
+          </a:fillRef>
+          <a:effectRef xmlns:a="http://schemas.openxmlformats.org/drawingml/2006/main" idx="2">
+            <a:schemeClr val="accent1"/>
+          </a:effectRef>
+          <a:fontRef xmlns:a="http://schemas.openxmlformats.org/drawingml/2006/main" idx="minor">
+            <a:schemeClr val="lt1"/>
+          </a:fontRef>
+        </p:style>
+        <p:txBody>
+          <a:bodyPr xmlns:a="http://schemas.openxmlformats.org/drawingml/2006/main" anchor="ctr"/>
+          <a:lstStyle xmlns:a="http://schemas.openxmlformats.org/drawingml/2006/main"/>
+          <a:p xmlns:a="http://schemas.openxmlformats.org/drawingml/2006/main">
+            <a:pPr algn="ctr">
+              <a:buNone/>
+            </a:pPr>
+          </a:p>
+        </p:txBody>
+      </p:sp>
+      <p:sp>
+        <p:nvSpPr>
+          <p:cNvPr id="33" name="TextBox 32">
+            <a:extLst xmlns:a="http://schemas.openxmlformats.org/drawingml/2006/main">
+              <a:ext uri="{FF2B5EF4-FFF2-40B4-BE49-F238E27FC236}">
+                <a16:creationId xmlns:a16="http://schemas.microsoft.com/office/drawing/2014/main" id="{609D2D58-E815-451C-88B1-C0D9CD009572}"/>
+              </a:ext>
+            </a:extLst>
+          </p:cNvPr>
+          <p:cNvSpPr>
+            <a:spLocks xmlns:a="http://schemas.openxmlformats.org/drawingml/2006/main" noGrp="1"/>
+          </p:cNvSpPr>
+          <p:nvPr/>
+        </p:nvSpPr>
+        <p:spPr>
+          <a:xfrm xmlns:a="http://schemas.openxmlformats.org/drawingml/2006/main">
+            <a:off x="612648" y="4020304"/>
+            <a:ext cx="2414187" cy="317010"/>
+          </a:xfrm>
+          <a:prstGeom xmlns:a="http://schemas.openxmlformats.org/drawingml/2006/main" prst="rect">
+            <a:avLst/>
+          </a:prstGeom>
+          <a:noFill xmlns:a="http://schemas.openxmlformats.org/drawingml/2006/main"/>
+        </p:spPr>
+        <p:txBody>
+          <a:bodyPr xmlns:a="http://schemas.openxmlformats.org/drawingml/2006/main" wrap="none" lIns="18288" tIns="4572" rIns="18288" bIns="4572" anchor="ctr">
+            <a:spAutoFit/>
+          </a:bodyPr>
+          <a:lstStyle xmlns:a="http://schemas.openxmlformats.org/drawingml/2006/main"/>
+          <a:p xmlns:a="http://schemas.openxmlformats.org/drawingml/2006/main">
+            <a:pPr algn="l">
+              <a:buNone/>
+            </a:pPr>
+            <a:r>
+              <a:rPr sz="1000" b="0" i="0">
+                <a:solidFill>
+                  <a:srgbClr val="202020"/>
+                </a:solidFill>
+                <a:latin typeface="Aptos"/>
+                <a:ea typeface="Aptos"/>
+                <a:cs typeface="Aptos"/>
+              </a:rPr>
+              <a:t>S/m - 2 (Control box redesign, </a:t>
+            </a:r>
+            <a:r>
+              <a:rPr sz="1000" b="0" i="0">
+                <a:solidFill>
+                  <a:srgbClr val="202020"/>
+                </a:solidFill>
+                <a:latin typeface="Aptos"/>
+                <a:ea typeface="Aptos"/>
+                <a:cs typeface="Aptos"/>
+              </a:rPr>
+              <a:t>evap</a:t>
+            </a:r>
+            <a:r>
+              <a:rPr sz="1000" b="0" i="0">
+                <a:solidFill>
+                  <a:srgbClr val="202020"/>
+                </a:solidFill>
+                <a:latin typeface="Aptos"/>
+                <a:ea typeface="Aptos"/>
+                <a:cs typeface="Aptos"/>
+              </a:rPr>
+              <a:t> shroud,</a:t>
+            </a:r>
+          </a:p>
+          <a:p xmlns:a="http://schemas.openxmlformats.org/drawingml/2006/main">
+            <a:pPr algn="l">
+              <a:buNone/>
+            </a:pPr>
+            <a:r>
+              <a:rPr sz="1000" b="0" i="0">
+                <a:solidFill>
+                  <a:srgbClr val="202020"/>
+                </a:solidFill>
+                <a:latin typeface="Aptos"/>
+                <a:ea typeface="Aptos"/>
+                <a:cs typeface="Aptos"/>
+              </a:rPr>
+              <a:t> compress base, cond. shroud)</a:t>
+            </a:r>
+          </a:p>
+        </p:txBody>
+      </p:sp>
+      <p:sp>
+        <p:nvSpPr>
+          <p:cNvPr id="34" name="TextBox 33">
+            <a:extLst xmlns:a="http://schemas.openxmlformats.org/drawingml/2006/main">
+              <a:ext uri="{FF2B5EF4-FFF2-40B4-BE49-F238E27FC236}">
+                <a16:creationId xmlns:a16="http://schemas.microsoft.com/office/drawing/2014/main" id="{A296F264-219A-400A-BD6C-F22A158AB125}"/>
+              </a:ext>
+            </a:extLst>
+          </p:cNvPr>
+          <p:cNvSpPr>
+            <a:spLocks xmlns:a="http://schemas.openxmlformats.org/drawingml/2006/main" noGrp="1"/>
+          </p:cNvSpPr>
+          <p:nvPr/>
+        </p:nvSpPr>
+        <p:spPr>
+          <a:xfrm xmlns:a="http://schemas.openxmlformats.org/drawingml/2006/main">
+            <a:off x="3811335" y="4024096"/>
+            <a:ext cx="420051" cy="163122"/>
+          </a:xfrm>
+          <a:prstGeom xmlns:a="http://schemas.openxmlformats.org/drawingml/2006/main" prst="rect">
+            <a:avLst/>
+          </a:prstGeom>
+          <a:noFill xmlns:a="http://schemas.openxmlformats.org/drawingml/2006/main"/>
+        </p:spPr>
+        <p:txBody>
+          <a:bodyPr xmlns:a="http://schemas.openxmlformats.org/drawingml/2006/main" wrap="none" lIns="18288" tIns="4572" rIns="18288" bIns="4572" anchor="ctr">
+            <a:spAutoFit/>
+          </a:bodyPr>
+          <a:lstStyle xmlns:a="http://schemas.openxmlformats.org/drawingml/2006/main"/>
+          <a:p xmlns:a="http://schemas.openxmlformats.org/drawingml/2006/main">
+            <a:pPr algn="r">
+              <a:buNone/>
+            </a:pPr>
+            <a:r>
+              <a:rPr sz="1000" b="1" i="0">
+                <a:solidFill>
+                  <a:srgbClr val="202020"/>
+                </a:solidFill>
+                <a:latin typeface="Aptos"/>
+                <a:ea typeface="Aptos"/>
+                <a:cs typeface="Aptos"/>
+              </a:rPr>
+              <a:t>$5.00</a:t>
+            </a:r>
+          </a:p>
+        </p:txBody>
+      </p:sp>
+      <p:sp>
+        <p:nvSpPr>
+          <p:cNvPr id="35" name="TextBox 34">
+            <a:extLst xmlns:a="http://schemas.openxmlformats.org/drawingml/2006/main">
+              <a:ext uri="{FF2B5EF4-FFF2-40B4-BE49-F238E27FC236}">
+                <a16:creationId xmlns:a16="http://schemas.microsoft.com/office/drawing/2014/main" id="{3582A80F-F6A8-4183-8901-E68043A686FE}"/>
+              </a:ext>
+            </a:extLst>
+          </p:cNvPr>
+          <p:cNvSpPr>
+            <a:spLocks xmlns:a="http://schemas.openxmlformats.org/drawingml/2006/main" noGrp="1"/>
+          </p:cNvSpPr>
+          <p:nvPr/>
+        </p:nvSpPr>
+        <p:spPr>
+          <a:xfrm xmlns:a="http://schemas.openxmlformats.org/drawingml/2006/main">
+            <a:off x="4429020" y="4024096"/>
+            <a:ext cx="606000" cy="163122"/>
+          </a:xfrm>
+          <a:prstGeom xmlns:a="http://schemas.openxmlformats.org/drawingml/2006/main" prst="rect">
+            <a:avLst/>
+          </a:prstGeom>
+          <a:noFill xmlns:a="http://schemas.openxmlformats.org/drawingml/2006/main"/>
+        </p:spPr>
+        <p:txBody>
+          <a:bodyPr xmlns:a="http://schemas.openxmlformats.org/drawingml/2006/main" wrap="none" lIns="18288" tIns="4572" rIns="18288" bIns="4572" anchor="ctr">
+            <a:spAutoFit/>
+          </a:bodyPr>
+          <a:lstStyle xmlns:a="http://schemas.openxmlformats.org/drawingml/2006/main"/>
+          <a:p xmlns:a="http://schemas.openxmlformats.org/drawingml/2006/main">
+            <a:pPr algn="ctr">
+              <a:buNone/>
+            </a:pPr>
+            <a:r>
+              <a:rPr sz="1000" b="0" i="0">
+                <a:solidFill>
+                  <a:srgbClr val="202020"/>
+                </a:solidFill>
+                <a:latin typeface="Aptos"/>
+                <a:ea typeface="Aptos"/>
+                <a:cs typeface="Aptos"/>
+              </a:rPr>
+              <a:t>10/15/2026</a:t>
+            </a:r>
+          </a:p>
+        </p:txBody>
+      </p:sp>
+      <p:sp>
+        <p:nvSpPr>
+          <p:cNvPr id="36" name="Rounded Rectangle 35">
+            <a:extLst xmlns:a="http://schemas.openxmlformats.org/drawingml/2006/main">
+              <a:ext uri="{FF2B5EF4-FFF2-40B4-BE49-F238E27FC236}">
+                <a16:creationId xmlns:a16="http://schemas.microsoft.com/office/drawing/2014/main" id="{DCE43CBC-76E8-4F66-BD17-6D9C57A1EA6A}"/>
+              </a:ext>
+            </a:extLst>
+          </p:cNvPr>
+          <p:cNvSpPr>
+            <a:spLocks xmlns:a="http://schemas.openxmlformats.org/drawingml/2006/main" noGrp="1"/>
+          </p:cNvSpPr>
+          <p:nvPr/>
+        </p:nvSpPr>
+        <p:spPr>
+          <a:xfrm xmlns:a="http://schemas.openxmlformats.org/drawingml/2006/main">
+            <a:off x="5149900" y="4005072"/>
+            <a:ext cx="822960" cy="256032"/>
+          </a:xfrm>
+          <a:prstGeom xmlns:a="http://schemas.openxmlformats.org/drawingml/2006/main" prst="roundRect">
+            <a:avLst/>
+          </a:prstGeom>
+          <a:solidFill xmlns:a="http://schemas.openxmlformats.org/drawingml/2006/main">
+            <a:srgbClr val="A6A6A6"/>
+          </a:solidFill>
+          <a:ln xmlns:a="http://schemas.openxmlformats.org/drawingml/2006/main" w="0">
+            <a:solidFill>
+              <a:srgbClr val="A6A6A6"/>
+            </a:solidFill>
+            <a:prstDash val="solid"/>
+          </a:ln>
+        </p:spPr>
+        <p:style>
+          <a:lnRef xmlns:a="http://schemas.openxmlformats.org/drawingml/2006/main" idx="1">
+            <a:schemeClr val="accent1"/>
+          </a:lnRef>
+          <a:fillRef xmlns:a="http://schemas.openxmlformats.org/drawingml/2006/main" idx="3">
+            <a:schemeClr val="accent1"/>
+          </a:fillRef>
+          <a:effectRef xmlns:a="http://schemas.openxmlformats.org/drawingml/2006/main" idx="2">
+            <a:schemeClr val="accent1"/>
+          </a:effectRef>
+          <a:fontRef xmlns:a="http://schemas.openxmlformats.org/drawingml/2006/main" idx="minor">
+            <a:schemeClr val="lt1"/>
+          </a:fontRef>
+        </p:style>
+        <p:txBody>
+          <a:bodyPr xmlns:a="http://schemas.openxmlformats.org/drawingml/2006/main" anchor="ctr"/>
+          <a:lstStyle xmlns:a="http://schemas.openxmlformats.org/drawingml/2006/main"/>
+          <a:p xmlns:a="http://schemas.openxmlformats.org/drawingml/2006/main">
+            <a:pPr algn="ctr">
+              <a:buNone/>
+            </a:pPr>
+          </a:p>
+        </p:txBody>
+      </p:sp>
+      <p:sp>
+        <p:nvSpPr>
+          <p:cNvPr id="37" name="TextBox 36">
+            <a:extLst xmlns:a="http://schemas.openxmlformats.org/drawingml/2006/main">
+              <a:ext uri="{FF2B5EF4-FFF2-40B4-BE49-F238E27FC236}">
+                <a16:creationId xmlns:a16="http://schemas.microsoft.com/office/drawing/2014/main" id="{8C0E9E66-321E-4090-9244-1CBF4CDFF844}"/>
+              </a:ext>
+            </a:extLst>
+          </p:cNvPr>
+          <p:cNvSpPr>
+            <a:spLocks xmlns:a="http://schemas.openxmlformats.org/drawingml/2006/main" noGrp="1"/>
+          </p:cNvSpPr>
+          <p:nvPr/>
+        </p:nvSpPr>
+        <p:spPr>
+          <a:xfrm xmlns:a="http://schemas.openxmlformats.org/drawingml/2006/main">
+            <a:off x="5216702" y="4019524"/>
+            <a:ext cx="689356" cy="163122"/>
+          </a:xfrm>
+          <a:prstGeom xmlns:a="http://schemas.openxmlformats.org/drawingml/2006/main" prst="rect">
+            <a:avLst/>
+          </a:prstGeom>
+          <a:noFill xmlns:a="http://schemas.openxmlformats.org/drawingml/2006/main"/>
+        </p:spPr>
+        <p:txBody>
+          <a:bodyPr xmlns:a="http://schemas.openxmlformats.org/drawingml/2006/main" wrap="none" lIns="18288" tIns="4572" rIns="18288" bIns="4572" anchor="ctr">
+            <a:spAutoFit/>
+          </a:bodyPr>
+          <a:lstStyle xmlns:a="http://schemas.openxmlformats.org/drawingml/2006/main"/>
+          <a:p xmlns:a="http://schemas.openxmlformats.org/drawingml/2006/main">
+            <a:pPr algn="ctr">
+              <a:buNone/>
+            </a:pPr>
+            <a:r>
+              <a:rPr sz="1000" b="1" i="0">
+                <a:solidFill>
+                  <a:srgbClr val="FFFFFF"/>
+                </a:solidFill>
+                <a:latin typeface="Aptos"/>
+                <a:ea typeface="Aptos"/>
+                <a:cs typeface="Aptos"/>
+              </a:rPr>
+              <a:t>Not Started</a:t>
+            </a:r>
+          </a:p>
+        </p:txBody>
+      </p:sp>
+      <p:sp>
+        <p:nvSpPr>
+          <p:cNvPr id="38" name="Rectangle 37">
+            <a:extLst xmlns:a="http://schemas.openxmlformats.org/drawingml/2006/main">
+              <a:ext uri="{FF2B5EF4-FFF2-40B4-BE49-F238E27FC236}">
+                <a16:creationId xmlns:a16="http://schemas.microsoft.com/office/drawing/2014/main" id="{1D6CC113-D710-4DB9-B50D-94895BE24F34}"/>
+              </a:ext>
+            </a:extLst>
+          </p:cNvPr>
+          <p:cNvSpPr>
+            <a:spLocks xmlns:a="http://schemas.openxmlformats.org/drawingml/2006/main" noGrp="1"/>
+          </p:cNvSpPr>
+          <p:nvPr/>
+        </p:nvSpPr>
+        <p:spPr>
+          <a:xfrm xmlns:a="http://schemas.openxmlformats.org/drawingml/2006/main">
+            <a:off x="502920" y="4535424"/>
+            <a:ext cx="5532120" cy="585216"/>
+          </a:xfrm>
+          <a:prstGeom xmlns:a="http://schemas.openxmlformats.org/drawingml/2006/main" prst="rect">
+            <a:avLst/>
+          </a:prstGeom>
+          <a:solidFill xmlns:a="http://schemas.openxmlformats.org/drawingml/2006/main">
+            <a:srgbClr val="F2F5FA"/>
+          </a:solidFill>
+          <a:ln xmlns:a="http://schemas.openxmlformats.org/drawingml/2006/main">
+            <a:solidFill>
+              <a:srgbClr val="F2F5FA"/>
+            </a:solidFill>
+          </a:ln>
+        </p:spPr>
+        <p:style>
+          <a:lnRef xmlns:a="http://schemas.openxmlformats.org/drawingml/2006/main" idx="1">
+            <a:schemeClr val="accent1"/>
+          </a:lnRef>
+          <a:fillRef xmlns:a="http://schemas.openxmlformats.org/drawingml/2006/main" idx="3">
+            <a:schemeClr val="accent1"/>
+          </a:fillRef>
+          <a:effectRef xmlns:a="http://schemas.openxmlformats.org/drawingml/2006/main" idx="2">
+            <a:schemeClr val="accent1"/>
+          </a:effectRef>
+          <a:fontRef xmlns:a="http://schemas.openxmlformats.org/drawingml/2006/main" idx="minor">
+            <a:schemeClr val="lt1"/>
+          </a:fontRef>
+        </p:style>
+        <p:txBody>
+          <a:bodyPr xmlns:a="http://schemas.openxmlformats.org/drawingml/2006/main" anchor="ctr"/>
+          <a:lstStyle xmlns:a="http://schemas.openxmlformats.org/drawingml/2006/main"/>
+          <a:p xmlns:a="http://schemas.openxmlformats.org/drawingml/2006/main">
+            <a:pPr algn="ctr">
+              <a:buNone/>
+            </a:pPr>
+          </a:p>
+        </p:txBody>
+      </p:sp>
+      <p:sp>
+        <p:nvSpPr>
+          <p:cNvPr id="39" name="TextBox 38">
+            <a:extLst xmlns:a="http://schemas.openxmlformats.org/drawingml/2006/main">
+              <a:ext uri="{FF2B5EF4-FFF2-40B4-BE49-F238E27FC236}">
+                <a16:creationId xmlns:a16="http://schemas.microsoft.com/office/drawing/2014/main" id="{B3A8F3CC-740B-4352-A533-F6803D1F9EA8}"/>
+              </a:ext>
+            </a:extLst>
+          </p:cNvPr>
+          <p:cNvSpPr>
+            <a:spLocks xmlns:a="http://schemas.openxmlformats.org/drawingml/2006/main" noGrp="1"/>
+          </p:cNvSpPr>
+          <p:nvPr/>
+        </p:nvSpPr>
+        <p:spPr>
+          <a:xfrm xmlns:a="http://schemas.openxmlformats.org/drawingml/2006/main">
+            <a:off x="612648" y="4764760"/>
+            <a:ext cx="2758832" cy="163122"/>
+          </a:xfrm>
+          <a:prstGeom xmlns:a="http://schemas.openxmlformats.org/drawingml/2006/main" prst="rect">
+            <a:avLst/>
+          </a:prstGeom>
+          <a:noFill xmlns:a="http://schemas.openxmlformats.org/drawingml/2006/main"/>
+        </p:spPr>
+        <p:txBody>
+          <a:bodyPr xmlns:a="http://schemas.openxmlformats.org/drawingml/2006/main" wrap="none" lIns="18288" tIns="4572" rIns="18288" bIns="4572" anchor="ctr">
+            <a:spAutoFit/>
+          </a:bodyPr>
+          <a:lstStyle xmlns:a="http://schemas.openxmlformats.org/drawingml/2006/main"/>
+          <a:p xmlns:a="http://schemas.openxmlformats.org/drawingml/2006/main">
+            <a:pPr algn="l">
+              <a:buNone/>
+            </a:pPr>
+            <a:r>
+              <a:rPr sz="1000" b="0" i="0">
+                <a:solidFill>
+                  <a:srgbClr val="202020"/>
+                </a:solidFill>
+                <a:latin typeface="Aptos"/>
+                <a:ea typeface="Aptos"/>
+                <a:cs typeface="Aptos"/>
+              </a:rPr>
+              <a:t>New solenoid Sanhua</a:t>
+            </a:r>
+          </a:p>
+        </p:txBody>
+      </p:sp>
+      <p:sp>
+        <p:nvSpPr>
+          <p:cNvPr id="40" name="TextBox 39">
+            <a:extLst xmlns:a="http://schemas.openxmlformats.org/drawingml/2006/main">
+              <a:ext uri="{FF2B5EF4-FFF2-40B4-BE49-F238E27FC236}">
+                <a16:creationId xmlns:a16="http://schemas.microsoft.com/office/drawing/2014/main" id="{71B6A305-ADB7-47AB-BC84-8A8BE68B417C}"/>
+              </a:ext>
+            </a:extLst>
+          </p:cNvPr>
+          <p:cNvSpPr>
+            <a:spLocks xmlns:a="http://schemas.openxmlformats.org/drawingml/2006/main" noGrp="1"/>
+          </p:cNvSpPr>
+          <p:nvPr/>
+        </p:nvSpPr>
+        <p:spPr>
+          <a:xfrm xmlns:a="http://schemas.openxmlformats.org/drawingml/2006/main">
+            <a:off x="3811335" y="4691608"/>
+            <a:ext cx="420051" cy="163122"/>
+          </a:xfrm>
+          <a:prstGeom xmlns:a="http://schemas.openxmlformats.org/drawingml/2006/main" prst="rect">
+            <a:avLst/>
+          </a:prstGeom>
+          <a:noFill xmlns:a="http://schemas.openxmlformats.org/drawingml/2006/main"/>
+        </p:spPr>
+        <p:txBody>
+          <a:bodyPr xmlns:a="http://schemas.openxmlformats.org/drawingml/2006/main" wrap="none" lIns="18288" tIns="4572" rIns="18288" bIns="4572" anchor="ctr">
+            <a:spAutoFit/>
+          </a:bodyPr>
+          <a:lstStyle xmlns:a="http://schemas.openxmlformats.org/drawingml/2006/main"/>
+          <a:p xmlns:a="http://schemas.openxmlformats.org/drawingml/2006/main">
+            <a:pPr algn="r">
+              <a:buNone/>
+            </a:pPr>
+            <a:r>
+              <a:rPr sz="1000" b="1" i="0">
+                <a:solidFill>
+                  <a:srgbClr val="202020"/>
+                </a:solidFill>
+                <a:latin typeface="Aptos"/>
+                <a:ea typeface="Aptos"/>
+                <a:cs typeface="Aptos"/>
+              </a:rPr>
+              <a:t>$10.00</a:t>
+            </a:r>
+          </a:p>
+        </p:txBody>
+      </p:sp>
+      <p:sp>
+        <p:nvSpPr>
+          <p:cNvPr id="41" name="TextBox 40">
+            <a:extLst xmlns:a="http://schemas.openxmlformats.org/drawingml/2006/main">
+              <a:ext uri="{FF2B5EF4-FFF2-40B4-BE49-F238E27FC236}">
+                <a16:creationId xmlns:a16="http://schemas.microsoft.com/office/drawing/2014/main" id="{FE60127C-CA66-4A04-BB7E-11398B1C1A41}"/>
+              </a:ext>
+            </a:extLst>
+          </p:cNvPr>
+          <p:cNvSpPr>
+            <a:spLocks xmlns:a="http://schemas.openxmlformats.org/drawingml/2006/main" noGrp="1"/>
+          </p:cNvSpPr>
+          <p:nvPr/>
+        </p:nvSpPr>
+        <p:spPr>
+          <a:xfrm xmlns:a="http://schemas.openxmlformats.org/drawingml/2006/main">
+            <a:off x="4394555" y="4691608"/>
+            <a:ext cx="674929" cy="163122"/>
+          </a:xfrm>
+          <a:prstGeom xmlns:a="http://schemas.openxmlformats.org/drawingml/2006/main" prst="rect">
+            <a:avLst/>
+          </a:prstGeom>
+          <a:noFill xmlns:a="http://schemas.openxmlformats.org/drawingml/2006/main"/>
+        </p:spPr>
+        <p:txBody>
+          <a:bodyPr xmlns:a="http://schemas.openxmlformats.org/drawingml/2006/main" wrap="none" lIns="18288" tIns="4572" rIns="18288" bIns="4572" anchor="ctr">
+            <a:spAutoFit/>
+          </a:bodyPr>
+          <a:lstStyle xmlns:a="http://schemas.openxmlformats.org/drawingml/2006/main"/>
+          <a:p xmlns:a="http://schemas.openxmlformats.org/drawingml/2006/main">
+            <a:pPr algn="ctr">
+              <a:buNone/>
+            </a:pPr>
+            <a:r>
+              <a:rPr sz="1000" b="0" i="0">
+                <a:solidFill>
+                  <a:srgbClr val="202020"/>
+                </a:solidFill>
+                <a:latin typeface="Aptos"/>
+                <a:ea typeface="Aptos"/>
+                <a:cs typeface="Aptos"/>
+              </a:rPr>
+              <a:t>10/16/2026</a:t>
+            </a:r>
+          </a:p>
+        </p:txBody>
+      </p:sp>
+      <p:sp>
+        <p:nvSpPr>
+          <p:cNvPr id="42" name="Rounded Rectangle 41">
+            <a:extLst xmlns:a="http://schemas.openxmlformats.org/drawingml/2006/main">
+              <a:ext uri="{FF2B5EF4-FFF2-40B4-BE49-F238E27FC236}">
+                <a16:creationId xmlns:a16="http://schemas.microsoft.com/office/drawing/2014/main" id="{67037022-FD4D-4517-903D-367543E7B485}"/>
+              </a:ext>
+            </a:extLst>
+          </p:cNvPr>
+          <p:cNvSpPr>
+            <a:spLocks xmlns:a="http://schemas.openxmlformats.org/drawingml/2006/main" noGrp="1"/>
+          </p:cNvSpPr>
+          <p:nvPr/>
+        </p:nvSpPr>
+        <p:spPr>
+          <a:xfrm xmlns:a="http://schemas.openxmlformats.org/drawingml/2006/main">
+            <a:off x="5149900" y="4672584"/>
+            <a:ext cx="822960" cy="256032"/>
+          </a:xfrm>
+          <a:prstGeom xmlns:a="http://schemas.openxmlformats.org/drawingml/2006/main" prst="roundRect">
+            <a:avLst/>
+          </a:prstGeom>
+          <a:solidFill xmlns:a="http://schemas.openxmlformats.org/drawingml/2006/main">
+            <a:srgbClr val="A6A6A6"/>
+          </a:solidFill>
+          <a:ln xmlns:a="http://schemas.openxmlformats.org/drawingml/2006/main" w="0">
+            <a:solidFill>
+              <a:srgbClr val="A6A6A6"/>
+            </a:solidFill>
+            <a:prstDash val="solid"/>
+          </a:ln>
+        </p:spPr>
+        <p:style>
+          <a:lnRef xmlns:a="http://schemas.openxmlformats.org/drawingml/2006/main" idx="1">
+            <a:schemeClr val="accent1"/>
+          </a:lnRef>
+          <a:fillRef xmlns:a="http://schemas.openxmlformats.org/drawingml/2006/main" idx="3">
+            <a:schemeClr val="accent1"/>
+          </a:fillRef>
+          <a:effectRef xmlns:a="http://schemas.openxmlformats.org/drawingml/2006/main" idx="2">
+            <a:schemeClr val="accent1"/>
+          </a:effectRef>
+          <a:fontRef xmlns:a="http://schemas.openxmlformats.org/drawingml/2006/main" idx="minor">
+            <a:schemeClr val="lt1"/>
+          </a:fontRef>
+        </p:style>
+        <p:txBody>
+          <a:bodyPr xmlns:a="http://schemas.openxmlformats.org/drawingml/2006/main" anchor="ctr"/>
+          <a:lstStyle xmlns:a="http://schemas.openxmlformats.org/drawingml/2006/main"/>
+          <a:p xmlns:a="http://schemas.openxmlformats.org/drawingml/2006/main">
+            <a:pPr algn="ctr">
+              <a:buNone/>
+            </a:pPr>
+          </a:p>
+        </p:txBody>
+      </p:sp>
+      <p:sp>
+        <p:nvSpPr>
+          <p:cNvPr id="43" name="TextBox 42">
+            <a:extLst xmlns:a="http://schemas.openxmlformats.org/drawingml/2006/main">
+              <a:ext uri="{FF2B5EF4-FFF2-40B4-BE49-F238E27FC236}">
+                <a16:creationId xmlns:a16="http://schemas.microsoft.com/office/drawing/2014/main" id="{61D05615-695E-42B9-ADEB-EBE7592924A6}"/>
+              </a:ext>
+            </a:extLst>
+          </p:cNvPr>
+          <p:cNvSpPr>
+            <a:spLocks xmlns:a="http://schemas.openxmlformats.org/drawingml/2006/main" noGrp="1"/>
+          </p:cNvSpPr>
+          <p:nvPr/>
+        </p:nvSpPr>
+        <p:spPr>
+          <a:xfrm xmlns:a="http://schemas.openxmlformats.org/drawingml/2006/main">
+            <a:off x="5216702" y="4687036"/>
+            <a:ext cx="689356" cy="163122"/>
+          </a:xfrm>
+          <a:prstGeom xmlns:a="http://schemas.openxmlformats.org/drawingml/2006/main" prst="rect">
+            <a:avLst/>
+          </a:prstGeom>
+          <a:noFill xmlns:a="http://schemas.openxmlformats.org/drawingml/2006/main"/>
+        </p:spPr>
+        <p:txBody>
+          <a:bodyPr xmlns:a="http://schemas.openxmlformats.org/drawingml/2006/main" wrap="none" lIns="18288" tIns="4572" rIns="18288" bIns="4572" anchor="ctr">
+            <a:spAutoFit/>
+          </a:bodyPr>
+          <a:lstStyle xmlns:a="http://schemas.openxmlformats.org/drawingml/2006/main"/>
+          <a:p xmlns:a="http://schemas.openxmlformats.org/drawingml/2006/main">
+            <a:pPr algn="ctr">
+              <a:buNone/>
+            </a:pPr>
+            <a:r>
+              <a:rPr sz="1000" b="1" i="0">
+                <a:solidFill>
+                  <a:srgbClr val="FFFFFF"/>
+                </a:solidFill>
+                <a:latin typeface="Aptos"/>
+                <a:ea typeface="Aptos"/>
+                <a:cs typeface="Aptos"/>
+              </a:rPr>
+              <a:t>Not Started</a:t>
+            </a:r>
+          </a:p>
+        </p:txBody>
+      </p:sp>
+      <p:sp>
+        <p:nvSpPr>
+          <p:cNvPr id="56" name="Rectangle 55">
+            <a:extLst xmlns:a="http://schemas.openxmlformats.org/drawingml/2006/main">
+              <a:ext uri="{FF2B5EF4-FFF2-40B4-BE49-F238E27FC236}">
+                <a16:creationId xmlns:a16="http://schemas.microsoft.com/office/drawing/2014/main" id="{DA0642D8-B542-43FF-9A04-69AC6221B9FD}"/>
+              </a:ext>
+            </a:extLst>
+          </p:cNvPr>
+          <p:cNvSpPr>
+            <a:spLocks xmlns:a="http://schemas.openxmlformats.org/drawingml/2006/main" noGrp="1"/>
+          </p:cNvSpPr>
+          <p:nvPr/>
+        </p:nvSpPr>
+        <p:spPr>
+          <a:xfrm xmlns:a="http://schemas.openxmlformats.org/drawingml/2006/main">
+            <a:off x="6263640" y="1508760"/>
+            <a:ext cx="5532120" cy="274320"/>
+          </a:xfrm>
+          <a:prstGeom xmlns:a="http://schemas.openxmlformats.org/drawingml/2006/main" prst="rect">
+            <a:avLst/>
+          </a:prstGeom>
+          <a:solidFill xmlns:a="http://schemas.openxmlformats.org/drawingml/2006/main">
+            <a:srgbClr val="E8EFF7"/>
+          </a:solidFill>
+          <a:ln xmlns:a="http://schemas.openxmlformats.org/drawingml/2006/main">
+            <a:solidFill>
+              <a:srgbClr val="D9D9D9"/>
+            </a:solidFill>
+          </a:ln>
+        </p:spPr>
+        <p:style>
+          <a:lnRef xmlns:a="http://schemas.openxmlformats.org/drawingml/2006/main" idx="1">
+            <a:schemeClr val="accent1"/>
+          </a:lnRef>
+          <a:fillRef xmlns:a="http://schemas.openxmlformats.org/drawingml/2006/main" idx="3">
+            <a:schemeClr val="accent1"/>
+          </a:fillRef>
+          <a:effectRef xmlns:a="http://schemas.openxmlformats.org/drawingml/2006/main" idx="2">
+            <a:schemeClr val="accent1"/>
+          </a:effectRef>
+          <a:fontRef xmlns:a="http://schemas.openxmlformats.org/drawingml/2006/main" idx="minor">
+            <a:schemeClr val="lt1"/>
+          </a:fontRef>
+        </p:style>
+        <p:txBody>
+          <a:bodyPr xmlns:a="http://schemas.openxmlformats.org/drawingml/2006/main" anchor="ctr"/>
+          <a:lstStyle xmlns:a="http://schemas.openxmlformats.org/drawingml/2006/main"/>
+          <a:p xmlns:a="http://schemas.openxmlformats.org/drawingml/2006/main">
+            <a:pPr algn="ctr">
+              <a:buNone/>
+            </a:pPr>
+          </a:p>
+        </p:txBody>
+      </p:sp>
+      <p:sp>
+        <p:nvSpPr>
+          <p:cNvPr id="57" name="TextBox 56">
+            <a:extLst xmlns:a="http://schemas.openxmlformats.org/drawingml/2006/main">
+              <a:ext uri="{FF2B5EF4-FFF2-40B4-BE49-F238E27FC236}">
+                <a16:creationId xmlns:a16="http://schemas.microsoft.com/office/drawing/2014/main" id="{B656BA7B-152B-44DE-B3E7-B92BAAE2D80B}"/>
+              </a:ext>
+            </a:extLst>
+          </p:cNvPr>
+          <p:cNvSpPr>
+            <a:spLocks xmlns:a="http://schemas.openxmlformats.org/drawingml/2006/main" noGrp="1"/>
+          </p:cNvSpPr>
+          <p:nvPr/>
+        </p:nvSpPr>
+        <p:spPr>
+          <a:xfrm xmlns:a="http://schemas.openxmlformats.org/drawingml/2006/main">
+            <a:off x="6373368" y="1541499"/>
+            <a:ext cx="679738" cy="163122"/>
+          </a:xfrm>
+          <a:prstGeom xmlns:a="http://schemas.openxmlformats.org/drawingml/2006/main" prst="rect">
+            <a:avLst/>
+          </a:prstGeom>
+          <a:noFill xmlns:a="http://schemas.openxmlformats.org/drawingml/2006/main"/>
+        </p:spPr>
+        <p:txBody>
+          <a:bodyPr xmlns:a="http://schemas.openxmlformats.org/drawingml/2006/main" wrap="none" lIns="18288" tIns="4572" rIns="18288" bIns="4572" anchor="ctr">
+            <a:spAutoFit/>
+          </a:bodyPr>
+          <a:lstStyle xmlns:a="http://schemas.openxmlformats.org/drawingml/2006/main"/>
+          <a:p xmlns:a="http://schemas.openxmlformats.org/drawingml/2006/main">
+            <a:pPr algn="l">
+              <a:buNone/>
+            </a:pPr>
+            <a:r>
+              <a:rPr sz="1000" b="1" i="0">
+                <a:solidFill>
+                  <a:srgbClr val="202020"/>
+                </a:solidFill>
+                <a:latin typeface="Aptos"/>
+                <a:ea typeface="Aptos"/>
+                <a:cs typeface="Aptos"/>
+              </a:rPr>
+              <a:t>Task Name</a:t>
+            </a:r>
+          </a:p>
+        </p:txBody>
+      </p:sp>
+      <p:sp>
+        <p:nvSpPr>
+          <p:cNvPr id="58" name="TextBox 57">
+            <a:extLst xmlns:a="http://schemas.openxmlformats.org/drawingml/2006/main">
+              <a:ext uri="{FF2B5EF4-FFF2-40B4-BE49-F238E27FC236}">
+                <a16:creationId xmlns:a16="http://schemas.microsoft.com/office/drawing/2014/main" id="{4BBB7264-7FD5-410B-A67E-C3E19D7B9C38}"/>
+              </a:ext>
+            </a:extLst>
+          </p:cNvPr>
+          <p:cNvSpPr>
+            <a:spLocks xmlns:a="http://schemas.openxmlformats.org/drawingml/2006/main" noGrp="1"/>
+          </p:cNvSpPr>
+          <p:nvPr/>
+        </p:nvSpPr>
+        <p:spPr>
+          <a:xfrm xmlns:a="http://schemas.openxmlformats.org/drawingml/2006/main">
+            <a:off x="9506332" y="1541499"/>
+            <a:ext cx="485774" cy="163122"/>
+          </a:xfrm>
+          <a:prstGeom xmlns:a="http://schemas.openxmlformats.org/drawingml/2006/main" prst="rect">
+            <a:avLst/>
+          </a:prstGeom>
+          <a:noFill xmlns:a="http://schemas.openxmlformats.org/drawingml/2006/main"/>
+        </p:spPr>
+        <p:txBody>
+          <a:bodyPr xmlns:a="http://schemas.openxmlformats.org/drawingml/2006/main" wrap="none" lIns="18288" tIns="4572" rIns="18288" bIns="4572" anchor="ctr">
+            <a:spAutoFit/>
+          </a:bodyPr>
+          <a:lstStyle xmlns:a="http://schemas.openxmlformats.org/drawingml/2006/main"/>
+          <a:p xmlns:a="http://schemas.openxmlformats.org/drawingml/2006/main">
+            <a:pPr algn="r">
+              <a:buNone/>
+            </a:pPr>
+            <a:r>
+              <a:rPr sz="1000" b="1" i="0">
+                <a:solidFill>
+                  <a:srgbClr val="202020"/>
+                </a:solidFill>
+                <a:latin typeface="Aptos"/>
+                <a:ea typeface="Aptos"/>
+                <a:cs typeface="Aptos"/>
+              </a:rPr>
+              <a:t>Savings</a:t>
+            </a:r>
+          </a:p>
+        </p:txBody>
+      </p:sp>
+      <p:sp>
+        <p:nvSpPr>
+          <p:cNvPr id="59" name="TextBox 58">
+            <a:extLst xmlns:a="http://schemas.openxmlformats.org/drawingml/2006/main">
+              <a:ext uri="{FF2B5EF4-FFF2-40B4-BE49-F238E27FC236}">
+                <a16:creationId xmlns:a16="http://schemas.microsoft.com/office/drawing/2014/main" id="{13116DE6-6CC0-4E7E-851A-841928A994EF}"/>
+              </a:ext>
+            </a:extLst>
+          </p:cNvPr>
+          <p:cNvSpPr>
+            <a:spLocks xmlns:a="http://schemas.openxmlformats.org/drawingml/2006/main" noGrp="1"/>
+          </p:cNvSpPr>
+          <p:nvPr/>
+        </p:nvSpPr>
+        <p:spPr>
+          <a:xfrm xmlns:a="http://schemas.openxmlformats.org/drawingml/2006/main">
+            <a:off x="10335432" y="1541499"/>
+            <a:ext cx="259751" cy="163122"/>
+          </a:xfrm>
+          <a:prstGeom xmlns:a="http://schemas.openxmlformats.org/drawingml/2006/main" prst="rect">
+            <a:avLst/>
+          </a:prstGeom>
+          <a:noFill xmlns:a="http://schemas.openxmlformats.org/drawingml/2006/main"/>
+        </p:spPr>
+        <p:txBody>
+          <a:bodyPr xmlns:a="http://schemas.openxmlformats.org/drawingml/2006/main" wrap="none" lIns="18288" tIns="4572" rIns="18288" bIns="4572" anchor="ctr">
+            <a:spAutoFit/>
+          </a:bodyPr>
+          <a:lstStyle xmlns:a="http://schemas.openxmlformats.org/drawingml/2006/main"/>
+          <a:p xmlns:a="http://schemas.openxmlformats.org/drawingml/2006/main">
+            <a:pPr algn="ctr">
+              <a:buNone/>
+            </a:pPr>
+            <a:r>
+              <a:rPr sz="1000" b="1" i="0">
+                <a:solidFill>
+                  <a:srgbClr val="202020"/>
+                </a:solidFill>
+                <a:latin typeface="Aptos"/>
+                <a:ea typeface="Aptos"/>
+                <a:cs typeface="Aptos"/>
+              </a:rPr>
+              <a:t>End</a:t>
+            </a:r>
+          </a:p>
+        </p:txBody>
+      </p:sp>
+      <p:sp>
+        <p:nvSpPr>
+          <p:cNvPr id="60" name="TextBox 59">
+            <a:extLst xmlns:a="http://schemas.openxmlformats.org/drawingml/2006/main">
+              <a:ext uri="{FF2B5EF4-FFF2-40B4-BE49-F238E27FC236}">
+                <a16:creationId xmlns:a16="http://schemas.microsoft.com/office/drawing/2014/main" id="{F21CBF41-2B58-4A41-A4A9-42E8F9E9FE4C}"/>
+              </a:ext>
+            </a:extLst>
+          </p:cNvPr>
+          <p:cNvSpPr>
+            <a:spLocks xmlns:a="http://schemas.openxmlformats.org/drawingml/2006/main" noGrp="1"/>
+          </p:cNvSpPr>
+          <p:nvPr/>
+        </p:nvSpPr>
+        <p:spPr>
+          <a:xfrm xmlns:a="http://schemas.openxmlformats.org/drawingml/2006/main">
+            <a:off x="11077903" y="1541499"/>
+            <a:ext cx="415242" cy="163122"/>
+          </a:xfrm>
+          <a:prstGeom xmlns:a="http://schemas.openxmlformats.org/drawingml/2006/main" prst="rect">
+            <a:avLst/>
+          </a:prstGeom>
+          <a:noFill xmlns:a="http://schemas.openxmlformats.org/drawingml/2006/main"/>
+        </p:spPr>
+        <p:txBody>
+          <a:bodyPr xmlns:a="http://schemas.openxmlformats.org/drawingml/2006/main" wrap="none" lIns="18288" tIns="4572" rIns="18288" bIns="4572" anchor="ctr">
+            <a:spAutoFit/>
+          </a:bodyPr>
+          <a:lstStyle xmlns:a="http://schemas.openxmlformats.org/drawingml/2006/main"/>
+          <a:p xmlns:a="http://schemas.openxmlformats.org/drawingml/2006/main">
+            <a:pPr algn="ctr">
+              <a:buNone/>
+            </a:pPr>
+            <a:r>
+              <a:rPr sz="1000" b="1" i="0">
+                <a:solidFill>
+                  <a:srgbClr val="202020"/>
+                </a:solidFill>
+                <a:latin typeface="Aptos"/>
+                <a:ea typeface="Aptos"/>
+                <a:cs typeface="Aptos"/>
+              </a:rPr>
+              <a:t>Status</a:t>
+            </a:r>
+          </a:p>
+        </p:txBody>
+      </p:sp>
+      <p:sp>
+        <p:nvSpPr>
+          <p:cNvPr id="61" name="Rectangle 60">
+            <a:extLst xmlns:a="http://schemas.openxmlformats.org/drawingml/2006/main">
+              <a:ext uri="{FF2B5EF4-FFF2-40B4-BE49-F238E27FC236}">
+                <a16:creationId xmlns:a16="http://schemas.microsoft.com/office/drawing/2014/main" id="{B3CA1FE7-3B4D-4596-B587-7BC75523FC7C}"/>
+              </a:ext>
+            </a:extLst>
+          </p:cNvPr>
+          <p:cNvSpPr>
+            <a:spLocks xmlns:a="http://schemas.openxmlformats.org/drawingml/2006/main" noGrp="1"/>
+          </p:cNvSpPr>
+          <p:nvPr/>
+        </p:nvSpPr>
+        <p:spPr>
+          <a:xfrm xmlns:a="http://schemas.openxmlformats.org/drawingml/2006/main">
+            <a:off x="6263640" y="1865376"/>
+            <a:ext cx="5532120" cy="585216"/>
+          </a:xfrm>
+          <a:prstGeom xmlns:a="http://schemas.openxmlformats.org/drawingml/2006/main" prst="rect">
+            <a:avLst/>
+          </a:prstGeom>
+          <a:solidFill xmlns:a="http://schemas.openxmlformats.org/drawingml/2006/main">
+            <a:srgbClr val="F2F5FA"/>
+          </a:solidFill>
+          <a:ln xmlns:a="http://schemas.openxmlformats.org/drawingml/2006/main">
+            <a:solidFill>
+              <a:srgbClr val="F2F5FA"/>
+            </a:solidFill>
+          </a:ln>
+        </p:spPr>
+        <p:style>
+          <a:lnRef xmlns:a="http://schemas.openxmlformats.org/drawingml/2006/main" idx="1">
+            <a:schemeClr val="accent1"/>
+          </a:lnRef>
+          <a:fillRef xmlns:a="http://schemas.openxmlformats.org/drawingml/2006/main" idx="3">
+            <a:schemeClr val="accent1"/>
+          </a:fillRef>
+          <a:effectRef xmlns:a="http://schemas.openxmlformats.org/drawingml/2006/main" idx="2">
+            <a:schemeClr val="accent1"/>
+          </a:effectRef>
+          <a:fontRef xmlns:a="http://schemas.openxmlformats.org/drawingml/2006/main" idx="minor">
+            <a:schemeClr val="lt1"/>
+          </a:fontRef>
+        </p:style>
+        <p:txBody>
+          <a:bodyPr xmlns:a="http://schemas.openxmlformats.org/drawingml/2006/main" anchor="ctr"/>
+          <a:lstStyle xmlns:a="http://schemas.openxmlformats.org/drawingml/2006/main"/>
+          <a:p xmlns:a="http://schemas.openxmlformats.org/drawingml/2006/main">
+            <a:pPr algn="ctr">
+              <a:buNone/>
+            </a:pPr>
+          </a:p>
+        </p:txBody>
+      </p:sp>
+      <p:sp>
+        <p:nvSpPr>
+          <p:cNvPr id="62" name="TextBox 61">
+            <a:extLst xmlns:a="http://schemas.openxmlformats.org/drawingml/2006/main">
+              <a:ext uri="{FF2B5EF4-FFF2-40B4-BE49-F238E27FC236}">
+                <a16:creationId xmlns:a16="http://schemas.microsoft.com/office/drawing/2014/main" id="{B3660ADC-DFC8-48F0-BC82-1795AFE273F7}"/>
+              </a:ext>
+            </a:extLst>
+          </p:cNvPr>
+          <p:cNvSpPr>
+            <a:spLocks xmlns:a="http://schemas.openxmlformats.org/drawingml/2006/main" noGrp="1"/>
+          </p:cNvSpPr>
+          <p:nvPr/>
+        </p:nvSpPr>
+        <p:spPr>
+          <a:xfrm xmlns:a="http://schemas.openxmlformats.org/drawingml/2006/main">
+            <a:off x="6373368" y="2094712"/>
+            <a:ext cx="957057" cy="163122"/>
+          </a:xfrm>
+          <a:prstGeom xmlns:a="http://schemas.openxmlformats.org/drawingml/2006/main" prst="rect">
+            <a:avLst/>
+          </a:prstGeom>
+          <a:noFill xmlns:a="http://schemas.openxmlformats.org/drawingml/2006/main"/>
+        </p:spPr>
+        <p:txBody>
+          <a:bodyPr xmlns:a="http://schemas.openxmlformats.org/drawingml/2006/main" wrap="none" lIns="18288" tIns="4572" rIns="18288" bIns="4572" anchor="ctr">
+            <a:spAutoFit/>
+          </a:bodyPr>
+          <a:lstStyle xmlns:a="http://schemas.openxmlformats.org/drawingml/2006/main"/>
+          <a:p xmlns:a="http://schemas.openxmlformats.org/drawingml/2006/main">
+            <a:pPr algn="l">
+              <a:buNone/>
+            </a:pPr>
+            <a:r>
+              <a:rPr sz="1000" b="0" i="0">
+                <a:solidFill>
+                  <a:srgbClr val="202020"/>
+                </a:solidFill>
+                <a:latin typeface="Aptos"/>
+                <a:ea typeface="Aptos"/>
+                <a:cs typeface="Aptos"/>
+              </a:rPr>
+              <a:t>New HP Switch- Danfoss</a:t>
+            </a:r>
+          </a:p>
+        </p:txBody>
+      </p:sp>
+      <p:sp>
+        <p:nvSpPr>
+          <p:cNvPr id="63" name="TextBox 62">
+            <a:extLst xmlns:a="http://schemas.openxmlformats.org/drawingml/2006/main">
+              <a:ext uri="{FF2B5EF4-FFF2-40B4-BE49-F238E27FC236}">
+                <a16:creationId xmlns:a16="http://schemas.microsoft.com/office/drawing/2014/main" id="{F65AD8FD-9B76-4BA9-99FB-9663F23B3F83}"/>
+              </a:ext>
+            </a:extLst>
+          </p:cNvPr>
+          <p:cNvSpPr>
+            <a:spLocks xmlns:a="http://schemas.openxmlformats.org/drawingml/2006/main" noGrp="1"/>
+          </p:cNvSpPr>
+          <p:nvPr/>
+        </p:nvSpPr>
+        <p:spPr>
+          <a:xfrm xmlns:a="http://schemas.openxmlformats.org/drawingml/2006/main">
+            <a:off x="9640983" y="2021560"/>
+            <a:ext cx="351123" cy="163122"/>
+          </a:xfrm>
+          <a:prstGeom xmlns:a="http://schemas.openxmlformats.org/drawingml/2006/main" prst="rect">
+            <a:avLst/>
+          </a:prstGeom>
+          <a:noFill xmlns:a="http://schemas.openxmlformats.org/drawingml/2006/main"/>
+        </p:spPr>
+        <p:txBody>
+          <a:bodyPr xmlns:a="http://schemas.openxmlformats.org/drawingml/2006/main" wrap="none" lIns="18288" tIns="4572" rIns="18288" bIns="4572" anchor="ctr">
+            <a:spAutoFit/>
+          </a:bodyPr>
+          <a:lstStyle xmlns:a="http://schemas.openxmlformats.org/drawingml/2006/main"/>
+          <a:p xmlns:a="http://schemas.openxmlformats.org/drawingml/2006/main">
+            <a:pPr algn="r">
+              <a:buNone/>
+            </a:pPr>
+            <a:r>
+              <a:rPr sz="1000" b="1" i="0">
+                <a:solidFill>
+                  <a:srgbClr val="202020"/>
+                </a:solidFill>
+                <a:latin typeface="Aptos"/>
+                <a:ea typeface="Aptos"/>
+                <a:cs typeface="Aptos"/>
+              </a:rPr>
+              <a:t>$7.00</a:t>
+            </a:r>
+          </a:p>
+        </p:txBody>
+      </p:sp>
+      <p:sp>
+        <p:nvSpPr>
+          <p:cNvPr id="64" name="TextBox 63">
+            <a:extLst xmlns:a="http://schemas.openxmlformats.org/drawingml/2006/main">
+              <a:ext uri="{FF2B5EF4-FFF2-40B4-BE49-F238E27FC236}">
+                <a16:creationId xmlns:a16="http://schemas.microsoft.com/office/drawing/2014/main" id="{D22FBEC1-15DB-410F-854F-6D0FCCC100DD}"/>
+              </a:ext>
+            </a:extLst>
+          </p:cNvPr>
+          <p:cNvSpPr>
+            <a:spLocks xmlns:a="http://schemas.openxmlformats.org/drawingml/2006/main" noGrp="1"/>
+          </p:cNvSpPr>
+          <p:nvPr/>
+        </p:nvSpPr>
+        <p:spPr>
+          <a:xfrm xmlns:a="http://schemas.openxmlformats.org/drawingml/2006/main">
+            <a:off x="10189741" y="2021560"/>
+            <a:ext cx="606000" cy="163122"/>
+          </a:xfrm>
+          <a:prstGeom xmlns:a="http://schemas.openxmlformats.org/drawingml/2006/main" prst="rect">
+            <a:avLst/>
+          </a:prstGeom>
+          <a:noFill xmlns:a="http://schemas.openxmlformats.org/drawingml/2006/main"/>
+        </p:spPr>
+        <p:txBody>
+          <a:bodyPr xmlns:a="http://schemas.openxmlformats.org/drawingml/2006/main" wrap="none" lIns="18288" tIns="4572" rIns="18288" bIns="4572" anchor="ctr">
+            <a:spAutoFit/>
+          </a:bodyPr>
+          <a:lstStyle xmlns:a="http://schemas.openxmlformats.org/drawingml/2006/main"/>
+          <a:p xmlns:a="http://schemas.openxmlformats.org/drawingml/2006/main">
+            <a:pPr algn="ctr">
+              <a:buNone/>
+            </a:pPr>
+            <a:r>
+              <a:rPr sz="1000" b="0" i="0">
+                <a:solidFill>
+                  <a:srgbClr val="202020"/>
+                </a:solidFill>
+                <a:latin typeface="Aptos"/>
+                <a:ea typeface="Aptos"/>
+                <a:cs typeface="Aptos"/>
+              </a:rPr>
+              <a:t>10/19/2026</a:t>
+            </a:r>
+          </a:p>
+        </p:txBody>
+      </p:sp>
+      <p:sp>
+        <p:nvSpPr>
+          <p:cNvPr id="65" name="Rounded Rectangle 64">
+            <a:extLst xmlns:a="http://schemas.openxmlformats.org/drawingml/2006/main">
+              <a:ext uri="{FF2B5EF4-FFF2-40B4-BE49-F238E27FC236}">
+                <a16:creationId xmlns:a16="http://schemas.microsoft.com/office/drawing/2014/main" id="{7305B2CF-B7E3-40E7-A2A5-73ED0148247A}"/>
+              </a:ext>
+            </a:extLst>
+          </p:cNvPr>
+          <p:cNvSpPr>
+            <a:spLocks xmlns:a="http://schemas.openxmlformats.org/drawingml/2006/main" noGrp="1"/>
+          </p:cNvSpPr>
+          <p:nvPr/>
+        </p:nvSpPr>
+        <p:spPr>
+          <a:xfrm xmlns:a="http://schemas.openxmlformats.org/drawingml/2006/main">
+            <a:off x="10910620" y="2002536"/>
+            <a:ext cx="822960" cy="256032"/>
+          </a:xfrm>
+          <a:prstGeom xmlns:a="http://schemas.openxmlformats.org/drawingml/2006/main" prst="roundRect">
+            <a:avLst/>
+          </a:prstGeom>
+          <a:solidFill xmlns:a="http://schemas.openxmlformats.org/drawingml/2006/main">
+            <a:srgbClr val="A6A6A6"/>
+          </a:solidFill>
+          <a:ln xmlns:a="http://schemas.openxmlformats.org/drawingml/2006/main" w="0">
+            <a:solidFill>
+              <a:srgbClr val="A6A6A6"/>
+            </a:solidFill>
+            <a:prstDash val="solid"/>
+          </a:ln>
+        </p:spPr>
+        <p:style>
+          <a:lnRef xmlns:a="http://schemas.openxmlformats.org/drawingml/2006/main" idx="1">
+            <a:schemeClr val="accent1"/>
+          </a:lnRef>
+          <a:fillRef xmlns:a="http://schemas.openxmlformats.org/drawingml/2006/main" idx="3">
+            <a:schemeClr val="accent1"/>
+          </a:fillRef>
+          <a:effectRef xmlns:a="http://schemas.openxmlformats.org/drawingml/2006/main" idx="2">
+            <a:schemeClr val="accent1"/>
+          </a:effectRef>
+          <a:fontRef xmlns:a="http://schemas.openxmlformats.org/drawingml/2006/main" idx="minor">
+            <a:schemeClr val="lt1"/>
+          </a:fontRef>
+        </p:style>
+        <p:txBody>
+          <a:bodyPr xmlns:a="http://schemas.openxmlformats.org/drawingml/2006/main" anchor="ctr"/>
+          <a:lstStyle xmlns:a="http://schemas.openxmlformats.org/drawingml/2006/main"/>
+          <a:p xmlns:a="http://schemas.openxmlformats.org/drawingml/2006/main">
+            <a:pPr algn="ctr">
+              <a:buNone/>
+            </a:pPr>
+          </a:p>
+        </p:txBody>
+      </p:sp>
+      <p:sp>
+        <p:nvSpPr>
+          <p:cNvPr id="66" name="TextBox 65">
+            <a:extLst xmlns:a="http://schemas.openxmlformats.org/drawingml/2006/main">
+              <a:ext uri="{FF2B5EF4-FFF2-40B4-BE49-F238E27FC236}">
+                <a16:creationId xmlns:a16="http://schemas.microsoft.com/office/drawing/2014/main" id="{A9972CAA-88A8-4E7E-96E1-A6BE8898976C}"/>
+              </a:ext>
+            </a:extLst>
+          </p:cNvPr>
+          <p:cNvSpPr>
+            <a:spLocks xmlns:a="http://schemas.openxmlformats.org/drawingml/2006/main" noGrp="1"/>
+          </p:cNvSpPr>
+          <p:nvPr/>
+        </p:nvSpPr>
+        <p:spPr>
+          <a:xfrm xmlns:a="http://schemas.openxmlformats.org/drawingml/2006/main">
+            <a:off x="10977422" y="2016988"/>
+            <a:ext cx="689356" cy="163122"/>
+          </a:xfrm>
+          <a:prstGeom xmlns:a="http://schemas.openxmlformats.org/drawingml/2006/main" prst="rect">
+            <a:avLst/>
+          </a:prstGeom>
+          <a:noFill xmlns:a="http://schemas.openxmlformats.org/drawingml/2006/main"/>
+        </p:spPr>
+        <p:txBody>
+          <a:bodyPr xmlns:a="http://schemas.openxmlformats.org/drawingml/2006/main" wrap="none" lIns="18288" tIns="4572" rIns="18288" bIns="4572" anchor="ctr">
+            <a:spAutoFit/>
+          </a:bodyPr>
+          <a:lstStyle xmlns:a="http://schemas.openxmlformats.org/drawingml/2006/main"/>
+          <a:p xmlns:a="http://schemas.openxmlformats.org/drawingml/2006/main">
+            <a:pPr algn="ctr">
+              <a:buNone/>
+            </a:pPr>
+            <a:r>
+              <a:rPr sz="1000" b="1" i="0">
+                <a:solidFill>
+                  <a:srgbClr val="FFFFFF"/>
+                </a:solidFill>
+                <a:latin typeface="Aptos"/>
+                <a:ea typeface="Aptos"/>
+                <a:cs typeface="Aptos"/>
+              </a:rPr>
+              <a:t>Not Started</a:t>
+            </a:r>
+          </a:p>
+        </p:txBody>
+      </p:sp>
+      <p:sp>
+        <p:nvSpPr>
+          <p:cNvPr id="67" name="Rectangle 66">
+            <a:extLst xmlns:a="http://schemas.openxmlformats.org/drawingml/2006/main">
+              <a:ext uri="{FF2B5EF4-FFF2-40B4-BE49-F238E27FC236}">
+                <a16:creationId xmlns:a16="http://schemas.microsoft.com/office/drawing/2014/main" id="{4FF469F7-2A87-4235-80C4-73B0A811F1B7}"/>
+              </a:ext>
+            </a:extLst>
+          </p:cNvPr>
+          <p:cNvSpPr>
+            <a:spLocks xmlns:a="http://schemas.openxmlformats.org/drawingml/2006/main" noGrp="1"/>
+          </p:cNvSpPr>
+          <p:nvPr/>
+        </p:nvSpPr>
+        <p:spPr>
+          <a:xfrm xmlns:a="http://schemas.openxmlformats.org/drawingml/2006/main">
+            <a:off x="6263640" y="2532888"/>
+            <a:ext cx="5532120" cy="585216"/>
+          </a:xfrm>
+          <a:prstGeom xmlns:a="http://schemas.openxmlformats.org/drawingml/2006/main" prst="rect">
+            <a:avLst/>
+          </a:prstGeom>
+          <a:solidFill xmlns:a="http://schemas.openxmlformats.org/drawingml/2006/main">
+            <a:srgbClr val="FFFFFF"/>
+          </a:solidFill>
+          <a:ln xmlns:a="http://schemas.openxmlformats.org/drawingml/2006/main">
+            <a:solidFill>
+              <a:srgbClr val="FFFFFF"/>
+            </a:solidFill>
+          </a:ln>
+        </p:spPr>
+        <p:style>
+          <a:lnRef xmlns:a="http://schemas.openxmlformats.org/drawingml/2006/main" idx="1">
+            <a:schemeClr val="accent1"/>
+          </a:lnRef>
+          <a:fillRef xmlns:a="http://schemas.openxmlformats.org/drawingml/2006/main" idx="3">
+            <a:schemeClr val="accent1"/>
+          </a:fillRef>
+          <a:effectRef xmlns:a="http://schemas.openxmlformats.org/drawingml/2006/main" idx="2">
+            <a:schemeClr val="accent1"/>
+          </a:effectRef>
+          <a:fontRef xmlns:a="http://schemas.openxmlformats.org/drawingml/2006/main" idx="minor">
+            <a:schemeClr val="lt1"/>
+          </a:fontRef>
+        </p:style>
+        <p:txBody>
+          <a:bodyPr xmlns:a="http://schemas.openxmlformats.org/drawingml/2006/main" anchor="ctr"/>
+          <a:lstStyle xmlns:a="http://schemas.openxmlformats.org/drawingml/2006/main"/>
+          <a:p xmlns:a="http://schemas.openxmlformats.org/drawingml/2006/main">
+            <a:pPr algn="ctr">
+              <a:buNone/>
+            </a:pPr>
+          </a:p>
+        </p:txBody>
+      </p:sp>
+      <p:sp>
+        <p:nvSpPr>
+          <p:cNvPr id="68" name="TextBox 67">
+            <a:extLst xmlns:a="http://schemas.openxmlformats.org/drawingml/2006/main">
+              <a:ext uri="{FF2B5EF4-FFF2-40B4-BE49-F238E27FC236}">
+                <a16:creationId xmlns:a16="http://schemas.microsoft.com/office/drawing/2014/main" id="{27D19985-3C94-41D9-BC8D-62F24AE717B2}"/>
+              </a:ext>
+            </a:extLst>
+          </p:cNvPr>
+          <p:cNvSpPr>
+            <a:spLocks xmlns:a="http://schemas.openxmlformats.org/drawingml/2006/main" noGrp="1"/>
+          </p:cNvSpPr>
+          <p:nvPr/>
+        </p:nvSpPr>
+        <p:spPr>
+          <a:xfrm xmlns:a="http://schemas.openxmlformats.org/drawingml/2006/main">
+            <a:off x="6373368" y="2762224"/>
+            <a:ext cx="894540" cy="163122"/>
+          </a:xfrm>
+          <a:prstGeom xmlns:a="http://schemas.openxmlformats.org/drawingml/2006/main" prst="rect">
+            <a:avLst/>
+          </a:prstGeom>
+          <a:noFill xmlns:a="http://schemas.openxmlformats.org/drawingml/2006/main"/>
+        </p:spPr>
+        <p:txBody>
+          <a:bodyPr xmlns:a="http://schemas.openxmlformats.org/drawingml/2006/main" wrap="none" lIns="18288" tIns="4572" rIns="18288" bIns="4572" anchor="ctr">
+            <a:spAutoFit/>
+          </a:bodyPr>
+          <a:lstStyle xmlns:a="http://schemas.openxmlformats.org/drawingml/2006/main"/>
+          <a:p xmlns:a="http://schemas.openxmlformats.org/drawingml/2006/main">
+            <a:pPr algn="l">
+              <a:buNone/>
+            </a:pPr>
+            <a:r>
+              <a:rPr sz="1000" b="0" i="0">
+                <a:solidFill>
+                  <a:srgbClr val="202020"/>
+                </a:solidFill>
+                <a:latin typeface="Aptos"/>
+                <a:ea typeface="Aptos"/>
+                <a:cs typeface="Aptos"/>
+              </a:rPr>
+              <a:t>Condenser coil with no quoting - Dunan</a:t>
+            </a:r>
+          </a:p>
+        </p:txBody>
+      </p:sp>
+      <p:sp>
+        <p:nvSpPr>
+          <p:cNvPr id="69" name="TextBox 68">
+            <a:extLst xmlns:a="http://schemas.openxmlformats.org/drawingml/2006/main">
+              <a:ext uri="{FF2B5EF4-FFF2-40B4-BE49-F238E27FC236}">
+                <a16:creationId xmlns:a16="http://schemas.microsoft.com/office/drawing/2014/main" id="{D3F00B53-5BBC-4783-9A16-71ACDFC092BD}"/>
+              </a:ext>
+            </a:extLst>
+          </p:cNvPr>
+          <p:cNvSpPr>
+            <a:spLocks xmlns:a="http://schemas.openxmlformats.org/drawingml/2006/main" noGrp="1"/>
+          </p:cNvSpPr>
+          <p:nvPr/>
+        </p:nvSpPr>
+        <p:spPr>
+          <a:xfrm xmlns:a="http://schemas.openxmlformats.org/drawingml/2006/main">
+            <a:off x="9572055" y="2689072"/>
+            <a:ext cx="420051" cy="163122"/>
+          </a:xfrm>
+          <a:prstGeom xmlns:a="http://schemas.openxmlformats.org/drawingml/2006/main" prst="rect">
+            <a:avLst/>
+          </a:prstGeom>
+          <a:noFill xmlns:a="http://schemas.openxmlformats.org/drawingml/2006/main"/>
+        </p:spPr>
+        <p:txBody>
+          <a:bodyPr xmlns:a="http://schemas.openxmlformats.org/drawingml/2006/main" wrap="none" lIns="18288" tIns="4572" rIns="18288" bIns="4572" anchor="ctr">
+            <a:spAutoFit/>
+          </a:bodyPr>
+          <a:lstStyle xmlns:a="http://schemas.openxmlformats.org/drawingml/2006/main"/>
+          <a:p xmlns:a="http://schemas.openxmlformats.org/drawingml/2006/main">
+            <a:pPr algn="r">
+              <a:buNone/>
+            </a:pPr>
+            <a:r>
+              <a:rPr sz="1000" b="1" i="0">
+                <a:solidFill>
+                  <a:srgbClr val="202020"/>
+                </a:solidFill>
+                <a:latin typeface="Aptos"/>
+                <a:ea typeface="Aptos"/>
+                <a:cs typeface="Aptos"/>
+              </a:rPr>
+              <a:t>$0.00</a:t>
+            </a:r>
+          </a:p>
+        </p:txBody>
+      </p:sp>
+      <p:sp>
+        <p:nvSpPr>
+          <p:cNvPr id="70" name="TextBox 69">
+            <a:extLst xmlns:a="http://schemas.openxmlformats.org/drawingml/2006/main">
+              <a:ext uri="{FF2B5EF4-FFF2-40B4-BE49-F238E27FC236}">
+                <a16:creationId xmlns:a16="http://schemas.microsoft.com/office/drawing/2014/main" id="{85D7212E-99DB-49EF-8B44-BEF8A85F59CE}"/>
+              </a:ext>
+            </a:extLst>
+          </p:cNvPr>
+          <p:cNvSpPr>
+            <a:spLocks xmlns:a="http://schemas.openxmlformats.org/drawingml/2006/main" noGrp="1"/>
+          </p:cNvSpPr>
+          <p:nvPr/>
+        </p:nvSpPr>
+        <p:spPr>
+          <a:xfrm xmlns:a="http://schemas.openxmlformats.org/drawingml/2006/main">
+            <a:off x="10189741" y="2689072"/>
+            <a:ext cx="606000" cy="163122"/>
+          </a:xfrm>
+          <a:prstGeom xmlns:a="http://schemas.openxmlformats.org/drawingml/2006/main" prst="rect">
+            <a:avLst/>
+          </a:prstGeom>
+          <a:noFill xmlns:a="http://schemas.openxmlformats.org/drawingml/2006/main"/>
+        </p:spPr>
+        <p:txBody>
+          <a:bodyPr xmlns:a="http://schemas.openxmlformats.org/drawingml/2006/main" wrap="none" lIns="18288" tIns="4572" rIns="18288" bIns="4572" anchor="ctr">
+            <a:spAutoFit/>
+          </a:bodyPr>
+          <a:lstStyle xmlns:a="http://schemas.openxmlformats.org/drawingml/2006/main"/>
+          <a:p xmlns:a="http://schemas.openxmlformats.org/drawingml/2006/main">
+            <a:pPr algn="ctr">
+              <a:buNone/>
+            </a:pPr>
+            <a:r>
+              <a:rPr sz="1000" b="0" i="0">
+                <a:solidFill>
+                  <a:srgbClr val="202020"/>
+                </a:solidFill>
+                <a:latin typeface="Aptos"/>
+                <a:ea typeface="Aptos"/>
+                <a:cs typeface="Aptos"/>
+              </a:rPr>
+              <a:t>10/20/2026</a:t>
+            </a:r>
+          </a:p>
+        </p:txBody>
+      </p:sp>
+      <p:sp>
+        <p:nvSpPr>
+          <p:cNvPr id="71" name="Rounded Rectangle 70">
+            <a:extLst xmlns:a="http://schemas.openxmlformats.org/drawingml/2006/main">
+              <a:ext uri="{FF2B5EF4-FFF2-40B4-BE49-F238E27FC236}">
+                <a16:creationId xmlns:a16="http://schemas.microsoft.com/office/drawing/2014/main" id="{140EB830-F344-48F9-95B6-6CF395AB335D}"/>
+              </a:ext>
+            </a:extLst>
+          </p:cNvPr>
+          <p:cNvSpPr>
+            <a:spLocks xmlns:a="http://schemas.openxmlformats.org/drawingml/2006/main" noGrp="1"/>
+          </p:cNvSpPr>
+          <p:nvPr/>
+        </p:nvSpPr>
+        <p:spPr>
+          <a:xfrm xmlns:a="http://schemas.openxmlformats.org/drawingml/2006/main">
+            <a:off x="10910620" y="2670048"/>
+            <a:ext cx="822960" cy="256032"/>
+          </a:xfrm>
+          <a:prstGeom xmlns:a="http://schemas.openxmlformats.org/drawingml/2006/main" prst="roundRect">
+            <a:avLst/>
+          </a:prstGeom>
+          <a:solidFill xmlns:a="http://schemas.openxmlformats.org/drawingml/2006/main">
+            <a:srgbClr val="A6A6A6"/>
+          </a:solidFill>
+          <a:ln xmlns:a="http://schemas.openxmlformats.org/drawingml/2006/main" w="0">
+            <a:solidFill>
+              <a:srgbClr val="A6A6A6"/>
+            </a:solidFill>
+            <a:prstDash val="solid"/>
+          </a:ln>
+        </p:spPr>
+        <p:style>
+          <a:lnRef xmlns:a="http://schemas.openxmlformats.org/drawingml/2006/main" idx="1">
+            <a:schemeClr val="accent1"/>
+          </a:lnRef>
+          <a:fillRef xmlns:a="http://schemas.openxmlformats.org/drawingml/2006/main" idx="3">
+            <a:schemeClr val="accent1"/>
+          </a:fillRef>
+          <a:effectRef xmlns:a="http://schemas.openxmlformats.org/drawingml/2006/main" idx="2">
+            <a:schemeClr val="accent1"/>
+          </a:effectRef>
+          <a:fontRef xmlns:a="http://schemas.openxmlformats.org/drawingml/2006/main" idx="minor">
+            <a:schemeClr val="lt1"/>
+          </a:fontRef>
+        </p:style>
+        <p:txBody>
+          <a:bodyPr xmlns:a="http://schemas.openxmlformats.org/drawingml/2006/main" anchor="ctr"/>
+          <a:lstStyle xmlns:a="http://schemas.openxmlformats.org/drawingml/2006/main"/>
+          <a:p xmlns:a="http://schemas.openxmlformats.org/drawingml/2006/main">
+            <a:pPr algn="ctr">
+              <a:buNone/>
+            </a:pPr>
+          </a:p>
+        </p:txBody>
+      </p:sp>
+      <p:sp>
+        <p:nvSpPr>
+          <p:cNvPr id="72" name="TextBox 71">
+            <a:extLst xmlns:a="http://schemas.openxmlformats.org/drawingml/2006/main">
+              <a:ext uri="{FF2B5EF4-FFF2-40B4-BE49-F238E27FC236}">
+                <a16:creationId xmlns:a16="http://schemas.microsoft.com/office/drawing/2014/main" id="{5E95B0AD-0B3A-4DD7-9B0D-486EA85CCBA3}"/>
+              </a:ext>
+            </a:extLst>
+          </p:cNvPr>
+          <p:cNvSpPr>
+            <a:spLocks xmlns:a="http://schemas.openxmlformats.org/drawingml/2006/main" noGrp="1"/>
+          </p:cNvSpPr>
+          <p:nvPr/>
+        </p:nvSpPr>
+        <p:spPr>
+          <a:xfrm xmlns:a="http://schemas.openxmlformats.org/drawingml/2006/main">
+            <a:off x="10977422" y="2684500"/>
+            <a:ext cx="689356" cy="163122"/>
+          </a:xfrm>
+          <a:prstGeom xmlns:a="http://schemas.openxmlformats.org/drawingml/2006/main" prst="rect">
+            <a:avLst/>
+          </a:prstGeom>
+          <a:noFill xmlns:a="http://schemas.openxmlformats.org/drawingml/2006/main"/>
+        </p:spPr>
+        <p:txBody>
+          <a:bodyPr xmlns:a="http://schemas.openxmlformats.org/drawingml/2006/main" wrap="none" lIns="18288" tIns="4572" rIns="18288" bIns="4572" anchor="ctr">
+            <a:spAutoFit/>
+          </a:bodyPr>
+          <a:lstStyle xmlns:a="http://schemas.openxmlformats.org/drawingml/2006/main"/>
+          <a:p xmlns:a="http://schemas.openxmlformats.org/drawingml/2006/main">
+            <a:pPr algn="ctr">
+              <a:buNone/>
+            </a:pPr>
+            <a:r>
+              <a:rPr sz="1000" b="1" i="0">
+                <a:solidFill>
+                  <a:srgbClr val="FFFFFF"/>
+                </a:solidFill>
+                <a:latin typeface="Aptos"/>
+                <a:ea typeface="Aptos"/>
+                <a:cs typeface="Aptos"/>
+              </a:rPr>
+              <a:t>Not Started</a:t>
+            </a:r>
+          </a:p>
+        </p:txBody>
+      </p:sp>
+      <p:sp>
+        <p:nvSpPr>
+          <p:cNvPr id="73" name="Rectangle 72">
+            <a:extLst xmlns:a="http://schemas.openxmlformats.org/drawingml/2006/main">
+              <a:ext uri="{FF2B5EF4-FFF2-40B4-BE49-F238E27FC236}">
+                <a16:creationId xmlns:a16="http://schemas.microsoft.com/office/drawing/2014/main" id="{12E9407A-5F16-4849-A26D-2C0D2BC8071E}"/>
+              </a:ext>
+            </a:extLst>
+          </p:cNvPr>
+          <p:cNvSpPr>
+            <a:spLocks xmlns:a="http://schemas.openxmlformats.org/drawingml/2006/main" noGrp="1"/>
+          </p:cNvSpPr>
+          <p:nvPr/>
+        </p:nvSpPr>
+        <p:spPr>
+          <a:xfrm xmlns:a="http://schemas.openxmlformats.org/drawingml/2006/main">
+            <a:off x="6263640" y="3200400"/>
+            <a:ext cx="5532120" cy="585216"/>
+          </a:xfrm>
+          <a:prstGeom xmlns:a="http://schemas.openxmlformats.org/drawingml/2006/main" prst="rect">
+            <a:avLst/>
+          </a:prstGeom>
+          <a:solidFill xmlns:a="http://schemas.openxmlformats.org/drawingml/2006/main">
+            <a:srgbClr val="F2F5FA"/>
+          </a:solidFill>
+          <a:ln xmlns:a="http://schemas.openxmlformats.org/drawingml/2006/main">
+            <a:solidFill>
+              <a:srgbClr val="F2F5FA"/>
+            </a:solidFill>
+          </a:ln>
+        </p:spPr>
+        <p:style>
+          <a:lnRef xmlns:a="http://schemas.openxmlformats.org/drawingml/2006/main" idx="1">
+            <a:schemeClr val="accent1"/>
+          </a:lnRef>
+          <a:fillRef xmlns:a="http://schemas.openxmlformats.org/drawingml/2006/main" idx="3">
+            <a:schemeClr val="accent1"/>
+          </a:fillRef>
+          <a:effectRef xmlns:a="http://schemas.openxmlformats.org/drawingml/2006/main" idx="2">
+            <a:schemeClr val="accent1"/>
+          </a:effectRef>
+          <a:fontRef xmlns:a="http://schemas.openxmlformats.org/drawingml/2006/main" idx="minor">
+            <a:schemeClr val="lt1"/>
+          </a:fontRef>
+        </p:style>
+        <p:txBody>
+          <a:bodyPr xmlns:a="http://schemas.openxmlformats.org/drawingml/2006/main" anchor="ctr"/>
+          <a:lstStyle xmlns:a="http://schemas.openxmlformats.org/drawingml/2006/main"/>
+          <a:p xmlns:a="http://schemas.openxmlformats.org/drawingml/2006/main">
+            <a:pPr algn="ctr">
+              <a:buNone/>
+            </a:pPr>
+          </a:p>
+        </p:txBody>
+      </p:sp>
+      <p:sp>
+        <p:nvSpPr>
+          <p:cNvPr id="74" name="TextBox 73">
+            <a:extLst xmlns:a="http://schemas.openxmlformats.org/drawingml/2006/main">
+              <a:ext uri="{FF2B5EF4-FFF2-40B4-BE49-F238E27FC236}">
+                <a16:creationId xmlns:a16="http://schemas.microsoft.com/office/drawing/2014/main" id="{8CD53E24-40D0-4C24-95A0-0256F81EAF66}"/>
+              </a:ext>
+            </a:extLst>
+          </p:cNvPr>
+          <p:cNvSpPr>
+            <a:spLocks xmlns:a="http://schemas.openxmlformats.org/drawingml/2006/main" noGrp="1"/>
+          </p:cNvSpPr>
+          <p:nvPr/>
+        </p:nvSpPr>
+        <p:spPr>
+          <a:xfrm xmlns:a="http://schemas.openxmlformats.org/drawingml/2006/main">
+            <a:off x="6373368" y="3429736"/>
+            <a:ext cx="1551771" cy="163122"/>
+          </a:xfrm>
+          <a:prstGeom xmlns:a="http://schemas.openxmlformats.org/drawingml/2006/main" prst="rect">
+            <a:avLst/>
+          </a:prstGeom>
+          <a:noFill xmlns:a="http://schemas.openxmlformats.org/drawingml/2006/main"/>
+        </p:spPr>
+        <p:txBody>
+          <a:bodyPr xmlns:a="http://schemas.openxmlformats.org/drawingml/2006/main" wrap="none" lIns="18288" tIns="4572" rIns="18288" bIns="4572" anchor="ctr">
+            <a:spAutoFit/>
+          </a:bodyPr>
+          <a:lstStyle xmlns:a="http://schemas.openxmlformats.org/drawingml/2006/main"/>
+          <a:p xmlns:a="http://schemas.openxmlformats.org/drawingml/2006/main">
+            <a:pPr algn="l">
+              <a:buNone/>
+            </a:pPr>
+            <a:r>
+              <a:rPr sz="1000" b="0" i="0">
+                <a:solidFill>
+                  <a:srgbClr val="202020"/>
+                </a:solidFill>
+                <a:latin typeface="Aptos"/>
+                <a:ea typeface="Aptos"/>
+                <a:cs typeface="Aptos"/>
+              </a:rPr>
+              <a:t>Tariff - MT</a:t>
+            </a:r>
+          </a:p>
+        </p:txBody>
+      </p:sp>
+      <p:sp>
+        <p:nvSpPr>
+          <p:cNvPr id="75" name="TextBox 74">
+            <a:extLst xmlns:a="http://schemas.openxmlformats.org/drawingml/2006/main">
+              <a:ext uri="{FF2B5EF4-FFF2-40B4-BE49-F238E27FC236}">
+                <a16:creationId xmlns:a16="http://schemas.microsoft.com/office/drawing/2014/main" id="{A0F6F07D-99E1-453F-B933-6D027997EB0A}"/>
+              </a:ext>
+            </a:extLst>
+          </p:cNvPr>
+          <p:cNvSpPr>
+            <a:spLocks xmlns:a="http://schemas.openxmlformats.org/drawingml/2006/main" noGrp="1"/>
+          </p:cNvSpPr>
+          <p:nvPr/>
+        </p:nvSpPr>
+        <p:spPr>
+          <a:xfrm xmlns:a="http://schemas.openxmlformats.org/drawingml/2006/main">
+            <a:off x="9572055" y="3356584"/>
+            <a:ext cx="420051" cy="163122"/>
+          </a:xfrm>
+          <a:prstGeom xmlns:a="http://schemas.openxmlformats.org/drawingml/2006/main" prst="rect">
+            <a:avLst/>
+          </a:prstGeom>
+          <a:noFill xmlns:a="http://schemas.openxmlformats.org/drawingml/2006/main"/>
+        </p:spPr>
+        <p:txBody>
+          <a:bodyPr xmlns:a="http://schemas.openxmlformats.org/drawingml/2006/main" wrap="none" lIns="18288" tIns="4572" rIns="18288" bIns="4572" anchor="ctr">
+            <a:spAutoFit/>
+          </a:bodyPr>
+          <a:lstStyle xmlns:a="http://schemas.openxmlformats.org/drawingml/2006/main"/>
+          <a:p xmlns:a="http://schemas.openxmlformats.org/drawingml/2006/main">
+            <a:pPr algn="r">
+              <a:buNone/>
+            </a:pPr>
+            <a:r>
+              <a:rPr sz="1000" b="1" i="0">
+                <a:solidFill>
+                  <a:srgbClr val="202020"/>
+                </a:solidFill>
+                <a:latin typeface="Aptos"/>
+                <a:ea typeface="Aptos"/>
+                <a:cs typeface="Aptos"/>
+              </a:rPr>
+              <a:t>$43.70</a:t>
+            </a:r>
+          </a:p>
+        </p:txBody>
+      </p:sp>
+      <p:sp>
+        <p:nvSpPr>
+          <p:cNvPr id="76" name="TextBox 75">
+            <a:extLst xmlns:a="http://schemas.openxmlformats.org/drawingml/2006/main">
+              <a:ext uri="{FF2B5EF4-FFF2-40B4-BE49-F238E27FC236}">
+                <a16:creationId xmlns:a16="http://schemas.microsoft.com/office/drawing/2014/main" id="{B69BF7F2-011B-40D0-B94F-997259B5B961}"/>
+              </a:ext>
+            </a:extLst>
+          </p:cNvPr>
+          <p:cNvSpPr>
+            <a:spLocks xmlns:a="http://schemas.openxmlformats.org/drawingml/2006/main" noGrp="1"/>
+          </p:cNvSpPr>
+          <p:nvPr/>
+        </p:nvSpPr>
+        <p:spPr>
+          <a:xfrm xmlns:a="http://schemas.openxmlformats.org/drawingml/2006/main">
+            <a:off x="10189741" y="3356584"/>
+            <a:ext cx="606000" cy="163122"/>
+          </a:xfrm>
+          <a:prstGeom xmlns:a="http://schemas.openxmlformats.org/drawingml/2006/main" prst="rect">
+            <a:avLst/>
+          </a:prstGeom>
+          <a:noFill xmlns:a="http://schemas.openxmlformats.org/drawingml/2006/main"/>
+        </p:spPr>
+        <p:txBody>
+          <a:bodyPr xmlns:a="http://schemas.openxmlformats.org/drawingml/2006/main" wrap="none" lIns="18288" tIns="4572" rIns="18288" bIns="4572" anchor="ctr">
+            <a:spAutoFit/>
+          </a:bodyPr>
+          <a:lstStyle xmlns:a="http://schemas.openxmlformats.org/drawingml/2006/main"/>
+          <a:p xmlns:a="http://schemas.openxmlformats.org/drawingml/2006/main">
+            <a:pPr algn="ctr">
+              <a:buNone/>
+            </a:pPr>
+            <a:r>
+              <a:rPr sz="1000" b="0" i="0">
+                <a:solidFill>
+                  <a:srgbClr val="202020"/>
+                </a:solidFill>
+                <a:latin typeface="Aptos"/>
+                <a:ea typeface="Aptos"/>
+                <a:cs typeface="Aptos"/>
+              </a:rPr>
+              <a:t>6/15/2026</a:t>
+            </a:r>
+          </a:p>
+        </p:txBody>
+      </p:sp>
+      <p:sp>
+        <p:nvSpPr>
+          <p:cNvPr id="77" name="Rounded Rectangle 76">
+            <a:extLst xmlns:a="http://schemas.openxmlformats.org/drawingml/2006/main">
+              <a:ext uri="{FF2B5EF4-FFF2-40B4-BE49-F238E27FC236}">
+                <a16:creationId xmlns:a16="http://schemas.microsoft.com/office/drawing/2014/main" id="{1DA9E4BC-83D6-48AB-ACC4-469294B5ABF4}"/>
+              </a:ext>
+            </a:extLst>
+          </p:cNvPr>
+          <p:cNvSpPr>
+            <a:spLocks xmlns:a="http://schemas.openxmlformats.org/drawingml/2006/main" noGrp="1"/>
+          </p:cNvSpPr>
+          <p:nvPr/>
+        </p:nvSpPr>
+        <p:spPr>
+          <a:xfrm xmlns:a="http://schemas.openxmlformats.org/drawingml/2006/main">
+            <a:off x="10910620" y="3337560"/>
+            <a:ext cx="822960" cy="256032"/>
+          </a:xfrm>
+          <a:prstGeom xmlns:a="http://schemas.openxmlformats.org/drawingml/2006/main" prst="roundRect">
+            <a:avLst/>
+          </a:prstGeom>
+          <a:solidFill xmlns:a="http://schemas.openxmlformats.org/drawingml/2006/main">
+            <a:srgbClr val="70AD47"/>
+          </a:solidFill>
+          <a:ln xmlns:a="http://schemas.openxmlformats.org/drawingml/2006/main" w="0">
+            <a:solidFill>
+              <a:srgbClr val="70AD47"/>
+            </a:solidFill>
+            <a:prstDash val="solid"/>
+          </a:ln>
+        </p:spPr>
+        <p:style>
+          <a:lnRef xmlns:a="http://schemas.openxmlformats.org/drawingml/2006/main" idx="1">
+            <a:schemeClr val="accent1"/>
+          </a:lnRef>
+          <a:fillRef xmlns:a="http://schemas.openxmlformats.org/drawingml/2006/main" idx="3">
+            <a:schemeClr val="accent1"/>
+          </a:fillRef>
+          <a:effectRef xmlns:a="http://schemas.openxmlformats.org/drawingml/2006/main" idx="2">
+            <a:schemeClr val="accent1"/>
+          </a:effectRef>
+          <a:fontRef xmlns:a="http://schemas.openxmlformats.org/drawingml/2006/main" idx="minor">
+            <a:schemeClr val="lt1"/>
+          </a:fontRef>
+        </p:style>
+        <p:txBody>
+          <a:bodyPr xmlns:a="http://schemas.openxmlformats.org/drawingml/2006/main" anchor="ctr"/>
+          <a:lstStyle xmlns:a="http://schemas.openxmlformats.org/drawingml/2006/main"/>
+          <a:p xmlns:a="http://schemas.openxmlformats.org/drawingml/2006/main">
+            <a:pPr algn="ctr">
+              <a:buNone/>
+            </a:pPr>
+          </a:p>
+        </p:txBody>
+      </p:sp>
+      <p:sp>
+        <p:nvSpPr>
+          <p:cNvPr id="78" name="TextBox 77">
+            <a:extLst xmlns:a="http://schemas.openxmlformats.org/drawingml/2006/main">
+              <a:ext uri="{FF2B5EF4-FFF2-40B4-BE49-F238E27FC236}">
+                <a16:creationId xmlns:a16="http://schemas.microsoft.com/office/drawing/2014/main" id="{57806EF5-3960-4DFE-9924-C296D2F31C17}"/>
+              </a:ext>
+            </a:extLst>
+          </p:cNvPr>
+          <p:cNvSpPr>
+            <a:spLocks xmlns:a="http://schemas.openxmlformats.org/drawingml/2006/main" noGrp="1"/>
+          </p:cNvSpPr>
+          <p:nvPr/>
+        </p:nvSpPr>
+        <p:spPr>
+          <a:xfrm xmlns:a="http://schemas.openxmlformats.org/drawingml/2006/main">
+            <a:off x="10977422" y="3352012"/>
+            <a:ext cx="689356" cy="163122"/>
+          </a:xfrm>
+          <a:prstGeom xmlns:a="http://schemas.openxmlformats.org/drawingml/2006/main" prst="rect">
+            <a:avLst/>
+          </a:prstGeom>
+          <a:noFill xmlns:a="http://schemas.openxmlformats.org/drawingml/2006/main"/>
+        </p:spPr>
+        <p:txBody>
+          <a:bodyPr xmlns:a="http://schemas.openxmlformats.org/drawingml/2006/main" wrap="none" lIns="18288" tIns="4572" rIns="18288" bIns="4572" anchor="ctr">
+            <a:spAutoFit/>
+          </a:bodyPr>
+          <a:lstStyle xmlns:a="http://schemas.openxmlformats.org/drawingml/2006/main"/>
+          <a:p xmlns:a="http://schemas.openxmlformats.org/drawingml/2006/main">
+            <a:pPr algn="ctr">
+              <a:buNone/>
+            </a:pPr>
+            <a:r>
+              <a:rPr sz="1000" b="1" i="0">
+                <a:solidFill>
+                  <a:srgbClr val="FFFFFF"/>
+                </a:solidFill>
+                <a:latin typeface="Aptos"/>
+                <a:ea typeface="Aptos"/>
+                <a:cs typeface="Aptos"/>
+              </a:rPr>
+              <a:t>Completed</a:t>
+            </a:r>
+          </a:p>
+        </p:txBody>
+      </p:sp>
+      <p:sp>
+        <p:nvSpPr>
+          <p:cNvPr id="79" name="Rectangle 78">
+            <a:extLst xmlns:a="http://schemas.openxmlformats.org/drawingml/2006/main">
+              <a:ext uri="{FF2B5EF4-FFF2-40B4-BE49-F238E27FC236}">
+                <a16:creationId xmlns:a16="http://schemas.microsoft.com/office/drawing/2014/main" id="{80EB1DD3-EE81-43EA-B459-EB0BEF38026C}"/>
+              </a:ext>
+            </a:extLst>
+          </p:cNvPr>
+          <p:cNvSpPr>
+            <a:spLocks xmlns:a="http://schemas.openxmlformats.org/drawingml/2006/main" noGrp="1"/>
+          </p:cNvSpPr>
+          <p:nvPr/>
+        </p:nvSpPr>
+        <p:spPr>
+          <a:xfrm xmlns:a="http://schemas.openxmlformats.org/drawingml/2006/main">
+            <a:off x="6263640" y="3867912"/>
+            <a:ext cx="5532120" cy="585216"/>
+          </a:xfrm>
+          <a:prstGeom xmlns:a="http://schemas.openxmlformats.org/drawingml/2006/main" prst="rect">
+            <a:avLst/>
+          </a:prstGeom>
+          <a:solidFill xmlns:a="http://schemas.openxmlformats.org/drawingml/2006/main">
+            <a:srgbClr val="FFFFFF"/>
+          </a:solidFill>
+          <a:ln xmlns:a="http://schemas.openxmlformats.org/drawingml/2006/main">
+            <a:solidFill>
+              <a:srgbClr val="FFFFFF"/>
+            </a:solidFill>
+          </a:ln>
+        </p:spPr>
+        <p:style>
+          <a:lnRef xmlns:a="http://schemas.openxmlformats.org/drawingml/2006/main" idx="1">
+            <a:schemeClr val="accent1"/>
+          </a:lnRef>
+          <a:fillRef xmlns:a="http://schemas.openxmlformats.org/drawingml/2006/main" idx="3">
+            <a:schemeClr val="accent1"/>
+          </a:fillRef>
+          <a:effectRef xmlns:a="http://schemas.openxmlformats.org/drawingml/2006/main" idx="2">
+            <a:schemeClr val="accent1"/>
+          </a:effectRef>
+          <a:fontRef xmlns:a="http://schemas.openxmlformats.org/drawingml/2006/main" idx="minor">
+            <a:schemeClr val="lt1"/>
+          </a:fontRef>
+        </p:style>
+        <p:txBody>
+          <a:bodyPr xmlns:a="http://schemas.openxmlformats.org/drawingml/2006/main" anchor="ctr"/>
+          <a:lstStyle xmlns:a="http://schemas.openxmlformats.org/drawingml/2006/main"/>
+          <a:p xmlns:a="http://schemas.openxmlformats.org/drawingml/2006/main">
+            <a:pPr algn="ctr">
+              <a:buNone/>
+            </a:pPr>
+          </a:p>
+        </p:txBody>
+      </p:sp>
+      <p:sp>
+        <p:nvSpPr>
+          <p:cNvPr id="80" name="TextBox 79">
+            <a:extLst xmlns:a="http://schemas.openxmlformats.org/drawingml/2006/main">
+              <a:ext uri="{FF2B5EF4-FFF2-40B4-BE49-F238E27FC236}">
+                <a16:creationId xmlns:a16="http://schemas.microsoft.com/office/drawing/2014/main" id="{3CA1BB1B-F033-4463-B6CC-FBB79CA7E598}"/>
+              </a:ext>
+            </a:extLst>
+          </p:cNvPr>
+          <p:cNvSpPr>
+            <a:spLocks xmlns:a="http://schemas.openxmlformats.org/drawingml/2006/main" noGrp="1"/>
+          </p:cNvSpPr>
+          <p:nvPr/>
+        </p:nvSpPr>
+        <p:spPr>
+          <a:xfrm xmlns:a="http://schemas.openxmlformats.org/drawingml/2006/main">
+            <a:off x="6373368" y="4097248"/>
+            <a:ext cx="1447576" cy="163122"/>
+          </a:xfrm>
+          <a:prstGeom xmlns:a="http://schemas.openxmlformats.org/drawingml/2006/main" prst="rect">
+            <a:avLst/>
+          </a:prstGeom>
+          <a:noFill xmlns:a="http://schemas.openxmlformats.org/drawingml/2006/main"/>
+        </p:spPr>
+        <p:txBody>
+          <a:bodyPr xmlns:a="http://schemas.openxmlformats.org/drawingml/2006/main" wrap="none" lIns="18288" tIns="4572" rIns="18288" bIns="4572" anchor="ctr">
+            <a:spAutoFit/>
+          </a:bodyPr>
+          <a:lstStyle xmlns:a="http://schemas.openxmlformats.org/drawingml/2006/main"/>
+          <a:p xmlns:a="http://schemas.openxmlformats.org/drawingml/2006/main">
+            <a:pPr algn="l">
+              <a:buNone/>
+            </a:pPr>
+            <a:r>
+              <a:rPr sz="1000" b="0" i="0">
+                <a:solidFill>
+                  <a:srgbClr val="202020"/>
+                </a:solidFill>
+                <a:latin typeface="Aptos"/>
+                <a:ea typeface="Aptos"/>
+                <a:cs typeface="Aptos"/>
+              </a:rPr>
+              <a:t>Tariff - LT</a:t>
+            </a:r>
+          </a:p>
+        </p:txBody>
+      </p:sp>
+      <p:sp>
+        <p:nvSpPr>
+          <p:cNvPr id="81" name="TextBox 80">
+            <a:extLst xmlns:a="http://schemas.openxmlformats.org/drawingml/2006/main">
+              <a:ext uri="{FF2B5EF4-FFF2-40B4-BE49-F238E27FC236}">
+                <a16:creationId xmlns:a16="http://schemas.microsoft.com/office/drawing/2014/main" id="{61B66CC6-BF82-48C2-ABE2-8C68104003EA}"/>
+              </a:ext>
+            </a:extLst>
+          </p:cNvPr>
+          <p:cNvSpPr>
+            <a:spLocks xmlns:a="http://schemas.openxmlformats.org/drawingml/2006/main" noGrp="1"/>
+          </p:cNvSpPr>
+          <p:nvPr/>
+        </p:nvSpPr>
+        <p:spPr>
+          <a:xfrm xmlns:a="http://schemas.openxmlformats.org/drawingml/2006/main">
+            <a:off x="9572055" y="4024096"/>
+            <a:ext cx="420051" cy="163122"/>
+          </a:xfrm>
+          <a:prstGeom xmlns:a="http://schemas.openxmlformats.org/drawingml/2006/main" prst="rect">
+            <a:avLst/>
+          </a:prstGeom>
+          <a:noFill xmlns:a="http://schemas.openxmlformats.org/drawingml/2006/main"/>
+        </p:spPr>
+        <p:txBody>
+          <a:bodyPr xmlns:a="http://schemas.openxmlformats.org/drawingml/2006/main" wrap="none" lIns="18288" tIns="4572" rIns="18288" bIns="4572" anchor="ctr">
+            <a:spAutoFit/>
+          </a:bodyPr>
+          <a:lstStyle xmlns:a="http://schemas.openxmlformats.org/drawingml/2006/main"/>
+          <a:p xmlns:a="http://schemas.openxmlformats.org/drawingml/2006/main">
+            <a:pPr algn="r">
+              <a:buNone/>
+            </a:pPr>
+            <a:r>
+              <a:rPr sz="1000" b="1" i="0">
+                <a:solidFill>
+                  <a:srgbClr val="202020"/>
+                </a:solidFill>
+                <a:latin typeface="Aptos"/>
+                <a:ea typeface="Aptos"/>
+                <a:cs typeface="Aptos"/>
+              </a:rPr>
+              <a:t>$0.00</a:t>
+            </a:r>
+          </a:p>
+        </p:txBody>
+      </p:sp>
+      <p:sp>
+        <p:nvSpPr>
+          <p:cNvPr id="82" name="TextBox 81">
+            <a:extLst xmlns:a="http://schemas.openxmlformats.org/drawingml/2006/main">
+              <a:ext uri="{FF2B5EF4-FFF2-40B4-BE49-F238E27FC236}">
+                <a16:creationId xmlns:a16="http://schemas.microsoft.com/office/drawing/2014/main" id="{B20544AC-96C6-4A8C-8CCF-16A621B9283F}"/>
+              </a:ext>
+            </a:extLst>
+          </p:cNvPr>
+          <p:cNvSpPr>
+            <a:spLocks xmlns:a="http://schemas.openxmlformats.org/drawingml/2006/main" noGrp="1"/>
+          </p:cNvSpPr>
+          <p:nvPr/>
+        </p:nvSpPr>
+        <p:spPr>
+          <a:xfrm xmlns:a="http://schemas.openxmlformats.org/drawingml/2006/main">
+            <a:off x="10189741" y="4024096"/>
+            <a:ext cx="606000" cy="163122"/>
+          </a:xfrm>
+          <a:prstGeom xmlns:a="http://schemas.openxmlformats.org/drawingml/2006/main" prst="rect">
+            <a:avLst/>
+          </a:prstGeom>
+          <a:noFill xmlns:a="http://schemas.openxmlformats.org/drawingml/2006/main"/>
+        </p:spPr>
+        <p:txBody>
+          <a:bodyPr xmlns:a="http://schemas.openxmlformats.org/drawingml/2006/main" wrap="none" lIns="18288" tIns="4572" rIns="18288" bIns="4572" anchor="ctr">
+            <a:spAutoFit/>
+          </a:bodyPr>
+          <a:lstStyle xmlns:a="http://schemas.openxmlformats.org/drawingml/2006/main"/>
+          <a:p xmlns:a="http://schemas.openxmlformats.org/drawingml/2006/main">
+            <a:pPr algn="ctr">
+              <a:buNone/>
+            </a:pPr>
+            <a:r>
+              <a:rPr sz="1000" b="0" i="0">
+                <a:solidFill>
+                  <a:srgbClr val="202020"/>
+                </a:solidFill>
+                <a:latin typeface="Aptos"/>
+                <a:ea typeface="Aptos"/>
+                <a:cs typeface="Aptos"/>
+              </a:rPr>
+              <a:t>6/15/2026</a:t>
+            </a:r>
+          </a:p>
+        </p:txBody>
+      </p:sp>
+      <p:sp>
+        <p:nvSpPr>
+          <p:cNvPr id="83" name="Rounded Rectangle 82">
+            <a:extLst xmlns:a="http://schemas.openxmlformats.org/drawingml/2006/main">
+              <a:ext uri="{FF2B5EF4-FFF2-40B4-BE49-F238E27FC236}">
+                <a16:creationId xmlns:a16="http://schemas.microsoft.com/office/drawing/2014/main" id="{99158F97-F7E6-48DA-91C7-09E741FD911B}"/>
+              </a:ext>
+            </a:extLst>
+          </p:cNvPr>
+          <p:cNvSpPr>
+            <a:spLocks xmlns:a="http://schemas.openxmlformats.org/drawingml/2006/main" noGrp="1"/>
+          </p:cNvSpPr>
+          <p:nvPr/>
+        </p:nvSpPr>
+        <p:spPr>
+          <a:xfrm xmlns:a="http://schemas.openxmlformats.org/drawingml/2006/main">
+            <a:off x="10910620" y="4005072"/>
+            <a:ext cx="822960" cy="256032"/>
+          </a:xfrm>
+          <a:prstGeom xmlns:a="http://schemas.openxmlformats.org/drawingml/2006/main" prst="roundRect">
+            <a:avLst/>
+          </a:prstGeom>
+          <a:solidFill xmlns:a="http://schemas.openxmlformats.org/drawingml/2006/main">
+            <a:srgbClr val="70AD47"/>
+          </a:solidFill>
+          <a:ln xmlns:a="http://schemas.openxmlformats.org/drawingml/2006/main" w="0">
+            <a:solidFill>
+              <a:srgbClr val="70AD47"/>
+            </a:solidFill>
+            <a:prstDash val="solid"/>
+          </a:ln>
+        </p:spPr>
+        <p:style>
+          <a:lnRef xmlns:a="http://schemas.openxmlformats.org/drawingml/2006/main" idx="1">
+            <a:schemeClr val="accent1"/>
+          </a:lnRef>
+          <a:fillRef xmlns:a="http://schemas.openxmlformats.org/drawingml/2006/main" idx="3">
+            <a:schemeClr val="accent1"/>
+          </a:fillRef>
+          <a:effectRef xmlns:a="http://schemas.openxmlformats.org/drawingml/2006/main" idx="2">
+            <a:schemeClr val="accent1"/>
+          </a:effectRef>
+          <a:fontRef xmlns:a="http://schemas.openxmlformats.org/drawingml/2006/main" idx="minor">
+            <a:schemeClr val="lt1"/>
+          </a:fontRef>
+        </p:style>
+        <p:txBody>
+          <a:bodyPr xmlns:a="http://schemas.openxmlformats.org/drawingml/2006/main" anchor="ctr"/>
+          <a:lstStyle xmlns:a="http://schemas.openxmlformats.org/drawingml/2006/main"/>
+          <a:p xmlns:a="http://schemas.openxmlformats.org/drawingml/2006/main">
+            <a:pPr algn="ctr">
+              <a:buNone/>
+            </a:pPr>
+          </a:p>
+        </p:txBody>
+      </p:sp>
+      <p:sp>
+        <p:nvSpPr>
+          <p:cNvPr id="84" name="TextBox 83">
+            <a:extLst xmlns:a="http://schemas.openxmlformats.org/drawingml/2006/main">
+              <a:ext uri="{FF2B5EF4-FFF2-40B4-BE49-F238E27FC236}">
+                <a16:creationId xmlns:a16="http://schemas.microsoft.com/office/drawing/2014/main" id="{83E2A428-A006-4D83-A6B3-3D4011EA03A3}"/>
+              </a:ext>
+            </a:extLst>
+          </p:cNvPr>
+          <p:cNvSpPr>
+            <a:spLocks xmlns:a="http://schemas.openxmlformats.org/drawingml/2006/main" noGrp="1"/>
+          </p:cNvSpPr>
+          <p:nvPr/>
+        </p:nvSpPr>
+        <p:spPr>
+          <a:xfrm xmlns:a="http://schemas.openxmlformats.org/drawingml/2006/main">
+            <a:off x="10977422" y="4019524"/>
+            <a:ext cx="689356" cy="163122"/>
+          </a:xfrm>
+          <a:prstGeom xmlns:a="http://schemas.openxmlformats.org/drawingml/2006/main" prst="rect">
+            <a:avLst/>
+          </a:prstGeom>
+          <a:noFill xmlns:a="http://schemas.openxmlformats.org/drawingml/2006/main"/>
+        </p:spPr>
+        <p:txBody>
+          <a:bodyPr xmlns:a="http://schemas.openxmlformats.org/drawingml/2006/main" wrap="none" lIns="18288" tIns="4572" rIns="18288" bIns="4572" anchor="ctr">
+            <a:spAutoFit/>
+          </a:bodyPr>
+          <a:lstStyle xmlns:a="http://schemas.openxmlformats.org/drawingml/2006/main"/>
+          <a:p xmlns:a="http://schemas.openxmlformats.org/drawingml/2006/main">
+            <a:pPr algn="ctr">
+              <a:buNone/>
+            </a:pPr>
+            <a:r>
+              <a:rPr sz="1000" b="1" i="0">
+                <a:solidFill>
+                  <a:srgbClr val="FFFFFF"/>
+                </a:solidFill>
+                <a:latin typeface="Aptos"/>
+                <a:ea typeface="Aptos"/>
+                <a:cs typeface="Aptos"/>
+              </a:rPr>
+              <a:t>Completed</a:t>
+            </a:r>
+          </a:p>
+        </p:txBody>
+      </p:sp>
+    </p:spTree>
+    <p:extLst>
+      <p:ext uri="{BB962C8B-B14F-4D97-AF65-F5344CB8AC3E}">
+        <p14:creationId xmlns:p14="http://schemas.microsoft.com/office/powerpoint/2010/main" val="1174098699"/>
+      </p:ext>
+    </p:extLst>
+  </p:cSld>
+</p:sld>
+</file>
+
+<file path=ppt/slides/slide3.xml><?xml version="1.0" encoding="utf-8"?>
 <p:sld xmlns:p="http://schemas.openxmlformats.org/presentationml/2006/main">
   <p:cSld>
     <p:bg>
